--- a/Presentacion/Avance_Financiera_Pacifico_30_oct_2026.pptx
+++ b/Presentacion/Avance_Financiera_Pacifico_30_oct_2026.pptx
@@ -2,26 +2,26 @@
 <file path=ppt/presentation.xml><?xml version="1.0" encoding="utf-8"?>
 <p:presentation xmlns:p="http://schemas.openxmlformats.org/presentationml/2006/main">
   <p:sldMasterIdLst>
-    <p:sldMasterId xmlns:r="http://schemas.openxmlformats.org/officeDocument/2006/relationships" id="2147483648" r:id="Rbaccaeef7cf64930"/>
+    <p:sldMasterId xmlns:r="http://schemas.openxmlformats.org/officeDocument/2006/relationships" id="2147483648" r:id="R062f9272c6bb434a"/>
   </p:sldMasterIdLst>
   <p:notesMasterIdLst>
-    <p:notesMasterId xmlns:r="http://schemas.openxmlformats.org/officeDocument/2006/relationships" r:id="R446b7145a77b4cb0"/>
+    <p:notesMasterId xmlns:r="http://schemas.openxmlformats.org/officeDocument/2006/relationships" r:id="R3106c8f0b4a54b6f"/>
   </p:notesMasterIdLst>
   <p:sldIdLst>
-    <p:sldId xmlns:r="http://schemas.openxmlformats.org/officeDocument/2006/relationships" id="256" r:id="Rda7967e6aa1e4829"/>
-    <p:sldId xmlns:r="http://schemas.openxmlformats.org/officeDocument/2006/relationships" id="257" r:id="Rbcc6c99ca7c6477f"/>
-    <p:sldId xmlns:r="http://schemas.openxmlformats.org/officeDocument/2006/relationships" id="258" r:id="R1f1405166cf64380"/>
-    <p:sldId xmlns:r="http://schemas.openxmlformats.org/officeDocument/2006/relationships" id="259" r:id="R1e113130714e41f0"/>
-    <p:sldId xmlns:r="http://schemas.openxmlformats.org/officeDocument/2006/relationships" id="260" r:id="R998eefc07ade463d"/>
-    <p:sldId xmlns:r="http://schemas.openxmlformats.org/officeDocument/2006/relationships" id="261" r:id="R1c0aa2aef047432d"/>
-    <p:sldId xmlns:r="http://schemas.openxmlformats.org/officeDocument/2006/relationships" id="262" r:id="Rcfe95d96547641e2"/>
-    <p:sldId xmlns:r="http://schemas.openxmlformats.org/officeDocument/2006/relationships" id="263" r:id="Refe6f87eda4b447d"/>
-    <p:sldId xmlns:r="http://schemas.openxmlformats.org/officeDocument/2006/relationships" id="264" r:id="Ra664fe04ecdd46e5"/>
-    <p:sldId xmlns:r="http://schemas.openxmlformats.org/officeDocument/2006/relationships" id="265" r:id="R21f22454f1c74507"/>
-    <p:sldId xmlns:r="http://schemas.openxmlformats.org/officeDocument/2006/relationships" id="266" r:id="R11bdbab62e4545df"/>
-    <p:sldId xmlns:r="http://schemas.openxmlformats.org/officeDocument/2006/relationships" id="267" r:id="Rb735e642e67b4b2f"/>
-    <p:sldId xmlns:r="http://schemas.openxmlformats.org/officeDocument/2006/relationships" id="268" r:id="Rc3d88aba4ca74c44"/>
-    <p:sldId xmlns:r="http://schemas.openxmlformats.org/officeDocument/2006/relationships" id="269" r:id="R3228760a79094035"/>
+    <p:sldId xmlns:r="http://schemas.openxmlformats.org/officeDocument/2006/relationships" id="256" r:id="Rd829d8430e794587"/>
+    <p:sldId xmlns:r="http://schemas.openxmlformats.org/officeDocument/2006/relationships" id="257" r:id="R176f519287c04e47"/>
+    <p:sldId xmlns:r="http://schemas.openxmlformats.org/officeDocument/2006/relationships" id="258" r:id="R27fd7ce9a9754f68"/>
+    <p:sldId xmlns:r="http://schemas.openxmlformats.org/officeDocument/2006/relationships" id="259" r:id="R752dd25d43754577"/>
+    <p:sldId xmlns:r="http://schemas.openxmlformats.org/officeDocument/2006/relationships" id="260" r:id="Rc8342c362c6d4071"/>
+    <p:sldId xmlns:r="http://schemas.openxmlformats.org/officeDocument/2006/relationships" id="261" r:id="R9810e706f807423f"/>
+    <p:sldId xmlns:r="http://schemas.openxmlformats.org/officeDocument/2006/relationships" id="262" r:id="R07ac87d9ea6e4b39"/>
+    <p:sldId xmlns:r="http://schemas.openxmlformats.org/officeDocument/2006/relationships" id="263" r:id="Rb852caad8670469a"/>
+    <p:sldId xmlns:r="http://schemas.openxmlformats.org/officeDocument/2006/relationships" id="264" r:id="R887fd7d002e64b29"/>
+    <p:sldId xmlns:r="http://schemas.openxmlformats.org/officeDocument/2006/relationships" id="265" r:id="R41fc2de77b99475b"/>
+    <p:sldId xmlns:r="http://schemas.openxmlformats.org/officeDocument/2006/relationships" id="266" r:id="R342cfb1d42a146f4"/>
+    <p:sldId xmlns:r="http://schemas.openxmlformats.org/officeDocument/2006/relationships" id="267" r:id="R2b9f794e8b24474a"/>
+    <p:sldId xmlns:r="http://schemas.openxmlformats.org/officeDocument/2006/relationships" id="268" r:id="R7ae9ba0844e6433d"/>
+    <p:sldId xmlns:r="http://schemas.openxmlformats.org/officeDocument/2006/relationships" id="269" r:id="Rdc72062108a64212"/>
   </p:sldIdLst>
   <p:sldSz cx="12192000" cy="6858000"/>
   <p:notesSz cx="6858000" cy="9144000"/>
@@ -1412,7 +1412,7 @@
           <p:cNvPr id="3" name="Title">
             <a:extLst xmlns:a="http://schemas.openxmlformats.org/drawingml/2006/main">
               <a:ext uri="{FF2B5EF4-FFF2-40B4-BE49-F238E27FC236}">
-                <a16:creationId xmlns:a16="http://schemas.microsoft.com/office/drawing/2014/main" id="{20945C45-2D93-42DF-8037-68B4C3EEE034}"/>
+                <a16:creationId xmlns:a16="http://schemas.microsoft.com/office/drawing/2014/main" id="{7AF0C6E2-7E90-4AB7-A1CD-E62C976F48AC}"/>
               </a:ext>
             </a:extLst>
           </p:cNvPr>
@@ -1641,7 +1641,7 @@
           <p:cNvPr id="2" name="Subtitle">
             <a:extLst xmlns:a="http://schemas.openxmlformats.org/drawingml/2006/main">
               <a:ext uri="{FF2B5EF4-FFF2-40B4-BE49-F238E27FC236}">
-                <a16:creationId xmlns:a16="http://schemas.microsoft.com/office/drawing/2014/main" id="{8A0BACBC-808E-482A-AA96-551C05805B56}"/>
+                <a16:creationId xmlns:a16="http://schemas.microsoft.com/office/drawing/2014/main" id="{D589974A-8308-48A6-ADB7-627686EC5F90}"/>
               </a:ext>
             </a:extLst>
           </p:cNvPr>
@@ -1887,7 +1887,7 @@
           <p:cNvPr id="2" name="Section title">
             <a:extLst xmlns:a="http://schemas.openxmlformats.org/drawingml/2006/main">
               <a:ext uri="{FF2B5EF4-FFF2-40B4-BE49-F238E27FC236}">
-                <a16:creationId xmlns:a16="http://schemas.microsoft.com/office/drawing/2014/main" id="{8825B655-D49E-4410-8E4C-29348072A5D6}"/>
+                <a16:creationId xmlns:a16="http://schemas.microsoft.com/office/drawing/2014/main" id="{9CCEB1EB-CCC9-4511-9C44-B47A47C97C72}"/>
               </a:ext>
             </a:extLst>
           </p:cNvPr>
@@ -2133,7 +2133,7 @@
           <p:cNvPr id="3" name="Title">
             <a:extLst xmlns:a="http://schemas.openxmlformats.org/drawingml/2006/main">
               <a:ext uri="{FF2B5EF4-FFF2-40B4-BE49-F238E27FC236}">
-                <a16:creationId xmlns:a16="http://schemas.microsoft.com/office/drawing/2014/main" id="{2E990DDB-10BD-4BD1-BDFC-35A098FE1F02}"/>
+                <a16:creationId xmlns:a16="http://schemas.microsoft.com/office/drawing/2014/main" id="{BD246A8F-DA40-450A-966C-E0975E97B107}"/>
               </a:ext>
             </a:extLst>
           </p:cNvPr>
@@ -2362,7 +2362,7 @@
           <p:cNvPr id="2" name="Body">
             <a:extLst xmlns:a="http://schemas.openxmlformats.org/drawingml/2006/main">
               <a:ext uri="{FF2B5EF4-FFF2-40B4-BE49-F238E27FC236}">
-                <a16:creationId xmlns:a16="http://schemas.microsoft.com/office/drawing/2014/main" id="{71AF7949-791C-47D1-A165-3101C97FDEC4}"/>
+                <a16:creationId xmlns:a16="http://schemas.microsoft.com/office/drawing/2014/main" id="{85DCE6A6-32F6-4A13-9E77-B5E9F30FD8C5}"/>
               </a:ext>
             </a:extLst>
           </p:cNvPr>
@@ -2608,7 +2608,7 @@
           <p:cNvPr id="4" name="Title">
             <a:extLst xmlns:a="http://schemas.openxmlformats.org/drawingml/2006/main">
               <a:ext uri="{FF2B5EF4-FFF2-40B4-BE49-F238E27FC236}">
-                <a16:creationId xmlns:a16="http://schemas.microsoft.com/office/drawing/2014/main" id="{256FB015-3AAE-4C2D-B892-8FA2F67944BB}"/>
+                <a16:creationId xmlns:a16="http://schemas.microsoft.com/office/drawing/2014/main" id="{393B74B6-D944-485C-8AC2-861667628E96}"/>
               </a:ext>
             </a:extLst>
           </p:cNvPr>
@@ -2837,7 +2837,7 @@
           <p:cNvPr id="2" name="Left column">
             <a:extLst xmlns:a="http://schemas.openxmlformats.org/drawingml/2006/main">
               <a:ext uri="{FF2B5EF4-FFF2-40B4-BE49-F238E27FC236}">
-                <a16:creationId xmlns:a16="http://schemas.microsoft.com/office/drawing/2014/main" id="{26440B3E-7B82-4707-A1A1-6FCEC04E751B}"/>
+                <a16:creationId xmlns:a16="http://schemas.microsoft.com/office/drawing/2014/main" id="{ECFBCD97-1D37-4D55-850C-52F4C3A77EBD}"/>
               </a:ext>
             </a:extLst>
           </p:cNvPr>
@@ -3066,7 +3066,7 @@
           <p:cNvPr id="3" name="Right column">
             <a:extLst xmlns:a="http://schemas.openxmlformats.org/drawingml/2006/main">
               <a:ext uri="{FF2B5EF4-FFF2-40B4-BE49-F238E27FC236}">
-                <a16:creationId xmlns:a16="http://schemas.microsoft.com/office/drawing/2014/main" id="{2EEB4F11-B030-46A5-9239-233A795291E5}"/>
+                <a16:creationId xmlns:a16="http://schemas.microsoft.com/office/drawing/2014/main" id="{9D77D2D1-E0C8-4B75-9CA1-AEB06645B723}"/>
               </a:ext>
             </a:extLst>
           </p:cNvPr>
@@ -3312,7 +3312,7 @@
           <p:cNvPr id="3" name="Title">
             <a:extLst xmlns:a="http://schemas.openxmlformats.org/drawingml/2006/main">
               <a:ext uri="{FF2B5EF4-FFF2-40B4-BE49-F238E27FC236}">
-                <a16:creationId xmlns:a16="http://schemas.microsoft.com/office/drawing/2014/main" id="{CDD1EEEE-CE70-4D67-B4A8-6FE4FAB882D0}"/>
+                <a16:creationId xmlns:a16="http://schemas.microsoft.com/office/drawing/2014/main" id="{935E2CC7-F6A9-4E28-B129-C0934DF9088C}"/>
               </a:ext>
             </a:extLst>
           </p:cNvPr>
@@ -3541,7 +3541,7 @@
           <p:cNvPr id="2" name="Left column">
             <a:extLst xmlns:a="http://schemas.openxmlformats.org/drawingml/2006/main">
               <a:ext uri="{FF2B5EF4-FFF2-40B4-BE49-F238E27FC236}">
-                <a16:creationId xmlns:a16="http://schemas.microsoft.com/office/drawing/2014/main" id="{C63FF595-B97A-4800-949B-D0F8D29B1587}"/>
+                <a16:creationId xmlns:a16="http://schemas.microsoft.com/office/drawing/2014/main" id="{7F5F9C98-C1C2-47F9-B049-5EC59312CE11}"/>
               </a:ext>
             </a:extLst>
           </p:cNvPr>
@@ -3808,12 +3808,12 @@
   </p:cSld>
   <p:clrMap bg1="lt1" tx1="dk1" bg2="lt2" tx2="dk2" accent1="accent1" accent2="accent2" accent3="accent3" accent4="accent4" accent5="accent5" accent6="accent6" hlink="hlink" folHlink="folHlink"/>
   <p:sldLayoutIdLst>
-    <p:sldLayoutId xmlns:r="http://schemas.openxmlformats.org/officeDocument/2006/relationships" id="2147483649" r:id="R9fefece25745460b"/>
-    <p:sldLayoutId xmlns:r="http://schemas.openxmlformats.org/officeDocument/2006/relationships" id="2147483650" r:id="Rc55a12d5b81e43e5"/>
-    <p:sldLayoutId xmlns:r="http://schemas.openxmlformats.org/officeDocument/2006/relationships" id="2147483651" r:id="R9265cbee61834142"/>
-    <p:sldLayoutId xmlns:r="http://schemas.openxmlformats.org/officeDocument/2006/relationships" id="2147483652" r:id="R311c9b5ea93e4127"/>
-    <p:sldLayoutId xmlns:r="http://schemas.openxmlformats.org/officeDocument/2006/relationships" id="2147483653" r:id="R0eb28c354f5b4689"/>
-    <p:sldLayoutId xmlns:r="http://schemas.openxmlformats.org/officeDocument/2006/relationships" id="2147483654" r:id="R8d083797f7d44e2b"/>
+    <p:sldLayoutId xmlns:r="http://schemas.openxmlformats.org/officeDocument/2006/relationships" id="2147483649" r:id="Rdb03e854affc4273"/>
+    <p:sldLayoutId xmlns:r="http://schemas.openxmlformats.org/officeDocument/2006/relationships" id="2147483650" r:id="Rc871822e10874281"/>
+    <p:sldLayoutId xmlns:r="http://schemas.openxmlformats.org/officeDocument/2006/relationships" id="2147483651" r:id="Rc5895bdcaa3c4231"/>
+    <p:sldLayoutId xmlns:r="http://schemas.openxmlformats.org/officeDocument/2006/relationships" id="2147483652" r:id="R2ea8dcc544604720"/>
+    <p:sldLayoutId xmlns:r="http://schemas.openxmlformats.org/officeDocument/2006/relationships" id="2147483653" r:id="Rb0ce696c0efa47bc"/>
+    <p:sldLayoutId xmlns:r="http://schemas.openxmlformats.org/officeDocument/2006/relationships" id="2147483654" r:id="Rf39054bb223742a7"/>
   </p:sldLayoutIdLst>
   <p:txStyles>
     <p:titleStyle>
@@ -4364,7 +4364,7 @@
           <p:cNvPr id="6" name="text-0">
             <a:extLst xmlns:a="http://schemas.openxmlformats.org/drawingml/2006/main">
               <a:ext uri="{FF2B5EF4-FFF2-40B4-BE49-F238E27FC236}">
-                <a16:creationId xmlns:a16="http://schemas.microsoft.com/office/drawing/2014/main" id="{BEF76570-8C32-47FF-B34E-DA1372B7C159}"/>
+                <a16:creationId xmlns:a16="http://schemas.microsoft.com/office/drawing/2014/main" id="{10C233B5-9DDC-4683-9997-EDF895CE6F67}"/>
               </a:ext>
             </a:extLst>
           </p:cNvPr>
@@ -4523,7 +4523,7 @@
           <p:cNvPr id="2" name="text-1">
             <a:extLst xmlns:a="http://schemas.openxmlformats.org/drawingml/2006/main">
               <a:ext uri="{FF2B5EF4-FFF2-40B4-BE49-F238E27FC236}">
-                <a16:creationId xmlns:a16="http://schemas.microsoft.com/office/drawing/2014/main" id="{052D149F-797F-4FC7-AE82-4060F93507C2}"/>
+                <a16:creationId xmlns:a16="http://schemas.microsoft.com/office/drawing/2014/main" id="{3CE3486B-E8DB-459E-AB43-210D30C5F00F}"/>
               </a:ext>
             </a:extLst>
           </p:cNvPr>
@@ -4682,7 +4682,7 @@
           <p:cNvPr id="3" name="text-2">
             <a:extLst xmlns:a="http://schemas.openxmlformats.org/drawingml/2006/main">
               <a:ext uri="{FF2B5EF4-FFF2-40B4-BE49-F238E27FC236}">
-                <a16:creationId xmlns:a16="http://schemas.microsoft.com/office/drawing/2014/main" id="{B25703A4-E9A9-41ED-8BE4-06F3F53B26BB}"/>
+                <a16:creationId xmlns:a16="http://schemas.microsoft.com/office/drawing/2014/main" id="{9F082752-0A06-44DB-8B28-6BAFFB70A23D}"/>
               </a:ext>
             </a:extLst>
           </p:cNvPr>
@@ -4864,7 +4864,7 @@
           <p:cNvPr id="4" name="text-3">
             <a:extLst xmlns:a="http://schemas.openxmlformats.org/drawingml/2006/main">
               <a:ext uri="{FF2B5EF4-FFF2-40B4-BE49-F238E27FC236}">
-                <a16:creationId xmlns:a16="http://schemas.microsoft.com/office/drawing/2014/main" id="{BD9388F0-01B4-484C-97EA-9DC625A2CB1E}"/>
+                <a16:creationId xmlns:a16="http://schemas.microsoft.com/office/drawing/2014/main" id="{9502132F-AB64-4B90-9693-E7B310FB3365}"/>
               </a:ext>
             </a:extLst>
           </p:cNvPr>
@@ -5013,7 +5013,7 @@
                 <a:ea typeface="DejaVu Sans"/>
                 <a:cs typeface="DejaVu Sans"/>
               </a:rPr>
-              <a:t>Avance Capstone al 23 de octubre de 2026</a:t>
+              <a:t>Avance Capstone al 24 de octubre de 2026</a:t>
             </a:r>
           </a:p>
         </p:txBody>
@@ -5023,7 +5023,7 @@
           <p:cNvPr id="5" name="text-4">
             <a:extLst xmlns:a="http://schemas.openxmlformats.org/drawingml/2006/main">
               <a:ext uri="{FF2B5EF4-FFF2-40B4-BE49-F238E27FC236}">
-                <a16:creationId xmlns:a16="http://schemas.microsoft.com/office/drawing/2014/main" id="{17EF7F20-8B83-407E-959C-9539621933B8}"/>
+                <a16:creationId xmlns:a16="http://schemas.microsoft.com/office/drawing/2014/main" id="{F51557CB-D290-4D86-9D77-7B2928DBF676}"/>
               </a:ext>
             </a:extLst>
           </p:cNvPr>
@@ -5203,7 +5203,7 @@
     </p:spTree>
     <p:extLst>
       <p:ext uri="{BB962C8B-B14F-4D97-AF65-F5344CB8AC3E}">
-        <p14:creationId xmlns:p14="http://schemas.microsoft.com/office/powerpoint/2010/main" val="314581338"/>
+        <p14:creationId xmlns:p14="http://schemas.microsoft.com/office/powerpoint/2010/main" val="1578053215"/>
       </p:ext>
     </p:extLst>
   </p:cSld>
@@ -5234,7 +5234,7 @@
           <p:cNvPr id="10" name="text-0">
             <a:extLst xmlns:a="http://schemas.openxmlformats.org/drawingml/2006/main">
               <a:ext uri="{FF2B5EF4-FFF2-40B4-BE49-F238E27FC236}">
-                <a16:creationId xmlns:a16="http://schemas.microsoft.com/office/drawing/2014/main" id="{831D55CE-8AA6-46B8-8125-55908CCC44D3}"/>
+                <a16:creationId xmlns:a16="http://schemas.microsoft.com/office/drawing/2014/main" id="{C2A51BF8-B013-42EC-B64E-D69CAC86D986}"/>
               </a:ext>
             </a:extLst>
           </p:cNvPr>
@@ -5393,7 +5393,7 @@
           <p:cNvPr id="2" name="text-1">
             <a:extLst xmlns:a="http://schemas.openxmlformats.org/drawingml/2006/main">
               <a:ext uri="{FF2B5EF4-FFF2-40B4-BE49-F238E27FC236}">
-                <a16:creationId xmlns:a16="http://schemas.microsoft.com/office/drawing/2014/main" id="{104F8D15-32CF-490D-8569-9BF58DFF7A99}"/>
+                <a16:creationId xmlns:a16="http://schemas.microsoft.com/office/drawing/2014/main" id="{E3742027-275A-4073-8720-EAC4C6452B8C}"/>
               </a:ext>
             </a:extLst>
           </p:cNvPr>
@@ -5552,7 +5552,7 @@
           <p:cNvPr id="3" name="text-2">
             <a:extLst xmlns:a="http://schemas.openxmlformats.org/drawingml/2006/main">
               <a:ext uri="{FF2B5EF4-FFF2-40B4-BE49-F238E27FC236}">
-                <a16:creationId xmlns:a16="http://schemas.microsoft.com/office/drawing/2014/main" id="{68B45C94-F3CC-4A01-922C-2FAB66FF3677}"/>
+                <a16:creationId xmlns:a16="http://schemas.microsoft.com/office/drawing/2014/main" id="{D3DA6D02-ECE0-4928-8B20-02A9A9EB6C21}"/>
               </a:ext>
             </a:extLst>
           </p:cNvPr>
@@ -5701,7 +5701,7 @@
                 <a:ea typeface="DejaVu Sans"/>
                 <a:cs typeface="DejaVu Sans"/>
               </a:rPr>
-              <a:t>78</a:t>
+              <a:t>79</a:t>
             </a:r>
           </a:p>
         </p:txBody>
@@ -5711,7 +5711,7 @@
           <p:cNvPr id="4" name="text-3">
             <a:extLst xmlns:a="http://schemas.openxmlformats.org/drawingml/2006/main">
               <a:ext uri="{FF2B5EF4-FFF2-40B4-BE49-F238E27FC236}">
-                <a16:creationId xmlns:a16="http://schemas.microsoft.com/office/drawing/2014/main" id="{236B6587-0487-4479-8F2F-1E213145FA0C}"/>
+                <a16:creationId xmlns:a16="http://schemas.microsoft.com/office/drawing/2014/main" id="{E914D401-62FC-43D1-9DB5-07B367589517}"/>
               </a:ext>
             </a:extLst>
           </p:cNvPr>
@@ -5870,7 +5870,7 @@
           <p:cNvPr id="5" name="text-4">
             <a:extLst xmlns:a="http://schemas.openxmlformats.org/drawingml/2006/main">
               <a:ext uri="{FF2B5EF4-FFF2-40B4-BE49-F238E27FC236}">
-                <a16:creationId xmlns:a16="http://schemas.microsoft.com/office/drawing/2014/main" id="{DEDD4012-2DBD-4D18-B594-74982080A1A6}"/>
+                <a16:creationId xmlns:a16="http://schemas.microsoft.com/office/drawing/2014/main" id="{A93068BE-625C-45FB-9444-B09AF9FD17C4}"/>
               </a:ext>
             </a:extLst>
           </p:cNvPr>
@@ -6029,7 +6029,7 @@
           <p:cNvPr id="6" name="text-5">
             <a:extLst xmlns:a="http://schemas.openxmlformats.org/drawingml/2006/main">
               <a:ext uri="{FF2B5EF4-FFF2-40B4-BE49-F238E27FC236}">
-                <a16:creationId xmlns:a16="http://schemas.microsoft.com/office/drawing/2014/main" id="{3D02244F-9618-4014-A119-22674412B689}"/>
+                <a16:creationId xmlns:a16="http://schemas.microsoft.com/office/drawing/2014/main" id="{3765DC43-037D-4B95-B599-3EDF46A79D5F}"/>
               </a:ext>
             </a:extLst>
           </p:cNvPr>
@@ -6188,7 +6188,7 @@
           <p:cNvPr id="7" name="text-6">
             <a:extLst xmlns:a="http://schemas.openxmlformats.org/drawingml/2006/main">
               <a:ext uri="{FF2B5EF4-FFF2-40B4-BE49-F238E27FC236}">
-                <a16:creationId xmlns:a16="http://schemas.microsoft.com/office/drawing/2014/main" id="{BABFBAA6-56F9-4820-87F0-A544E8364EA2}"/>
+                <a16:creationId xmlns:a16="http://schemas.microsoft.com/office/drawing/2014/main" id="{0E283F77-C0A4-41F5-B43C-105FCC7A67D0}"/>
               </a:ext>
             </a:extLst>
           </p:cNvPr>
@@ -6347,7 +6347,7 @@
           <p:cNvPr id="8" name="text-7">
             <a:extLst xmlns:a="http://schemas.openxmlformats.org/drawingml/2006/main">
               <a:ext uri="{FF2B5EF4-FFF2-40B4-BE49-F238E27FC236}">
-                <a16:creationId xmlns:a16="http://schemas.microsoft.com/office/drawing/2014/main" id="{058D59AA-7CB1-4D07-B339-7C57491222C5}"/>
+                <a16:creationId xmlns:a16="http://schemas.microsoft.com/office/drawing/2014/main" id="{8DB7A137-EAC3-4D55-9E86-A1F609F11155}"/>
               </a:ext>
             </a:extLst>
           </p:cNvPr>
@@ -6529,7 +6529,7 @@
           <p:cNvPr id="9" name="text-8">
             <a:extLst xmlns:a="http://schemas.openxmlformats.org/drawingml/2006/main">
               <a:ext uri="{FF2B5EF4-FFF2-40B4-BE49-F238E27FC236}">
-                <a16:creationId xmlns:a16="http://schemas.microsoft.com/office/drawing/2014/main" id="{0F431F18-D4A0-497A-BC89-90EE26C6AA32}"/>
+                <a16:creationId xmlns:a16="http://schemas.microsoft.com/office/drawing/2014/main" id="{EEAD08A1-C3F9-49BE-A470-17E8D767B835}"/>
               </a:ext>
             </a:extLst>
           </p:cNvPr>
@@ -6686,7 +6686,7 @@
     </p:spTree>
     <p:extLst>
       <p:ext uri="{BB962C8B-B14F-4D97-AF65-F5344CB8AC3E}">
-        <p14:creationId xmlns:p14="http://schemas.microsoft.com/office/powerpoint/2010/main" val="917079322"/>
+        <p14:creationId xmlns:p14="http://schemas.microsoft.com/office/powerpoint/2010/main" val="702076027"/>
       </p:ext>
     </p:extLst>
   </p:cSld>
@@ -6717,7 +6717,7 @@
           <p:cNvPr id="6" name="text-0">
             <a:extLst xmlns:a="http://schemas.openxmlformats.org/drawingml/2006/main">
               <a:ext uri="{FF2B5EF4-FFF2-40B4-BE49-F238E27FC236}">
-                <a16:creationId xmlns:a16="http://schemas.microsoft.com/office/drawing/2014/main" id="{E0E1627B-5FE3-4287-B333-F2D964D0C93C}"/>
+                <a16:creationId xmlns:a16="http://schemas.microsoft.com/office/drawing/2014/main" id="{83659B90-63F0-433C-B384-B228C33C01CC}"/>
               </a:ext>
             </a:extLst>
           </p:cNvPr>
@@ -6876,7 +6876,7 @@
           <p:cNvPr id="2" name="text-1">
             <a:extLst xmlns:a="http://schemas.openxmlformats.org/drawingml/2006/main">
               <a:ext uri="{FF2B5EF4-FFF2-40B4-BE49-F238E27FC236}">
-                <a16:creationId xmlns:a16="http://schemas.microsoft.com/office/drawing/2014/main" id="{3A7D0CCA-7994-4676-9CBE-9D10B0C14EBB}"/>
+                <a16:creationId xmlns:a16="http://schemas.microsoft.com/office/drawing/2014/main" id="{B3D3AB8D-C88A-4311-9007-94A4C7B32CDE}"/>
               </a:ext>
             </a:extLst>
           </p:cNvPr>
@@ -7035,7 +7035,7 @@
           <p:cNvPr id="3" name="">
             <a:extLst xmlns:a="http://schemas.openxmlformats.org/drawingml/2006/main">
               <a:ext uri="{FF2B5EF4-FFF2-40B4-BE49-F238E27FC236}">
-                <a16:creationId xmlns:a16="http://schemas.microsoft.com/office/drawing/2014/main" id="{E409B1B7-7148-437E-A9AF-2EA85B629A34}"/>
+                <a16:creationId xmlns:a16="http://schemas.microsoft.com/office/drawing/2014/main" id="{A988D7F6-8752-43DA-84B1-1E5BA9392AA3}"/>
               </a:ext>
             </a:extLst>
           </p:cNvPr>
@@ -7246,7 +7246,7 @@
                           <a:ea typeface="DejaVu Sans"/>
                           <a:cs typeface="DejaVu Sans"/>
                         </a:rPr>
-                        <a:t>817.268.133</a:t>
+                        <a:t>792.550.011</a:t>
                       </a:r>
                     </a:p>
                   </a:txBody>
@@ -7594,7 +7594,7 @@
                           <a:ea typeface="DejaVu Sans"/>
                           <a:cs typeface="DejaVu Sans"/>
                         </a:rPr>
-                        <a:t>1.526.153.453</a:t>
+                        <a:t>1.501.435.331</a:t>
                       </a:r>
                     </a:p>
                   </a:txBody>
@@ -7662,7 +7662,7 @@
           <p:cNvPr id="4" name="text-2">
             <a:extLst xmlns:a="http://schemas.openxmlformats.org/drawingml/2006/main">
               <a:ext uri="{FF2B5EF4-FFF2-40B4-BE49-F238E27FC236}">
-                <a16:creationId xmlns:a16="http://schemas.microsoft.com/office/drawing/2014/main" id="{2B7F8E2A-E744-480B-9548-C37E87C96680}"/>
+                <a16:creationId xmlns:a16="http://schemas.microsoft.com/office/drawing/2014/main" id="{66D9DA5B-54C5-482C-A550-64E8529DC4B7}"/>
               </a:ext>
             </a:extLst>
           </p:cNvPr>
@@ -7821,7 +7821,7 @@
           <p:cNvPr id="5" name="text-3">
             <a:extLst xmlns:a="http://schemas.openxmlformats.org/drawingml/2006/main">
               <a:ext uri="{FF2B5EF4-FFF2-40B4-BE49-F238E27FC236}">
-                <a16:creationId xmlns:a16="http://schemas.microsoft.com/office/drawing/2014/main" id="{4B86DB1F-F437-4B6C-A1DC-9D4C86495F1B}"/>
+                <a16:creationId xmlns:a16="http://schemas.microsoft.com/office/drawing/2014/main" id="{C6169EE3-4C58-432B-9760-C22A7A20FB42}"/>
               </a:ext>
             </a:extLst>
           </p:cNvPr>
@@ -7978,7 +7978,7 @@
     </p:spTree>
     <p:extLst>
       <p:ext uri="{BB962C8B-B14F-4D97-AF65-F5344CB8AC3E}">
-        <p14:creationId xmlns:p14="http://schemas.microsoft.com/office/powerpoint/2010/main" val="103162195"/>
+        <p14:creationId xmlns:p14="http://schemas.microsoft.com/office/powerpoint/2010/main" val="262337770"/>
       </p:ext>
     </p:extLst>
   </p:cSld>
@@ -8009,7 +8009,7 @@
           <p:cNvPr id="9" name="text-0">
             <a:extLst xmlns:a="http://schemas.openxmlformats.org/drawingml/2006/main">
               <a:ext uri="{FF2B5EF4-FFF2-40B4-BE49-F238E27FC236}">
-                <a16:creationId xmlns:a16="http://schemas.microsoft.com/office/drawing/2014/main" id="{CE3270B5-2371-428A-B218-105897FADCDB}"/>
+                <a16:creationId xmlns:a16="http://schemas.microsoft.com/office/drawing/2014/main" id="{6DF6B4EA-8FD5-46D4-AD2C-1E04282F19C9}"/>
               </a:ext>
             </a:extLst>
           </p:cNvPr>
@@ -8158,7 +8158,7 @@
                 <a:ea typeface="DejaVu Sans"/>
                 <a:cs typeface="DejaVu Sans"/>
               </a:rPr>
-              <a:t>Dificultades y decisiones pendientes</a:t>
+              <a:t>Revisión final y límites del diseño</a:t>
             </a:r>
           </a:p>
         </p:txBody>
@@ -8168,7 +8168,7 @@
           <p:cNvPr id="2" name="text-1">
             <a:extLst xmlns:a="http://schemas.openxmlformats.org/drawingml/2006/main">
               <a:ext uri="{FF2B5EF4-FFF2-40B4-BE49-F238E27FC236}">
-                <a16:creationId xmlns:a16="http://schemas.microsoft.com/office/drawing/2014/main" id="{8A3611E7-61B6-43BF-B363-DA9A434F62C6}"/>
+                <a16:creationId xmlns:a16="http://schemas.microsoft.com/office/drawing/2014/main" id="{0C9C7C00-F39A-4DF8-A6F8-FA995BDF4041}"/>
               </a:ext>
             </a:extLst>
           </p:cNvPr>
@@ -8327,7 +8327,7 @@
           <p:cNvPr id="3" name="text-2">
             <a:extLst xmlns:a="http://schemas.openxmlformats.org/drawingml/2006/main">
               <a:ext uri="{FF2B5EF4-FFF2-40B4-BE49-F238E27FC236}">
-                <a16:creationId xmlns:a16="http://schemas.microsoft.com/office/drawing/2014/main" id="{64696DF3-5575-4C91-82F3-D64782D62997}"/>
+                <a16:creationId xmlns:a16="http://schemas.microsoft.com/office/drawing/2014/main" id="{E11ABEFA-822F-4AA3-ABE2-F7E34FA893D9}"/>
               </a:ext>
             </a:extLst>
           </p:cNvPr>
@@ -8476,7 +8476,7 @@
                 <a:ea typeface="DejaVu Sans"/>
                 <a:cs typeface="DejaVu Sans"/>
               </a:rPr>
-              <a:t>Coherencia de la opción A</a:t>
+              <a:t>Ajuste WAN cerrado</a:t>
             </a:r>
           </a:p>
         </p:txBody>
@@ -8486,7 +8486,7 @@
           <p:cNvPr id="4" name="text-3">
             <a:extLst xmlns:a="http://schemas.openxmlformats.org/drawingml/2006/main">
               <a:ext uri="{FF2B5EF4-FFF2-40B4-BE49-F238E27FC236}">
-                <a16:creationId xmlns:a16="http://schemas.microsoft.com/office/drawing/2014/main" id="{BEADEF52-70E2-4873-8435-AB048B739037}"/>
+                <a16:creationId xmlns:a16="http://schemas.microsoft.com/office/drawing/2014/main" id="{08776B12-3345-4857-A9C7-FE0D08771907}"/>
               </a:ext>
             </a:extLst>
           </p:cNvPr>
@@ -8635,7 +8635,7 @@
                 <a:ea typeface="DejaVu Sans"/>
                 <a:cs typeface="DejaVu Sans"/>
               </a:rPr>
-              <a:t>A aún utiliza Cisco C1300 en WAN-A/B. Falta sustituirlos por otra marca y recalcular inventario, puertos y costos.</a:t>
+              <a:t>A y B ya usan distribuidores MikroTik. La revisión WAN-2 concilia modelos, puertos, inventario y presupuesto.</a:t>
             </a:r>
           </a:p>
         </p:txBody>
@@ -8645,7 +8645,7 @@
           <p:cNvPr id="5" name="text-4">
             <a:extLst xmlns:a="http://schemas.openxmlformats.org/drawingml/2006/main">
               <a:ext uri="{FF2B5EF4-FFF2-40B4-BE49-F238E27FC236}">
-                <a16:creationId xmlns:a16="http://schemas.microsoft.com/office/drawing/2014/main" id="{B95A9DE6-4981-4EBC-A548-3C034C35FC74}"/>
+                <a16:creationId xmlns:a16="http://schemas.microsoft.com/office/drawing/2014/main" id="{15930B70-6D0D-4458-A33A-69EB94556457}"/>
               </a:ext>
             </a:extLst>
           </p:cNvPr>
@@ -8804,7 +8804,7 @@
           <p:cNvPr id="6" name="text-5">
             <a:extLst xmlns:a="http://schemas.openxmlformats.org/drawingml/2006/main">
               <a:ext uri="{FF2B5EF4-FFF2-40B4-BE49-F238E27FC236}">
-                <a16:creationId xmlns:a16="http://schemas.microsoft.com/office/drawing/2014/main" id="{2C9315D4-B7EE-4AC4-833E-7A1587F7AE0A}"/>
+                <a16:creationId xmlns:a16="http://schemas.microsoft.com/office/drawing/2014/main" id="{BA6F7C28-F113-495F-B4C3-FE9876831033}"/>
               </a:ext>
             </a:extLst>
           </p:cNvPr>
@@ -8963,7 +8963,7 @@
           <p:cNvPr id="7" name="text-6">
             <a:extLst xmlns:a="http://schemas.openxmlformats.org/drawingml/2006/main">
               <a:ext uri="{FF2B5EF4-FFF2-40B4-BE49-F238E27FC236}">
-                <a16:creationId xmlns:a16="http://schemas.microsoft.com/office/drawing/2014/main" id="{EBA938CD-2E67-448F-90D9-0264197ECD24}"/>
+                <a16:creationId xmlns:a16="http://schemas.microsoft.com/office/drawing/2014/main" id="{85D1EDDE-6CD2-41D2-9CF6-4FEAE6453E93}"/>
               </a:ext>
             </a:extLst>
           </p:cNvPr>
@@ -9122,7 +9122,7 @@
           <p:cNvPr id="8" name="text-7">
             <a:extLst xmlns:a="http://schemas.openxmlformats.org/drawingml/2006/main">
               <a:ext uri="{FF2B5EF4-FFF2-40B4-BE49-F238E27FC236}">
-                <a16:creationId xmlns:a16="http://schemas.microsoft.com/office/drawing/2014/main" id="{C145D820-16C2-41DD-B139-5F85114A34DC}"/>
+                <a16:creationId xmlns:a16="http://schemas.microsoft.com/office/drawing/2014/main" id="{4FCDF9ED-0BE1-44FC-824E-3AE051AE60E1}"/>
               </a:ext>
             </a:extLst>
           </p:cNvPr>
@@ -9279,7 +9279,7 @@
     </p:spTree>
     <p:extLst>
       <p:ext uri="{BB962C8B-B14F-4D97-AF65-F5344CB8AC3E}">
-        <p14:creationId xmlns:p14="http://schemas.microsoft.com/office/powerpoint/2010/main" val="1609352926"/>
+        <p14:creationId xmlns:p14="http://schemas.microsoft.com/office/powerpoint/2010/main" val="134550108"/>
       </p:ext>
     </p:extLst>
   </p:cSld>
@@ -9310,7 +9310,7 @@
           <p:cNvPr id="5" name="text-0">
             <a:extLst xmlns:a="http://schemas.openxmlformats.org/drawingml/2006/main">
               <a:ext uri="{FF2B5EF4-FFF2-40B4-BE49-F238E27FC236}">
-                <a16:creationId xmlns:a16="http://schemas.microsoft.com/office/drawing/2014/main" id="{43BFFD78-F62F-4330-91ED-20F8CF54532A}"/>
+                <a16:creationId xmlns:a16="http://schemas.microsoft.com/office/drawing/2014/main" id="{E5CDC38B-9FAE-46F9-9918-AA6939465DD0}"/>
               </a:ext>
             </a:extLst>
           </p:cNvPr>
@@ -9469,7 +9469,7 @@
           <p:cNvPr id="2" name="text-1">
             <a:extLst xmlns:a="http://schemas.openxmlformats.org/drawingml/2006/main">
               <a:ext uri="{FF2B5EF4-FFF2-40B4-BE49-F238E27FC236}">
-                <a16:creationId xmlns:a16="http://schemas.microsoft.com/office/drawing/2014/main" id="{98F5BE47-1297-4226-9D57-D8B0EDF2461F}"/>
+                <a16:creationId xmlns:a16="http://schemas.microsoft.com/office/drawing/2014/main" id="{AD767768-4107-45E1-99C6-4236D1D32F85}"/>
               </a:ext>
             </a:extLst>
           </p:cNvPr>
@@ -9628,7 +9628,7 @@
           <p:cNvPr id="3" name="">
             <a:extLst xmlns:a="http://schemas.openxmlformats.org/drawingml/2006/main">
               <a:ext uri="{FF2B5EF4-FFF2-40B4-BE49-F238E27FC236}">
-                <a16:creationId xmlns:a16="http://schemas.microsoft.com/office/drawing/2014/main" id="{F86F35CA-1674-432A-9F0B-3DDD6DE1BF35}"/>
+                <a16:creationId xmlns:a16="http://schemas.microsoft.com/office/drawing/2014/main" id="{19540FED-14EA-4B1C-944C-4073CA6C4F0D}"/>
               </a:ext>
             </a:extLst>
           </p:cNvPr>
@@ -9988,7 +9988,7 @@
           <p:cNvPr id="4" name="text-2">
             <a:extLst xmlns:a="http://schemas.openxmlformats.org/drawingml/2006/main">
               <a:ext uri="{FF2B5EF4-FFF2-40B4-BE49-F238E27FC236}">
-                <a16:creationId xmlns:a16="http://schemas.microsoft.com/office/drawing/2014/main" id="{6F4C879F-E36F-42BF-896E-96DCB6A8015B}"/>
+                <a16:creationId xmlns:a16="http://schemas.microsoft.com/office/drawing/2014/main" id="{CAD99BF4-D821-49A9-ADA3-AD18829166DF}"/>
               </a:ext>
             </a:extLst>
           </p:cNvPr>
@@ -10145,7 +10145,7 @@
     </p:spTree>
     <p:extLst>
       <p:ext uri="{BB962C8B-B14F-4D97-AF65-F5344CB8AC3E}">
-        <p14:creationId xmlns:p14="http://schemas.microsoft.com/office/powerpoint/2010/main" val="999532484"/>
+        <p14:creationId xmlns:p14="http://schemas.microsoft.com/office/powerpoint/2010/main" val="279815981"/>
       </p:ext>
     </p:extLst>
   </p:cSld>
@@ -10176,7 +10176,7 @@
           <p:cNvPr id="5" name="text-0">
             <a:extLst xmlns:a="http://schemas.openxmlformats.org/drawingml/2006/main">
               <a:ext uri="{FF2B5EF4-FFF2-40B4-BE49-F238E27FC236}">
-                <a16:creationId xmlns:a16="http://schemas.microsoft.com/office/drawing/2014/main" id="{25FAFAFA-E6A2-429B-ACC4-7042A61061B4}"/>
+                <a16:creationId xmlns:a16="http://schemas.microsoft.com/office/drawing/2014/main" id="{27F0AC76-9E38-4C29-BA48-3400BB4EB787}"/>
               </a:ext>
             </a:extLst>
           </p:cNvPr>
@@ -10335,7 +10335,7 @@
           <p:cNvPr id="2" name="text-1">
             <a:extLst xmlns:a="http://schemas.openxmlformats.org/drawingml/2006/main">
               <a:ext uri="{FF2B5EF4-FFF2-40B4-BE49-F238E27FC236}">
-                <a16:creationId xmlns:a16="http://schemas.microsoft.com/office/drawing/2014/main" id="{B46B2DF4-333F-4C56-8706-F70511429753}"/>
+                <a16:creationId xmlns:a16="http://schemas.microsoft.com/office/drawing/2014/main" id="{4EE9687B-3EBB-4A9F-BBC6-1D6DD56AC53E}"/>
               </a:ext>
             </a:extLst>
           </p:cNvPr>
@@ -10494,7 +10494,7 @@
           <p:cNvPr id="3" name="">
             <a:extLst xmlns:a="http://schemas.openxmlformats.org/drawingml/2006/main">
               <a:ext uri="{FF2B5EF4-FFF2-40B4-BE49-F238E27FC236}">
-                <a16:creationId xmlns:a16="http://schemas.microsoft.com/office/drawing/2014/main" id="{3FD602D0-29B9-4BD9-929C-0A2D76B6B7F8}"/>
+                <a16:creationId xmlns:a16="http://schemas.microsoft.com/office/drawing/2014/main" id="{0AC11D2E-A2D0-4FFC-897E-8DF656F1A88A}"/>
               </a:ext>
             </a:extLst>
           </p:cNvPr>
@@ -10742,7 +10742,7 @@
                           <a:ea typeface="DejaVu Sans"/>
                           <a:cs typeface="DejaVu Sans"/>
                         </a:rPr>
-                        <a:t>Cerrar el cambio WAN de A y actualizar las salidas afectadas.</a:t>
+                        <a:t>Cambio WAN de A cerrado. Revisar el recorrido de la grabación.</a:t>
                       </a:r>
                     </a:p>
                   </a:txBody>
@@ -11014,7 +11014,7 @@
           <p:cNvPr id="4" name="text-2">
             <a:extLst xmlns:a="http://schemas.openxmlformats.org/drawingml/2006/main">
               <a:ext uri="{FF2B5EF4-FFF2-40B4-BE49-F238E27FC236}">
-                <a16:creationId xmlns:a16="http://schemas.microsoft.com/office/drawing/2014/main" id="{8A0C7FFB-DCC8-461A-B756-9F53B8E80260}"/>
+                <a16:creationId xmlns:a16="http://schemas.microsoft.com/office/drawing/2014/main" id="{2D1069FF-3C94-49DD-AA0C-5442E4E7E2B3}"/>
               </a:ext>
             </a:extLst>
           </p:cNvPr>
@@ -11171,7 +11171,7 @@
     </p:spTree>
     <p:extLst>
       <p:ext uri="{BB962C8B-B14F-4D97-AF65-F5344CB8AC3E}">
-        <p14:creationId xmlns:p14="http://schemas.microsoft.com/office/powerpoint/2010/main" val="1596447605"/>
+        <p14:creationId xmlns:p14="http://schemas.microsoft.com/office/powerpoint/2010/main" val="1977542362"/>
       </p:ext>
     </p:extLst>
   </p:cSld>
@@ -11202,7 +11202,7 @@
           <p:cNvPr id="9" name="text-0">
             <a:extLst xmlns:a="http://schemas.openxmlformats.org/drawingml/2006/main">
               <a:ext uri="{FF2B5EF4-FFF2-40B4-BE49-F238E27FC236}">
-                <a16:creationId xmlns:a16="http://schemas.microsoft.com/office/drawing/2014/main" id="{CE59C65C-141A-4E25-BC79-903DECB41E6C}"/>
+                <a16:creationId xmlns:a16="http://schemas.microsoft.com/office/drawing/2014/main" id="{A4464EB4-9F0D-4D9D-984C-A362AAD2F0A7}"/>
               </a:ext>
             </a:extLst>
           </p:cNvPr>
@@ -11361,7 +11361,7 @@
           <p:cNvPr id="2" name="text-1">
             <a:extLst xmlns:a="http://schemas.openxmlformats.org/drawingml/2006/main">
               <a:ext uri="{FF2B5EF4-FFF2-40B4-BE49-F238E27FC236}">
-                <a16:creationId xmlns:a16="http://schemas.microsoft.com/office/drawing/2014/main" id="{883DBB6E-53A9-4D2D-A607-11B5B1B98073}"/>
+                <a16:creationId xmlns:a16="http://schemas.microsoft.com/office/drawing/2014/main" id="{BF3D0EC9-5E26-4ED1-9AD6-6141FF65C902}"/>
               </a:ext>
             </a:extLst>
           </p:cNvPr>
@@ -11520,7 +11520,7 @@
           <p:cNvPr id="3" name="text-2">
             <a:extLst xmlns:a="http://schemas.openxmlformats.org/drawingml/2006/main">
               <a:ext uri="{FF2B5EF4-FFF2-40B4-BE49-F238E27FC236}">
-                <a16:creationId xmlns:a16="http://schemas.microsoft.com/office/drawing/2014/main" id="{851B1186-CD00-41B0-8049-B38C15AF6889}"/>
+                <a16:creationId xmlns:a16="http://schemas.microsoft.com/office/drawing/2014/main" id="{C7205840-C11A-4F2E-A349-501AFDFA7490}"/>
               </a:ext>
             </a:extLst>
           </p:cNvPr>
@@ -11679,7 +11679,7 @@
           <p:cNvPr id="4" name="text-3">
             <a:extLst xmlns:a="http://schemas.openxmlformats.org/drawingml/2006/main">
               <a:ext uri="{FF2B5EF4-FFF2-40B4-BE49-F238E27FC236}">
-                <a16:creationId xmlns:a16="http://schemas.microsoft.com/office/drawing/2014/main" id="{0F2ADA5C-87DC-419C-A10A-714C7AEE156A}"/>
+                <a16:creationId xmlns:a16="http://schemas.microsoft.com/office/drawing/2014/main" id="{311B92CC-326B-4EEE-AE03-DDEC560F7CB3}"/>
               </a:ext>
             </a:extLst>
           </p:cNvPr>
@@ -11866,7 +11866,7 @@
           <p:cNvPr id="5" name="text-4">
             <a:extLst xmlns:a="http://schemas.openxmlformats.org/drawingml/2006/main">
               <a:ext uri="{FF2B5EF4-FFF2-40B4-BE49-F238E27FC236}">
-                <a16:creationId xmlns:a16="http://schemas.microsoft.com/office/drawing/2014/main" id="{E51446C7-102D-4C4D-B4BE-A935A4423D44}"/>
+                <a16:creationId xmlns:a16="http://schemas.microsoft.com/office/drawing/2014/main" id="{3BBF4EC9-2AA4-4F07-9DB9-600345E41D2A}"/>
               </a:ext>
             </a:extLst>
           </p:cNvPr>
@@ -12025,7 +12025,7 @@
           <p:cNvPr id="6" name="text-5">
             <a:extLst xmlns:a="http://schemas.openxmlformats.org/drawingml/2006/main">
               <a:ext uri="{FF2B5EF4-FFF2-40B4-BE49-F238E27FC236}">
-                <a16:creationId xmlns:a16="http://schemas.microsoft.com/office/drawing/2014/main" id="{5F683C5B-78EB-4233-A873-AC0369FC6996}"/>
+                <a16:creationId xmlns:a16="http://schemas.microsoft.com/office/drawing/2014/main" id="{F102EE6D-B0D7-40CE-974F-74B28EA2536C}"/>
               </a:ext>
             </a:extLst>
           </p:cNvPr>
@@ -12212,7 +12212,7 @@
           <p:cNvPr id="7" name="text-6">
             <a:extLst xmlns:a="http://schemas.openxmlformats.org/drawingml/2006/main">
               <a:ext uri="{FF2B5EF4-FFF2-40B4-BE49-F238E27FC236}">
-                <a16:creationId xmlns:a16="http://schemas.microsoft.com/office/drawing/2014/main" id="{66103B27-A27A-42EF-9787-3C11FFF6D167}"/>
+                <a16:creationId xmlns:a16="http://schemas.microsoft.com/office/drawing/2014/main" id="{B69C443B-0F2F-4658-8A37-31373C6D095B}"/>
               </a:ext>
             </a:extLst>
           </p:cNvPr>
@@ -12371,7 +12371,7 @@
           <p:cNvPr id="8" name="text-7">
             <a:extLst xmlns:a="http://schemas.openxmlformats.org/drawingml/2006/main">
               <a:ext uri="{FF2B5EF4-FFF2-40B4-BE49-F238E27FC236}">
-                <a16:creationId xmlns:a16="http://schemas.microsoft.com/office/drawing/2014/main" id="{42D432A5-8D50-4DDC-9F51-EA0B4DACB61C}"/>
+                <a16:creationId xmlns:a16="http://schemas.microsoft.com/office/drawing/2014/main" id="{F2FEB201-C350-482D-92A6-DD5F234E49B1}"/>
               </a:ext>
             </a:extLst>
           </p:cNvPr>
@@ -12520,7 +12520,7 @@
                 <a:ea typeface="DejaVu Sans"/>
                 <a:cs typeface="DejaVu Sans"/>
               </a:rPr>
-              <a:t>Pendientes de esta entrega: ajuste WAN de A, grabación y revisión del video, envío de video y PPT por AVA.</a:t>
+              <a:t>Pendientes de esta entrega: grabación y revisión del video, envío de video y PPT por AVA.</a:t>
             </a:r>
           </a:p>
         </p:txBody>
@@ -12528,7 +12528,7 @@
     </p:spTree>
     <p:extLst>
       <p:ext uri="{BB962C8B-B14F-4D97-AF65-F5344CB8AC3E}">
-        <p14:creationId xmlns:p14="http://schemas.microsoft.com/office/powerpoint/2010/main" val="1784033521"/>
+        <p14:creationId xmlns:p14="http://schemas.microsoft.com/office/powerpoint/2010/main" val="672301099"/>
       </p:ext>
     </p:extLst>
   </p:cSld>
@@ -12559,7 +12559,7 @@
           <p:cNvPr id="8" name="text-0">
             <a:extLst xmlns:a="http://schemas.openxmlformats.org/drawingml/2006/main">
               <a:ext uri="{FF2B5EF4-FFF2-40B4-BE49-F238E27FC236}">
-                <a16:creationId xmlns:a16="http://schemas.microsoft.com/office/drawing/2014/main" id="{9B601BEC-76E5-4BD2-AD13-C1C60CC49040}"/>
+                <a16:creationId xmlns:a16="http://schemas.microsoft.com/office/drawing/2014/main" id="{AC9DA80F-C300-4939-8D0B-CECB52572EB4}"/>
               </a:ext>
             </a:extLst>
           </p:cNvPr>
@@ -12718,7 +12718,7 @@
           <p:cNvPr id="2" name="text-1">
             <a:extLst xmlns:a="http://schemas.openxmlformats.org/drawingml/2006/main">
               <a:ext uri="{FF2B5EF4-FFF2-40B4-BE49-F238E27FC236}">
-                <a16:creationId xmlns:a16="http://schemas.microsoft.com/office/drawing/2014/main" id="{B3E2027C-8EBB-44E9-8106-7C57630B5AF0}"/>
+                <a16:creationId xmlns:a16="http://schemas.microsoft.com/office/drawing/2014/main" id="{38B20E09-0F2F-4D75-8505-ED42E4778C90}"/>
               </a:ext>
             </a:extLst>
           </p:cNvPr>
@@ -12877,7 +12877,7 @@
           <p:cNvPr id="3" name="text-2">
             <a:extLst xmlns:a="http://schemas.openxmlformats.org/drawingml/2006/main">
               <a:ext uri="{FF2B5EF4-FFF2-40B4-BE49-F238E27FC236}">
-                <a16:creationId xmlns:a16="http://schemas.microsoft.com/office/drawing/2014/main" id="{43AEEFE5-D040-4D79-BDA8-92688A861283}"/>
+                <a16:creationId xmlns:a16="http://schemas.microsoft.com/office/drawing/2014/main" id="{8A10B46E-4642-4E5B-9C16-C8562F4474D7}"/>
               </a:ext>
             </a:extLst>
           </p:cNvPr>
@@ -13036,7 +13036,7 @@
           <p:cNvPr id="4" name="text-3">
             <a:extLst xmlns:a="http://schemas.openxmlformats.org/drawingml/2006/main">
               <a:ext uri="{FF2B5EF4-FFF2-40B4-BE49-F238E27FC236}">
-                <a16:creationId xmlns:a16="http://schemas.microsoft.com/office/drawing/2014/main" id="{64824920-4109-4C12-B96B-9CC4A49E3DA1}"/>
+                <a16:creationId xmlns:a16="http://schemas.microsoft.com/office/drawing/2014/main" id="{6DAEBF1F-74DF-40BB-8662-415F2C29E634}"/>
               </a:ext>
             </a:extLst>
           </p:cNvPr>
@@ -13251,7 +13251,7 @@
           <p:cNvPr id="5" name="text-4">
             <a:extLst xmlns:a="http://schemas.openxmlformats.org/drawingml/2006/main">
               <a:ext uri="{FF2B5EF4-FFF2-40B4-BE49-F238E27FC236}">
-                <a16:creationId xmlns:a16="http://schemas.microsoft.com/office/drawing/2014/main" id="{29FFAAC6-9CFE-4DD8-9D25-03E666327BEC}"/>
+                <a16:creationId xmlns:a16="http://schemas.microsoft.com/office/drawing/2014/main" id="{9929D680-EF56-49F5-BE4E-55FC4FB6B22B}"/>
               </a:ext>
             </a:extLst>
           </p:cNvPr>
@@ -13410,7 +13410,7 @@
           <p:cNvPr id="6" name="text-5">
             <a:extLst xmlns:a="http://schemas.openxmlformats.org/drawingml/2006/main">
               <a:ext uri="{FF2B5EF4-FFF2-40B4-BE49-F238E27FC236}">
-                <a16:creationId xmlns:a16="http://schemas.microsoft.com/office/drawing/2014/main" id="{85315AB0-36E8-4A35-9059-39F25C534756}"/>
+                <a16:creationId xmlns:a16="http://schemas.microsoft.com/office/drawing/2014/main" id="{7DECEA33-B2C8-4391-80D0-35DE1A5804CD}"/>
               </a:ext>
             </a:extLst>
           </p:cNvPr>
@@ -13625,7 +13625,7 @@
           <p:cNvPr id="7" name="text-6">
             <a:extLst xmlns:a="http://schemas.openxmlformats.org/drawingml/2006/main">
               <a:ext uri="{FF2B5EF4-FFF2-40B4-BE49-F238E27FC236}">
-                <a16:creationId xmlns:a16="http://schemas.microsoft.com/office/drawing/2014/main" id="{1C2C5F41-A4CE-41B4-A450-5A5ACF559A86}"/>
+                <a16:creationId xmlns:a16="http://schemas.microsoft.com/office/drawing/2014/main" id="{155BCB47-CC8B-4430-8997-CF187B107B6D}"/>
               </a:ext>
             </a:extLst>
           </p:cNvPr>
@@ -13782,7 +13782,7 @@
     </p:spTree>
     <p:extLst>
       <p:ext uri="{BB962C8B-B14F-4D97-AF65-F5344CB8AC3E}">
-        <p14:creationId xmlns:p14="http://schemas.microsoft.com/office/powerpoint/2010/main" val="341326297"/>
+        <p14:creationId xmlns:p14="http://schemas.microsoft.com/office/powerpoint/2010/main" val="571669159"/>
       </p:ext>
     </p:extLst>
   </p:cSld>
@@ -13813,7 +13813,7 @@
           <p:cNvPr id="5" name="text-0">
             <a:extLst xmlns:a="http://schemas.openxmlformats.org/drawingml/2006/main">
               <a:ext uri="{FF2B5EF4-FFF2-40B4-BE49-F238E27FC236}">
-                <a16:creationId xmlns:a16="http://schemas.microsoft.com/office/drawing/2014/main" id="{C93ECC1F-E340-48A9-B759-983E0B01D026}"/>
+                <a16:creationId xmlns:a16="http://schemas.microsoft.com/office/drawing/2014/main" id="{65C969E9-7E24-43F4-9F3D-1541EA4DE387}"/>
               </a:ext>
             </a:extLst>
           </p:cNvPr>
@@ -13972,7 +13972,7 @@
           <p:cNvPr id="2" name="text-1">
             <a:extLst xmlns:a="http://schemas.openxmlformats.org/drawingml/2006/main">
               <a:ext uri="{FF2B5EF4-FFF2-40B4-BE49-F238E27FC236}">
-                <a16:creationId xmlns:a16="http://schemas.microsoft.com/office/drawing/2014/main" id="{63FBDAF7-EC9A-418E-B66C-C24E8022C889}"/>
+                <a16:creationId xmlns:a16="http://schemas.microsoft.com/office/drawing/2014/main" id="{DF23105E-659B-4255-986E-063D1AABE84D}"/>
               </a:ext>
             </a:extLst>
           </p:cNvPr>
@@ -14131,7 +14131,7 @@
           <p:cNvPr id="3" name="">
             <a:extLst xmlns:a="http://schemas.openxmlformats.org/drawingml/2006/main">
               <a:ext uri="{FF2B5EF4-FFF2-40B4-BE49-F238E27FC236}">
-                <a16:creationId xmlns:a16="http://schemas.microsoft.com/office/drawing/2014/main" id="{312D8F18-D8F6-48EB-822F-37FA33A851C2}"/>
+                <a16:creationId xmlns:a16="http://schemas.microsoft.com/office/drawing/2014/main" id="{06997678-3B5E-4A7A-8457-D26809B1EAD8}"/>
               </a:ext>
             </a:extLst>
           </p:cNvPr>
@@ -14491,7 +14491,7 @@
           <p:cNvPr id="4" name="text-2">
             <a:extLst xmlns:a="http://schemas.openxmlformats.org/drawingml/2006/main">
               <a:ext uri="{FF2B5EF4-FFF2-40B4-BE49-F238E27FC236}">
-                <a16:creationId xmlns:a16="http://schemas.microsoft.com/office/drawing/2014/main" id="{C6E33796-9229-4C92-ADAA-31090CB0B423}"/>
+                <a16:creationId xmlns:a16="http://schemas.microsoft.com/office/drawing/2014/main" id="{2613C4B0-A5C1-475D-B0F4-684DCAF93F12}"/>
               </a:ext>
             </a:extLst>
           </p:cNvPr>
@@ -14648,7 +14648,7 @@
     </p:spTree>
     <p:extLst>
       <p:ext uri="{BB962C8B-B14F-4D97-AF65-F5344CB8AC3E}">
-        <p14:creationId xmlns:p14="http://schemas.microsoft.com/office/powerpoint/2010/main" val="1159261813"/>
+        <p14:creationId xmlns:p14="http://schemas.microsoft.com/office/powerpoint/2010/main" val="956373861"/>
       </p:ext>
     </p:extLst>
   </p:cSld>
@@ -14679,7 +14679,7 @@
           <p:cNvPr id="6" name="text-0">
             <a:extLst xmlns:a="http://schemas.openxmlformats.org/drawingml/2006/main">
               <a:ext uri="{FF2B5EF4-FFF2-40B4-BE49-F238E27FC236}">
-                <a16:creationId xmlns:a16="http://schemas.microsoft.com/office/drawing/2014/main" id="{80223423-8642-4EF1-B10A-5FD69A03FC0C}"/>
+                <a16:creationId xmlns:a16="http://schemas.microsoft.com/office/drawing/2014/main" id="{318142DD-5E09-4FF5-A23C-BDAAC46ECBAD}"/>
               </a:ext>
             </a:extLst>
           </p:cNvPr>
@@ -14838,7 +14838,7 @@
           <p:cNvPr id="2" name="text-1">
             <a:extLst xmlns:a="http://schemas.openxmlformats.org/drawingml/2006/main">
               <a:ext uri="{FF2B5EF4-FFF2-40B4-BE49-F238E27FC236}">
-                <a16:creationId xmlns:a16="http://schemas.microsoft.com/office/drawing/2014/main" id="{F7A73F17-78F2-483E-AE7B-2C5F096B8183}"/>
+                <a16:creationId xmlns:a16="http://schemas.microsoft.com/office/drawing/2014/main" id="{260EBB74-998D-410F-BDF6-37B68EFCE4D9}"/>
               </a:ext>
             </a:extLst>
           </p:cNvPr>
@@ -14997,7 +14997,7 @@
           <p:cNvPr id="3" name="">
             <a:extLst xmlns:a="http://schemas.openxmlformats.org/drawingml/2006/main">
               <a:ext uri="{FF2B5EF4-FFF2-40B4-BE49-F238E27FC236}">
-                <a16:creationId xmlns:a16="http://schemas.microsoft.com/office/drawing/2014/main" id="{BAFA4DF9-E897-4AF3-89B4-612F7A69CDAB}"/>
+                <a16:creationId xmlns:a16="http://schemas.microsoft.com/office/drawing/2014/main" id="{84D7E6B0-B2ED-4D10-94AC-764A18C45A7A}"/>
               </a:ext>
             </a:extLst>
           </p:cNvPr>
@@ -15007,7 +15007,7 @@
           <p:nvPr/>
         </p:nvPicPr>
         <p:blipFill>
-          <a:blip xmlns:r="http://schemas.openxmlformats.org/officeDocument/2006/relationships" xmlns:a="http://schemas.openxmlformats.org/drawingml/2006/main" r:embed="R84b66c4f9da643fc"/>
+          <a:blip xmlns:r="http://schemas.openxmlformats.org/officeDocument/2006/relationships" xmlns:a="http://schemas.openxmlformats.org/drawingml/2006/main" r:embed="R7c2cd2e13e814a17"/>
           <a:stretch xmlns:a="http://schemas.openxmlformats.org/drawingml/2006/main"/>
         </p:blipFill>
         <p:spPr>
@@ -15025,7 +15025,7 @@
           <p:cNvPr id="4" name="text-2">
             <a:extLst xmlns:a="http://schemas.openxmlformats.org/drawingml/2006/main">
               <a:ext uri="{FF2B5EF4-FFF2-40B4-BE49-F238E27FC236}">
-                <a16:creationId xmlns:a16="http://schemas.microsoft.com/office/drawing/2014/main" id="{16C3FE3A-C171-4F14-86A2-5314A888763A}"/>
+                <a16:creationId xmlns:a16="http://schemas.microsoft.com/office/drawing/2014/main" id="{54F3FCFA-A0E6-451F-8295-D0D5897959C7}"/>
               </a:ext>
             </a:extLst>
           </p:cNvPr>
@@ -15184,7 +15184,7 @@
           <p:cNvPr id="5" name="text-3">
             <a:extLst xmlns:a="http://schemas.openxmlformats.org/drawingml/2006/main">
               <a:ext uri="{FF2B5EF4-FFF2-40B4-BE49-F238E27FC236}">
-                <a16:creationId xmlns:a16="http://schemas.microsoft.com/office/drawing/2014/main" id="{AD885E96-83B9-45D6-B156-2F38BF497463}"/>
+                <a16:creationId xmlns:a16="http://schemas.microsoft.com/office/drawing/2014/main" id="{B7EB25AB-AE7D-4314-BF59-0080EF98A56B}"/>
               </a:ext>
             </a:extLst>
           </p:cNvPr>
@@ -15341,7 +15341,7 @@
     </p:spTree>
     <p:extLst>
       <p:ext uri="{BB962C8B-B14F-4D97-AF65-F5344CB8AC3E}">
-        <p14:creationId xmlns:p14="http://schemas.microsoft.com/office/powerpoint/2010/main" val="1474988300"/>
+        <p14:creationId xmlns:p14="http://schemas.microsoft.com/office/powerpoint/2010/main" val="969651781"/>
       </p:ext>
     </p:extLst>
   </p:cSld>
@@ -15372,7 +15372,7 @@
           <p:cNvPr id="5" name="text-0">
             <a:extLst xmlns:a="http://schemas.openxmlformats.org/drawingml/2006/main">
               <a:ext uri="{FF2B5EF4-FFF2-40B4-BE49-F238E27FC236}">
-                <a16:creationId xmlns:a16="http://schemas.microsoft.com/office/drawing/2014/main" id="{9DDF1343-12C3-44DF-A6EE-D9169092749A}"/>
+                <a16:creationId xmlns:a16="http://schemas.microsoft.com/office/drawing/2014/main" id="{B503FEEB-1584-451B-B7C1-D2ECB0CFE653}"/>
               </a:ext>
             </a:extLst>
           </p:cNvPr>
@@ -15531,7 +15531,7 @@
           <p:cNvPr id="2" name="text-1">
             <a:extLst xmlns:a="http://schemas.openxmlformats.org/drawingml/2006/main">
               <a:ext uri="{FF2B5EF4-FFF2-40B4-BE49-F238E27FC236}">
-                <a16:creationId xmlns:a16="http://schemas.microsoft.com/office/drawing/2014/main" id="{07F79653-A327-4901-9EA0-829DA4B12287}"/>
+                <a16:creationId xmlns:a16="http://schemas.microsoft.com/office/drawing/2014/main" id="{D0572C7A-2BA2-4F8A-9255-FC7AEF8A5664}"/>
               </a:ext>
             </a:extLst>
           </p:cNvPr>
@@ -15690,7 +15690,7 @@
           <p:cNvPr id="3" name="">
             <a:extLst xmlns:a="http://schemas.openxmlformats.org/drawingml/2006/main">
               <a:ext uri="{FF2B5EF4-FFF2-40B4-BE49-F238E27FC236}">
-                <a16:creationId xmlns:a16="http://schemas.microsoft.com/office/drawing/2014/main" id="{37B8B981-553F-47AF-8FF1-E629A04CBF78}"/>
+                <a16:creationId xmlns:a16="http://schemas.microsoft.com/office/drawing/2014/main" id="{DFC67B83-FD8C-4F2E-9754-1E494ACEB33D}"/>
               </a:ext>
             </a:extLst>
           </p:cNvPr>
@@ -16275,20 +16275,7 @@
                           <a:ea typeface="DejaVu Sans"/>
                           <a:cs typeface="DejaVu Sans"/>
                         </a:rPr>
-                        <a:t>45 C1300 GE y 1 multigig</a:t>
-                      </a:r>
-                    </a:p>
-                    <a:p>
-                      <a:r>
-                        <a:rPr sz="1725">
-                          <a:solidFill>
-                            <a:srgbClr val="102638"/>
-                          </a:solidFill>
-                          <a:latin typeface="DejaVu Sans"/>
-                          <a:ea typeface="DejaVu Sans"/>
-                          <a:cs typeface="DejaVu Sans"/>
-                        </a:rPr>
-                        <a:t>Cambio de marca pendiente</a:t>
+                        <a:t>45 hEX E50UG y 1 CRS310</a:t>
                       </a:r>
                     </a:p>
                   </a:txBody>
@@ -16356,7 +16343,7 @@
           <p:cNvPr id="4" name="text-2">
             <a:extLst xmlns:a="http://schemas.openxmlformats.org/drawingml/2006/main">
               <a:ext uri="{FF2B5EF4-FFF2-40B4-BE49-F238E27FC236}">
-                <a16:creationId xmlns:a16="http://schemas.microsoft.com/office/drawing/2014/main" id="{AE402265-25FC-4FFF-81AF-B2321D4C3CBF}"/>
+                <a16:creationId xmlns:a16="http://schemas.microsoft.com/office/drawing/2014/main" id="{48770BC2-9BCD-49FE-B907-D140BA72AD87}"/>
               </a:ext>
             </a:extLst>
           </p:cNvPr>
@@ -16513,7 +16500,7 @@
     </p:spTree>
     <p:extLst>
       <p:ext uri="{BB962C8B-B14F-4D97-AF65-F5344CB8AC3E}">
-        <p14:creationId xmlns:p14="http://schemas.microsoft.com/office/powerpoint/2010/main" val="1493202071"/>
+        <p14:creationId xmlns:p14="http://schemas.microsoft.com/office/powerpoint/2010/main" val="581809988"/>
       </p:ext>
     </p:extLst>
   </p:cSld>
@@ -16544,7 +16531,7 @@
           <p:cNvPr id="5" name="text-0">
             <a:extLst xmlns:a="http://schemas.openxmlformats.org/drawingml/2006/main">
               <a:ext uri="{FF2B5EF4-FFF2-40B4-BE49-F238E27FC236}">
-                <a16:creationId xmlns:a16="http://schemas.microsoft.com/office/drawing/2014/main" id="{CB108B3D-D59B-403A-AAE7-004B700A1EBE}"/>
+                <a16:creationId xmlns:a16="http://schemas.microsoft.com/office/drawing/2014/main" id="{54799513-7A3D-4348-B658-34F05001F6E0}"/>
               </a:ext>
             </a:extLst>
           </p:cNvPr>
@@ -16703,7 +16690,7 @@
           <p:cNvPr id="2" name="text-1">
             <a:extLst xmlns:a="http://schemas.openxmlformats.org/drawingml/2006/main">
               <a:ext uri="{FF2B5EF4-FFF2-40B4-BE49-F238E27FC236}">
-                <a16:creationId xmlns:a16="http://schemas.microsoft.com/office/drawing/2014/main" id="{B41885ED-E777-4D85-9CBD-04DB61B1739E}"/>
+                <a16:creationId xmlns:a16="http://schemas.microsoft.com/office/drawing/2014/main" id="{5916F03B-48F4-4883-B911-0003EC8E7A59}"/>
               </a:ext>
             </a:extLst>
           </p:cNvPr>
@@ -16862,7 +16849,7 @@
           <p:cNvPr id="3" name="">
             <a:extLst xmlns:a="http://schemas.openxmlformats.org/drawingml/2006/main">
               <a:ext uri="{FF2B5EF4-FFF2-40B4-BE49-F238E27FC236}">
-                <a16:creationId xmlns:a16="http://schemas.microsoft.com/office/drawing/2014/main" id="{1F52A53B-E0C0-403A-80B2-8FCF3C83C31B}"/>
+                <a16:creationId xmlns:a16="http://schemas.microsoft.com/office/drawing/2014/main" id="{C0C328E5-A076-49A7-9CDC-2C5617152A55}"/>
               </a:ext>
             </a:extLst>
           </p:cNvPr>
@@ -17515,7 +17502,7 @@
           <p:cNvPr id="4" name="text-2">
             <a:extLst xmlns:a="http://schemas.openxmlformats.org/drawingml/2006/main">
               <a:ext uri="{FF2B5EF4-FFF2-40B4-BE49-F238E27FC236}">
-                <a16:creationId xmlns:a16="http://schemas.microsoft.com/office/drawing/2014/main" id="{862460EA-80F0-48AF-BB07-352214B6920A}"/>
+                <a16:creationId xmlns:a16="http://schemas.microsoft.com/office/drawing/2014/main" id="{088E488D-964E-4335-8B21-E49B1DF2B59E}"/>
               </a:ext>
             </a:extLst>
           </p:cNvPr>
@@ -17672,7 +17659,7 @@
     </p:spTree>
     <p:extLst>
       <p:ext uri="{BB962C8B-B14F-4D97-AF65-F5344CB8AC3E}">
-        <p14:creationId xmlns:p14="http://schemas.microsoft.com/office/powerpoint/2010/main" val="1126393499"/>
+        <p14:creationId xmlns:p14="http://schemas.microsoft.com/office/powerpoint/2010/main" val="1746162918"/>
       </p:ext>
     </p:extLst>
   </p:cSld>
@@ -17703,7 +17690,7 @@
           <p:cNvPr id="9" name="text-0">
             <a:extLst xmlns:a="http://schemas.openxmlformats.org/drawingml/2006/main">
               <a:ext uri="{FF2B5EF4-FFF2-40B4-BE49-F238E27FC236}">
-                <a16:creationId xmlns:a16="http://schemas.microsoft.com/office/drawing/2014/main" id="{C03D8C1D-E559-4C16-80BD-68FE2F10F1E8}"/>
+                <a16:creationId xmlns:a16="http://schemas.microsoft.com/office/drawing/2014/main" id="{727886E3-7B5C-4B4C-89D2-5EC10D58E9C6}"/>
               </a:ext>
             </a:extLst>
           </p:cNvPr>
@@ -17862,7 +17849,7 @@
           <p:cNvPr id="2" name="text-1">
             <a:extLst xmlns:a="http://schemas.openxmlformats.org/drawingml/2006/main">
               <a:ext uri="{FF2B5EF4-FFF2-40B4-BE49-F238E27FC236}">
-                <a16:creationId xmlns:a16="http://schemas.microsoft.com/office/drawing/2014/main" id="{9BB842EE-BACD-4CF3-8B13-1FE8ECEB6EE9}"/>
+                <a16:creationId xmlns:a16="http://schemas.microsoft.com/office/drawing/2014/main" id="{BBF3DB2A-3E08-47FF-8270-3259FF4D4B82}"/>
               </a:ext>
             </a:extLst>
           </p:cNvPr>
@@ -18021,7 +18008,7 @@
           <p:cNvPr id="3" name="text-2">
             <a:extLst xmlns:a="http://schemas.openxmlformats.org/drawingml/2006/main">
               <a:ext uri="{FF2B5EF4-FFF2-40B4-BE49-F238E27FC236}">
-                <a16:creationId xmlns:a16="http://schemas.microsoft.com/office/drawing/2014/main" id="{BF374E86-0680-4F66-9285-5348268B0C60}"/>
+                <a16:creationId xmlns:a16="http://schemas.microsoft.com/office/drawing/2014/main" id="{C51DD794-8DCF-4AA7-86A1-32D35A14E64E}"/>
               </a:ext>
             </a:extLst>
           </p:cNvPr>
@@ -18180,7 +18167,7 @@
           <p:cNvPr id="4" name="text-3">
             <a:extLst xmlns:a="http://schemas.openxmlformats.org/drawingml/2006/main">
               <a:ext uri="{FF2B5EF4-FFF2-40B4-BE49-F238E27FC236}">
-                <a16:creationId xmlns:a16="http://schemas.microsoft.com/office/drawing/2014/main" id="{41A2CBBE-13A8-47B4-A084-A3D659A2B9E2}"/>
+                <a16:creationId xmlns:a16="http://schemas.microsoft.com/office/drawing/2014/main" id="{4F490D54-9642-4B8E-8B42-DCB1082E2D1D}"/>
               </a:ext>
             </a:extLst>
           </p:cNvPr>
@@ -18367,7 +18354,7 @@
           <p:cNvPr id="5" name="text-4">
             <a:extLst xmlns:a="http://schemas.openxmlformats.org/drawingml/2006/main">
               <a:ext uri="{FF2B5EF4-FFF2-40B4-BE49-F238E27FC236}">
-                <a16:creationId xmlns:a16="http://schemas.microsoft.com/office/drawing/2014/main" id="{00E3E81C-AF1F-4536-A36F-F729C076E18E}"/>
+                <a16:creationId xmlns:a16="http://schemas.microsoft.com/office/drawing/2014/main" id="{B5F0578B-B712-42EB-BEB7-226871E1E083}"/>
               </a:ext>
             </a:extLst>
           </p:cNvPr>
@@ -18526,7 +18513,7 @@
           <p:cNvPr id="6" name="text-5">
             <a:extLst xmlns:a="http://schemas.openxmlformats.org/drawingml/2006/main">
               <a:ext uri="{FF2B5EF4-FFF2-40B4-BE49-F238E27FC236}">
-                <a16:creationId xmlns:a16="http://schemas.microsoft.com/office/drawing/2014/main" id="{A8524952-F597-48AD-957E-17848D89A64D}"/>
+                <a16:creationId xmlns:a16="http://schemas.microsoft.com/office/drawing/2014/main" id="{8636CD48-5BD6-4395-8F38-0C9FF24DB1D1}"/>
               </a:ext>
             </a:extLst>
           </p:cNvPr>
@@ -18713,7 +18700,7 @@
           <p:cNvPr id="7" name="text-6">
             <a:extLst xmlns:a="http://schemas.openxmlformats.org/drawingml/2006/main">
               <a:ext uri="{FF2B5EF4-FFF2-40B4-BE49-F238E27FC236}">
-                <a16:creationId xmlns:a16="http://schemas.microsoft.com/office/drawing/2014/main" id="{D75C2A90-8DDC-4A9A-B172-C60BFEA13785}"/>
+                <a16:creationId xmlns:a16="http://schemas.microsoft.com/office/drawing/2014/main" id="{E9385689-DA2F-4377-8FD1-0384FEB5438E}"/>
               </a:ext>
             </a:extLst>
           </p:cNvPr>
@@ -18872,7 +18859,7 @@
           <p:cNvPr id="8" name="text-7">
             <a:extLst xmlns:a="http://schemas.openxmlformats.org/drawingml/2006/main">
               <a:ext uri="{FF2B5EF4-FFF2-40B4-BE49-F238E27FC236}">
-                <a16:creationId xmlns:a16="http://schemas.microsoft.com/office/drawing/2014/main" id="{033CF077-F9CA-43D0-9016-DBBE129070FC}"/>
+                <a16:creationId xmlns:a16="http://schemas.microsoft.com/office/drawing/2014/main" id="{7238FC74-7C06-493A-843E-B7E4785C1D6D}"/>
               </a:ext>
             </a:extLst>
           </p:cNvPr>
@@ -19029,7 +19016,7 @@
     </p:spTree>
     <p:extLst>
       <p:ext uri="{BB962C8B-B14F-4D97-AF65-F5344CB8AC3E}">
-        <p14:creationId xmlns:p14="http://schemas.microsoft.com/office/powerpoint/2010/main" val="573535855"/>
+        <p14:creationId xmlns:p14="http://schemas.microsoft.com/office/powerpoint/2010/main" val="1192892186"/>
       </p:ext>
     </p:extLst>
   </p:cSld>
@@ -19060,7 +19047,7 @@
           <p:cNvPr id="6" name="text-0">
             <a:extLst xmlns:a="http://schemas.openxmlformats.org/drawingml/2006/main">
               <a:ext uri="{FF2B5EF4-FFF2-40B4-BE49-F238E27FC236}">
-                <a16:creationId xmlns:a16="http://schemas.microsoft.com/office/drawing/2014/main" id="{94EEDC29-437A-4641-9232-3FB762BCF46E}"/>
+                <a16:creationId xmlns:a16="http://schemas.microsoft.com/office/drawing/2014/main" id="{B064DFD7-B409-4E4B-AE30-7425D02AF5E1}"/>
               </a:ext>
             </a:extLst>
           </p:cNvPr>
@@ -19219,7 +19206,7 @@
           <p:cNvPr id="2" name="text-1">
             <a:extLst xmlns:a="http://schemas.openxmlformats.org/drawingml/2006/main">
               <a:ext uri="{FF2B5EF4-FFF2-40B4-BE49-F238E27FC236}">
-                <a16:creationId xmlns:a16="http://schemas.microsoft.com/office/drawing/2014/main" id="{312C146D-7BFA-4CD7-84EF-5D58E92A91A3}"/>
+                <a16:creationId xmlns:a16="http://schemas.microsoft.com/office/drawing/2014/main" id="{B77155C4-8753-499C-A5FC-B6C6FF4423B0}"/>
               </a:ext>
             </a:extLst>
           </p:cNvPr>
@@ -19378,7 +19365,7 @@
           <p:cNvPr id="3" name="">
             <a:extLst xmlns:a="http://schemas.openxmlformats.org/drawingml/2006/main">
               <a:ext uri="{FF2B5EF4-FFF2-40B4-BE49-F238E27FC236}">
-                <a16:creationId xmlns:a16="http://schemas.microsoft.com/office/drawing/2014/main" id="{253CE978-A2BF-464A-AAE7-C2C3757558CB}"/>
+                <a16:creationId xmlns:a16="http://schemas.microsoft.com/office/drawing/2014/main" id="{9609310D-657B-4D94-81D2-7BD013D32E95}"/>
               </a:ext>
             </a:extLst>
           </p:cNvPr>
@@ -19818,7 +19805,7 @@
           <p:cNvPr id="4" name="text-2">
             <a:extLst xmlns:a="http://schemas.openxmlformats.org/drawingml/2006/main">
               <a:ext uri="{FF2B5EF4-FFF2-40B4-BE49-F238E27FC236}">
-                <a16:creationId xmlns:a16="http://schemas.microsoft.com/office/drawing/2014/main" id="{F9051673-64BD-4438-8C46-6D3A0657534A}"/>
+                <a16:creationId xmlns:a16="http://schemas.microsoft.com/office/drawing/2014/main" id="{61037176-034C-4E05-BA7F-8E5A0EE9FD06}"/>
               </a:ext>
             </a:extLst>
           </p:cNvPr>
@@ -19966,7 +19953,7 @@
                 <a:latin typeface="DejaVu Sans"/>
                 <a:ea typeface="DejaVu Sans"/>
                 <a:cs typeface="DejaVu Sans"/>
-                <a:hlinkClick xmlns:r="http://schemas.openxmlformats.org/officeDocument/2006/relationships" r:id="Rb48e0d6d04d74070"/>
+                <a:hlinkClick xmlns:r="http://schemas.openxmlformats.org/officeDocument/2006/relationships" r:id="R7dee3f55b8854e8f"/>
               </a:rPr>
               <a:t>Abrir simulador</a:t>
             </a:r>
@@ -19978,7 +19965,7 @@
           <p:cNvPr id="5" name="text-3">
             <a:extLst xmlns:a="http://schemas.openxmlformats.org/drawingml/2006/main">
               <a:ext uri="{FF2B5EF4-FFF2-40B4-BE49-F238E27FC236}">
-                <a16:creationId xmlns:a16="http://schemas.microsoft.com/office/drawing/2014/main" id="{FBD798C3-E17D-4427-B41F-D8E1C0C3F0CD}"/>
+                <a16:creationId xmlns:a16="http://schemas.microsoft.com/office/drawing/2014/main" id="{3EE3AE0C-E48E-4659-B48E-3AAB87D781D9}"/>
               </a:ext>
             </a:extLst>
           </p:cNvPr>
@@ -20135,7 +20122,7 @@
     </p:spTree>
     <p:extLst>
       <p:ext uri="{BB962C8B-B14F-4D97-AF65-F5344CB8AC3E}">
-        <p14:creationId xmlns:p14="http://schemas.microsoft.com/office/powerpoint/2010/main" val="421397231"/>
+        <p14:creationId xmlns:p14="http://schemas.microsoft.com/office/powerpoint/2010/main" val="1396155895"/>
       </p:ext>
     </p:extLst>
   </p:cSld>

--- a/Presentacion/Avance_Financiera_Pacifico_30_oct_2026.pptx
+++ b/Presentacion/Avance_Financiera_Pacifico_30_oct_2026.pptx
@@ -2,26 +2,26 @@
 <file path=ppt/presentation.xml><?xml version="1.0" encoding="utf-8"?>
 <p:presentation xmlns:p="http://schemas.openxmlformats.org/presentationml/2006/main">
   <p:sldMasterIdLst>
-    <p:sldMasterId xmlns:r="http://schemas.openxmlformats.org/officeDocument/2006/relationships" id="2147483648" r:id="R062f9272c6bb434a"/>
+    <p:sldMasterId xmlns:r="http://schemas.openxmlformats.org/officeDocument/2006/relationships" id="2147483648" r:id="R4194250760f1496e"/>
   </p:sldMasterIdLst>
   <p:notesMasterIdLst>
-    <p:notesMasterId xmlns:r="http://schemas.openxmlformats.org/officeDocument/2006/relationships" r:id="R3106c8f0b4a54b6f"/>
+    <p:notesMasterId xmlns:r="http://schemas.openxmlformats.org/officeDocument/2006/relationships" r:id="R6800d4dd78f74b75"/>
   </p:notesMasterIdLst>
   <p:sldIdLst>
-    <p:sldId xmlns:r="http://schemas.openxmlformats.org/officeDocument/2006/relationships" id="256" r:id="Rd829d8430e794587"/>
-    <p:sldId xmlns:r="http://schemas.openxmlformats.org/officeDocument/2006/relationships" id="257" r:id="R176f519287c04e47"/>
-    <p:sldId xmlns:r="http://schemas.openxmlformats.org/officeDocument/2006/relationships" id="258" r:id="R27fd7ce9a9754f68"/>
-    <p:sldId xmlns:r="http://schemas.openxmlformats.org/officeDocument/2006/relationships" id="259" r:id="R752dd25d43754577"/>
-    <p:sldId xmlns:r="http://schemas.openxmlformats.org/officeDocument/2006/relationships" id="260" r:id="Rc8342c362c6d4071"/>
-    <p:sldId xmlns:r="http://schemas.openxmlformats.org/officeDocument/2006/relationships" id="261" r:id="R9810e706f807423f"/>
-    <p:sldId xmlns:r="http://schemas.openxmlformats.org/officeDocument/2006/relationships" id="262" r:id="R07ac87d9ea6e4b39"/>
-    <p:sldId xmlns:r="http://schemas.openxmlformats.org/officeDocument/2006/relationships" id="263" r:id="Rb852caad8670469a"/>
-    <p:sldId xmlns:r="http://schemas.openxmlformats.org/officeDocument/2006/relationships" id="264" r:id="R887fd7d002e64b29"/>
-    <p:sldId xmlns:r="http://schemas.openxmlformats.org/officeDocument/2006/relationships" id="265" r:id="R41fc2de77b99475b"/>
-    <p:sldId xmlns:r="http://schemas.openxmlformats.org/officeDocument/2006/relationships" id="266" r:id="R342cfb1d42a146f4"/>
-    <p:sldId xmlns:r="http://schemas.openxmlformats.org/officeDocument/2006/relationships" id="267" r:id="R2b9f794e8b24474a"/>
-    <p:sldId xmlns:r="http://schemas.openxmlformats.org/officeDocument/2006/relationships" id="268" r:id="R7ae9ba0844e6433d"/>
-    <p:sldId xmlns:r="http://schemas.openxmlformats.org/officeDocument/2006/relationships" id="269" r:id="Rdc72062108a64212"/>
+    <p:sldId xmlns:r="http://schemas.openxmlformats.org/officeDocument/2006/relationships" id="256" r:id="Rdc8a833493c5495b"/>
+    <p:sldId xmlns:r="http://schemas.openxmlformats.org/officeDocument/2006/relationships" id="257" r:id="Ra61ab16fc3c24ad1"/>
+    <p:sldId xmlns:r="http://schemas.openxmlformats.org/officeDocument/2006/relationships" id="258" r:id="Rbea6848bb9694cc0"/>
+    <p:sldId xmlns:r="http://schemas.openxmlformats.org/officeDocument/2006/relationships" id="259" r:id="Rc8490331ed0a4248"/>
+    <p:sldId xmlns:r="http://schemas.openxmlformats.org/officeDocument/2006/relationships" id="260" r:id="R0d7f5b678c1943e3"/>
+    <p:sldId xmlns:r="http://schemas.openxmlformats.org/officeDocument/2006/relationships" id="261" r:id="R9f46d9a3632442ba"/>
+    <p:sldId xmlns:r="http://schemas.openxmlformats.org/officeDocument/2006/relationships" id="262" r:id="R6d854621f4bb48fe"/>
+    <p:sldId xmlns:r="http://schemas.openxmlformats.org/officeDocument/2006/relationships" id="263" r:id="R980d1c69d5bd4119"/>
+    <p:sldId xmlns:r="http://schemas.openxmlformats.org/officeDocument/2006/relationships" id="264" r:id="R109199951c134ff4"/>
+    <p:sldId xmlns:r="http://schemas.openxmlformats.org/officeDocument/2006/relationships" id="265" r:id="Rb1c78414f18b43be"/>
+    <p:sldId xmlns:r="http://schemas.openxmlformats.org/officeDocument/2006/relationships" id="266" r:id="Rc928f2831ece4646"/>
+    <p:sldId xmlns:r="http://schemas.openxmlformats.org/officeDocument/2006/relationships" id="267" r:id="R72c9c9547ffa4959"/>
+    <p:sldId xmlns:r="http://schemas.openxmlformats.org/officeDocument/2006/relationships" id="268" r:id="R268228a686b84254"/>
+    <p:sldId xmlns:r="http://schemas.openxmlformats.org/officeDocument/2006/relationships" id="269" r:id="Rcd35af32d4b64e49"/>
   </p:sldIdLst>
   <p:sldSz cx="12192000" cy="6858000"/>
   <p:notesSz cx="6858000" cy="9144000"/>
@@ -3808,12 +3808,12 @@
   </p:cSld>
   <p:clrMap bg1="lt1" tx1="dk1" bg2="lt2" tx2="dk2" accent1="accent1" accent2="accent2" accent3="accent3" accent4="accent4" accent5="accent5" accent6="accent6" hlink="hlink" folHlink="folHlink"/>
   <p:sldLayoutIdLst>
-    <p:sldLayoutId xmlns:r="http://schemas.openxmlformats.org/officeDocument/2006/relationships" id="2147483649" r:id="Rdb03e854affc4273"/>
-    <p:sldLayoutId xmlns:r="http://schemas.openxmlformats.org/officeDocument/2006/relationships" id="2147483650" r:id="Rc871822e10874281"/>
-    <p:sldLayoutId xmlns:r="http://schemas.openxmlformats.org/officeDocument/2006/relationships" id="2147483651" r:id="Rc5895bdcaa3c4231"/>
-    <p:sldLayoutId xmlns:r="http://schemas.openxmlformats.org/officeDocument/2006/relationships" id="2147483652" r:id="R2ea8dcc544604720"/>
-    <p:sldLayoutId xmlns:r="http://schemas.openxmlformats.org/officeDocument/2006/relationships" id="2147483653" r:id="Rb0ce696c0efa47bc"/>
-    <p:sldLayoutId xmlns:r="http://schemas.openxmlformats.org/officeDocument/2006/relationships" id="2147483654" r:id="Rf39054bb223742a7"/>
+    <p:sldLayoutId xmlns:r="http://schemas.openxmlformats.org/officeDocument/2006/relationships" id="2147483649" r:id="R8c9c75c0fa814769"/>
+    <p:sldLayoutId xmlns:r="http://schemas.openxmlformats.org/officeDocument/2006/relationships" id="2147483650" r:id="Re54f8c1ea9db4c01"/>
+    <p:sldLayoutId xmlns:r="http://schemas.openxmlformats.org/officeDocument/2006/relationships" id="2147483651" r:id="Rfaa6b279bd0649df"/>
+    <p:sldLayoutId xmlns:r="http://schemas.openxmlformats.org/officeDocument/2006/relationships" id="2147483652" r:id="R3ee270e1cac34c50"/>
+    <p:sldLayoutId xmlns:r="http://schemas.openxmlformats.org/officeDocument/2006/relationships" id="2147483653" r:id="R8c5ddb07b9514e1e"/>
+    <p:sldLayoutId xmlns:r="http://schemas.openxmlformats.org/officeDocument/2006/relationships" id="2147483654" r:id="R2bc3785d87234d5d"/>
   </p:sldLayoutIdLst>
   <p:txStyles>
     <p:titleStyle>
@@ -4403,6 +4403,7 @@
               </a:defRPr>
             </a:defPPr>
             <a:lvl1pPr>
+              <a:buNone/>
               <a:defRPr sz="3300" b="1">
                 <a:solidFill>
                   <a:srgbClr val="FFFFFF"/>
@@ -4413,6 +4414,7 @@
               </a:defRPr>
             </a:lvl1pPr>
             <a:lvl2pPr>
+              <a:buNone/>
               <a:defRPr sz="3300" b="1">
                 <a:solidFill>
                   <a:srgbClr val="FFFFFF"/>
@@ -4423,6 +4425,7 @@
               </a:defRPr>
             </a:lvl2pPr>
             <a:lvl3pPr>
+              <a:buNone/>
               <a:defRPr sz="3300" b="1">
                 <a:solidFill>
                   <a:srgbClr val="FFFFFF"/>
@@ -4433,6 +4436,7 @@
               </a:defRPr>
             </a:lvl3pPr>
             <a:lvl4pPr>
+              <a:buNone/>
               <a:defRPr sz="3300" b="1">
                 <a:solidFill>
                   <a:srgbClr val="FFFFFF"/>
@@ -4443,6 +4447,7 @@
               </a:defRPr>
             </a:lvl4pPr>
             <a:lvl5pPr>
+              <a:buNone/>
               <a:defRPr sz="3300" b="1">
                 <a:solidFill>
                   <a:srgbClr val="FFFFFF"/>
@@ -4453,6 +4458,7 @@
               </a:defRPr>
             </a:lvl5pPr>
             <a:lvl6pPr>
+              <a:buNone/>
               <a:defRPr sz="3300" b="1">
                 <a:solidFill>
                   <a:srgbClr val="FFFFFF"/>
@@ -4463,6 +4469,7 @@
               </a:defRPr>
             </a:lvl6pPr>
             <a:lvl7pPr>
+              <a:buNone/>
               <a:defRPr sz="3300" b="1">
                 <a:solidFill>
                   <a:srgbClr val="FFFFFF"/>
@@ -4473,6 +4480,7 @@
               </a:defRPr>
             </a:lvl7pPr>
             <a:lvl8pPr>
+              <a:buNone/>
               <a:defRPr sz="3300" b="1">
                 <a:solidFill>
                   <a:srgbClr val="FFFFFF"/>
@@ -4483,6 +4491,7 @@
               </a:defRPr>
             </a:lvl8pPr>
             <a:lvl9pPr>
+              <a:buNone/>
               <a:defRPr sz="3300" b="1">
                 <a:solidFill>
                   <a:srgbClr val="FFFFFF"/>
@@ -4495,6 +4504,7 @@
           </a:lstStyle>
           <a:p xmlns:a="http://schemas.openxmlformats.org/drawingml/2006/main">
             <a:pPr>
+              <a:buNone/>
               <a:defRPr sz="3300" b="1">
                 <a:solidFill>
                   <a:srgbClr val="FFFFFF"/>
@@ -4562,6 +4572,7 @@
               </a:defRPr>
             </a:defPPr>
             <a:lvl1pPr>
+              <a:buNone/>
               <a:defRPr sz="1275" b="0">
                 <a:solidFill>
                   <a:srgbClr val="9BB7C4"/>
@@ -4572,6 +4583,7 @@
               </a:defRPr>
             </a:lvl1pPr>
             <a:lvl2pPr>
+              <a:buNone/>
               <a:defRPr sz="1275" b="0">
                 <a:solidFill>
                   <a:srgbClr val="9BB7C4"/>
@@ -4582,6 +4594,7 @@
               </a:defRPr>
             </a:lvl2pPr>
             <a:lvl3pPr>
+              <a:buNone/>
               <a:defRPr sz="1275" b="0">
                 <a:solidFill>
                   <a:srgbClr val="9BB7C4"/>
@@ -4592,6 +4605,7 @@
               </a:defRPr>
             </a:lvl3pPr>
             <a:lvl4pPr>
+              <a:buNone/>
               <a:defRPr sz="1275" b="0">
                 <a:solidFill>
                   <a:srgbClr val="9BB7C4"/>
@@ -4602,6 +4616,7 @@
               </a:defRPr>
             </a:lvl4pPr>
             <a:lvl5pPr>
+              <a:buNone/>
               <a:defRPr sz="1275" b="0">
                 <a:solidFill>
                   <a:srgbClr val="9BB7C4"/>
@@ -4612,6 +4627,7 @@
               </a:defRPr>
             </a:lvl5pPr>
             <a:lvl6pPr>
+              <a:buNone/>
               <a:defRPr sz="1275" b="0">
                 <a:solidFill>
                   <a:srgbClr val="9BB7C4"/>
@@ -4622,6 +4638,7 @@
               </a:defRPr>
             </a:lvl6pPr>
             <a:lvl7pPr>
+              <a:buNone/>
               <a:defRPr sz="1275" b="0">
                 <a:solidFill>
                   <a:srgbClr val="9BB7C4"/>
@@ -4632,6 +4649,7 @@
               </a:defRPr>
             </a:lvl7pPr>
             <a:lvl8pPr>
+              <a:buNone/>
               <a:defRPr sz="1275" b="0">
                 <a:solidFill>
                   <a:srgbClr val="9BB7C4"/>
@@ -4642,6 +4660,7 @@
               </a:defRPr>
             </a:lvl8pPr>
             <a:lvl9pPr>
+              <a:buNone/>
               <a:defRPr sz="1275" b="0">
                 <a:solidFill>
                   <a:srgbClr val="9BB7C4"/>
@@ -4654,6 +4673,7 @@
           </a:lstStyle>
           <a:p xmlns:a="http://schemas.openxmlformats.org/drawingml/2006/main">
             <a:pPr>
+              <a:buNone/>
               <a:defRPr sz="1275" b="0">
                 <a:solidFill>
                   <a:srgbClr val="9BB7C4"/>
@@ -4721,6 +4741,7 @@
               </a:defRPr>
             </a:defPPr>
             <a:lvl1pPr>
+              <a:buNone/>
               <a:defRPr sz="4350" b="1">
                 <a:solidFill>
                   <a:srgbClr val="FFFFFF"/>
@@ -4731,6 +4752,7 @@
               </a:defRPr>
             </a:lvl1pPr>
             <a:lvl2pPr>
+              <a:buNone/>
               <a:defRPr sz="4350" b="1">
                 <a:solidFill>
                   <a:srgbClr val="FFFFFF"/>
@@ -4741,6 +4763,7 @@
               </a:defRPr>
             </a:lvl2pPr>
             <a:lvl3pPr>
+              <a:buNone/>
               <a:defRPr sz="4350" b="1">
                 <a:solidFill>
                   <a:srgbClr val="FFFFFF"/>
@@ -4751,6 +4774,7 @@
               </a:defRPr>
             </a:lvl3pPr>
             <a:lvl4pPr>
+              <a:buNone/>
               <a:defRPr sz="4350" b="1">
                 <a:solidFill>
                   <a:srgbClr val="FFFFFF"/>
@@ -4761,6 +4785,7 @@
               </a:defRPr>
             </a:lvl4pPr>
             <a:lvl5pPr>
+              <a:buNone/>
               <a:defRPr sz="4350" b="1">
                 <a:solidFill>
                   <a:srgbClr val="FFFFFF"/>
@@ -4771,6 +4796,7 @@
               </a:defRPr>
             </a:lvl5pPr>
             <a:lvl6pPr>
+              <a:buNone/>
               <a:defRPr sz="4350" b="1">
                 <a:solidFill>
                   <a:srgbClr val="FFFFFF"/>
@@ -4781,6 +4807,7 @@
               </a:defRPr>
             </a:lvl6pPr>
             <a:lvl7pPr>
+              <a:buNone/>
               <a:defRPr sz="4350" b="1">
                 <a:solidFill>
                   <a:srgbClr val="FFFFFF"/>
@@ -4791,6 +4818,7 @@
               </a:defRPr>
             </a:lvl7pPr>
             <a:lvl8pPr>
+              <a:buNone/>
               <a:defRPr sz="4350" b="1">
                 <a:solidFill>
                   <a:srgbClr val="FFFFFF"/>
@@ -4801,6 +4829,7 @@
               </a:defRPr>
             </a:lvl8pPr>
             <a:lvl9pPr>
+              <a:buNone/>
               <a:defRPr sz="4350" b="1">
                 <a:solidFill>
                   <a:srgbClr val="FFFFFF"/>
@@ -4813,6 +4842,7 @@
           </a:lstStyle>
           <a:p xmlns:a="http://schemas.openxmlformats.org/drawingml/2006/main">
             <a:pPr>
+              <a:buNone/>
               <a:defRPr sz="4350" b="1">
                 <a:solidFill>
                   <a:srgbClr val="FFFFFF"/>
@@ -4836,6 +4866,7 @@
           </a:p>
           <a:p xmlns:a="http://schemas.openxmlformats.org/drawingml/2006/main">
             <a:pPr>
+              <a:buNone/>
               <a:defRPr sz="4350" b="1">
                 <a:solidFill>
                   <a:srgbClr val="FFFFFF"/>
@@ -4903,6 +4934,7 @@
               </a:defRPr>
             </a:defPPr>
             <a:lvl1pPr>
+              <a:buNone/>
               <a:defRPr sz="2175" b="0">
                 <a:solidFill>
                   <a:srgbClr val="9DDBDB"/>
@@ -4913,6 +4945,7 @@
               </a:defRPr>
             </a:lvl1pPr>
             <a:lvl2pPr>
+              <a:buNone/>
               <a:defRPr sz="2175" b="0">
                 <a:solidFill>
                   <a:srgbClr val="9DDBDB"/>
@@ -4923,6 +4956,7 @@
               </a:defRPr>
             </a:lvl2pPr>
             <a:lvl3pPr>
+              <a:buNone/>
               <a:defRPr sz="2175" b="0">
                 <a:solidFill>
                   <a:srgbClr val="9DDBDB"/>
@@ -4933,6 +4967,7 @@
               </a:defRPr>
             </a:lvl3pPr>
             <a:lvl4pPr>
+              <a:buNone/>
               <a:defRPr sz="2175" b="0">
                 <a:solidFill>
                   <a:srgbClr val="9DDBDB"/>
@@ -4943,6 +4978,7 @@
               </a:defRPr>
             </a:lvl4pPr>
             <a:lvl5pPr>
+              <a:buNone/>
               <a:defRPr sz="2175" b="0">
                 <a:solidFill>
                   <a:srgbClr val="9DDBDB"/>
@@ -4953,6 +4989,7 @@
               </a:defRPr>
             </a:lvl5pPr>
             <a:lvl6pPr>
+              <a:buNone/>
               <a:defRPr sz="2175" b="0">
                 <a:solidFill>
                   <a:srgbClr val="9DDBDB"/>
@@ -4963,6 +5000,7 @@
               </a:defRPr>
             </a:lvl6pPr>
             <a:lvl7pPr>
+              <a:buNone/>
               <a:defRPr sz="2175" b="0">
                 <a:solidFill>
                   <a:srgbClr val="9DDBDB"/>
@@ -4973,6 +5011,7 @@
               </a:defRPr>
             </a:lvl7pPr>
             <a:lvl8pPr>
+              <a:buNone/>
               <a:defRPr sz="2175" b="0">
                 <a:solidFill>
                   <a:srgbClr val="9DDBDB"/>
@@ -4983,6 +5022,7 @@
               </a:defRPr>
             </a:lvl8pPr>
             <a:lvl9pPr>
+              <a:buNone/>
               <a:defRPr sz="2175" b="0">
                 <a:solidFill>
                   <a:srgbClr val="9DDBDB"/>
@@ -4995,6 +5035,7 @@
           </a:lstStyle>
           <a:p xmlns:a="http://schemas.openxmlformats.org/drawingml/2006/main">
             <a:pPr>
+              <a:buNone/>
               <a:defRPr sz="2175" b="0">
                 <a:solidFill>
                   <a:srgbClr val="9DDBDB"/>
@@ -5013,7 +5054,7 @@
                 <a:ea typeface="DejaVu Sans"/>
                 <a:cs typeface="DejaVu Sans"/>
               </a:rPr>
-              <a:t>Avance Capstone al 24 de octubre de 2026</a:t>
+              <a:t>Avance Capstone al 25 de octubre de 2026</a:t>
             </a:r>
           </a:p>
         </p:txBody>
@@ -5062,6 +5103,7 @@
               </a:defRPr>
             </a:defPPr>
             <a:lvl1pPr>
+              <a:buNone/>
               <a:defRPr sz="1875" b="0">
                 <a:solidFill>
                   <a:srgbClr val="FFFFFF"/>
@@ -5072,6 +5114,7 @@
               </a:defRPr>
             </a:lvl1pPr>
             <a:lvl2pPr>
+              <a:buNone/>
               <a:defRPr sz="1875" b="0">
                 <a:solidFill>
                   <a:srgbClr val="FFFFFF"/>
@@ -5082,6 +5125,7 @@
               </a:defRPr>
             </a:lvl2pPr>
             <a:lvl3pPr>
+              <a:buNone/>
               <a:defRPr sz="1875" b="0">
                 <a:solidFill>
                   <a:srgbClr val="FFFFFF"/>
@@ -5092,6 +5136,7 @@
               </a:defRPr>
             </a:lvl3pPr>
             <a:lvl4pPr>
+              <a:buNone/>
               <a:defRPr sz="1875" b="0">
                 <a:solidFill>
                   <a:srgbClr val="FFFFFF"/>
@@ -5102,6 +5147,7 @@
               </a:defRPr>
             </a:lvl4pPr>
             <a:lvl5pPr>
+              <a:buNone/>
               <a:defRPr sz="1875" b="0">
                 <a:solidFill>
                   <a:srgbClr val="FFFFFF"/>
@@ -5112,6 +5158,7 @@
               </a:defRPr>
             </a:lvl5pPr>
             <a:lvl6pPr>
+              <a:buNone/>
               <a:defRPr sz="1875" b="0">
                 <a:solidFill>
                   <a:srgbClr val="FFFFFF"/>
@@ -5122,6 +5169,7 @@
               </a:defRPr>
             </a:lvl6pPr>
             <a:lvl7pPr>
+              <a:buNone/>
               <a:defRPr sz="1875" b="0">
                 <a:solidFill>
                   <a:srgbClr val="FFFFFF"/>
@@ -5132,6 +5180,7 @@
               </a:defRPr>
             </a:lvl7pPr>
             <a:lvl8pPr>
+              <a:buNone/>
               <a:defRPr sz="1875" b="0">
                 <a:solidFill>
                   <a:srgbClr val="FFFFFF"/>
@@ -5142,6 +5191,7 @@
               </a:defRPr>
             </a:lvl8pPr>
             <a:lvl9pPr>
+              <a:buNone/>
               <a:defRPr sz="1875" b="0">
                 <a:solidFill>
                   <a:srgbClr val="FFFFFF"/>
@@ -5154,6 +5204,7 @@
           </a:lstStyle>
           <a:p xmlns:a="http://schemas.openxmlformats.org/drawingml/2006/main">
             <a:pPr>
+              <a:buNone/>
               <a:defRPr sz="1875" b="0">
                 <a:solidFill>
                   <a:srgbClr val="FFFFFF"/>
@@ -5177,6 +5228,7 @@
           </a:p>
           <a:p xmlns:a="http://schemas.openxmlformats.org/drawingml/2006/main">
             <a:pPr>
+              <a:buNone/>
               <a:defRPr sz="1875" b="0">
                 <a:solidFill>
                   <a:srgbClr val="FFFFFF"/>
@@ -5273,6 +5325,7 @@
               </a:defRPr>
             </a:defPPr>
             <a:lvl1pPr>
+              <a:buNone/>
               <a:defRPr sz="3300" b="1">
                 <a:solidFill>
                   <a:srgbClr val="102638"/>
@@ -5283,6 +5336,7 @@
               </a:defRPr>
             </a:lvl1pPr>
             <a:lvl2pPr>
+              <a:buNone/>
               <a:defRPr sz="3300" b="1">
                 <a:solidFill>
                   <a:srgbClr val="102638"/>
@@ -5293,6 +5347,7 @@
               </a:defRPr>
             </a:lvl2pPr>
             <a:lvl3pPr>
+              <a:buNone/>
               <a:defRPr sz="3300" b="1">
                 <a:solidFill>
                   <a:srgbClr val="102638"/>
@@ -5303,6 +5358,7 @@
               </a:defRPr>
             </a:lvl3pPr>
             <a:lvl4pPr>
+              <a:buNone/>
               <a:defRPr sz="3300" b="1">
                 <a:solidFill>
                   <a:srgbClr val="102638"/>
@@ -5313,6 +5369,7 @@
               </a:defRPr>
             </a:lvl4pPr>
             <a:lvl5pPr>
+              <a:buNone/>
               <a:defRPr sz="3300" b="1">
                 <a:solidFill>
                   <a:srgbClr val="102638"/>
@@ -5323,6 +5380,7 @@
               </a:defRPr>
             </a:lvl5pPr>
             <a:lvl6pPr>
+              <a:buNone/>
               <a:defRPr sz="3300" b="1">
                 <a:solidFill>
                   <a:srgbClr val="102638"/>
@@ -5333,6 +5391,7 @@
               </a:defRPr>
             </a:lvl6pPr>
             <a:lvl7pPr>
+              <a:buNone/>
               <a:defRPr sz="3300" b="1">
                 <a:solidFill>
                   <a:srgbClr val="102638"/>
@@ -5343,6 +5402,7 @@
               </a:defRPr>
             </a:lvl7pPr>
             <a:lvl8pPr>
+              <a:buNone/>
               <a:defRPr sz="3300" b="1">
                 <a:solidFill>
                   <a:srgbClr val="102638"/>
@@ -5353,6 +5413,7 @@
               </a:defRPr>
             </a:lvl8pPr>
             <a:lvl9pPr>
+              <a:buNone/>
               <a:defRPr sz="3300" b="1">
                 <a:solidFill>
                   <a:srgbClr val="102638"/>
@@ -5365,6 +5426,7 @@
           </a:lstStyle>
           <a:p xmlns:a="http://schemas.openxmlformats.org/drawingml/2006/main">
             <a:pPr>
+              <a:buNone/>
               <a:defRPr sz="3300" b="1">
                 <a:solidFill>
                   <a:srgbClr val="102638"/>
@@ -5432,6 +5494,7 @@
               </a:defRPr>
             </a:defPPr>
             <a:lvl1pPr>
+              <a:buNone/>
               <a:defRPr sz="1275" b="0">
                 <a:solidFill>
                   <a:srgbClr val="476071"/>
@@ -5442,6 +5505,7 @@
               </a:defRPr>
             </a:lvl1pPr>
             <a:lvl2pPr>
+              <a:buNone/>
               <a:defRPr sz="1275" b="0">
                 <a:solidFill>
                   <a:srgbClr val="476071"/>
@@ -5452,6 +5516,7 @@
               </a:defRPr>
             </a:lvl2pPr>
             <a:lvl3pPr>
+              <a:buNone/>
               <a:defRPr sz="1275" b="0">
                 <a:solidFill>
                   <a:srgbClr val="476071"/>
@@ -5462,6 +5527,7 @@
               </a:defRPr>
             </a:lvl3pPr>
             <a:lvl4pPr>
+              <a:buNone/>
               <a:defRPr sz="1275" b="0">
                 <a:solidFill>
                   <a:srgbClr val="476071"/>
@@ -5472,6 +5538,7 @@
               </a:defRPr>
             </a:lvl4pPr>
             <a:lvl5pPr>
+              <a:buNone/>
               <a:defRPr sz="1275" b="0">
                 <a:solidFill>
                   <a:srgbClr val="476071"/>
@@ -5482,6 +5549,7 @@
               </a:defRPr>
             </a:lvl5pPr>
             <a:lvl6pPr>
+              <a:buNone/>
               <a:defRPr sz="1275" b="0">
                 <a:solidFill>
                   <a:srgbClr val="476071"/>
@@ -5492,6 +5560,7 @@
               </a:defRPr>
             </a:lvl6pPr>
             <a:lvl7pPr>
+              <a:buNone/>
               <a:defRPr sz="1275" b="0">
                 <a:solidFill>
                   <a:srgbClr val="476071"/>
@@ -5502,6 +5571,7 @@
               </a:defRPr>
             </a:lvl7pPr>
             <a:lvl8pPr>
+              <a:buNone/>
               <a:defRPr sz="1275" b="0">
                 <a:solidFill>
                   <a:srgbClr val="476071"/>
@@ -5512,6 +5582,7 @@
               </a:defRPr>
             </a:lvl8pPr>
             <a:lvl9pPr>
+              <a:buNone/>
               <a:defRPr sz="1275" b="0">
                 <a:solidFill>
                   <a:srgbClr val="476071"/>
@@ -5524,6 +5595,7 @@
           </a:lstStyle>
           <a:p xmlns:a="http://schemas.openxmlformats.org/drawingml/2006/main">
             <a:pPr>
+              <a:buNone/>
               <a:defRPr sz="1275" b="0">
                 <a:solidFill>
                   <a:srgbClr val="476071"/>
@@ -5591,6 +5663,7 @@
               </a:defRPr>
             </a:defPPr>
             <a:lvl1pPr>
+              <a:buNone/>
               <a:defRPr sz="6225" b="1">
                 <a:solidFill>
                   <a:srgbClr val="007E87"/>
@@ -5601,6 +5674,7 @@
               </a:defRPr>
             </a:lvl1pPr>
             <a:lvl2pPr>
+              <a:buNone/>
               <a:defRPr sz="6225" b="1">
                 <a:solidFill>
                   <a:srgbClr val="007E87"/>
@@ -5611,6 +5685,7 @@
               </a:defRPr>
             </a:lvl2pPr>
             <a:lvl3pPr>
+              <a:buNone/>
               <a:defRPr sz="6225" b="1">
                 <a:solidFill>
                   <a:srgbClr val="007E87"/>
@@ -5621,6 +5696,7 @@
               </a:defRPr>
             </a:lvl3pPr>
             <a:lvl4pPr>
+              <a:buNone/>
               <a:defRPr sz="6225" b="1">
                 <a:solidFill>
                   <a:srgbClr val="007E87"/>
@@ -5631,6 +5707,7 @@
               </a:defRPr>
             </a:lvl4pPr>
             <a:lvl5pPr>
+              <a:buNone/>
               <a:defRPr sz="6225" b="1">
                 <a:solidFill>
                   <a:srgbClr val="007E87"/>
@@ -5641,6 +5718,7 @@
               </a:defRPr>
             </a:lvl5pPr>
             <a:lvl6pPr>
+              <a:buNone/>
               <a:defRPr sz="6225" b="1">
                 <a:solidFill>
                   <a:srgbClr val="007E87"/>
@@ -5651,6 +5729,7 @@
               </a:defRPr>
             </a:lvl6pPr>
             <a:lvl7pPr>
+              <a:buNone/>
               <a:defRPr sz="6225" b="1">
                 <a:solidFill>
                   <a:srgbClr val="007E87"/>
@@ -5661,6 +5740,7 @@
               </a:defRPr>
             </a:lvl7pPr>
             <a:lvl8pPr>
+              <a:buNone/>
               <a:defRPr sz="6225" b="1">
                 <a:solidFill>
                   <a:srgbClr val="007E87"/>
@@ -5671,6 +5751,7 @@
               </a:defRPr>
             </a:lvl8pPr>
             <a:lvl9pPr>
+              <a:buNone/>
               <a:defRPr sz="6225" b="1">
                 <a:solidFill>
                   <a:srgbClr val="007E87"/>
@@ -5683,6 +5764,7 @@
           </a:lstStyle>
           <a:p xmlns:a="http://schemas.openxmlformats.org/drawingml/2006/main">
             <a:pPr>
+              <a:buNone/>
               <a:defRPr sz="6225" b="1">
                 <a:solidFill>
                   <a:srgbClr val="007E87"/>
@@ -5701,7 +5783,7 @@
                 <a:ea typeface="DejaVu Sans"/>
                 <a:cs typeface="DejaVu Sans"/>
               </a:rPr>
-              <a:t>79</a:t>
+              <a:t>93</a:t>
             </a:r>
           </a:p>
         </p:txBody>
@@ -5750,6 +5832,7 @@
               </a:defRPr>
             </a:defPPr>
             <a:lvl1pPr>
+              <a:buNone/>
               <a:defRPr sz="2100" b="0">
                 <a:solidFill>
                   <a:srgbClr val="102638"/>
@@ -5760,6 +5843,7 @@
               </a:defRPr>
             </a:lvl1pPr>
             <a:lvl2pPr>
+              <a:buNone/>
               <a:defRPr sz="2100" b="0">
                 <a:solidFill>
                   <a:srgbClr val="102638"/>
@@ -5770,6 +5854,7 @@
               </a:defRPr>
             </a:lvl2pPr>
             <a:lvl3pPr>
+              <a:buNone/>
               <a:defRPr sz="2100" b="0">
                 <a:solidFill>
                   <a:srgbClr val="102638"/>
@@ -5780,6 +5865,7 @@
               </a:defRPr>
             </a:lvl3pPr>
             <a:lvl4pPr>
+              <a:buNone/>
               <a:defRPr sz="2100" b="0">
                 <a:solidFill>
                   <a:srgbClr val="102638"/>
@@ -5790,6 +5876,7 @@
               </a:defRPr>
             </a:lvl4pPr>
             <a:lvl5pPr>
+              <a:buNone/>
               <a:defRPr sz="2100" b="0">
                 <a:solidFill>
                   <a:srgbClr val="102638"/>
@@ -5800,6 +5887,7 @@
               </a:defRPr>
             </a:lvl5pPr>
             <a:lvl6pPr>
+              <a:buNone/>
               <a:defRPr sz="2100" b="0">
                 <a:solidFill>
                   <a:srgbClr val="102638"/>
@@ -5810,6 +5898,7 @@
               </a:defRPr>
             </a:lvl6pPr>
             <a:lvl7pPr>
+              <a:buNone/>
               <a:defRPr sz="2100" b="0">
                 <a:solidFill>
                   <a:srgbClr val="102638"/>
@@ -5820,6 +5909,7 @@
               </a:defRPr>
             </a:lvl7pPr>
             <a:lvl8pPr>
+              <a:buNone/>
               <a:defRPr sz="2100" b="0">
                 <a:solidFill>
                   <a:srgbClr val="102638"/>
@@ -5830,6 +5920,7 @@
               </a:defRPr>
             </a:lvl8pPr>
             <a:lvl9pPr>
+              <a:buNone/>
               <a:defRPr sz="2100" b="0">
                 <a:solidFill>
                   <a:srgbClr val="102638"/>
@@ -5842,6 +5933,7 @@
           </a:lstStyle>
           <a:p xmlns:a="http://schemas.openxmlformats.org/drawingml/2006/main">
             <a:pPr>
+              <a:buNone/>
               <a:defRPr sz="2100" b="0">
                 <a:solidFill>
                   <a:srgbClr val="102638"/>
@@ -5909,6 +6001,7 @@
               </a:defRPr>
             </a:defPPr>
             <a:lvl1pPr>
+              <a:buNone/>
               <a:defRPr sz="6225" b="1">
                 <a:solidFill>
                   <a:srgbClr val="007E87"/>
@@ -5919,6 +6012,7 @@
               </a:defRPr>
             </a:lvl1pPr>
             <a:lvl2pPr>
+              <a:buNone/>
               <a:defRPr sz="6225" b="1">
                 <a:solidFill>
                   <a:srgbClr val="007E87"/>
@@ -5929,6 +6023,7 @@
               </a:defRPr>
             </a:lvl2pPr>
             <a:lvl3pPr>
+              <a:buNone/>
               <a:defRPr sz="6225" b="1">
                 <a:solidFill>
                   <a:srgbClr val="007E87"/>
@@ -5939,6 +6034,7 @@
               </a:defRPr>
             </a:lvl3pPr>
             <a:lvl4pPr>
+              <a:buNone/>
               <a:defRPr sz="6225" b="1">
                 <a:solidFill>
                   <a:srgbClr val="007E87"/>
@@ -5949,6 +6045,7 @@
               </a:defRPr>
             </a:lvl4pPr>
             <a:lvl5pPr>
+              <a:buNone/>
               <a:defRPr sz="6225" b="1">
                 <a:solidFill>
                   <a:srgbClr val="007E87"/>
@@ -5959,6 +6056,7 @@
               </a:defRPr>
             </a:lvl5pPr>
             <a:lvl6pPr>
+              <a:buNone/>
               <a:defRPr sz="6225" b="1">
                 <a:solidFill>
                   <a:srgbClr val="007E87"/>
@@ -5969,6 +6067,7 @@
               </a:defRPr>
             </a:lvl6pPr>
             <a:lvl7pPr>
+              <a:buNone/>
               <a:defRPr sz="6225" b="1">
                 <a:solidFill>
                   <a:srgbClr val="007E87"/>
@@ -5979,6 +6078,7 @@
               </a:defRPr>
             </a:lvl7pPr>
             <a:lvl8pPr>
+              <a:buNone/>
               <a:defRPr sz="6225" b="1">
                 <a:solidFill>
                   <a:srgbClr val="007E87"/>
@@ -5989,6 +6089,7 @@
               </a:defRPr>
             </a:lvl8pPr>
             <a:lvl9pPr>
+              <a:buNone/>
               <a:defRPr sz="6225" b="1">
                 <a:solidFill>
                   <a:srgbClr val="007E87"/>
@@ -6001,6 +6102,7 @@
           </a:lstStyle>
           <a:p xmlns:a="http://schemas.openxmlformats.org/drawingml/2006/main">
             <a:pPr>
+              <a:buNone/>
               <a:defRPr sz="6225" b="1">
                 <a:solidFill>
                   <a:srgbClr val="007E87"/>
@@ -6019,7 +6121,7 @@
                 <a:ea typeface="DejaVu Sans"/>
                 <a:cs typeface="DejaVu Sans"/>
               </a:rPr>
-              <a:t>144</a:t>
+              <a:t>151</a:t>
             </a:r>
           </a:p>
         </p:txBody>
@@ -6068,6 +6170,7 @@
               </a:defRPr>
             </a:defPPr>
             <a:lvl1pPr>
+              <a:buNone/>
               <a:defRPr sz="2100" b="0">
                 <a:solidFill>
                   <a:srgbClr val="102638"/>
@@ -6078,6 +6181,7 @@
               </a:defRPr>
             </a:lvl1pPr>
             <a:lvl2pPr>
+              <a:buNone/>
               <a:defRPr sz="2100" b="0">
                 <a:solidFill>
                   <a:srgbClr val="102638"/>
@@ -6088,6 +6192,7 @@
               </a:defRPr>
             </a:lvl2pPr>
             <a:lvl3pPr>
+              <a:buNone/>
               <a:defRPr sz="2100" b="0">
                 <a:solidFill>
                   <a:srgbClr val="102638"/>
@@ -6098,6 +6203,7 @@
               </a:defRPr>
             </a:lvl3pPr>
             <a:lvl4pPr>
+              <a:buNone/>
               <a:defRPr sz="2100" b="0">
                 <a:solidFill>
                   <a:srgbClr val="102638"/>
@@ -6108,6 +6214,7 @@
               </a:defRPr>
             </a:lvl4pPr>
             <a:lvl5pPr>
+              <a:buNone/>
               <a:defRPr sz="2100" b="0">
                 <a:solidFill>
                   <a:srgbClr val="102638"/>
@@ -6118,6 +6225,7 @@
               </a:defRPr>
             </a:lvl5pPr>
             <a:lvl6pPr>
+              <a:buNone/>
               <a:defRPr sz="2100" b="0">
                 <a:solidFill>
                   <a:srgbClr val="102638"/>
@@ -6128,6 +6236,7 @@
               </a:defRPr>
             </a:lvl6pPr>
             <a:lvl7pPr>
+              <a:buNone/>
               <a:defRPr sz="2100" b="0">
                 <a:solidFill>
                   <a:srgbClr val="102638"/>
@@ -6138,6 +6247,7 @@
               </a:defRPr>
             </a:lvl7pPr>
             <a:lvl8pPr>
+              <a:buNone/>
               <a:defRPr sz="2100" b="0">
                 <a:solidFill>
                   <a:srgbClr val="102638"/>
@@ -6148,6 +6258,7 @@
               </a:defRPr>
             </a:lvl8pPr>
             <a:lvl9pPr>
+              <a:buNone/>
               <a:defRPr sz="2100" b="0">
                 <a:solidFill>
                   <a:srgbClr val="102638"/>
@@ -6160,6 +6271,7 @@
           </a:lstStyle>
           <a:p xmlns:a="http://schemas.openxmlformats.org/drawingml/2006/main">
             <a:pPr>
+              <a:buNone/>
               <a:defRPr sz="2100" b="0">
                 <a:solidFill>
                   <a:srgbClr val="102638"/>
@@ -6227,6 +6339,7 @@
               </a:defRPr>
             </a:defPPr>
             <a:lvl1pPr>
+              <a:buNone/>
               <a:defRPr sz="2325" b="1">
                 <a:solidFill>
                   <a:srgbClr val="102638"/>
@@ -6237,6 +6350,7 @@
               </a:defRPr>
             </a:lvl1pPr>
             <a:lvl2pPr>
+              <a:buNone/>
               <a:defRPr sz="2325" b="1">
                 <a:solidFill>
                   <a:srgbClr val="102638"/>
@@ -6247,6 +6361,7 @@
               </a:defRPr>
             </a:lvl2pPr>
             <a:lvl3pPr>
+              <a:buNone/>
               <a:defRPr sz="2325" b="1">
                 <a:solidFill>
                   <a:srgbClr val="102638"/>
@@ -6257,6 +6372,7 @@
               </a:defRPr>
             </a:lvl3pPr>
             <a:lvl4pPr>
+              <a:buNone/>
               <a:defRPr sz="2325" b="1">
                 <a:solidFill>
                   <a:srgbClr val="102638"/>
@@ -6267,6 +6383,7 @@
               </a:defRPr>
             </a:lvl4pPr>
             <a:lvl5pPr>
+              <a:buNone/>
               <a:defRPr sz="2325" b="1">
                 <a:solidFill>
                   <a:srgbClr val="102638"/>
@@ -6277,6 +6394,7 @@
               </a:defRPr>
             </a:lvl5pPr>
             <a:lvl6pPr>
+              <a:buNone/>
               <a:defRPr sz="2325" b="1">
                 <a:solidFill>
                   <a:srgbClr val="102638"/>
@@ -6287,6 +6405,7 @@
               </a:defRPr>
             </a:lvl6pPr>
             <a:lvl7pPr>
+              <a:buNone/>
               <a:defRPr sz="2325" b="1">
                 <a:solidFill>
                   <a:srgbClr val="102638"/>
@@ -6297,6 +6416,7 @@
               </a:defRPr>
             </a:lvl7pPr>
             <a:lvl8pPr>
+              <a:buNone/>
               <a:defRPr sz="2325" b="1">
                 <a:solidFill>
                   <a:srgbClr val="102638"/>
@@ -6307,6 +6427,7 @@
               </a:defRPr>
             </a:lvl8pPr>
             <a:lvl9pPr>
+              <a:buNone/>
               <a:defRPr sz="2325" b="1">
                 <a:solidFill>
                   <a:srgbClr val="102638"/>
@@ -6319,6 +6440,7 @@
           </a:lstStyle>
           <a:p xmlns:a="http://schemas.openxmlformats.org/drawingml/2006/main">
             <a:pPr>
+              <a:buNone/>
               <a:defRPr sz="2325" b="1">
                 <a:solidFill>
                   <a:srgbClr val="102638"/>
@@ -6386,6 +6508,7 @@
               </a:defRPr>
             </a:defPPr>
             <a:lvl1pPr>
+              <a:buNone/>
               <a:defRPr sz="1875" b="0">
                 <a:solidFill>
                   <a:srgbClr val="102638"/>
@@ -6396,6 +6519,7 @@
               </a:defRPr>
             </a:lvl1pPr>
             <a:lvl2pPr>
+              <a:buNone/>
               <a:defRPr sz="1875" b="0">
                 <a:solidFill>
                   <a:srgbClr val="102638"/>
@@ -6406,6 +6530,7 @@
               </a:defRPr>
             </a:lvl2pPr>
             <a:lvl3pPr>
+              <a:buNone/>
               <a:defRPr sz="1875" b="0">
                 <a:solidFill>
                   <a:srgbClr val="102638"/>
@@ -6416,6 +6541,7 @@
               </a:defRPr>
             </a:lvl3pPr>
             <a:lvl4pPr>
+              <a:buNone/>
               <a:defRPr sz="1875" b="0">
                 <a:solidFill>
                   <a:srgbClr val="102638"/>
@@ -6426,6 +6552,7 @@
               </a:defRPr>
             </a:lvl4pPr>
             <a:lvl5pPr>
+              <a:buNone/>
               <a:defRPr sz="1875" b="0">
                 <a:solidFill>
                   <a:srgbClr val="102638"/>
@@ -6436,6 +6563,7 @@
               </a:defRPr>
             </a:lvl5pPr>
             <a:lvl6pPr>
+              <a:buNone/>
               <a:defRPr sz="1875" b="0">
                 <a:solidFill>
                   <a:srgbClr val="102638"/>
@@ -6446,6 +6574,7 @@
               </a:defRPr>
             </a:lvl6pPr>
             <a:lvl7pPr>
+              <a:buNone/>
               <a:defRPr sz="1875" b="0">
                 <a:solidFill>
                   <a:srgbClr val="102638"/>
@@ -6456,6 +6585,7 @@
               </a:defRPr>
             </a:lvl7pPr>
             <a:lvl8pPr>
+              <a:buNone/>
               <a:defRPr sz="1875" b="0">
                 <a:solidFill>
                   <a:srgbClr val="102638"/>
@@ -6466,6 +6596,7 @@
               </a:defRPr>
             </a:lvl8pPr>
             <a:lvl9pPr>
+              <a:buNone/>
               <a:defRPr sz="1875" b="0">
                 <a:solidFill>
                   <a:srgbClr val="102638"/>
@@ -6478,6 +6609,7 @@
           </a:lstStyle>
           <a:p xmlns:a="http://schemas.openxmlformats.org/drawingml/2006/main">
             <a:pPr>
+              <a:buNone/>
               <a:defRPr sz="1875" b="0">
                 <a:solidFill>
                   <a:srgbClr val="102638"/>
@@ -6496,11 +6628,12 @@
                 <a:ea typeface="DejaVu Sans"/>
                 <a:cs typeface="DejaVu Sans"/>
               </a:rPr>
-              <a:t>La revisión final repite 31 pruebas del alcance general.</a:t>
+              <a:t>QoS, VPN y HA cuentan con regresiones adicionales.</a:t>
             </a:r>
           </a:p>
           <a:p xmlns:a="http://schemas.openxmlformats.org/drawingml/2006/main">
             <a:pPr>
+              <a:buNone/>
               <a:defRPr sz="1875" b="0">
                 <a:solidFill>
                   <a:srgbClr val="102638"/>
@@ -6519,7 +6652,7 @@
                 <a:ea typeface="DejaVu Sans"/>
                 <a:cs typeface="DejaVu Sans"/>
               </a:rPr>
-              <a:t>Los resultados corresponden al software y sus reglas.</a:t>
+              <a:t>Los conteos describen pasadas de software, sin sumarlas.</a:t>
             </a:r>
           </a:p>
         </p:txBody>
@@ -6568,6 +6701,7 @@
               </a:defRPr>
             </a:defPPr>
             <a:lvl1pPr>
+              <a:buNone/>
               <a:defRPr sz="1350" b="0">
                 <a:solidFill>
                   <a:srgbClr val="476071"/>
@@ -6578,6 +6712,7 @@
               </a:defRPr>
             </a:lvl1pPr>
             <a:lvl2pPr>
+              <a:buNone/>
               <a:defRPr sz="1350" b="0">
                 <a:solidFill>
                   <a:srgbClr val="476071"/>
@@ -6588,6 +6723,7 @@
               </a:defRPr>
             </a:lvl2pPr>
             <a:lvl3pPr>
+              <a:buNone/>
               <a:defRPr sz="1350" b="0">
                 <a:solidFill>
                   <a:srgbClr val="476071"/>
@@ -6598,6 +6734,7 @@
               </a:defRPr>
             </a:lvl3pPr>
             <a:lvl4pPr>
+              <a:buNone/>
               <a:defRPr sz="1350" b="0">
                 <a:solidFill>
                   <a:srgbClr val="476071"/>
@@ -6608,6 +6745,7 @@
               </a:defRPr>
             </a:lvl4pPr>
             <a:lvl5pPr>
+              <a:buNone/>
               <a:defRPr sz="1350" b="0">
                 <a:solidFill>
                   <a:srgbClr val="476071"/>
@@ -6618,6 +6756,7 @@
               </a:defRPr>
             </a:lvl5pPr>
             <a:lvl6pPr>
+              <a:buNone/>
               <a:defRPr sz="1350" b="0">
                 <a:solidFill>
                   <a:srgbClr val="476071"/>
@@ -6628,6 +6767,7 @@
               </a:defRPr>
             </a:lvl6pPr>
             <a:lvl7pPr>
+              <a:buNone/>
               <a:defRPr sz="1350" b="0">
                 <a:solidFill>
                   <a:srgbClr val="476071"/>
@@ -6638,6 +6778,7 @@
               </a:defRPr>
             </a:lvl7pPr>
             <a:lvl8pPr>
+              <a:buNone/>
               <a:defRPr sz="1350" b="0">
                 <a:solidFill>
                   <a:srgbClr val="476071"/>
@@ -6648,6 +6789,7 @@
               </a:defRPr>
             </a:lvl8pPr>
             <a:lvl9pPr>
+              <a:buNone/>
               <a:defRPr sz="1350" b="0">
                 <a:solidFill>
                   <a:srgbClr val="476071"/>
@@ -6660,6 +6802,7 @@
           </a:lstStyle>
           <a:p xmlns:a="http://schemas.openxmlformats.org/drawingml/2006/main">
             <a:pPr>
+              <a:buNone/>
               <a:defRPr sz="1350" b="0">
                 <a:solidFill>
                   <a:srgbClr val="476071"/>
@@ -6756,6 +6899,7 @@
               </a:defRPr>
             </a:defPPr>
             <a:lvl1pPr>
+              <a:buNone/>
               <a:defRPr sz="3300" b="1">
                 <a:solidFill>
                   <a:srgbClr val="102638"/>
@@ -6766,6 +6910,7 @@
               </a:defRPr>
             </a:lvl1pPr>
             <a:lvl2pPr>
+              <a:buNone/>
               <a:defRPr sz="3300" b="1">
                 <a:solidFill>
                   <a:srgbClr val="102638"/>
@@ -6776,6 +6921,7 @@
               </a:defRPr>
             </a:lvl2pPr>
             <a:lvl3pPr>
+              <a:buNone/>
               <a:defRPr sz="3300" b="1">
                 <a:solidFill>
                   <a:srgbClr val="102638"/>
@@ -6786,6 +6932,7 @@
               </a:defRPr>
             </a:lvl3pPr>
             <a:lvl4pPr>
+              <a:buNone/>
               <a:defRPr sz="3300" b="1">
                 <a:solidFill>
                   <a:srgbClr val="102638"/>
@@ -6796,6 +6943,7 @@
               </a:defRPr>
             </a:lvl4pPr>
             <a:lvl5pPr>
+              <a:buNone/>
               <a:defRPr sz="3300" b="1">
                 <a:solidFill>
                   <a:srgbClr val="102638"/>
@@ -6806,6 +6954,7 @@
               </a:defRPr>
             </a:lvl5pPr>
             <a:lvl6pPr>
+              <a:buNone/>
               <a:defRPr sz="3300" b="1">
                 <a:solidFill>
                   <a:srgbClr val="102638"/>
@@ -6816,6 +6965,7 @@
               </a:defRPr>
             </a:lvl6pPr>
             <a:lvl7pPr>
+              <a:buNone/>
               <a:defRPr sz="3300" b="1">
                 <a:solidFill>
                   <a:srgbClr val="102638"/>
@@ -6826,6 +6976,7 @@
               </a:defRPr>
             </a:lvl7pPr>
             <a:lvl8pPr>
+              <a:buNone/>
               <a:defRPr sz="3300" b="1">
                 <a:solidFill>
                   <a:srgbClr val="102638"/>
@@ -6836,6 +6987,7 @@
               </a:defRPr>
             </a:lvl8pPr>
             <a:lvl9pPr>
+              <a:buNone/>
               <a:defRPr sz="3300" b="1">
                 <a:solidFill>
                   <a:srgbClr val="102638"/>
@@ -6848,6 +7000,7 @@
           </a:lstStyle>
           <a:p xmlns:a="http://schemas.openxmlformats.org/drawingml/2006/main">
             <a:pPr>
+              <a:buNone/>
               <a:defRPr sz="3300" b="1">
                 <a:solidFill>
                   <a:srgbClr val="102638"/>
@@ -6915,6 +7068,7 @@
               </a:defRPr>
             </a:defPPr>
             <a:lvl1pPr>
+              <a:buNone/>
               <a:defRPr sz="1275" b="0">
                 <a:solidFill>
                   <a:srgbClr val="476071"/>
@@ -6925,6 +7079,7 @@
               </a:defRPr>
             </a:lvl1pPr>
             <a:lvl2pPr>
+              <a:buNone/>
               <a:defRPr sz="1275" b="0">
                 <a:solidFill>
                   <a:srgbClr val="476071"/>
@@ -6935,6 +7090,7 @@
               </a:defRPr>
             </a:lvl2pPr>
             <a:lvl3pPr>
+              <a:buNone/>
               <a:defRPr sz="1275" b="0">
                 <a:solidFill>
                   <a:srgbClr val="476071"/>
@@ -6945,6 +7101,7 @@
               </a:defRPr>
             </a:lvl3pPr>
             <a:lvl4pPr>
+              <a:buNone/>
               <a:defRPr sz="1275" b="0">
                 <a:solidFill>
                   <a:srgbClr val="476071"/>
@@ -6955,6 +7112,7 @@
               </a:defRPr>
             </a:lvl4pPr>
             <a:lvl5pPr>
+              <a:buNone/>
               <a:defRPr sz="1275" b="0">
                 <a:solidFill>
                   <a:srgbClr val="476071"/>
@@ -6965,6 +7123,7 @@
               </a:defRPr>
             </a:lvl5pPr>
             <a:lvl6pPr>
+              <a:buNone/>
               <a:defRPr sz="1275" b="0">
                 <a:solidFill>
                   <a:srgbClr val="476071"/>
@@ -6975,6 +7134,7 @@
               </a:defRPr>
             </a:lvl6pPr>
             <a:lvl7pPr>
+              <a:buNone/>
               <a:defRPr sz="1275" b="0">
                 <a:solidFill>
                   <a:srgbClr val="476071"/>
@@ -6985,6 +7145,7 @@
               </a:defRPr>
             </a:lvl7pPr>
             <a:lvl8pPr>
+              <a:buNone/>
               <a:defRPr sz="1275" b="0">
                 <a:solidFill>
                   <a:srgbClr val="476071"/>
@@ -6995,6 +7156,7 @@
               </a:defRPr>
             </a:lvl8pPr>
             <a:lvl9pPr>
+              <a:buNone/>
               <a:defRPr sz="1275" b="0">
                 <a:solidFill>
                   <a:srgbClr val="476071"/>
@@ -7007,6 +7169,7 @@
           </a:lstStyle>
           <a:p xmlns:a="http://schemas.openxmlformats.org/drawingml/2006/main">
             <a:pPr>
+              <a:buNone/>
               <a:defRPr sz="1275" b="0">
                 <a:solidFill>
                   <a:srgbClr val="476071"/>
@@ -7035,7 +7198,7 @@
           <p:cNvPr id="3" name="">
             <a:extLst xmlns:a="http://schemas.openxmlformats.org/drawingml/2006/main">
               <a:ext uri="{FF2B5EF4-FFF2-40B4-BE49-F238E27FC236}">
-                <a16:creationId xmlns:a16="http://schemas.microsoft.com/office/drawing/2014/main" id="{A988D7F6-8752-43DA-84B1-1E5BA9392AA3}"/>
+                <a16:creationId xmlns:a16="http://schemas.microsoft.com/office/drawing/2014/main" id="{F46F360E-4600-4DFD-B1E4-7A5AD475DEF6}"/>
               </a:ext>
             </a:extLst>
           </p:cNvPr>
@@ -7701,6 +7864,7 @@
               </a:defRPr>
             </a:defPPr>
             <a:lvl1pPr>
+              <a:buNone/>
               <a:defRPr sz="2100" b="1">
                 <a:solidFill>
                   <a:srgbClr val="007E87"/>
@@ -7711,6 +7875,7 @@
               </a:defRPr>
             </a:lvl1pPr>
             <a:lvl2pPr>
+              <a:buNone/>
               <a:defRPr sz="2100" b="1">
                 <a:solidFill>
                   <a:srgbClr val="007E87"/>
@@ -7721,6 +7886,7 @@
               </a:defRPr>
             </a:lvl2pPr>
             <a:lvl3pPr>
+              <a:buNone/>
               <a:defRPr sz="2100" b="1">
                 <a:solidFill>
                   <a:srgbClr val="007E87"/>
@@ -7731,6 +7897,7 @@
               </a:defRPr>
             </a:lvl3pPr>
             <a:lvl4pPr>
+              <a:buNone/>
               <a:defRPr sz="2100" b="1">
                 <a:solidFill>
                   <a:srgbClr val="007E87"/>
@@ -7741,6 +7908,7 @@
               </a:defRPr>
             </a:lvl4pPr>
             <a:lvl5pPr>
+              <a:buNone/>
               <a:defRPr sz="2100" b="1">
                 <a:solidFill>
                   <a:srgbClr val="007E87"/>
@@ -7751,6 +7919,7 @@
               </a:defRPr>
             </a:lvl5pPr>
             <a:lvl6pPr>
+              <a:buNone/>
               <a:defRPr sz="2100" b="1">
                 <a:solidFill>
                   <a:srgbClr val="007E87"/>
@@ -7761,6 +7930,7 @@
               </a:defRPr>
             </a:lvl6pPr>
             <a:lvl7pPr>
+              <a:buNone/>
               <a:defRPr sz="2100" b="1">
                 <a:solidFill>
                   <a:srgbClr val="007E87"/>
@@ -7771,6 +7941,7 @@
               </a:defRPr>
             </a:lvl7pPr>
             <a:lvl8pPr>
+              <a:buNone/>
               <a:defRPr sz="2100" b="1">
                 <a:solidFill>
                   <a:srgbClr val="007E87"/>
@@ -7781,6 +7952,7 @@
               </a:defRPr>
             </a:lvl8pPr>
             <a:lvl9pPr>
+              <a:buNone/>
               <a:defRPr sz="2100" b="1">
                 <a:solidFill>
                   <a:srgbClr val="007E87"/>
@@ -7793,6 +7965,7 @@
           </a:lstStyle>
           <a:p xmlns:a="http://schemas.openxmlformats.org/drawingml/2006/main">
             <a:pPr>
+              <a:buNone/>
               <a:defRPr sz="2100" b="1">
                 <a:solidFill>
                   <a:srgbClr val="007E87"/>
@@ -7860,6 +8033,7 @@
               </a:defRPr>
             </a:defPPr>
             <a:lvl1pPr>
+              <a:buNone/>
               <a:defRPr sz="1350" b="0">
                 <a:solidFill>
                   <a:srgbClr val="476071"/>
@@ -7870,6 +8044,7 @@
               </a:defRPr>
             </a:lvl1pPr>
             <a:lvl2pPr>
+              <a:buNone/>
               <a:defRPr sz="1350" b="0">
                 <a:solidFill>
                   <a:srgbClr val="476071"/>
@@ -7880,6 +8055,7 @@
               </a:defRPr>
             </a:lvl2pPr>
             <a:lvl3pPr>
+              <a:buNone/>
               <a:defRPr sz="1350" b="0">
                 <a:solidFill>
                   <a:srgbClr val="476071"/>
@@ -7890,6 +8066,7 @@
               </a:defRPr>
             </a:lvl3pPr>
             <a:lvl4pPr>
+              <a:buNone/>
               <a:defRPr sz="1350" b="0">
                 <a:solidFill>
                   <a:srgbClr val="476071"/>
@@ -7900,6 +8077,7 @@
               </a:defRPr>
             </a:lvl4pPr>
             <a:lvl5pPr>
+              <a:buNone/>
               <a:defRPr sz="1350" b="0">
                 <a:solidFill>
                   <a:srgbClr val="476071"/>
@@ -7910,6 +8088,7 @@
               </a:defRPr>
             </a:lvl5pPr>
             <a:lvl6pPr>
+              <a:buNone/>
               <a:defRPr sz="1350" b="0">
                 <a:solidFill>
                   <a:srgbClr val="476071"/>
@@ -7920,6 +8099,7 @@
               </a:defRPr>
             </a:lvl6pPr>
             <a:lvl7pPr>
+              <a:buNone/>
               <a:defRPr sz="1350" b="0">
                 <a:solidFill>
                   <a:srgbClr val="476071"/>
@@ -7930,6 +8110,7 @@
               </a:defRPr>
             </a:lvl7pPr>
             <a:lvl8pPr>
+              <a:buNone/>
               <a:defRPr sz="1350" b="0">
                 <a:solidFill>
                   <a:srgbClr val="476071"/>
@@ -7940,6 +8121,7 @@
               </a:defRPr>
             </a:lvl8pPr>
             <a:lvl9pPr>
+              <a:buNone/>
               <a:defRPr sz="1350" b="0">
                 <a:solidFill>
                   <a:srgbClr val="476071"/>
@@ -7952,6 +8134,7 @@
           </a:lstStyle>
           <a:p xmlns:a="http://schemas.openxmlformats.org/drawingml/2006/main">
             <a:pPr>
+              <a:buNone/>
               <a:defRPr sz="1350" b="0">
                 <a:solidFill>
                   <a:srgbClr val="476071"/>
@@ -8048,6 +8231,7 @@
               </a:defRPr>
             </a:defPPr>
             <a:lvl1pPr>
+              <a:buNone/>
               <a:defRPr sz="3300" b="1">
                 <a:solidFill>
                   <a:srgbClr val="102638"/>
@@ -8058,6 +8242,7 @@
               </a:defRPr>
             </a:lvl1pPr>
             <a:lvl2pPr>
+              <a:buNone/>
               <a:defRPr sz="3300" b="1">
                 <a:solidFill>
                   <a:srgbClr val="102638"/>
@@ -8068,6 +8253,7 @@
               </a:defRPr>
             </a:lvl2pPr>
             <a:lvl3pPr>
+              <a:buNone/>
               <a:defRPr sz="3300" b="1">
                 <a:solidFill>
                   <a:srgbClr val="102638"/>
@@ -8078,6 +8264,7 @@
               </a:defRPr>
             </a:lvl3pPr>
             <a:lvl4pPr>
+              <a:buNone/>
               <a:defRPr sz="3300" b="1">
                 <a:solidFill>
                   <a:srgbClr val="102638"/>
@@ -8088,6 +8275,7 @@
               </a:defRPr>
             </a:lvl4pPr>
             <a:lvl5pPr>
+              <a:buNone/>
               <a:defRPr sz="3300" b="1">
                 <a:solidFill>
                   <a:srgbClr val="102638"/>
@@ -8098,6 +8286,7 @@
               </a:defRPr>
             </a:lvl5pPr>
             <a:lvl6pPr>
+              <a:buNone/>
               <a:defRPr sz="3300" b="1">
                 <a:solidFill>
                   <a:srgbClr val="102638"/>
@@ -8108,6 +8297,7 @@
               </a:defRPr>
             </a:lvl6pPr>
             <a:lvl7pPr>
+              <a:buNone/>
               <a:defRPr sz="3300" b="1">
                 <a:solidFill>
                   <a:srgbClr val="102638"/>
@@ -8118,6 +8308,7 @@
               </a:defRPr>
             </a:lvl7pPr>
             <a:lvl8pPr>
+              <a:buNone/>
               <a:defRPr sz="3300" b="1">
                 <a:solidFill>
                   <a:srgbClr val="102638"/>
@@ -8128,6 +8319,7 @@
               </a:defRPr>
             </a:lvl8pPr>
             <a:lvl9pPr>
+              <a:buNone/>
               <a:defRPr sz="3300" b="1">
                 <a:solidFill>
                   <a:srgbClr val="102638"/>
@@ -8140,6 +8332,7 @@
           </a:lstStyle>
           <a:p xmlns:a="http://schemas.openxmlformats.org/drawingml/2006/main">
             <a:pPr>
+              <a:buNone/>
               <a:defRPr sz="3300" b="1">
                 <a:solidFill>
                   <a:srgbClr val="102638"/>
@@ -8207,6 +8400,7 @@
               </a:defRPr>
             </a:defPPr>
             <a:lvl1pPr>
+              <a:buNone/>
               <a:defRPr sz="1275" b="0">
                 <a:solidFill>
                   <a:srgbClr val="476071"/>
@@ -8217,6 +8411,7 @@
               </a:defRPr>
             </a:lvl1pPr>
             <a:lvl2pPr>
+              <a:buNone/>
               <a:defRPr sz="1275" b="0">
                 <a:solidFill>
                   <a:srgbClr val="476071"/>
@@ -8227,6 +8422,7 @@
               </a:defRPr>
             </a:lvl2pPr>
             <a:lvl3pPr>
+              <a:buNone/>
               <a:defRPr sz="1275" b="0">
                 <a:solidFill>
                   <a:srgbClr val="476071"/>
@@ -8237,6 +8433,7 @@
               </a:defRPr>
             </a:lvl3pPr>
             <a:lvl4pPr>
+              <a:buNone/>
               <a:defRPr sz="1275" b="0">
                 <a:solidFill>
                   <a:srgbClr val="476071"/>
@@ -8247,6 +8444,7 @@
               </a:defRPr>
             </a:lvl4pPr>
             <a:lvl5pPr>
+              <a:buNone/>
               <a:defRPr sz="1275" b="0">
                 <a:solidFill>
                   <a:srgbClr val="476071"/>
@@ -8257,6 +8455,7 @@
               </a:defRPr>
             </a:lvl5pPr>
             <a:lvl6pPr>
+              <a:buNone/>
               <a:defRPr sz="1275" b="0">
                 <a:solidFill>
                   <a:srgbClr val="476071"/>
@@ -8267,6 +8466,7 @@
               </a:defRPr>
             </a:lvl6pPr>
             <a:lvl7pPr>
+              <a:buNone/>
               <a:defRPr sz="1275" b="0">
                 <a:solidFill>
                   <a:srgbClr val="476071"/>
@@ -8277,6 +8477,7 @@
               </a:defRPr>
             </a:lvl7pPr>
             <a:lvl8pPr>
+              <a:buNone/>
               <a:defRPr sz="1275" b="0">
                 <a:solidFill>
                   <a:srgbClr val="476071"/>
@@ -8287,6 +8488,7 @@
               </a:defRPr>
             </a:lvl8pPr>
             <a:lvl9pPr>
+              <a:buNone/>
               <a:defRPr sz="1275" b="0">
                 <a:solidFill>
                   <a:srgbClr val="476071"/>
@@ -8299,6 +8501,7 @@
           </a:lstStyle>
           <a:p xmlns:a="http://schemas.openxmlformats.org/drawingml/2006/main">
             <a:pPr>
+              <a:buNone/>
               <a:defRPr sz="1275" b="0">
                 <a:solidFill>
                   <a:srgbClr val="476071"/>
@@ -8366,6 +8569,7 @@
               </a:defRPr>
             </a:defPPr>
             <a:lvl1pPr>
+              <a:buNone/>
               <a:defRPr sz="2100" b="1">
                 <a:solidFill>
                   <a:srgbClr val="007E87"/>
@@ -8376,6 +8580,7 @@
               </a:defRPr>
             </a:lvl1pPr>
             <a:lvl2pPr>
+              <a:buNone/>
               <a:defRPr sz="2100" b="1">
                 <a:solidFill>
                   <a:srgbClr val="007E87"/>
@@ -8386,6 +8591,7 @@
               </a:defRPr>
             </a:lvl2pPr>
             <a:lvl3pPr>
+              <a:buNone/>
               <a:defRPr sz="2100" b="1">
                 <a:solidFill>
                   <a:srgbClr val="007E87"/>
@@ -8396,6 +8602,7 @@
               </a:defRPr>
             </a:lvl3pPr>
             <a:lvl4pPr>
+              <a:buNone/>
               <a:defRPr sz="2100" b="1">
                 <a:solidFill>
                   <a:srgbClr val="007E87"/>
@@ -8406,6 +8613,7 @@
               </a:defRPr>
             </a:lvl4pPr>
             <a:lvl5pPr>
+              <a:buNone/>
               <a:defRPr sz="2100" b="1">
                 <a:solidFill>
                   <a:srgbClr val="007E87"/>
@@ -8416,6 +8624,7 @@
               </a:defRPr>
             </a:lvl5pPr>
             <a:lvl6pPr>
+              <a:buNone/>
               <a:defRPr sz="2100" b="1">
                 <a:solidFill>
                   <a:srgbClr val="007E87"/>
@@ -8426,6 +8635,7 @@
               </a:defRPr>
             </a:lvl6pPr>
             <a:lvl7pPr>
+              <a:buNone/>
               <a:defRPr sz="2100" b="1">
                 <a:solidFill>
                   <a:srgbClr val="007E87"/>
@@ -8436,6 +8646,7 @@
               </a:defRPr>
             </a:lvl7pPr>
             <a:lvl8pPr>
+              <a:buNone/>
               <a:defRPr sz="2100" b="1">
                 <a:solidFill>
                   <a:srgbClr val="007E87"/>
@@ -8446,6 +8657,7 @@
               </a:defRPr>
             </a:lvl8pPr>
             <a:lvl9pPr>
+              <a:buNone/>
               <a:defRPr sz="2100" b="1">
                 <a:solidFill>
                   <a:srgbClr val="007E87"/>
@@ -8458,6 +8670,7 @@
           </a:lstStyle>
           <a:p xmlns:a="http://schemas.openxmlformats.org/drawingml/2006/main">
             <a:pPr>
+              <a:buNone/>
               <a:defRPr sz="2100" b="1">
                 <a:solidFill>
                   <a:srgbClr val="007E87"/>
@@ -8525,6 +8738,7 @@
               </a:defRPr>
             </a:defPPr>
             <a:lvl1pPr>
+              <a:buNone/>
               <a:defRPr sz="1950" b="0">
                 <a:solidFill>
                   <a:srgbClr val="102638"/>
@@ -8535,6 +8749,7 @@
               </a:defRPr>
             </a:lvl1pPr>
             <a:lvl2pPr>
+              <a:buNone/>
               <a:defRPr sz="1950" b="0">
                 <a:solidFill>
                   <a:srgbClr val="102638"/>
@@ -8545,6 +8760,7 @@
               </a:defRPr>
             </a:lvl2pPr>
             <a:lvl3pPr>
+              <a:buNone/>
               <a:defRPr sz="1950" b="0">
                 <a:solidFill>
                   <a:srgbClr val="102638"/>
@@ -8555,6 +8771,7 @@
               </a:defRPr>
             </a:lvl3pPr>
             <a:lvl4pPr>
+              <a:buNone/>
               <a:defRPr sz="1950" b="0">
                 <a:solidFill>
                   <a:srgbClr val="102638"/>
@@ -8565,6 +8782,7 @@
               </a:defRPr>
             </a:lvl4pPr>
             <a:lvl5pPr>
+              <a:buNone/>
               <a:defRPr sz="1950" b="0">
                 <a:solidFill>
                   <a:srgbClr val="102638"/>
@@ -8575,6 +8793,7 @@
               </a:defRPr>
             </a:lvl5pPr>
             <a:lvl6pPr>
+              <a:buNone/>
               <a:defRPr sz="1950" b="0">
                 <a:solidFill>
                   <a:srgbClr val="102638"/>
@@ -8585,6 +8804,7 @@
               </a:defRPr>
             </a:lvl6pPr>
             <a:lvl7pPr>
+              <a:buNone/>
               <a:defRPr sz="1950" b="0">
                 <a:solidFill>
                   <a:srgbClr val="102638"/>
@@ -8595,6 +8815,7 @@
               </a:defRPr>
             </a:lvl7pPr>
             <a:lvl8pPr>
+              <a:buNone/>
               <a:defRPr sz="1950" b="0">
                 <a:solidFill>
                   <a:srgbClr val="102638"/>
@@ -8605,6 +8826,7 @@
               </a:defRPr>
             </a:lvl8pPr>
             <a:lvl9pPr>
+              <a:buNone/>
               <a:defRPr sz="1950" b="0">
                 <a:solidFill>
                   <a:srgbClr val="102638"/>
@@ -8617,6 +8839,7 @@
           </a:lstStyle>
           <a:p xmlns:a="http://schemas.openxmlformats.org/drawingml/2006/main">
             <a:pPr>
+              <a:buNone/>
               <a:defRPr sz="1950" b="0">
                 <a:solidFill>
                   <a:srgbClr val="102638"/>
@@ -8684,6 +8907,7 @@
               </a:defRPr>
             </a:defPPr>
             <a:lvl1pPr>
+              <a:buNone/>
               <a:defRPr sz="2100" b="1">
                 <a:solidFill>
                   <a:srgbClr val="007E87"/>
@@ -8694,6 +8918,7 @@
               </a:defRPr>
             </a:lvl1pPr>
             <a:lvl2pPr>
+              <a:buNone/>
               <a:defRPr sz="2100" b="1">
                 <a:solidFill>
                   <a:srgbClr val="007E87"/>
@@ -8704,6 +8929,7 @@
               </a:defRPr>
             </a:lvl2pPr>
             <a:lvl3pPr>
+              <a:buNone/>
               <a:defRPr sz="2100" b="1">
                 <a:solidFill>
                   <a:srgbClr val="007E87"/>
@@ -8714,6 +8940,7 @@
               </a:defRPr>
             </a:lvl3pPr>
             <a:lvl4pPr>
+              <a:buNone/>
               <a:defRPr sz="2100" b="1">
                 <a:solidFill>
                   <a:srgbClr val="007E87"/>
@@ -8724,6 +8951,7 @@
               </a:defRPr>
             </a:lvl4pPr>
             <a:lvl5pPr>
+              <a:buNone/>
               <a:defRPr sz="2100" b="1">
                 <a:solidFill>
                   <a:srgbClr val="007E87"/>
@@ -8734,6 +8962,7 @@
               </a:defRPr>
             </a:lvl5pPr>
             <a:lvl6pPr>
+              <a:buNone/>
               <a:defRPr sz="2100" b="1">
                 <a:solidFill>
                   <a:srgbClr val="007E87"/>
@@ -8744,6 +8973,7 @@
               </a:defRPr>
             </a:lvl6pPr>
             <a:lvl7pPr>
+              <a:buNone/>
               <a:defRPr sz="2100" b="1">
                 <a:solidFill>
                   <a:srgbClr val="007E87"/>
@@ -8754,6 +8984,7 @@
               </a:defRPr>
             </a:lvl7pPr>
             <a:lvl8pPr>
+              <a:buNone/>
               <a:defRPr sz="2100" b="1">
                 <a:solidFill>
                   <a:srgbClr val="007E87"/>
@@ -8764,6 +8995,7 @@
               </a:defRPr>
             </a:lvl8pPr>
             <a:lvl9pPr>
+              <a:buNone/>
               <a:defRPr sz="2100" b="1">
                 <a:solidFill>
                   <a:srgbClr val="007E87"/>
@@ -8776,6 +9008,7 @@
           </a:lstStyle>
           <a:p xmlns:a="http://schemas.openxmlformats.org/drawingml/2006/main">
             <a:pPr>
+              <a:buNone/>
               <a:defRPr sz="2100" b="1">
                 <a:solidFill>
                   <a:srgbClr val="007E87"/>
@@ -8843,6 +9076,7 @@
               </a:defRPr>
             </a:defPPr>
             <a:lvl1pPr>
+              <a:buNone/>
               <a:defRPr sz="1950" b="0">
                 <a:solidFill>
                   <a:srgbClr val="102638"/>
@@ -8853,6 +9087,7 @@
               </a:defRPr>
             </a:lvl1pPr>
             <a:lvl2pPr>
+              <a:buNone/>
               <a:defRPr sz="1950" b="0">
                 <a:solidFill>
                   <a:srgbClr val="102638"/>
@@ -8863,6 +9098,7 @@
               </a:defRPr>
             </a:lvl2pPr>
             <a:lvl3pPr>
+              <a:buNone/>
               <a:defRPr sz="1950" b="0">
                 <a:solidFill>
                   <a:srgbClr val="102638"/>
@@ -8873,6 +9109,7 @@
               </a:defRPr>
             </a:lvl3pPr>
             <a:lvl4pPr>
+              <a:buNone/>
               <a:defRPr sz="1950" b="0">
                 <a:solidFill>
                   <a:srgbClr val="102638"/>
@@ -8883,6 +9120,7 @@
               </a:defRPr>
             </a:lvl4pPr>
             <a:lvl5pPr>
+              <a:buNone/>
               <a:defRPr sz="1950" b="0">
                 <a:solidFill>
                   <a:srgbClr val="102638"/>
@@ -8893,6 +9131,7 @@
               </a:defRPr>
             </a:lvl5pPr>
             <a:lvl6pPr>
+              <a:buNone/>
               <a:defRPr sz="1950" b="0">
                 <a:solidFill>
                   <a:srgbClr val="102638"/>
@@ -8903,6 +9142,7 @@
               </a:defRPr>
             </a:lvl6pPr>
             <a:lvl7pPr>
+              <a:buNone/>
               <a:defRPr sz="1950" b="0">
                 <a:solidFill>
                   <a:srgbClr val="102638"/>
@@ -8913,6 +9153,7 @@
               </a:defRPr>
             </a:lvl7pPr>
             <a:lvl8pPr>
+              <a:buNone/>
               <a:defRPr sz="1950" b="0">
                 <a:solidFill>
                   <a:srgbClr val="102638"/>
@@ -8923,6 +9164,7 @@
               </a:defRPr>
             </a:lvl8pPr>
             <a:lvl9pPr>
+              <a:buNone/>
               <a:defRPr sz="1950" b="0">
                 <a:solidFill>
                   <a:srgbClr val="102638"/>
@@ -8935,6 +9177,7 @@
           </a:lstStyle>
           <a:p xmlns:a="http://schemas.openxmlformats.org/drawingml/2006/main">
             <a:pPr>
+              <a:buNone/>
               <a:defRPr sz="1950" b="0">
                 <a:solidFill>
                   <a:srgbClr val="102638"/>
@@ -8953,7 +9196,7 @@
                 <a:ea typeface="DejaVu Sans"/>
                 <a:cs typeface="DejaVu Sans"/>
               </a:rPr>
-              <a:t>El pico calculado con video llega a 1.088 Mbps de subida frente a 1.000 Mbps del principal. Se requiere admisión de video y revisión antes de crecer.</a:t>
+              <a:t>Política del diseño: hasta 30 terminales remotos y 3 en CM con video. Subida calculada: 966 de 1.000 Mbps. En contingencia se suspende el video.</a:t>
             </a:r>
           </a:p>
         </p:txBody>
@@ -9002,6 +9245,7 @@
               </a:defRPr>
             </a:defPPr>
             <a:lvl1pPr>
+              <a:buNone/>
               <a:defRPr sz="2100" b="1">
                 <a:solidFill>
                   <a:srgbClr val="007E87"/>
@@ -9012,6 +9256,7 @@
               </a:defRPr>
             </a:lvl1pPr>
             <a:lvl2pPr>
+              <a:buNone/>
               <a:defRPr sz="2100" b="1">
                 <a:solidFill>
                   <a:srgbClr val="007E87"/>
@@ -9022,6 +9267,7 @@
               </a:defRPr>
             </a:lvl2pPr>
             <a:lvl3pPr>
+              <a:buNone/>
               <a:defRPr sz="2100" b="1">
                 <a:solidFill>
                   <a:srgbClr val="007E87"/>
@@ -9032,6 +9278,7 @@
               </a:defRPr>
             </a:lvl3pPr>
             <a:lvl4pPr>
+              <a:buNone/>
               <a:defRPr sz="2100" b="1">
                 <a:solidFill>
                   <a:srgbClr val="007E87"/>
@@ -9042,6 +9289,7 @@
               </a:defRPr>
             </a:lvl4pPr>
             <a:lvl5pPr>
+              <a:buNone/>
               <a:defRPr sz="2100" b="1">
                 <a:solidFill>
                   <a:srgbClr val="007E87"/>
@@ -9052,6 +9300,7 @@
               </a:defRPr>
             </a:lvl5pPr>
             <a:lvl6pPr>
+              <a:buNone/>
               <a:defRPr sz="2100" b="1">
                 <a:solidFill>
                   <a:srgbClr val="007E87"/>
@@ -9062,6 +9311,7 @@
               </a:defRPr>
             </a:lvl6pPr>
             <a:lvl7pPr>
+              <a:buNone/>
               <a:defRPr sz="2100" b="1">
                 <a:solidFill>
                   <a:srgbClr val="007E87"/>
@@ -9072,6 +9322,7 @@
               </a:defRPr>
             </a:lvl7pPr>
             <a:lvl8pPr>
+              <a:buNone/>
               <a:defRPr sz="2100" b="1">
                 <a:solidFill>
                   <a:srgbClr val="007E87"/>
@@ -9082,6 +9333,7 @@
               </a:defRPr>
             </a:lvl8pPr>
             <a:lvl9pPr>
+              <a:buNone/>
               <a:defRPr sz="2100" b="1">
                 <a:solidFill>
                   <a:srgbClr val="007E87"/>
@@ -9094,6 +9346,7 @@
           </a:lstStyle>
           <a:p xmlns:a="http://schemas.openxmlformats.org/drawingml/2006/main">
             <a:pPr>
+              <a:buNone/>
               <a:defRPr sz="2100" b="1">
                 <a:solidFill>
                   <a:srgbClr val="007E87"/>
@@ -9161,6 +9414,7 @@
               </a:defRPr>
             </a:defPPr>
             <a:lvl1pPr>
+              <a:buNone/>
               <a:defRPr sz="1950" b="0">
                 <a:solidFill>
                   <a:srgbClr val="102638"/>
@@ -9171,6 +9425,7 @@
               </a:defRPr>
             </a:lvl1pPr>
             <a:lvl2pPr>
+              <a:buNone/>
               <a:defRPr sz="1950" b="0">
                 <a:solidFill>
                   <a:srgbClr val="102638"/>
@@ -9181,6 +9436,7 @@
               </a:defRPr>
             </a:lvl2pPr>
             <a:lvl3pPr>
+              <a:buNone/>
               <a:defRPr sz="1950" b="0">
                 <a:solidFill>
                   <a:srgbClr val="102638"/>
@@ -9191,6 +9447,7 @@
               </a:defRPr>
             </a:lvl3pPr>
             <a:lvl4pPr>
+              <a:buNone/>
               <a:defRPr sz="1950" b="0">
                 <a:solidFill>
                   <a:srgbClr val="102638"/>
@@ -9201,6 +9458,7 @@
               </a:defRPr>
             </a:lvl4pPr>
             <a:lvl5pPr>
+              <a:buNone/>
               <a:defRPr sz="1950" b="0">
                 <a:solidFill>
                   <a:srgbClr val="102638"/>
@@ -9211,6 +9469,7 @@
               </a:defRPr>
             </a:lvl5pPr>
             <a:lvl6pPr>
+              <a:buNone/>
               <a:defRPr sz="1950" b="0">
                 <a:solidFill>
                   <a:srgbClr val="102638"/>
@@ -9221,6 +9480,7 @@
               </a:defRPr>
             </a:lvl6pPr>
             <a:lvl7pPr>
+              <a:buNone/>
               <a:defRPr sz="1950" b="0">
                 <a:solidFill>
                   <a:srgbClr val="102638"/>
@@ -9231,6 +9491,7 @@
               </a:defRPr>
             </a:lvl7pPr>
             <a:lvl8pPr>
+              <a:buNone/>
               <a:defRPr sz="1950" b="0">
                 <a:solidFill>
                   <a:srgbClr val="102638"/>
@@ -9241,6 +9502,7 @@
               </a:defRPr>
             </a:lvl8pPr>
             <a:lvl9pPr>
+              <a:buNone/>
               <a:defRPr sz="1950" b="0">
                 <a:solidFill>
                   <a:srgbClr val="102638"/>
@@ -9253,6 +9515,7 @@
           </a:lstStyle>
           <a:p xmlns:a="http://schemas.openxmlformats.org/drawingml/2006/main">
             <a:pPr>
+              <a:buNone/>
               <a:defRPr sz="1950" b="0">
                 <a:solidFill>
                   <a:srgbClr val="102638"/>
@@ -9349,6 +9612,7 @@
               </a:defRPr>
             </a:defPPr>
             <a:lvl1pPr>
+              <a:buNone/>
               <a:defRPr sz="3300" b="1">
                 <a:solidFill>
                   <a:srgbClr val="102638"/>
@@ -9359,6 +9623,7 @@
               </a:defRPr>
             </a:lvl1pPr>
             <a:lvl2pPr>
+              <a:buNone/>
               <a:defRPr sz="3300" b="1">
                 <a:solidFill>
                   <a:srgbClr val="102638"/>
@@ -9369,6 +9634,7 @@
               </a:defRPr>
             </a:lvl2pPr>
             <a:lvl3pPr>
+              <a:buNone/>
               <a:defRPr sz="3300" b="1">
                 <a:solidFill>
                   <a:srgbClr val="102638"/>
@@ -9379,6 +9645,7 @@
               </a:defRPr>
             </a:lvl3pPr>
             <a:lvl4pPr>
+              <a:buNone/>
               <a:defRPr sz="3300" b="1">
                 <a:solidFill>
                   <a:srgbClr val="102638"/>
@@ -9389,6 +9656,7 @@
               </a:defRPr>
             </a:lvl4pPr>
             <a:lvl5pPr>
+              <a:buNone/>
               <a:defRPr sz="3300" b="1">
                 <a:solidFill>
                   <a:srgbClr val="102638"/>
@@ -9399,6 +9667,7 @@
               </a:defRPr>
             </a:lvl5pPr>
             <a:lvl6pPr>
+              <a:buNone/>
               <a:defRPr sz="3300" b="1">
                 <a:solidFill>
                   <a:srgbClr val="102638"/>
@@ -9409,6 +9678,7 @@
               </a:defRPr>
             </a:lvl6pPr>
             <a:lvl7pPr>
+              <a:buNone/>
               <a:defRPr sz="3300" b="1">
                 <a:solidFill>
                   <a:srgbClr val="102638"/>
@@ -9419,6 +9689,7 @@
               </a:defRPr>
             </a:lvl7pPr>
             <a:lvl8pPr>
+              <a:buNone/>
               <a:defRPr sz="3300" b="1">
                 <a:solidFill>
                   <a:srgbClr val="102638"/>
@@ -9429,6 +9700,7 @@
               </a:defRPr>
             </a:lvl8pPr>
             <a:lvl9pPr>
+              <a:buNone/>
               <a:defRPr sz="3300" b="1">
                 <a:solidFill>
                   <a:srgbClr val="102638"/>
@@ -9441,6 +9713,7 @@
           </a:lstStyle>
           <a:p xmlns:a="http://schemas.openxmlformats.org/drawingml/2006/main">
             <a:pPr>
+              <a:buNone/>
               <a:defRPr sz="3300" b="1">
                 <a:solidFill>
                   <a:srgbClr val="102638"/>
@@ -9508,6 +9781,7 @@
               </a:defRPr>
             </a:defPPr>
             <a:lvl1pPr>
+              <a:buNone/>
               <a:defRPr sz="1275" b="0">
                 <a:solidFill>
                   <a:srgbClr val="476071"/>
@@ -9518,6 +9792,7 @@
               </a:defRPr>
             </a:lvl1pPr>
             <a:lvl2pPr>
+              <a:buNone/>
               <a:defRPr sz="1275" b="0">
                 <a:solidFill>
                   <a:srgbClr val="476071"/>
@@ -9528,6 +9803,7 @@
               </a:defRPr>
             </a:lvl2pPr>
             <a:lvl3pPr>
+              <a:buNone/>
               <a:defRPr sz="1275" b="0">
                 <a:solidFill>
                   <a:srgbClr val="476071"/>
@@ -9538,6 +9814,7 @@
               </a:defRPr>
             </a:lvl3pPr>
             <a:lvl4pPr>
+              <a:buNone/>
               <a:defRPr sz="1275" b="0">
                 <a:solidFill>
                   <a:srgbClr val="476071"/>
@@ -9548,6 +9825,7 @@
               </a:defRPr>
             </a:lvl4pPr>
             <a:lvl5pPr>
+              <a:buNone/>
               <a:defRPr sz="1275" b="0">
                 <a:solidFill>
                   <a:srgbClr val="476071"/>
@@ -9558,6 +9836,7 @@
               </a:defRPr>
             </a:lvl5pPr>
             <a:lvl6pPr>
+              <a:buNone/>
               <a:defRPr sz="1275" b="0">
                 <a:solidFill>
                   <a:srgbClr val="476071"/>
@@ -9568,6 +9847,7 @@
               </a:defRPr>
             </a:lvl6pPr>
             <a:lvl7pPr>
+              <a:buNone/>
               <a:defRPr sz="1275" b="0">
                 <a:solidFill>
                   <a:srgbClr val="476071"/>
@@ -9578,6 +9858,7 @@
               </a:defRPr>
             </a:lvl7pPr>
             <a:lvl8pPr>
+              <a:buNone/>
               <a:defRPr sz="1275" b="0">
                 <a:solidFill>
                   <a:srgbClr val="476071"/>
@@ -9588,6 +9869,7 @@
               </a:defRPr>
             </a:lvl8pPr>
             <a:lvl9pPr>
+              <a:buNone/>
               <a:defRPr sz="1275" b="0">
                 <a:solidFill>
                   <a:srgbClr val="476071"/>
@@ -9600,6 +9882,7 @@
           </a:lstStyle>
           <a:p xmlns:a="http://schemas.openxmlformats.org/drawingml/2006/main">
             <a:pPr>
+              <a:buNone/>
               <a:defRPr sz="1275" b="0">
                 <a:solidFill>
                   <a:srgbClr val="476071"/>
@@ -9628,7 +9911,7 @@
           <p:cNvPr id="3" name="">
             <a:extLst xmlns:a="http://schemas.openxmlformats.org/drawingml/2006/main">
               <a:ext uri="{FF2B5EF4-FFF2-40B4-BE49-F238E27FC236}">
-                <a16:creationId xmlns:a16="http://schemas.microsoft.com/office/drawing/2014/main" id="{19540FED-14EA-4B1C-944C-4073CA6C4F0D}"/>
+                <a16:creationId xmlns:a16="http://schemas.microsoft.com/office/drawing/2014/main" id="{EA0E5162-0247-4ACF-9595-18D42FA79D3C}"/>
               </a:ext>
             </a:extLst>
           </p:cNvPr>
@@ -10027,6 +10310,7 @@
               </a:defRPr>
             </a:defPPr>
             <a:lvl1pPr>
+              <a:buNone/>
               <a:defRPr sz="1350" b="0">
                 <a:solidFill>
                   <a:srgbClr val="476071"/>
@@ -10037,6 +10321,7 @@
               </a:defRPr>
             </a:lvl1pPr>
             <a:lvl2pPr>
+              <a:buNone/>
               <a:defRPr sz="1350" b="0">
                 <a:solidFill>
                   <a:srgbClr val="476071"/>
@@ -10047,6 +10332,7 @@
               </a:defRPr>
             </a:lvl2pPr>
             <a:lvl3pPr>
+              <a:buNone/>
               <a:defRPr sz="1350" b="0">
                 <a:solidFill>
                   <a:srgbClr val="476071"/>
@@ -10057,6 +10343,7 @@
               </a:defRPr>
             </a:lvl3pPr>
             <a:lvl4pPr>
+              <a:buNone/>
               <a:defRPr sz="1350" b="0">
                 <a:solidFill>
                   <a:srgbClr val="476071"/>
@@ -10067,6 +10354,7 @@
               </a:defRPr>
             </a:lvl4pPr>
             <a:lvl5pPr>
+              <a:buNone/>
               <a:defRPr sz="1350" b="0">
                 <a:solidFill>
                   <a:srgbClr val="476071"/>
@@ -10077,6 +10365,7 @@
               </a:defRPr>
             </a:lvl5pPr>
             <a:lvl6pPr>
+              <a:buNone/>
               <a:defRPr sz="1350" b="0">
                 <a:solidFill>
                   <a:srgbClr val="476071"/>
@@ -10087,6 +10376,7 @@
               </a:defRPr>
             </a:lvl6pPr>
             <a:lvl7pPr>
+              <a:buNone/>
               <a:defRPr sz="1350" b="0">
                 <a:solidFill>
                   <a:srgbClr val="476071"/>
@@ -10097,6 +10387,7 @@
               </a:defRPr>
             </a:lvl7pPr>
             <a:lvl8pPr>
+              <a:buNone/>
               <a:defRPr sz="1350" b="0">
                 <a:solidFill>
                   <a:srgbClr val="476071"/>
@@ -10107,6 +10398,7 @@
               </a:defRPr>
             </a:lvl8pPr>
             <a:lvl9pPr>
+              <a:buNone/>
               <a:defRPr sz="1350" b="0">
                 <a:solidFill>
                   <a:srgbClr val="476071"/>
@@ -10119,6 +10411,7 @@
           </a:lstStyle>
           <a:p xmlns:a="http://schemas.openxmlformats.org/drawingml/2006/main">
             <a:pPr>
+              <a:buNone/>
               <a:defRPr sz="1350" b="0">
                 <a:solidFill>
                   <a:srgbClr val="476071"/>
@@ -10215,6 +10508,7 @@
               </a:defRPr>
             </a:defPPr>
             <a:lvl1pPr>
+              <a:buNone/>
               <a:defRPr sz="3300" b="1">
                 <a:solidFill>
                   <a:srgbClr val="102638"/>
@@ -10225,6 +10519,7 @@
               </a:defRPr>
             </a:lvl1pPr>
             <a:lvl2pPr>
+              <a:buNone/>
               <a:defRPr sz="3300" b="1">
                 <a:solidFill>
                   <a:srgbClr val="102638"/>
@@ -10235,6 +10530,7 @@
               </a:defRPr>
             </a:lvl2pPr>
             <a:lvl3pPr>
+              <a:buNone/>
               <a:defRPr sz="3300" b="1">
                 <a:solidFill>
                   <a:srgbClr val="102638"/>
@@ -10245,6 +10541,7 @@
               </a:defRPr>
             </a:lvl3pPr>
             <a:lvl4pPr>
+              <a:buNone/>
               <a:defRPr sz="3300" b="1">
                 <a:solidFill>
                   <a:srgbClr val="102638"/>
@@ -10255,6 +10552,7 @@
               </a:defRPr>
             </a:lvl4pPr>
             <a:lvl5pPr>
+              <a:buNone/>
               <a:defRPr sz="3300" b="1">
                 <a:solidFill>
                   <a:srgbClr val="102638"/>
@@ -10265,6 +10563,7 @@
               </a:defRPr>
             </a:lvl5pPr>
             <a:lvl6pPr>
+              <a:buNone/>
               <a:defRPr sz="3300" b="1">
                 <a:solidFill>
                   <a:srgbClr val="102638"/>
@@ -10275,6 +10574,7 @@
               </a:defRPr>
             </a:lvl6pPr>
             <a:lvl7pPr>
+              <a:buNone/>
               <a:defRPr sz="3300" b="1">
                 <a:solidFill>
                   <a:srgbClr val="102638"/>
@@ -10285,6 +10585,7 @@
               </a:defRPr>
             </a:lvl7pPr>
             <a:lvl8pPr>
+              <a:buNone/>
               <a:defRPr sz="3300" b="1">
                 <a:solidFill>
                   <a:srgbClr val="102638"/>
@@ -10295,6 +10596,7 @@
               </a:defRPr>
             </a:lvl8pPr>
             <a:lvl9pPr>
+              <a:buNone/>
               <a:defRPr sz="3300" b="1">
                 <a:solidFill>
                   <a:srgbClr val="102638"/>
@@ -10307,6 +10609,7 @@
           </a:lstStyle>
           <a:p xmlns:a="http://schemas.openxmlformats.org/drawingml/2006/main">
             <a:pPr>
+              <a:buNone/>
               <a:defRPr sz="3300" b="1">
                 <a:solidFill>
                   <a:srgbClr val="102638"/>
@@ -10374,6 +10677,7 @@
               </a:defRPr>
             </a:defPPr>
             <a:lvl1pPr>
+              <a:buNone/>
               <a:defRPr sz="1275" b="0">
                 <a:solidFill>
                   <a:srgbClr val="476071"/>
@@ -10384,6 +10688,7 @@
               </a:defRPr>
             </a:lvl1pPr>
             <a:lvl2pPr>
+              <a:buNone/>
               <a:defRPr sz="1275" b="0">
                 <a:solidFill>
                   <a:srgbClr val="476071"/>
@@ -10394,6 +10699,7 @@
               </a:defRPr>
             </a:lvl2pPr>
             <a:lvl3pPr>
+              <a:buNone/>
               <a:defRPr sz="1275" b="0">
                 <a:solidFill>
                   <a:srgbClr val="476071"/>
@@ -10404,6 +10710,7 @@
               </a:defRPr>
             </a:lvl3pPr>
             <a:lvl4pPr>
+              <a:buNone/>
               <a:defRPr sz="1275" b="0">
                 <a:solidFill>
                   <a:srgbClr val="476071"/>
@@ -10414,6 +10721,7 @@
               </a:defRPr>
             </a:lvl4pPr>
             <a:lvl5pPr>
+              <a:buNone/>
               <a:defRPr sz="1275" b="0">
                 <a:solidFill>
                   <a:srgbClr val="476071"/>
@@ -10424,6 +10732,7 @@
               </a:defRPr>
             </a:lvl5pPr>
             <a:lvl6pPr>
+              <a:buNone/>
               <a:defRPr sz="1275" b="0">
                 <a:solidFill>
                   <a:srgbClr val="476071"/>
@@ -10434,6 +10743,7 @@
               </a:defRPr>
             </a:lvl6pPr>
             <a:lvl7pPr>
+              <a:buNone/>
               <a:defRPr sz="1275" b="0">
                 <a:solidFill>
                   <a:srgbClr val="476071"/>
@@ -10444,6 +10754,7 @@
               </a:defRPr>
             </a:lvl7pPr>
             <a:lvl8pPr>
+              <a:buNone/>
               <a:defRPr sz="1275" b="0">
                 <a:solidFill>
                   <a:srgbClr val="476071"/>
@@ -10454,6 +10765,7 @@
               </a:defRPr>
             </a:lvl8pPr>
             <a:lvl9pPr>
+              <a:buNone/>
               <a:defRPr sz="1275" b="0">
                 <a:solidFill>
                   <a:srgbClr val="476071"/>
@@ -10466,6 +10778,7 @@
           </a:lstStyle>
           <a:p xmlns:a="http://schemas.openxmlformats.org/drawingml/2006/main">
             <a:pPr>
+              <a:buNone/>
               <a:defRPr sz="1275" b="0">
                 <a:solidFill>
                   <a:srgbClr val="476071"/>
@@ -10494,7 +10807,7 @@
           <p:cNvPr id="3" name="">
             <a:extLst xmlns:a="http://schemas.openxmlformats.org/drawingml/2006/main">
               <a:ext uri="{FF2B5EF4-FFF2-40B4-BE49-F238E27FC236}">
-                <a16:creationId xmlns:a16="http://schemas.microsoft.com/office/drawing/2014/main" id="{0AC11D2E-A2D0-4FFC-897E-8DF656F1A88A}"/>
+                <a16:creationId xmlns:a16="http://schemas.microsoft.com/office/drawing/2014/main" id="{0D36082B-F320-4230-9C2E-B5A9ED483774}"/>
               </a:ext>
             </a:extLst>
           </p:cNvPr>
@@ -11053,6 +11366,7 @@
               </a:defRPr>
             </a:defPPr>
             <a:lvl1pPr>
+              <a:buNone/>
               <a:defRPr sz="1350" b="0">
                 <a:solidFill>
                   <a:srgbClr val="476071"/>
@@ -11063,6 +11377,7 @@
               </a:defRPr>
             </a:lvl1pPr>
             <a:lvl2pPr>
+              <a:buNone/>
               <a:defRPr sz="1350" b="0">
                 <a:solidFill>
                   <a:srgbClr val="476071"/>
@@ -11073,6 +11388,7 @@
               </a:defRPr>
             </a:lvl2pPr>
             <a:lvl3pPr>
+              <a:buNone/>
               <a:defRPr sz="1350" b="0">
                 <a:solidFill>
                   <a:srgbClr val="476071"/>
@@ -11083,6 +11399,7 @@
               </a:defRPr>
             </a:lvl3pPr>
             <a:lvl4pPr>
+              <a:buNone/>
               <a:defRPr sz="1350" b="0">
                 <a:solidFill>
                   <a:srgbClr val="476071"/>
@@ -11093,6 +11410,7 @@
               </a:defRPr>
             </a:lvl4pPr>
             <a:lvl5pPr>
+              <a:buNone/>
               <a:defRPr sz="1350" b="0">
                 <a:solidFill>
                   <a:srgbClr val="476071"/>
@@ -11103,6 +11421,7 @@
               </a:defRPr>
             </a:lvl5pPr>
             <a:lvl6pPr>
+              <a:buNone/>
               <a:defRPr sz="1350" b="0">
                 <a:solidFill>
                   <a:srgbClr val="476071"/>
@@ -11113,6 +11432,7 @@
               </a:defRPr>
             </a:lvl6pPr>
             <a:lvl7pPr>
+              <a:buNone/>
               <a:defRPr sz="1350" b="0">
                 <a:solidFill>
                   <a:srgbClr val="476071"/>
@@ -11123,6 +11443,7 @@
               </a:defRPr>
             </a:lvl7pPr>
             <a:lvl8pPr>
+              <a:buNone/>
               <a:defRPr sz="1350" b="0">
                 <a:solidFill>
                   <a:srgbClr val="476071"/>
@@ -11133,6 +11454,7 @@
               </a:defRPr>
             </a:lvl8pPr>
             <a:lvl9pPr>
+              <a:buNone/>
               <a:defRPr sz="1350" b="0">
                 <a:solidFill>
                   <a:srgbClr val="476071"/>
@@ -11145,6 +11467,7 @@
           </a:lstStyle>
           <a:p xmlns:a="http://schemas.openxmlformats.org/drawingml/2006/main">
             <a:pPr>
+              <a:buNone/>
               <a:defRPr sz="1350" b="0">
                 <a:solidFill>
                   <a:srgbClr val="476071"/>
@@ -11241,6 +11564,7 @@
               </a:defRPr>
             </a:defPPr>
             <a:lvl1pPr>
+              <a:buNone/>
               <a:defRPr sz="3300" b="1">
                 <a:solidFill>
                   <a:srgbClr val="102638"/>
@@ -11251,6 +11575,7 @@
               </a:defRPr>
             </a:lvl1pPr>
             <a:lvl2pPr>
+              <a:buNone/>
               <a:defRPr sz="3300" b="1">
                 <a:solidFill>
                   <a:srgbClr val="102638"/>
@@ -11261,6 +11586,7 @@
               </a:defRPr>
             </a:lvl2pPr>
             <a:lvl3pPr>
+              <a:buNone/>
               <a:defRPr sz="3300" b="1">
                 <a:solidFill>
                   <a:srgbClr val="102638"/>
@@ -11271,6 +11597,7 @@
               </a:defRPr>
             </a:lvl3pPr>
             <a:lvl4pPr>
+              <a:buNone/>
               <a:defRPr sz="3300" b="1">
                 <a:solidFill>
                   <a:srgbClr val="102638"/>
@@ -11281,6 +11608,7 @@
               </a:defRPr>
             </a:lvl4pPr>
             <a:lvl5pPr>
+              <a:buNone/>
               <a:defRPr sz="3300" b="1">
                 <a:solidFill>
                   <a:srgbClr val="102638"/>
@@ -11291,6 +11619,7 @@
               </a:defRPr>
             </a:lvl5pPr>
             <a:lvl6pPr>
+              <a:buNone/>
               <a:defRPr sz="3300" b="1">
                 <a:solidFill>
                   <a:srgbClr val="102638"/>
@@ -11301,6 +11630,7 @@
               </a:defRPr>
             </a:lvl6pPr>
             <a:lvl7pPr>
+              <a:buNone/>
               <a:defRPr sz="3300" b="1">
                 <a:solidFill>
                   <a:srgbClr val="102638"/>
@@ -11311,6 +11641,7 @@
               </a:defRPr>
             </a:lvl7pPr>
             <a:lvl8pPr>
+              <a:buNone/>
               <a:defRPr sz="3300" b="1">
                 <a:solidFill>
                   <a:srgbClr val="102638"/>
@@ -11321,6 +11652,7 @@
               </a:defRPr>
             </a:lvl8pPr>
             <a:lvl9pPr>
+              <a:buNone/>
               <a:defRPr sz="3300" b="1">
                 <a:solidFill>
                   <a:srgbClr val="102638"/>
@@ -11333,6 +11665,7 @@
           </a:lstStyle>
           <a:p xmlns:a="http://schemas.openxmlformats.org/drawingml/2006/main">
             <a:pPr>
+              <a:buNone/>
               <a:defRPr sz="3300" b="1">
                 <a:solidFill>
                   <a:srgbClr val="102638"/>
@@ -11400,6 +11733,7 @@
               </a:defRPr>
             </a:defPPr>
             <a:lvl1pPr>
+              <a:buNone/>
               <a:defRPr sz="1275" b="0">
                 <a:solidFill>
                   <a:srgbClr val="476071"/>
@@ -11410,6 +11744,7 @@
               </a:defRPr>
             </a:lvl1pPr>
             <a:lvl2pPr>
+              <a:buNone/>
               <a:defRPr sz="1275" b="0">
                 <a:solidFill>
                   <a:srgbClr val="476071"/>
@@ -11420,6 +11755,7 @@
               </a:defRPr>
             </a:lvl2pPr>
             <a:lvl3pPr>
+              <a:buNone/>
               <a:defRPr sz="1275" b="0">
                 <a:solidFill>
                   <a:srgbClr val="476071"/>
@@ -11430,6 +11766,7 @@
               </a:defRPr>
             </a:lvl3pPr>
             <a:lvl4pPr>
+              <a:buNone/>
               <a:defRPr sz="1275" b="0">
                 <a:solidFill>
                   <a:srgbClr val="476071"/>
@@ -11440,6 +11777,7 @@
               </a:defRPr>
             </a:lvl4pPr>
             <a:lvl5pPr>
+              <a:buNone/>
               <a:defRPr sz="1275" b="0">
                 <a:solidFill>
                   <a:srgbClr val="476071"/>
@@ -11450,6 +11788,7 @@
               </a:defRPr>
             </a:lvl5pPr>
             <a:lvl6pPr>
+              <a:buNone/>
               <a:defRPr sz="1275" b="0">
                 <a:solidFill>
                   <a:srgbClr val="476071"/>
@@ -11460,6 +11799,7 @@
               </a:defRPr>
             </a:lvl6pPr>
             <a:lvl7pPr>
+              <a:buNone/>
               <a:defRPr sz="1275" b="0">
                 <a:solidFill>
                   <a:srgbClr val="476071"/>
@@ -11470,6 +11810,7 @@
               </a:defRPr>
             </a:lvl7pPr>
             <a:lvl8pPr>
+              <a:buNone/>
               <a:defRPr sz="1275" b="0">
                 <a:solidFill>
                   <a:srgbClr val="476071"/>
@@ -11480,6 +11821,7 @@
               </a:defRPr>
             </a:lvl8pPr>
             <a:lvl9pPr>
+              <a:buNone/>
               <a:defRPr sz="1275" b="0">
                 <a:solidFill>
                   <a:srgbClr val="476071"/>
@@ -11492,6 +11834,7 @@
           </a:lstStyle>
           <a:p xmlns:a="http://schemas.openxmlformats.org/drawingml/2006/main">
             <a:pPr>
+              <a:buNone/>
               <a:defRPr sz="1275" b="0">
                 <a:solidFill>
                   <a:srgbClr val="476071"/>
@@ -11559,6 +11902,7 @@
               </a:defRPr>
             </a:defPPr>
             <a:lvl1pPr>
+              <a:buNone/>
               <a:defRPr sz="2100" b="1">
                 <a:solidFill>
                   <a:srgbClr val="007E87"/>
@@ -11569,6 +11913,7 @@
               </a:defRPr>
             </a:lvl1pPr>
             <a:lvl2pPr>
+              <a:buNone/>
               <a:defRPr sz="2100" b="1">
                 <a:solidFill>
                   <a:srgbClr val="007E87"/>
@@ -11579,6 +11924,7 @@
               </a:defRPr>
             </a:lvl2pPr>
             <a:lvl3pPr>
+              <a:buNone/>
               <a:defRPr sz="2100" b="1">
                 <a:solidFill>
                   <a:srgbClr val="007E87"/>
@@ -11589,6 +11935,7 @@
               </a:defRPr>
             </a:lvl3pPr>
             <a:lvl4pPr>
+              <a:buNone/>
               <a:defRPr sz="2100" b="1">
                 <a:solidFill>
                   <a:srgbClr val="007E87"/>
@@ -11599,6 +11946,7 @@
               </a:defRPr>
             </a:lvl4pPr>
             <a:lvl5pPr>
+              <a:buNone/>
               <a:defRPr sz="2100" b="1">
                 <a:solidFill>
                   <a:srgbClr val="007E87"/>
@@ -11609,6 +11957,7 @@
               </a:defRPr>
             </a:lvl5pPr>
             <a:lvl6pPr>
+              <a:buNone/>
               <a:defRPr sz="2100" b="1">
                 <a:solidFill>
                   <a:srgbClr val="007E87"/>
@@ -11619,6 +11968,7 @@
               </a:defRPr>
             </a:lvl6pPr>
             <a:lvl7pPr>
+              <a:buNone/>
               <a:defRPr sz="2100" b="1">
                 <a:solidFill>
                   <a:srgbClr val="007E87"/>
@@ -11629,6 +11979,7 @@
               </a:defRPr>
             </a:lvl7pPr>
             <a:lvl8pPr>
+              <a:buNone/>
               <a:defRPr sz="2100" b="1">
                 <a:solidFill>
                   <a:srgbClr val="007E87"/>
@@ -11639,6 +11990,7 @@
               </a:defRPr>
             </a:lvl8pPr>
             <a:lvl9pPr>
+              <a:buNone/>
               <a:defRPr sz="2100" b="1">
                 <a:solidFill>
                   <a:srgbClr val="007E87"/>
@@ -11651,6 +12003,7 @@
           </a:lstStyle>
           <a:p xmlns:a="http://schemas.openxmlformats.org/drawingml/2006/main">
             <a:pPr>
+              <a:buNone/>
               <a:defRPr sz="2100" b="1">
                 <a:solidFill>
                   <a:srgbClr val="007E87"/>
@@ -11718,6 +12071,7 @@
               </a:defRPr>
             </a:defPPr>
             <a:lvl1pPr>
+              <a:buNone/>
               <a:defRPr sz="1950" b="0">
                 <a:solidFill>
                   <a:srgbClr val="102638"/>
@@ -11728,6 +12082,7 @@
               </a:defRPr>
             </a:lvl1pPr>
             <a:lvl2pPr>
+              <a:buNone/>
               <a:defRPr sz="1950" b="0">
                 <a:solidFill>
                   <a:srgbClr val="102638"/>
@@ -11738,6 +12093,7 @@
               </a:defRPr>
             </a:lvl2pPr>
             <a:lvl3pPr>
+              <a:buNone/>
               <a:defRPr sz="1950" b="0">
                 <a:solidFill>
                   <a:srgbClr val="102638"/>
@@ -11748,6 +12104,7 @@
               </a:defRPr>
             </a:lvl3pPr>
             <a:lvl4pPr>
+              <a:buNone/>
               <a:defRPr sz="1950" b="0">
                 <a:solidFill>
                   <a:srgbClr val="102638"/>
@@ -11758,6 +12115,7 @@
               </a:defRPr>
             </a:lvl4pPr>
             <a:lvl5pPr>
+              <a:buNone/>
               <a:defRPr sz="1950" b="0">
                 <a:solidFill>
                   <a:srgbClr val="102638"/>
@@ -11768,6 +12126,7 @@
               </a:defRPr>
             </a:lvl5pPr>
             <a:lvl6pPr>
+              <a:buNone/>
               <a:defRPr sz="1950" b="0">
                 <a:solidFill>
                   <a:srgbClr val="102638"/>
@@ -11778,6 +12137,7 @@
               </a:defRPr>
             </a:lvl6pPr>
             <a:lvl7pPr>
+              <a:buNone/>
               <a:defRPr sz="1950" b="0">
                 <a:solidFill>
                   <a:srgbClr val="102638"/>
@@ -11788,6 +12148,7 @@
               </a:defRPr>
             </a:lvl7pPr>
             <a:lvl8pPr>
+              <a:buNone/>
               <a:defRPr sz="1950" b="0">
                 <a:solidFill>
                   <a:srgbClr val="102638"/>
@@ -11798,6 +12159,7 @@
               </a:defRPr>
             </a:lvl8pPr>
             <a:lvl9pPr>
+              <a:buNone/>
               <a:defRPr sz="1950" b="0">
                 <a:solidFill>
                   <a:srgbClr val="102638"/>
@@ -11810,6 +12172,7 @@
           </a:lstStyle>
           <a:p xmlns:a="http://schemas.openxmlformats.org/drawingml/2006/main">
             <a:pPr>
+              <a:buNone/>
               <a:defRPr sz="1950" b="0">
                 <a:solidFill>
                   <a:srgbClr val="102638"/>
@@ -11838,6 +12201,7 @@
           </a:p>
           <a:p xmlns:a="http://schemas.openxmlformats.org/drawingml/2006/main">
             <a:pPr>
+              <a:buNone/>
               <a:defRPr sz="1950" b="0">
                 <a:solidFill>
                   <a:srgbClr val="102638"/>
@@ -11905,6 +12269,7 @@
               </a:defRPr>
             </a:defPPr>
             <a:lvl1pPr>
+              <a:buNone/>
               <a:defRPr sz="2100" b="1">
                 <a:solidFill>
                   <a:srgbClr val="007E87"/>
@@ -11915,6 +12280,7 @@
               </a:defRPr>
             </a:lvl1pPr>
             <a:lvl2pPr>
+              <a:buNone/>
               <a:defRPr sz="2100" b="1">
                 <a:solidFill>
                   <a:srgbClr val="007E87"/>
@@ -11925,6 +12291,7 @@
               </a:defRPr>
             </a:lvl2pPr>
             <a:lvl3pPr>
+              <a:buNone/>
               <a:defRPr sz="2100" b="1">
                 <a:solidFill>
                   <a:srgbClr val="007E87"/>
@@ -11935,6 +12302,7 @@
               </a:defRPr>
             </a:lvl3pPr>
             <a:lvl4pPr>
+              <a:buNone/>
               <a:defRPr sz="2100" b="1">
                 <a:solidFill>
                   <a:srgbClr val="007E87"/>
@@ -11945,6 +12313,7 @@
               </a:defRPr>
             </a:lvl4pPr>
             <a:lvl5pPr>
+              <a:buNone/>
               <a:defRPr sz="2100" b="1">
                 <a:solidFill>
                   <a:srgbClr val="007E87"/>
@@ -11955,6 +12324,7 @@
               </a:defRPr>
             </a:lvl5pPr>
             <a:lvl6pPr>
+              <a:buNone/>
               <a:defRPr sz="2100" b="1">
                 <a:solidFill>
                   <a:srgbClr val="007E87"/>
@@ -11965,6 +12335,7 @@
               </a:defRPr>
             </a:lvl6pPr>
             <a:lvl7pPr>
+              <a:buNone/>
               <a:defRPr sz="2100" b="1">
                 <a:solidFill>
                   <a:srgbClr val="007E87"/>
@@ -11975,6 +12346,7 @@
               </a:defRPr>
             </a:lvl7pPr>
             <a:lvl8pPr>
+              <a:buNone/>
               <a:defRPr sz="2100" b="1">
                 <a:solidFill>
                   <a:srgbClr val="007E87"/>
@@ -11985,6 +12357,7 @@
               </a:defRPr>
             </a:lvl8pPr>
             <a:lvl9pPr>
+              <a:buNone/>
               <a:defRPr sz="2100" b="1">
                 <a:solidFill>
                   <a:srgbClr val="007E87"/>
@@ -11997,6 +12370,7 @@
           </a:lstStyle>
           <a:p xmlns:a="http://schemas.openxmlformats.org/drawingml/2006/main">
             <a:pPr>
+              <a:buNone/>
               <a:defRPr sz="2100" b="1">
                 <a:solidFill>
                   <a:srgbClr val="007E87"/>
@@ -12064,6 +12438,7 @@
               </a:defRPr>
             </a:defPPr>
             <a:lvl1pPr>
+              <a:buNone/>
               <a:defRPr sz="1950" b="0">
                 <a:solidFill>
                   <a:srgbClr val="102638"/>
@@ -12074,6 +12449,7 @@
               </a:defRPr>
             </a:lvl1pPr>
             <a:lvl2pPr>
+              <a:buNone/>
               <a:defRPr sz="1950" b="0">
                 <a:solidFill>
                   <a:srgbClr val="102638"/>
@@ -12084,6 +12460,7 @@
               </a:defRPr>
             </a:lvl2pPr>
             <a:lvl3pPr>
+              <a:buNone/>
               <a:defRPr sz="1950" b="0">
                 <a:solidFill>
                   <a:srgbClr val="102638"/>
@@ -12094,6 +12471,7 @@
               </a:defRPr>
             </a:lvl3pPr>
             <a:lvl4pPr>
+              <a:buNone/>
               <a:defRPr sz="1950" b="0">
                 <a:solidFill>
                   <a:srgbClr val="102638"/>
@@ -12104,6 +12482,7 @@
               </a:defRPr>
             </a:lvl4pPr>
             <a:lvl5pPr>
+              <a:buNone/>
               <a:defRPr sz="1950" b="0">
                 <a:solidFill>
                   <a:srgbClr val="102638"/>
@@ -12114,6 +12493,7 @@
               </a:defRPr>
             </a:lvl5pPr>
             <a:lvl6pPr>
+              <a:buNone/>
               <a:defRPr sz="1950" b="0">
                 <a:solidFill>
                   <a:srgbClr val="102638"/>
@@ -12124,6 +12504,7 @@
               </a:defRPr>
             </a:lvl6pPr>
             <a:lvl7pPr>
+              <a:buNone/>
               <a:defRPr sz="1950" b="0">
                 <a:solidFill>
                   <a:srgbClr val="102638"/>
@@ -12134,6 +12515,7 @@
               </a:defRPr>
             </a:lvl7pPr>
             <a:lvl8pPr>
+              <a:buNone/>
               <a:defRPr sz="1950" b="0">
                 <a:solidFill>
                   <a:srgbClr val="102638"/>
@@ -12144,6 +12526,7 @@
               </a:defRPr>
             </a:lvl8pPr>
             <a:lvl9pPr>
+              <a:buNone/>
               <a:defRPr sz="1950" b="0">
                 <a:solidFill>
                   <a:srgbClr val="102638"/>
@@ -12156,6 +12539,7 @@
           </a:lstStyle>
           <a:p xmlns:a="http://schemas.openxmlformats.org/drawingml/2006/main">
             <a:pPr>
+              <a:buNone/>
               <a:defRPr sz="1950" b="0">
                 <a:solidFill>
                   <a:srgbClr val="102638"/>
@@ -12184,6 +12568,7 @@
           </a:p>
           <a:p xmlns:a="http://schemas.openxmlformats.org/drawingml/2006/main">
             <a:pPr>
+              <a:buNone/>
               <a:defRPr sz="1950" b="0">
                 <a:solidFill>
                   <a:srgbClr val="102638"/>
@@ -12251,6 +12636,7 @@
               </a:defRPr>
             </a:defPPr>
             <a:lvl1pPr>
+              <a:buNone/>
               <a:defRPr sz="2400" b="1">
                 <a:solidFill>
                   <a:srgbClr val="007E87"/>
@@ -12261,6 +12647,7 @@
               </a:defRPr>
             </a:lvl1pPr>
             <a:lvl2pPr>
+              <a:buNone/>
               <a:defRPr sz="2400" b="1">
                 <a:solidFill>
                   <a:srgbClr val="007E87"/>
@@ -12271,6 +12658,7 @@
               </a:defRPr>
             </a:lvl2pPr>
             <a:lvl3pPr>
+              <a:buNone/>
               <a:defRPr sz="2400" b="1">
                 <a:solidFill>
                   <a:srgbClr val="007E87"/>
@@ -12281,6 +12669,7 @@
               </a:defRPr>
             </a:lvl3pPr>
             <a:lvl4pPr>
+              <a:buNone/>
               <a:defRPr sz="2400" b="1">
                 <a:solidFill>
                   <a:srgbClr val="007E87"/>
@@ -12291,6 +12680,7 @@
               </a:defRPr>
             </a:lvl4pPr>
             <a:lvl5pPr>
+              <a:buNone/>
               <a:defRPr sz="2400" b="1">
                 <a:solidFill>
                   <a:srgbClr val="007E87"/>
@@ -12301,6 +12691,7 @@
               </a:defRPr>
             </a:lvl5pPr>
             <a:lvl6pPr>
+              <a:buNone/>
               <a:defRPr sz="2400" b="1">
                 <a:solidFill>
                   <a:srgbClr val="007E87"/>
@@ -12311,6 +12702,7 @@
               </a:defRPr>
             </a:lvl6pPr>
             <a:lvl7pPr>
+              <a:buNone/>
               <a:defRPr sz="2400" b="1">
                 <a:solidFill>
                   <a:srgbClr val="007E87"/>
@@ -12321,6 +12713,7 @@
               </a:defRPr>
             </a:lvl7pPr>
             <a:lvl8pPr>
+              <a:buNone/>
               <a:defRPr sz="2400" b="1">
                 <a:solidFill>
                   <a:srgbClr val="007E87"/>
@@ -12331,6 +12724,7 @@
               </a:defRPr>
             </a:lvl8pPr>
             <a:lvl9pPr>
+              <a:buNone/>
               <a:defRPr sz="2400" b="1">
                 <a:solidFill>
                   <a:srgbClr val="007E87"/>
@@ -12343,6 +12737,7 @@
           </a:lstStyle>
           <a:p xmlns:a="http://schemas.openxmlformats.org/drawingml/2006/main">
             <a:pPr>
+              <a:buNone/>
               <a:defRPr sz="2400" b="1">
                 <a:solidFill>
                   <a:srgbClr val="007E87"/>
@@ -12410,6 +12805,7 @@
               </a:defRPr>
             </a:defPPr>
             <a:lvl1pPr>
+              <a:buNone/>
               <a:defRPr sz="1350" b="0">
                 <a:solidFill>
                   <a:srgbClr val="476071"/>
@@ -12420,6 +12816,7 @@
               </a:defRPr>
             </a:lvl1pPr>
             <a:lvl2pPr>
+              <a:buNone/>
               <a:defRPr sz="1350" b="0">
                 <a:solidFill>
                   <a:srgbClr val="476071"/>
@@ -12430,6 +12827,7 @@
               </a:defRPr>
             </a:lvl2pPr>
             <a:lvl3pPr>
+              <a:buNone/>
               <a:defRPr sz="1350" b="0">
                 <a:solidFill>
                   <a:srgbClr val="476071"/>
@@ -12440,6 +12838,7 @@
               </a:defRPr>
             </a:lvl3pPr>
             <a:lvl4pPr>
+              <a:buNone/>
               <a:defRPr sz="1350" b="0">
                 <a:solidFill>
                   <a:srgbClr val="476071"/>
@@ -12450,6 +12849,7 @@
               </a:defRPr>
             </a:lvl4pPr>
             <a:lvl5pPr>
+              <a:buNone/>
               <a:defRPr sz="1350" b="0">
                 <a:solidFill>
                   <a:srgbClr val="476071"/>
@@ -12460,6 +12860,7 @@
               </a:defRPr>
             </a:lvl5pPr>
             <a:lvl6pPr>
+              <a:buNone/>
               <a:defRPr sz="1350" b="0">
                 <a:solidFill>
                   <a:srgbClr val="476071"/>
@@ -12470,6 +12871,7 @@
               </a:defRPr>
             </a:lvl6pPr>
             <a:lvl7pPr>
+              <a:buNone/>
               <a:defRPr sz="1350" b="0">
                 <a:solidFill>
                   <a:srgbClr val="476071"/>
@@ -12480,6 +12882,7 @@
               </a:defRPr>
             </a:lvl7pPr>
             <a:lvl8pPr>
+              <a:buNone/>
               <a:defRPr sz="1350" b="0">
                 <a:solidFill>
                   <a:srgbClr val="476071"/>
@@ -12490,6 +12893,7 @@
               </a:defRPr>
             </a:lvl8pPr>
             <a:lvl9pPr>
+              <a:buNone/>
               <a:defRPr sz="1350" b="0">
                 <a:solidFill>
                   <a:srgbClr val="476071"/>
@@ -12502,6 +12906,7 @@
           </a:lstStyle>
           <a:p xmlns:a="http://schemas.openxmlformats.org/drawingml/2006/main">
             <a:pPr>
+              <a:buNone/>
               <a:defRPr sz="1350" b="0">
                 <a:solidFill>
                   <a:srgbClr val="476071"/>
@@ -12598,6 +13003,7 @@
               </a:defRPr>
             </a:defPPr>
             <a:lvl1pPr>
+              <a:buNone/>
               <a:defRPr sz="3300" b="1">
                 <a:solidFill>
                   <a:srgbClr val="102638"/>
@@ -12608,6 +13014,7 @@
               </a:defRPr>
             </a:lvl1pPr>
             <a:lvl2pPr>
+              <a:buNone/>
               <a:defRPr sz="3300" b="1">
                 <a:solidFill>
                   <a:srgbClr val="102638"/>
@@ -12618,6 +13025,7 @@
               </a:defRPr>
             </a:lvl2pPr>
             <a:lvl3pPr>
+              <a:buNone/>
               <a:defRPr sz="3300" b="1">
                 <a:solidFill>
                   <a:srgbClr val="102638"/>
@@ -12628,6 +13036,7 @@
               </a:defRPr>
             </a:lvl3pPr>
             <a:lvl4pPr>
+              <a:buNone/>
               <a:defRPr sz="3300" b="1">
                 <a:solidFill>
                   <a:srgbClr val="102638"/>
@@ -12638,6 +13047,7 @@
               </a:defRPr>
             </a:lvl4pPr>
             <a:lvl5pPr>
+              <a:buNone/>
               <a:defRPr sz="3300" b="1">
                 <a:solidFill>
                   <a:srgbClr val="102638"/>
@@ -12648,6 +13058,7 @@
               </a:defRPr>
             </a:lvl5pPr>
             <a:lvl6pPr>
+              <a:buNone/>
               <a:defRPr sz="3300" b="1">
                 <a:solidFill>
                   <a:srgbClr val="102638"/>
@@ -12658,6 +13069,7 @@
               </a:defRPr>
             </a:lvl6pPr>
             <a:lvl7pPr>
+              <a:buNone/>
               <a:defRPr sz="3300" b="1">
                 <a:solidFill>
                   <a:srgbClr val="102638"/>
@@ -12668,6 +13080,7 @@
               </a:defRPr>
             </a:lvl7pPr>
             <a:lvl8pPr>
+              <a:buNone/>
               <a:defRPr sz="3300" b="1">
                 <a:solidFill>
                   <a:srgbClr val="102638"/>
@@ -12678,6 +13091,7 @@
               </a:defRPr>
             </a:lvl8pPr>
             <a:lvl9pPr>
+              <a:buNone/>
               <a:defRPr sz="3300" b="1">
                 <a:solidFill>
                   <a:srgbClr val="102638"/>
@@ -12690,6 +13104,7 @@
           </a:lstStyle>
           <a:p xmlns:a="http://schemas.openxmlformats.org/drawingml/2006/main">
             <a:pPr>
+              <a:buNone/>
               <a:defRPr sz="3300" b="1">
                 <a:solidFill>
                   <a:srgbClr val="102638"/>
@@ -12757,6 +13172,7 @@
               </a:defRPr>
             </a:defPPr>
             <a:lvl1pPr>
+              <a:buNone/>
               <a:defRPr sz="1275" b="0">
                 <a:solidFill>
                   <a:srgbClr val="476071"/>
@@ -12767,6 +13183,7 @@
               </a:defRPr>
             </a:lvl1pPr>
             <a:lvl2pPr>
+              <a:buNone/>
               <a:defRPr sz="1275" b="0">
                 <a:solidFill>
                   <a:srgbClr val="476071"/>
@@ -12777,6 +13194,7 @@
               </a:defRPr>
             </a:lvl2pPr>
             <a:lvl3pPr>
+              <a:buNone/>
               <a:defRPr sz="1275" b="0">
                 <a:solidFill>
                   <a:srgbClr val="476071"/>
@@ -12787,6 +13205,7 @@
               </a:defRPr>
             </a:lvl3pPr>
             <a:lvl4pPr>
+              <a:buNone/>
               <a:defRPr sz="1275" b="0">
                 <a:solidFill>
                   <a:srgbClr val="476071"/>
@@ -12797,6 +13216,7 @@
               </a:defRPr>
             </a:lvl4pPr>
             <a:lvl5pPr>
+              <a:buNone/>
               <a:defRPr sz="1275" b="0">
                 <a:solidFill>
                   <a:srgbClr val="476071"/>
@@ -12807,6 +13227,7 @@
               </a:defRPr>
             </a:lvl5pPr>
             <a:lvl6pPr>
+              <a:buNone/>
               <a:defRPr sz="1275" b="0">
                 <a:solidFill>
                   <a:srgbClr val="476071"/>
@@ -12817,6 +13238,7 @@
               </a:defRPr>
             </a:lvl6pPr>
             <a:lvl7pPr>
+              <a:buNone/>
               <a:defRPr sz="1275" b="0">
                 <a:solidFill>
                   <a:srgbClr val="476071"/>
@@ -12827,6 +13249,7 @@
               </a:defRPr>
             </a:lvl7pPr>
             <a:lvl8pPr>
+              <a:buNone/>
               <a:defRPr sz="1275" b="0">
                 <a:solidFill>
                   <a:srgbClr val="476071"/>
@@ -12837,6 +13260,7 @@
               </a:defRPr>
             </a:lvl8pPr>
             <a:lvl9pPr>
+              <a:buNone/>
               <a:defRPr sz="1275" b="0">
                 <a:solidFill>
                   <a:srgbClr val="476071"/>
@@ -12849,6 +13273,7 @@
           </a:lstStyle>
           <a:p xmlns:a="http://schemas.openxmlformats.org/drawingml/2006/main">
             <a:pPr>
+              <a:buNone/>
               <a:defRPr sz="1275" b="0">
                 <a:solidFill>
                   <a:srgbClr val="476071"/>
@@ -12916,6 +13341,7 @@
               </a:defRPr>
             </a:defPPr>
             <a:lvl1pPr>
+              <a:buNone/>
               <a:defRPr sz="2100" b="1">
                 <a:solidFill>
                   <a:srgbClr val="007E87"/>
@@ -12926,6 +13352,7 @@
               </a:defRPr>
             </a:lvl1pPr>
             <a:lvl2pPr>
+              <a:buNone/>
               <a:defRPr sz="2100" b="1">
                 <a:solidFill>
                   <a:srgbClr val="007E87"/>
@@ -12936,6 +13363,7 @@
               </a:defRPr>
             </a:lvl2pPr>
             <a:lvl3pPr>
+              <a:buNone/>
               <a:defRPr sz="2100" b="1">
                 <a:solidFill>
                   <a:srgbClr val="007E87"/>
@@ -12946,6 +13374,7 @@
               </a:defRPr>
             </a:lvl3pPr>
             <a:lvl4pPr>
+              <a:buNone/>
               <a:defRPr sz="2100" b="1">
                 <a:solidFill>
                   <a:srgbClr val="007E87"/>
@@ -12956,6 +13385,7 @@
               </a:defRPr>
             </a:lvl4pPr>
             <a:lvl5pPr>
+              <a:buNone/>
               <a:defRPr sz="2100" b="1">
                 <a:solidFill>
                   <a:srgbClr val="007E87"/>
@@ -12966,6 +13396,7 @@
               </a:defRPr>
             </a:lvl5pPr>
             <a:lvl6pPr>
+              <a:buNone/>
               <a:defRPr sz="2100" b="1">
                 <a:solidFill>
                   <a:srgbClr val="007E87"/>
@@ -12976,6 +13407,7 @@
               </a:defRPr>
             </a:lvl6pPr>
             <a:lvl7pPr>
+              <a:buNone/>
               <a:defRPr sz="2100" b="1">
                 <a:solidFill>
                   <a:srgbClr val="007E87"/>
@@ -12986,6 +13418,7 @@
               </a:defRPr>
             </a:lvl7pPr>
             <a:lvl8pPr>
+              <a:buNone/>
               <a:defRPr sz="2100" b="1">
                 <a:solidFill>
                   <a:srgbClr val="007E87"/>
@@ -12996,6 +13429,7 @@
               </a:defRPr>
             </a:lvl8pPr>
             <a:lvl9pPr>
+              <a:buNone/>
               <a:defRPr sz="2100" b="1">
                 <a:solidFill>
                   <a:srgbClr val="007E87"/>
@@ -13008,6 +13442,7 @@
           </a:lstStyle>
           <a:p xmlns:a="http://schemas.openxmlformats.org/drawingml/2006/main">
             <a:pPr>
+              <a:buNone/>
               <a:defRPr sz="2100" b="1">
                 <a:solidFill>
                   <a:srgbClr val="007E87"/>
@@ -13075,6 +13510,7 @@
               </a:defRPr>
             </a:defPPr>
             <a:lvl1pPr>
+              <a:buNone/>
               <a:defRPr sz="1950" b="0">
                 <a:solidFill>
                   <a:srgbClr val="102638"/>
@@ -13085,6 +13521,7 @@
               </a:defRPr>
             </a:lvl1pPr>
             <a:lvl2pPr>
+              <a:buNone/>
               <a:defRPr sz="1950" b="0">
                 <a:solidFill>
                   <a:srgbClr val="102638"/>
@@ -13095,6 +13532,7 @@
               </a:defRPr>
             </a:lvl2pPr>
             <a:lvl3pPr>
+              <a:buNone/>
               <a:defRPr sz="1950" b="0">
                 <a:solidFill>
                   <a:srgbClr val="102638"/>
@@ -13105,6 +13543,7 @@
               </a:defRPr>
             </a:lvl3pPr>
             <a:lvl4pPr>
+              <a:buNone/>
               <a:defRPr sz="1950" b="0">
                 <a:solidFill>
                   <a:srgbClr val="102638"/>
@@ -13115,6 +13554,7 @@
               </a:defRPr>
             </a:lvl4pPr>
             <a:lvl5pPr>
+              <a:buNone/>
               <a:defRPr sz="1950" b="0">
                 <a:solidFill>
                   <a:srgbClr val="102638"/>
@@ -13125,6 +13565,7 @@
               </a:defRPr>
             </a:lvl5pPr>
             <a:lvl6pPr>
+              <a:buNone/>
               <a:defRPr sz="1950" b="0">
                 <a:solidFill>
                   <a:srgbClr val="102638"/>
@@ -13135,6 +13576,7 @@
               </a:defRPr>
             </a:lvl6pPr>
             <a:lvl7pPr>
+              <a:buNone/>
               <a:defRPr sz="1950" b="0">
                 <a:solidFill>
                   <a:srgbClr val="102638"/>
@@ -13145,6 +13587,7 @@
               </a:defRPr>
             </a:lvl7pPr>
             <a:lvl8pPr>
+              <a:buNone/>
               <a:defRPr sz="1950" b="0">
                 <a:solidFill>
                   <a:srgbClr val="102638"/>
@@ -13155,6 +13598,7 @@
               </a:defRPr>
             </a:lvl8pPr>
             <a:lvl9pPr>
+              <a:buNone/>
               <a:defRPr sz="1950" b="0">
                 <a:solidFill>
                   <a:srgbClr val="102638"/>
@@ -13167,6 +13611,7 @@
           </a:lstStyle>
           <a:p xmlns:a="http://schemas.openxmlformats.org/drawingml/2006/main">
             <a:pPr>
+              <a:buNone/>
               <a:defRPr sz="1950" b="0">
                 <a:solidFill>
                   <a:srgbClr val="102638"/>
@@ -13195,6 +13640,7 @@
           </a:p>
           <a:p xmlns:a="http://schemas.openxmlformats.org/drawingml/2006/main">
             <a:pPr>
+              <a:buNone/>
               <a:defRPr sz="1950" b="0">
                 <a:solidFill>
                   <a:srgbClr val="102638"/>
@@ -13223,6 +13669,7 @@
           </a:p>
           <a:p xmlns:a="http://schemas.openxmlformats.org/drawingml/2006/main">
             <a:pPr>
+              <a:buNone/>
               <a:defRPr sz="1950" b="0">
                 <a:solidFill>
                   <a:srgbClr val="102638"/>
@@ -13290,6 +13737,7 @@
               </a:defRPr>
             </a:defPPr>
             <a:lvl1pPr>
+              <a:buNone/>
               <a:defRPr sz="2100" b="1">
                 <a:solidFill>
                   <a:srgbClr val="007E87"/>
@@ -13300,6 +13748,7 @@
               </a:defRPr>
             </a:lvl1pPr>
             <a:lvl2pPr>
+              <a:buNone/>
               <a:defRPr sz="2100" b="1">
                 <a:solidFill>
                   <a:srgbClr val="007E87"/>
@@ -13310,6 +13759,7 @@
               </a:defRPr>
             </a:lvl2pPr>
             <a:lvl3pPr>
+              <a:buNone/>
               <a:defRPr sz="2100" b="1">
                 <a:solidFill>
                   <a:srgbClr val="007E87"/>
@@ -13320,6 +13770,7 @@
               </a:defRPr>
             </a:lvl3pPr>
             <a:lvl4pPr>
+              <a:buNone/>
               <a:defRPr sz="2100" b="1">
                 <a:solidFill>
                   <a:srgbClr val="007E87"/>
@@ -13330,6 +13781,7 @@
               </a:defRPr>
             </a:lvl4pPr>
             <a:lvl5pPr>
+              <a:buNone/>
               <a:defRPr sz="2100" b="1">
                 <a:solidFill>
                   <a:srgbClr val="007E87"/>
@@ -13340,6 +13792,7 @@
               </a:defRPr>
             </a:lvl5pPr>
             <a:lvl6pPr>
+              <a:buNone/>
               <a:defRPr sz="2100" b="1">
                 <a:solidFill>
                   <a:srgbClr val="007E87"/>
@@ -13350,6 +13803,7 @@
               </a:defRPr>
             </a:lvl6pPr>
             <a:lvl7pPr>
+              <a:buNone/>
               <a:defRPr sz="2100" b="1">
                 <a:solidFill>
                   <a:srgbClr val="007E87"/>
@@ -13360,6 +13814,7 @@
               </a:defRPr>
             </a:lvl7pPr>
             <a:lvl8pPr>
+              <a:buNone/>
               <a:defRPr sz="2100" b="1">
                 <a:solidFill>
                   <a:srgbClr val="007E87"/>
@@ -13370,6 +13825,7 @@
               </a:defRPr>
             </a:lvl8pPr>
             <a:lvl9pPr>
+              <a:buNone/>
               <a:defRPr sz="2100" b="1">
                 <a:solidFill>
                   <a:srgbClr val="007E87"/>
@@ -13382,6 +13838,7 @@
           </a:lstStyle>
           <a:p xmlns:a="http://schemas.openxmlformats.org/drawingml/2006/main">
             <a:pPr>
+              <a:buNone/>
               <a:defRPr sz="2100" b="1">
                 <a:solidFill>
                   <a:srgbClr val="007E87"/>
@@ -13449,6 +13906,7 @@
               </a:defRPr>
             </a:defPPr>
             <a:lvl1pPr>
+              <a:buNone/>
               <a:defRPr sz="1950" b="0">
                 <a:solidFill>
                   <a:srgbClr val="102638"/>
@@ -13459,6 +13917,7 @@
               </a:defRPr>
             </a:lvl1pPr>
             <a:lvl2pPr>
+              <a:buNone/>
               <a:defRPr sz="1950" b="0">
                 <a:solidFill>
                   <a:srgbClr val="102638"/>
@@ -13469,6 +13928,7 @@
               </a:defRPr>
             </a:lvl2pPr>
             <a:lvl3pPr>
+              <a:buNone/>
               <a:defRPr sz="1950" b="0">
                 <a:solidFill>
                   <a:srgbClr val="102638"/>
@@ -13479,6 +13939,7 @@
               </a:defRPr>
             </a:lvl3pPr>
             <a:lvl4pPr>
+              <a:buNone/>
               <a:defRPr sz="1950" b="0">
                 <a:solidFill>
                   <a:srgbClr val="102638"/>
@@ -13489,6 +13950,7 @@
               </a:defRPr>
             </a:lvl4pPr>
             <a:lvl5pPr>
+              <a:buNone/>
               <a:defRPr sz="1950" b="0">
                 <a:solidFill>
                   <a:srgbClr val="102638"/>
@@ -13499,6 +13961,7 @@
               </a:defRPr>
             </a:lvl5pPr>
             <a:lvl6pPr>
+              <a:buNone/>
               <a:defRPr sz="1950" b="0">
                 <a:solidFill>
                   <a:srgbClr val="102638"/>
@@ -13509,6 +13972,7 @@
               </a:defRPr>
             </a:lvl6pPr>
             <a:lvl7pPr>
+              <a:buNone/>
               <a:defRPr sz="1950" b="0">
                 <a:solidFill>
                   <a:srgbClr val="102638"/>
@@ -13519,6 +13983,7 @@
               </a:defRPr>
             </a:lvl7pPr>
             <a:lvl8pPr>
+              <a:buNone/>
               <a:defRPr sz="1950" b="0">
                 <a:solidFill>
                   <a:srgbClr val="102638"/>
@@ -13529,6 +13994,7 @@
               </a:defRPr>
             </a:lvl8pPr>
             <a:lvl9pPr>
+              <a:buNone/>
               <a:defRPr sz="1950" b="0">
                 <a:solidFill>
                   <a:srgbClr val="102638"/>
@@ -13541,6 +14007,7 @@
           </a:lstStyle>
           <a:p xmlns:a="http://schemas.openxmlformats.org/drawingml/2006/main">
             <a:pPr>
+              <a:buNone/>
               <a:defRPr sz="1950" b="0">
                 <a:solidFill>
                   <a:srgbClr val="102638"/>
@@ -13569,6 +14036,7 @@
           </a:p>
           <a:p xmlns:a="http://schemas.openxmlformats.org/drawingml/2006/main">
             <a:pPr>
+              <a:buNone/>
               <a:defRPr sz="1950" b="0">
                 <a:solidFill>
                   <a:srgbClr val="102638"/>
@@ -13597,6 +14065,7 @@
           </a:p>
           <a:p xmlns:a="http://schemas.openxmlformats.org/drawingml/2006/main">
             <a:pPr>
+              <a:buNone/>
               <a:defRPr sz="1950" b="0">
                 <a:solidFill>
                   <a:srgbClr val="102638"/>
@@ -13664,6 +14133,7 @@
               </a:defRPr>
             </a:defPPr>
             <a:lvl1pPr>
+              <a:buNone/>
               <a:defRPr sz="1350" b="0">
                 <a:solidFill>
                   <a:srgbClr val="476071"/>
@@ -13674,6 +14144,7 @@
               </a:defRPr>
             </a:lvl1pPr>
             <a:lvl2pPr>
+              <a:buNone/>
               <a:defRPr sz="1350" b="0">
                 <a:solidFill>
                   <a:srgbClr val="476071"/>
@@ -13684,6 +14155,7 @@
               </a:defRPr>
             </a:lvl2pPr>
             <a:lvl3pPr>
+              <a:buNone/>
               <a:defRPr sz="1350" b="0">
                 <a:solidFill>
                   <a:srgbClr val="476071"/>
@@ -13694,6 +14166,7 @@
               </a:defRPr>
             </a:lvl3pPr>
             <a:lvl4pPr>
+              <a:buNone/>
               <a:defRPr sz="1350" b="0">
                 <a:solidFill>
                   <a:srgbClr val="476071"/>
@@ -13704,6 +14177,7 @@
               </a:defRPr>
             </a:lvl4pPr>
             <a:lvl5pPr>
+              <a:buNone/>
               <a:defRPr sz="1350" b="0">
                 <a:solidFill>
                   <a:srgbClr val="476071"/>
@@ -13714,6 +14188,7 @@
               </a:defRPr>
             </a:lvl5pPr>
             <a:lvl6pPr>
+              <a:buNone/>
               <a:defRPr sz="1350" b="0">
                 <a:solidFill>
                   <a:srgbClr val="476071"/>
@@ -13724,6 +14199,7 @@
               </a:defRPr>
             </a:lvl6pPr>
             <a:lvl7pPr>
+              <a:buNone/>
               <a:defRPr sz="1350" b="0">
                 <a:solidFill>
                   <a:srgbClr val="476071"/>
@@ -13734,6 +14210,7 @@
               </a:defRPr>
             </a:lvl7pPr>
             <a:lvl8pPr>
+              <a:buNone/>
               <a:defRPr sz="1350" b="0">
                 <a:solidFill>
                   <a:srgbClr val="476071"/>
@@ -13744,6 +14221,7 @@
               </a:defRPr>
             </a:lvl8pPr>
             <a:lvl9pPr>
+              <a:buNone/>
               <a:defRPr sz="1350" b="0">
                 <a:solidFill>
                   <a:srgbClr val="476071"/>
@@ -13756,6 +14234,7 @@
           </a:lstStyle>
           <a:p xmlns:a="http://schemas.openxmlformats.org/drawingml/2006/main">
             <a:pPr>
+              <a:buNone/>
               <a:defRPr sz="1350" b="0">
                 <a:solidFill>
                   <a:srgbClr val="476071"/>
@@ -13852,6 +14331,7 @@
               </a:defRPr>
             </a:defPPr>
             <a:lvl1pPr>
+              <a:buNone/>
               <a:defRPr sz="3300" b="1">
                 <a:solidFill>
                   <a:srgbClr val="102638"/>
@@ -13862,6 +14342,7 @@
               </a:defRPr>
             </a:lvl1pPr>
             <a:lvl2pPr>
+              <a:buNone/>
               <a:defRPr sz="3300" b="1">
                 <a:solidFill>
                   <a:srgbClr val="102638"/>
@@ -13872,6 +14353,7 @@
               </a:defRPr>
             </a:lvl2pPr>
             <a:lvl3pPr>
+              <a:buNone/>
               <a:defRPr sz="3300" b="1">
                 <a:solidFill>
                   <a:srgbClr val="102638"/>
@@ -13882,6 +14364,7 @@
               </a:defRPr>
             </a:lvl3pPr>
             <a:lvl4pPr>
+              <a:buNone/>
               <a:defRPr sz="3300" b="1">
                 <a:solidFill>
                   <a:srgbClr val="102638"/>
@@ -13892,6 +14375,7 @@
               </a:defRPr>
             </a:lvl4pPr>
             <a:lvl5pPr>
+              <a:buNone/>
               <a:defRPr sz="3300" b="1">
                 <a:solidFill>
                   <a:srgbClr val="102638"/>
@@ -13902,6 +14386,7 @@
               </a:defRPr>
             </a:lvl5pPr>
             <a:lvl6pPr>
+              <a:buNone/>
               <a:defRPr sz="3300" b="1">
                 <a:solidFill>
                   <a:srgbClr val="102638"/>
@@ -13912,6 +14397,7 @@
               </a:defRPr>
             </a:lvl6pPr>
             <a:lvl7pPr>
+              <a:buNone/>
               <a:defRPr sz="3300" b="1">
                 <a:solidFill>
                   <a:srgbClr val="102638"/>
@@ -13922,6 +14408,7 @@
               </a:defRPr>
             </a:lvl7pPr>
             <a:lvl8pPr>
+              <a:buNone/>
               <a:defRPr sz="3300" b="1">
                 <a:solidFill>
                   <a:srgbClr val="102638"/>
@@ -13932,6 +14419,7 @@
               </a:defRPr>
             </a:lvl8pPr>
             <a:lvl9pPr>
+              <a:buNone/>
               <a:defRPr sz="3300" b="1">
                 <a:solidFill>
                   <a:srgbClr val="102638"/>
@@ -13944,6 +14432,7 @@
           </a:lstStyle>
           <a:p xmlns:a="http://schemas.openxmlformats.org/drawingml/2006/main">
             <a:pPr>
+              <a:buNone/>
               <a:defRPr sz="3300" b="1">
                 <a:solidFill>
                   <a:srgbClr val="102638"/>
@@ -14011,6 +14500,7 @@
               </a:defRPr>
             </a:defPPr>
             <a:lvl1pPr>
+              <a:buNone/>
               <a:defRPr sz="1275" b="0">
                 <a:solidFill>
                   <a:srgbClr val="476071"/>
@@ -14021,6 +14511,7 @@
               </a:defRPr>
             </a:lvl1pPr>
             <a:lvl2pPr>
+              <a:buNone/>
               <a:defRPr sz="1275" b="0">
                 <a:solidFill>
                   <a:srgbClr val="476071"/>
@@ -14031,6 +14522,7 @@
               </a:defRPr>
             </a:lvl2pPr>
             <a:lvl3pPr>
+              <a:buNone/>
               <a:defRPr sz="1275" b="0">
                 <a:solidFill>
                   <a:srgbClr val="476071"/>
@@ -14041,6 +14533,7 @@
               </a:defRPr>
             </a:lvl3pPr>
             <a:lvl4pPr>
+              <a:buNone/>
               <a:defRPr sz="1275" b="0">
                 <a:solidFill>
                   <a:srgbClr val="476071"/>
@@ -14051,6 +14544,7 @@
               </a:defRPr>
             </a:lvl4pPr>
             <a:lvl5pPr>
+              <a:buNone/>
               <a:defRPr sz="1275" b="0">
                 <a:solidFill>
                   <a:srgbClr val="476071"/>
@@ -14061,6 +14555,7 @@
               </a:defRPr>
             </a:lvl5pPr>
             <a:lvl6pPr>
+              <a:buNone/>
               <a:defRPr sz="1275" b="0">
                 <a:solidFill>
                   <a:srgbClr val="476071"/>
@@ -14071,6 +14566,7 @@
               </a:defRPr>
             </a:lvl6pPr>
             <a:lvl7pPr>
+              <a:buNone/>
               <a:defRPr sz="1275" b="0">
                 <a:solidFill>
                   <a:srgbClr val="476071"/>
@@ -14081,6 +14577,7 @@
               </a:defRPr>
             </a:lvl7pPr>
             <a:lvl8pPr>
+              <a:buNone/>
               <a:defRPr sz="1275" b="0">
                 <a:solidFill>
                   <a:srgbClr val="476071"/>
@@ -14091,6 +14588,7 @@
               </a:defRPr>
             </a:lvl8pPr>
             <a:lvl9pPr>
+              <a:buNone/>
               <a:defRPr sz="1275" b="0">
                 <a:solidFill>
                   <a:srgbClr val="476071"/>
@@ -14103,6 +14601,7 @@
           </a:lstStyle>
           <a:p xmlns:a="http://schemas.openxmlformats.org/drawingml/2006/main">
             <a:pPr>
+              <a:buNone/>
               <a:defRPr sz="1275" b="0">
                 <a:solidFill>
                   <a:srgbClr val="476071"/>
@@ -14131,7 +14630,7 @@
           <p:cNvPr id="3" name="">
             <a:extLst xmlns:a="http://schemas.openxmlformats.org/drawingml/2006/main">
               <a:ext uri="{FF2B5EF4-FFF2-40B4-BE49-F238E27FC236}">
-                <a16:creationId xmlns:a16="http://schemas.microsoft.com/office/drawing/2014/main" id="{06997678-3B5E-4A7A-8457-D26809B1EAD8}"/>
+                <a16:creationId xmlns:a16="http://schemas.microsoft.com/office/drawing/2014/main" id="{0FC5E5EB-57C5-4CA5-8A6F-DC73F0627014}"/>
               </a:ext>
             </a:extLst>
           </p:cNvPr>
@@ -14530,6 +15029,7 @@
               </a:defRPr>
             </a:defPPr>
             <a:lvl1pPr>
+              <a:buNone/>
               <a:defRPr sz="1350" b="0">
                 <a:solidFill>
                   <a:srgbClr val="476071"/>
@@ -14540,6 +15040,7 @@
               </a:defRPr>
             </a:lvl1pPr>
             <a:lvl2pPr>
+              <a:buNone/>
               <a:defRPr sz="1350" b="0">
                 <a:solidFill>
                   <a:srgbClr val="476071"/>
@@ -14550,6 +15051,7 @@
               </a:defRPr>
             </a:lvl2pPr>
             <a:lvl3pPr>
+              <a:buNone/>
               <a:defRPr sz="1350" b="0">
                 <a:solidFill>
                   <a:srgbClr val="476071"/>
@@ -14560,6 +15062,7 @@
               </a:defRPr>
             </a:lvl3pPr>
             <a:lvl4pPr>
+              <a:buNone/>
               <a:defRPr sz="1350" b="0">
                 <a:solidFill>
                   <a:srgbClr val="476071"/>
@@ -14570,6 +15073,7 @@
               </a:defRPr>
             </a:lvl4pPr>
             <a:lvl5pPr>
+              <a:buNone/>
               <a:defRPr sz="1350" b="0">
                 <a:solidFill>
                   <a:srgbClr val="476071"/>
@@ -14580,6 +15084,7 @@
               </a:defRPr>
             </a:lvl5pPr>
             <a:lvl6pPr>
+              <a:buNone/>
               <a:defRPr sz="1350" b="0">
                 <a:solidFill>
                   <a:srgbClr val="476071"/>
@@ -14590,6 +15095,7 @@
               </a:defRPr>
             </a:lvl6pPr>
             <a:lvl7pPr>
+              <a:buNone/>
               <a:defRPr sz="1350" b="0">
                 <a:solidFill>
                   <a:srgbClr val="476071"/>
@@ -14600,6 +15106,7 @@
               </a:defRPr>
             </a:lvl7pPr>
             <a:lvl8pPr>
+              <a:buNone/>
               <a:defRPr sz="1350" b="0">
                 <a:solidFill>
                   <a:srgbClr val="476071"/>
@@ -14610,6 +15117,7 @@
               </a:defRPr>
             </a:lvl8pPr>
             <a:lvl9pPr>
+              <a:buNone/>
               <a:defRPr sz="1350" b="0">
                 <a:solidFill>
                   <a:srgbClr val="476071"/>
@@ -14622,6 +15130,7 @@
           </a:lstStyle>
           <a:p xmlns:a="http://schemas.openxmlformats.org/drawingml/2006/main">
             <a:pPr>
+              <a:buNone/>
               <a:defRPr sz="1350" b="0">
                 <a:solidFill>
                   <a:srgbClr val="476071"/>
@@ -14718,6 +15227,7 @@
               </a:defRPr>
             </a:defPPr>
             <a:lvl1pPr>
+              <a:buNone/>
               <a:defRPr sz="3300" b="1">
                 <a:solidFill>
                   <a:srgbClr val="102638"/>
@@ -14728,6 +15238,7 @@
               </a:defRPr>
             </a:lvl1pPr>
             <a:lvl2pPr>
+              <a:buNone/>
               <a:defRPr sz="3300" b="1">
                 <a:solidFill>
                   <a:srgbClr val="102638"/>
@@ -14738,6 +15249,7 @@
               </a:defRPr>
             </a:lvl2pPr>
             <a:lvl3pPr>
+              <a:buNone/>
               <a:defRPr sz="3300" b="1">
                 <a:solidFill>
                   <a:srgbClr val="102638"/>
@@ -14748,6 +15260,7 @@
               </a:defRPr>
             </a:lvl3pPr>
             <a:lvl4pPr>
+              <a:buNone/>
               <a:defRPr sz="3300" b="1">
                 <a:solidFill>
                   <a:srgbClr val="102638"/>
@@ -14758,6 +15271,7 @@
               </a:defRPr>
             </a:lvl4pPr>
             <a:lvl5pPr>
+              <a:buNone/>
               <a:defRPr sz="3300" b="1">
                 <a:solidFill>
                   <a:srgbClr val="102638"/>
@@ -14768,6 +15282,7 @@
               </a:defRPr>
             </a:lvl5pPr>
             <a:lvl6pPr>
+              <a:buNone/>
               <a:defRPr sz="3300" b="1">
                 <a:solidFill>
                   <a:srgbClr val="102638"/>
@@ -14778,6 +15293,7 @@
               </a:defRPr>
             </a:lvl6pPr>
             <a:lvl7pPr>
+              <a:buNone/>
               <a:defRPr sz="3300" b="1">
                 <a:solidFill>
                   <a:srgbClr val="102638"/>
@@ -14788,6 +15304,7 @@
               </a:defRPr>
             </a:lvl7pPr>
             <a:lvl8pPr>
+              <a:buNone/>
               <a:defRPr sz="3300" b="1">
                 <a:solidFill>
                   <a:srgbClr val="102638"/>
@@ -14798,6 +15315,7 @@
               </a:defRPr>
             </a:lvl8pPr>
             <a:lvl9pPr>
+              <a:buNone/>
               <a:defRPr sz="3300" b="1">
                 <a:solidFill>
                   <a:srgbClr val="102638"/>
@@ -14810,6 +15328,7 @@
           </a:lstStyle>
           <a:p xmlns:a="http://schemas.openxmlformats.org/drawingml/2006/main">
             <a:pPr>
+              <a:buNone/>
               <a:defRPr sz="3300" b="1">
                 <a:solidFill>
                   <a:srgbClr val="102638"/>
@@ -14877,6 +15396,7 @@
               </a:defRPr>
             </a:defPPr>
             <a:lvl1pPr>
+              <a:buNone/>
               <a:defRPr sz="1275" b="0">
                 <a:solidFill>
                   <a:srgbClr val="476071"/>
@@ -14887,6 +15407,7 @@
               </a:defRPr>
             </a:lvl1pPr>
             <a:lvl2pPr>
+              <a:buNone/>
               <a:defRPr sz="1275" b="0">
                 <a:solidFill>
                   <a:srgbClr val="476071"/>
@@ -14897,6 +15418,7 @@
               </a:defRPr>
             </a:lvl2pPr>
             <a:lvl3pPr>
+              <a:buNone/>
               <a:defRPr sz="1275" b="0">
                 <a:solidFill>
                   <a:srgbClr val="476071"/>
@@ -14907,6 +15429,7 @@
               </a:defRPr>
             </a:lvl3pPr>
             <a:lvl4pPr>
+              <a:buNone/>
               <a:defRPr sz="1275" b="0">
                 <a:solidFill>
                   <a:srgbClr val="476071"/>
@@ -14917,6 +15440,7 @@
               </a:defRPr>
             </a:lvl4pPr>
             <a:lvl5pPr>
+              <a:buNone/>
               <a:defRPr sz="1275" b="0">
                 <a:solidFill>
                   <a:srgbClr val="476071"/>
@@ -14927,6 +15451,7 @@
               </a:defRPr>
             </a:lvl5pPr>
             <a:lvl6pPr>
+              <a:buNone/>
               <a:defRPr sz="1275" b="0">
                 <a:solidFill>
                   <a:srgbClr val="476071"/>
@@ -14937,6 +15462,7 @@
               </a:defRPr>
             </a:lvl6pPr>
             <a:lvl7pPr>
+              <a:buNone/>
               <a:defRPr sz="1275" b="0">
                 <a:solidFill>
                   <a:srgbClr val="476071"/>
@@ -14947,6 +15473,7 @@
               </a:defRPr>
             </a:lvl7pPr>
             <a:lvl8pPr>
+              <a:buNone/>
               <a:defRPr sz="1275" b="0">
                 <a:solidFill>
                   <a:srgbClr val="476071"/>
@@ -14957,6 +15484,7 @@
               </a:defRPr>
             </a:lvl8pPr>
             <a:lvl9pPr>
+              <a:buNone/>
               <a:defRPr sz="1275" b="0">
                 <a:solidFill>
                   <a:srgbClr val="476071"/>
@@ -14969,6 +15497,7 @@
           </a:lstStyle>
           <a:p xmlns:a="http://schemas.openxmlformats.org/drawingml/2006/main">
             <a:pPr>
+              <a:buNone/>
               <a:defRPr sz="1275" b="0">
                 <a:solidFill>
                   <a:srgbClr val="476071"/>
@@ -14997,7 +15526,7 @@
           <p:cNvPr id="3" name="">
             <a:extLst xmlns:a="http://schemas.openxmlformats.org/drawingml/2006/main">
               <a:ext uri="{FF2B5EF4-FFF2-40B4-BE49-F238E27FC236}">
-                <a16:creationId xmlns:a16="http://schemas.microsoft.com/office/drawing/2014/main" id="{84D7E6B0-B2ED-4D10-94AC-764A18C45A7A}"/>
+                <a16:creationId xmlns:a16="http://schemas.microsoft.com/office/drawing/2014/main" id="{44D5990C-D816-46BD-98C1-E0F1D006D72E}"/>
               </a:ext>
             </a:extLst>
           </p:cNvPr>
@@ -15007,7 +15536,7 @@
           <p:nvPr/>
         </p:nvPicPr>
         <p:blipFill>
-          <a:blip xmlns:r="http://schemas.openxmlformats.org/officeDocument/2006/relationships" xmlns:a="http://schemas.openxmlformats.org/drawingml/2006/main" r:embed="R7c2cd2e13e814a17"/>
+          <a:blip xmlns:r="http://schemas.openxmlformats.org/officeDocument/2006/relationships" xmlns:a="http://schemas.openxmlformats.org/drawingml/2006/main" r:embed="Rb644e37ffee04c07"/>
           <a:stretch xmlns:a="http://schemas.openxmlformats.org/drawingml/2006/main"/>
         </p:blipFill>
         <p:spPr>
@@ -15064,6 +15593,7 @@
               </a:defRPr>
             </a:defPPr>
             <a:lvl1pPr>
+              <a:buNone/>
               <a:defRPr sz="2100" b="1">
                 <a:solidFill>
                   <a:srgbClr val="007E87"/>
@@ -15074,6 +15604,7 @@
               </a:defRPr>
             </a:lvl1pPr>
             <a:lvl2pPr>
+              <a:buNone/>
               <a:defRPr sz="2100" b="1">
                 <a:solidFill>
                   <a:srgbClr val="007E87"/>
@@ -15084,6 +15615,7 @@
               </a:defRPr>
             </a:lvl2pPr>
             <a:lvl3pPr>
+              <a:buNone/>
               <a:defRPr sz="2100" b="1">
                 <a:solidFill>
                   <a:srgbClr val="007E87"/>
@@ -15094,6 +15626,7 @@
               </a:defRPr>
             </a:lvl3pPr>
             <a:lvl4pPr>
+              <a:buNone/>
               <a:defRPr sz="2100" b="1">
                 <a:solidFill>
                   <a:srgbClr val="007E87"/>
@@ -15104,6 +15637,7 @@
               </a:defRPr>
             </a:lvl4pPr>
             <a:lvl5pPr>
+              <a:buNone/>
               <a:defRPr sz="2100" b="1">
                 <a:solidFill>
                   <a:srgbClr val="007E87"/>
@@ -15114,6 +15648,7 @@
               </a:defRPr>
             </a:lvl5pPr>
             <a:lvl6pPr>
+              <a:buNone/>
               <a:defRPr sz="2100" b="1">
                 <a:solidFill>
                   <a:srgbClr val="007E87"/>
@@ -15124,6 +15659,7 @@
               </a:defRPr>
             </a:lvl6pPr>
             <a:lvl7pPr>
+              <a:buNone/>
               <a:defRPr sz="2100" b="1">
                 <a:solidFill>
                   <a:srgbClr val="007E87"/>
@@ -15134,6 +15670,7 @@
               </a:defRPr>
             </a:lvl7pPr>
             <a:lvl8pPr>
+              <a:buNone/>
               <a:defRPr sz="2100" b="1">
                 <a:solidFill>
                   <a:srgbClr val="007E87"/>
@@ -15144,6 +15681,7 @@
               </a:defRPr>
             </a:lvl8pPr>
             <a:lvl9pPr>
+              <a:buNone/>
               <a:defRPr sz="2100" b="1">
                 <a:solidFill>
                   <a:srgbClr val="007E87"/>
@@ -15156,6 +15694,7 @@
           </a:lstStyle>
           <a:p xmlns:a="http://schemas.openxmlformats.org/drawingml/2006/main">
             <a:pPr>
+              <a:buNone/>
               <a:defRPr sz="2100" b="1">
                 <a:solidFill>
                   <a:srgbClr val="007E87"/>
@@ -15223,6 +15762,7 @@
               </a:defRPr>
             </a:defPPr>
             <a:lvl1pPr>
+              <a:buNone/>
               <a:defRPr sz="1350" b="0">
                 <a:solidFill>
                   <a:srgbClr val="476071"/>
@@ -15233,6 +15773,7 @@
               </a:defRPr>
             </a:lvl1pPr>
             <a:lvl2pPr>
+              <a:buNone/>
               <a:defRPr sz="1350" b="0">
                 <a:solidFill>
                   <a:srgbClr val="476071"/>
@@ -15243,6 +15784,7 @@
               </a:defRPr>
             </a:lvl2pPr>
             <a:lvl3pPr>
+              <a:buNone/>
               <a:defRPr sz="1350" b="0">
                 <a:solidFill>
                   <a:srgbClr val="476071"/>
@@ -15253,6 +15795,7 @@
               </a:defRPr>
             </a:lvl3pPr>
             <a:lvl4pPr>
+              <a:buNone/>
               <a:defRPr sz="1350" b="0">
                 <a:solidFill>
                   <a:srgbClr val="476071"/>
@@ -15263,6 +15806,7 @@
               </a:defRPr>
             </a:lvl4pPr>
             <a:lvl5pPr>
+              <a:buNone/>
               <a:defRPr sz="1350" b="0">
                 <a:solidFill>
                   <a:srgbClr val="476071"/>
@@ -15273,6 +15817,7 @@
               </a:defRPr>
             </a:lvl5pPr>
             <a:lvl6pPr>
+              <a:buNone/>
               <a:defRPr sz="1350" b="0">
                 <a:solidFill>
                   <a:srgbClr val="476071"/>
@@ -15283,6 +15828,7 @@
               </a:defRPr>
             </a:lvl6pPr>
             <a:lvl7pPr>
+              <a:buNone/>
               <a:defRPr sz="1350" b="0">
                 <a:solidFill>
                   <a:srgbClr val="476071"/>
@@ -15293,6 +15839,7 @@
               </a:defRPr>
             </a:lvl7pPr>
             <a:lvl8pPr>
+              <a:buNone/>
               <a:defRPr sz="1350" b="0">
                 <a:solidFill>
                   <a:srgbClr val="476071"/>
@@ -15303,6 +15850,7 @@
               </a:defRPr>
             </a:lvl8pPr>
             <a:lvl9pPr>
+              <a:buNone/>
               <a:defRPr sz="1350" b="0">
                 <a:solidFill>
                   <a:srgbClr val="476071"/>
@@ -15315,6 +15863,7 @@
           </a:lstStyle>
           <a:p xmlns:a="http://schemas.openxmlformats.org/drawingml/2006/main">
             <a:pPr>
+              <a:buNone/>
               <a:defRPr sz="1350" b="0">
                 <a:solidFill>
                   <a:srgbClr val="476071"/>
@@ -15411,6 +15960,7 @@
               </a:defRPr>
             </a:defPPr>
             <a:lvl1pPr>
+              <a:buNone/>
               <a:defRPr sz="3300" b="1">
                 <a:solidFill>
                   <a:srgbClr val="102638"/>
@@ -15421,6 +15971,7 @@
               </a:defRPr>
             </a:lvl1pPr>
             <a:lvl2pPr>
+              <a:buNone/>
               <a:defRPr sz="3300" b="1">
                 <a:solidFill>
                   <a:srgbClr val="102638"/>
@@ -15431,6 +15982,7 @@
               </a:defRPr>
             </a:lvl2pPr>
             <a:lvl3pPr>
+              <a:buNone/>
               <a:defRPr sz="3300" b="1">
                 <a:solidFill>
                   <a:srgbClr val="102638"/>
@@ -15441,6 +15993,7 @@
               </a:defRPr>
             </a:lvl3pPr>
             <a:lvl4pPr>
+              <a:buNone/>
               <a:defRPr sz="3300" b="1">
                 <a:solidFill>
                   <a:srgbClr val="102638"/>
@@ -15451,6 +16004,7 @@
               </a:defRPr>
             </a:lvl4pPr>
             <a:lvl5pPr>
+              <a:buNone/>
               <a:defRPr sz="3300" b="1">
                 <a:solidFill>
                   <a:srgbClr val="102638"/>
@@ -15461,6 +16015,7 @@
               </a:defRPr>
             </a:lvl5pPr>
             <a:lvl6pPr>
+              <a:buNone/>
               <a:defRPr sz="3300" b="1">
                 <a:solidFill>
                   <a:srgbClr val="102638"/>
@@ -15471,6 +16026,7 @@
               </a:defRPr>
             </a:lvl6pPr>
             <a:lvl7pPr>
+              <a:buNone/>
               <a:defRPr sz="3300" b="1">
                 <a:solidFill>
                   <a:srgbClr val="102638"/>
@@ -15481,6 +16037,7 @@
               </a:defRPr>
             </a:lvl7pPr>
             <a:lvl8pPr>
+              <a:buNone/>
               <a:defRPr sz="3300" b="1">
                 <a:solidFill>
                   <a:srgbClr val="102638"/>
@@ -15491,6 +16048,7 @@
               </a:defRPr>
             </a:lvl8pPr>
             <a:lvl9pPr>
+              <a:buNone/>
               <a:defRPr sz="3300" b="1">
                 <a:solidFill>
                   <a:srgbClr val="102638"/>
@@ -15503,6 +16061,7 @@
           </a:lstStyle>
           <a:p xmlns:a="http://schemas.openxmlformats.org/drawingml/2006/main">
             <a:pPr>
+              <a:buNone/>
               <a:defRPr sz="3300" b="1">
                 <a:solidFill>
                   <a:srgbClr val="102638"/>
@@ -15570,6 +16129,7 @@
               </a:defRPr>
             </a:defPPr>
             <a:lvl1pPr>
+              <a:buNone/>
               <a:defRPr sz="1275" b="0">
                 <a:solidFill>
                   <a:srgbClr val="476071"/>
@@ -15580,6 +16140,7 @@
               </a:defRPr>
             </a:lvl1pPr>
             <a:lvl2pPr>
+              <a:buNone/>
               <a:defRPr sz="1275" b="0">
                 <a:solidFill>
                   <a:srgbClr val="476071"/>
@@ -15590,6 +16151,7 @@
               </a:defRPr>
             </a:lvl2pPr>
             <a:lvl3pPr>
+              <a:buNone/>
               <a:defRPr sz="1275" b="0">
                 <a:solidFill>
                   <a:srgbClr val="476071"/>
@@ -15600,6 +16162,7 @@
               </a:defRPr>
             </a:lvl3pPr>
             <a:lvl4pPr>
+              <a:buNone/>
               <a:defRPr sz="1275" b="0">
                 <a:solidFill>
                   <a:srgbClr val="476071"/>
@@ -15610,6 +16173,7 @@
               </a:defRPr>
             </a:lvl4pPr>
             <a:lvl5pPr>
+              <a:buNone/>
               <a:defRPr sz="1275" b="0">
                 <a:solidFill>
                   <a:srgbClr val="476071"/>
@@ -15620,6 +16184,7 @@
               </a:defRPr>
             </a:lvl5pPr>
             <a:lvl6pPr>
+              <a:buNone/>
               <a:defRPr sz="1275" b="0">
                 <a:solidFill>
                   <a:srgbClr val="476071"/>
@@ -15630,6 +16195,7 @@
               </a:defRPr>
             </a:lvl6pPr>
             <a:lvl7pPr>
+              <a:buNone/>
               <a:defRPr sz="1275" b="0">
                 <a:solidFill>
                   <a:srgbClr val="476071"/>
@@ -15640,6 +16206,7 @@
               </a:defRPr>
             </a:lvl7pPr>
             <a:lvl8pPr>
+              <a:buNone/>
               <a:defRPr sz="1275" b="0">
                 <a:solidFill>
                   <a:srgbClr val="476071"/>
@@ -15650,6 +16217,7 @@
               </a:defRPr>
             </a:lvl8pPr>
             <a:lvl9pPr>
+              <a:buNone/>
               <a:defRPr sz="1275" b="0">
                 <a:solidFill>
                   <a:srgbClr val="476071"/>
@@ -15662,6 +16230,7 @@
           </a:lstStyle>
           <a:p xmlns:a="http://schemas.openxmlformats.org/drawingml/2006/main">
             <a:pPr>
+              <a:buNone/>
               <a:defRPr sz="1275" b="0">
                 <a:solidFill>
                   <a:srgbClr val="476071"/>
@@ -15690,7 +16259,7 @@
           <p:cNvPr id="3" name="">
             <a:extLst xmlns:a="http://schemas.openxmlformats.org/drawingml/2006/main">
               <a:ext uri="{FF2B5EF4-FFF2-40B4-BE49-F238E27FC236}">
-                <a16:creationId xmlns:a16="http://schemas.microsoft.com/office/drawing/2014/main" id="{DFC67B83-FD8C-4F2E-9754-1E494ACEB33D}"/>
+                <a16:creationId xmlns:a16="http://schemas.microsoft.com/office/drawing/2014/main" id="{41027567-6C69-49E5-9F15-F71E90F03BCC}"/>
               </a:ext>
             </a:extLst>
           </p:cNvPr>
@@ -16382,6 +16951,7 @@
               </a:defRPr>
             </a:defPPr>
             <a:lvl1pPr>
+              <a:buNone/>
               <a:defRPr sz="1350" b="0">
                 <a:solidFill>
                   <a:srgbClr val="476071"/>
@@ -16392,6 +16962,7 @@
               </a:defRPr>
             </a:lvl1pPr>
             <a:lvl2pPr>
+              <a:buNone/>
               <a:defRPr sz="1350" b="0">
                 <a:solidFill>
                   <a:srgbClr val="476071"/>
@@ -16402,6 +16973,7 @@
               </a:defRPr>
             </a:lvl2pPr>
             <a:lvl3pPr>
+              <a:buNone/>
               <a:defRPr sz="1350" b="0">
                 <a:solidFill>
                   <a:srgbClr val="476071"/>
@@ -16412,6 +16984,7 @@
               </a:defRPr>
             </a:lvl3pPr>
             <a:lvl4pPr>
+              <a:buNone/>
               <a:defRPr sz="1350" b="0">
                 <a:solidFill>
                   <a:srgbClr val="476071"/>
@@ -16422,6 +16995,7 @@
               </a:defRPr>
             </a:lvl4pPr>
             <a:lvl5pPr>
+              <a:buNone/>
               <a:defRPr sz="1350" b="0">
                 <a:solidFill>
                   <a:srgbClr val="476071"/>
@@ -16432,6 +17006,7 @@
               </a:defRPr>
             </a:lvl5pPr>
             <a:lvl6pPr>
+              <a:buNone/>
               <a:defRPr sz="1350" b="0">
                 <a:solidFill>
                   <a:srgbClr val="476071"/>
@@ -16442,6 +17017,7 @@
               </a:defRPr>
             </a:lvl6pPr>
             <a:lvl7pPr>
+              <a:buNone/>
               <a:defRPr sz="1350" b="0">
                 <a:solidFill>
                   <a:srgbClr val="476071"/>
@@ -16452,6 +17028,7 @@
               </a:defRPr>
             </a:lvl7pPr>
             <a:lvl8pPr>
+              <a:buNone/>
               <a:defRPr sz="1350" b="0">
                 <a:solidFill>
                   <a:srgbClr val="476071"/>
@@ -16462,6 +17039,7 @@
               </a:defRPr>
             </a:lvl8pPr>
             <a:lvl9pPr>
+              <a:buNone/>
               <a:defRPr sz="1350" b="0">
                 <a:solidFill>
                   <a:srgbClr val="476071"/>
@@ -16474,6 +17052,7 @@
           </a:lstStyle>
           <a:p xmlns:a="http://schemas.openxmlformats.org/drawingml/2006/main">
             <a:pPr>
+              <a:buNone/>
               <a:defRPr sz="1350" b="0">
                 <a:solidFill>
                   <a:srgbClr val="476071"/>
@@ -16570,6 +17149,7 @@
               </a:defRPr>
             </a:defPPr>
             <a:lvl1pPr>
+              <a:buNone/>
               <a:defRPr sz="3300" b="1">
                 <a:solidFill>
                   <a:srgbClr val="102638"/>
@@ -16580,6 +17160,7 @@
               </a:defRPr>
             </a:lvl1pPr>
             <a:lvl2pPr>
+              <a:buNone/>
               <a:defRPr sz="3300" b="1">
                 <a:solidFill>
                   <a:srgbClr val="102638"/>
@@ -16590,6 +17171,7 @@
               </a:defRPr>
             </a:lvl2pPr>
             <a:lvl3pPr>
+              <a:buNone/>
               <a:defRPr sz="3300" b="1">
                 <a:solidFill>
                   <a:srgbClr val="102638"/>
@@ -16600,6 +17182,7 @@
               </a:defRPr>
             </a:lvl3pPr>
             <a:lvl4pPr>
+              <a:buNone/>
               <a:defRPr sz="3300" b="1">
                 <a:solidFill>
                   <a:srgbClr val="102638"/>
@@ -16610,6 +17193,7 @@
               </a:defRPr>
             </a:lvl4pPr>
             <a:lvl5pPr>
+              <a:buNone/>
               <a:defRPr sz="3300" b="1">
                 <a:solidFill>
                   <a:srgbClr val="102638"/>
@@ -16620,6 +17204,7 @@
               </a:defRPr>
             </a:lvl5pPr>
             <a:lvl6pPr>
+              <a:buNone/>
               <a:defRPr sz="3300" b="1">
                 <a:solidFill>
                   <a:srgbClr val="102638"/>
@@ -16630,6 +17215,7 @@
               </a:defRPr>
             </a:lvl6pPr>
             <a:lvl7pPr>
+              <a:buNone/>
               <a:defRPr sz="3300" b="1">
                 <a:solidFill>
                   <a:srgbClr val="102638"/>
@@ -16640,6 +17226,7 @@
               </a:defRPr>
             </a:lvl7pPr>
             <a:lvl8pPr>
+              <a:buNone/>
               <a:defRPr sz="3300" b="1">
                 <a:solidFill>
                   <a:srgbClr val="102638"/>
@@ -16650,6 +17237,7 @@
               </a:defRPr>
             </a:lvl8pPr>
             <a:lvl9pPr>
+              <a:buNone/>
               <a:defRPr sz="3300" b="1">
                 <a:solidFill>
                   <a:srgbClr val="102638"/>
@@ -16662,6 +17250,7 @@
           </a:lstStyle>
           <a:p xmlns:a="http://schemas.openxmlformats.org/drawingml/2006/main">
             <a:pPr>
+              <a:buNone/>
               <a:defRPr sz="3300" b="1">
                 <a:solidFill>
                   <a:srgbClr val="102638"/>
@@ -16729,6 +17318,7 @@
               </a:defRPr>
             </a:defPPr>
             <a:lvl1pPr>
+              <a:buNone/>
               <a:defRPr sz="1275" b="0">
                 <a:solidFill>
                   <a:srgbClr val="476071"/>
@@ -16739,6 +17329,7 @@
               </a:defRPr>
             </a:lvl1pPr>
             <a:lvl2pPr>
+              <a:buNone/>
               <a:defRPr sz="1275" b="0">
                 <a:solidFill>
                   <a:srgbClr val="476071"/>
@@ -16749,6 +17340,7 @@
               </a:defRPr>
             </a:lvl2pPr>
             <a:lvl3pPr>
+              <a:buNone/>
               <a:defRPr sz="1275" b="0">
                 <a:solidFill>
                   <a:srgbClr val="476071"/>
@@ -16759,6 +17351,7 @@
               </a:defRPr>
             </a:lvl3pPr>
             <a:lvl4pPr>
+              <a:buNone/>
               <a:defRPr sz="1275" b="0">
                 <a:solidFill>
                   <a:srgbClr val="476071"/>
@@ -16769,6 +17362,7 @@
               </a:defRPr>
             </a:lvl4pPr>
             <a:lvl5pPr>
+              <a:buNone/>
               <a:defRPr sz="1275" b="0">
                 <a:solidFill>
                   <a:srgbClr val="476071"/>
@@ -16779,6 +17373,7 @@
               </a:defRPr>
             </a:lvl5pPr>
             <a:lvl6pPr>
+              <a:buNone/>
               <a:defRPr sz="1275" b="0">
                 <a:solidFill>
                   <a:srgbClr val="476071"/>
@@ -16789,6 +17384,7 @@
               </a:defRPr>
             </a:lvl6pPr>
             <a:lvl7pPr>
+              <a:buNone/>
               <a:defRPr sz="1275" b="0">
                 <a:solidFill>
                   <a:srgbClr val="476071"/>
@@ -16799,6 +17395,7 @@
               </a:defRPr>
             </a:lvl7pPr>
             <a:lvl8pPr>
+              <a:buNone/>
               <a:defRPr sz="1275" b="0">
                 <a:solidFill>
                   <a:srgbClr val="476071"/>
@@ -16809,6 +17406,7 @@
               </a:defRPr>
             </a:lvl8pPr>
             <a:lvl9pPr>
+              <a:buNone/>
               <a:defRPr sz="1275" b="0">
                 <a:solidFill>
                   <a:srgbClr val="476071"/>
@@ -16821,6 +17419,7 @@
           </a:lstStyle>
           <a:p xmlns:a="http://schemas.openxmlformats.org/drawingml/2006/main">
             <a:pPr>
+              <a:buNone/>
               <a:defRPr sz="1275" b="0">
                 <a:solidFill>
                   <a:srgbClr val="476071"/>
@@ -16849,7 +17448,7 @@
           <p:cNvPr id="3" name="">
             <a:extLst xmlns:a="http://schemas.openxmlformats.org/drawingml/2006/main">
               <a:ext uri="{FF2B5EF4-FFF2-40B4-BE49-F238E27FC236}">
-                <a16:creationId xmlns:a16="http://schemas.microsoft.com/office/drawing/2014/main" id="{C0C328E5-A076-49A7-9CDC-2C5617152A55}"/>
+                <a16:creationId xmlns:a16="http://schemas.microsoft.com/office/drawing/2014/main" id="{3E31069A-2BC1-43B1-BC7F-C0D021ACD509}"/>
               </a:ext>
             </a:extLst>
           </p:cNvPr>
@@ -17541,6 +18140,7 @@
               </a:defRPr>
             </a:defPPr>
             <a:lvl1pPr>
+              <a:buNone/>
               <a:defRPr sz="1350" b="0">
                 <a:solidFill>
                   <a:srgbClr val="476071"/>
@@ -17551,6 +18151,7 @@
               </a:defRPr>
             </a:lvl1pPr>
             <a:lvl2pPr>
+              <a:buNone/>
               <a:defRPr sz="1350" b="0">
                 <a:solidFill>
                   <a:srgbClr val="476071"/>
@@ -17561,6 +18162,7 @@
               </a:defRPr>
             </a:lvl2pPr>
             <a:lvl3pPr>
+              <a:buNone/>
               <a:defRPr sz="1350" b="0">
                 <a:solidFill>
                   <a:srgbClr val="476071"/>
@@ -17571,6 +18173,7 @@
               </a:defRPr>
             </a:lvl3pPr>
             <a:lvl4pPr>
+              <a:buNone/>
               <a:defRPr sz="1350" b="0">
                 <a:solidFill>
                   <a:srgbClr val="476071"/>
@@ -17581,6 +18184,7 @@
               </a:defRPr>
             </a:lvl4pPr>
             <a:lvl5pPr>
+              <a:buNone/>
               <a:defRPr sz="1350" b="0">
                 <a:solidFill>
                   <a:srgbClr val="476071"/>
@@ -17591,6 +18195,7 @@
               </a:defRPr>
             </a:lvl5pPr>
             <a:lvl6pPr>
+              <a:buNone/>
               <a:defRPr sz="1350" b="0">
                 <a:solidFill>
                   <a:srgbClr val="476071"/>
@@ -17601,6 +18206,7 @@
               </a:defRPr>
             </a:lvl6pPr>
             <a:lvl7pPr>
+              <a:buNone/>
               <a:defRPr sz="1350" b="0">
                 <a:solidFill>
                   <a:srgbClr val="476071"/>
@@ -17611,6 +18217,7 @@
               </a:defRPr>
             </a:lvl7pPr>
             <a:lvl8pPr>
+              <a:buNone/>
               <a:defRPr sz="1350" b="0">
                 <a:solidFill>
                   <a:srgbClr val="476071"/>
@@ -17621,6 +18228,7 @@
               </a:defRPr>
             </a:lvl8pPr>
             <a:lvl9pPr>
+              <a:buNone/>
               <a:defRPr sz="1350" b="0">
                 <a:solidFill>
                   <a:srgbClr val="476071"/>
@@ -17633,6 +18241,7 @@
           </a:lstStyle>
           <a:p xmlns:a="http://schemas.openxmlformats.org/drawingml/2006/main">
             <a:pPr>
+              <a:buNone/>
               <a:defRPr sz="1350" b="0">
                 <a:solidFill>
                   <a:srgbClr val="476071"/>
@@ -17729,6 +18338,7 @@
               </a:defRPr>
             </a:defPPr>
             <a:lvl1pPr>
+              <a:buNone/>
               <a:defRPr sz="3300" b="1">
                 <a:solidFill>
                   <a:srgbClr val="102638"/>
@@ -17739,6 +18349,7 @@
               </a:defRPr>
             </a:lvl1pPr>
             <a:lvl2pPr>
+              <a:buNone/>
               <a:defRPr sz="3300" b="1">
                 <a:solidFill>
                   <a:srgbClr val="102638"/>
@@ -17749,6 +18360,7 @@
               </a:defRPr>
             </a:lvl2pPr>
             <a:lvl3pPr>
+              <a:buNone/>
               <a:defRPr sz="3300" b="1">
                 <a:solidFill>
                   <a:srgbClr val="102638"/>
@@ -17759,6 +18371,7 @@
               </a:defRPr>
             </a:lvl3pPr>
             <a:lvl4pPr>
+              <a:buNone/>
               <a:defRPr sz="3300" b="1">
                 <a:solidFill>
                   <a:srgbClr val="102638"/>
@@ -17769,6 +18382,7 @@
               </a:defRPr>
             </a:lvl4pPr>
             <a:lvl5pPr>
+              <a:buNone/>
               <a:defRPr sz="3300" b="1">
                 <a:solidFill>
                   <a:srgbClr val="102638"/>
@@ -17779,6 +18393,7 @@
               </a:defRPr>
             </a:lvl5pPr>
             <a:lvl6pPr>
+              <a:buNone/>
               <a:defRPr sz="3300" b="1">
                 <a:solidFill>
                   <a:srgbClr val="102638"/>
@@ -17789,6 +18404,7 @@
               </a:defRPr>
             </a:lvl6pPr>
             <a:lvl7pPr>
+              <a:buNone/>
               <a:defRPr sz="3300" b="1">
                 <a:solidFill>
                   <a:srgbClr val="102638"/>
@@ -17799,6 +18415,7 @@
               </a:defRPr>
             </a:lvl7pPr>
             <a:lvl8pPr>
+              <a:buNone/>
               <a:defRPr sz="3300" b="1">
                 <a:solidFill>
                   <a:srgbClr val="102638"/>
@@ -17809,6 +18426,7 @@
               </a:defRPr>
             </a:lvl8pPr>
             <a:lvl9pPr>
+              <a:buNone/>
               <a:defRPr sz="3300" b="1">
                 <a:solidFill>
                   <a:srgbClr val="102638"/>
@@ -17821,6 +18439,7 @@
           </a:lstStyle>
           <a:p xmlns:a="http://schemas.openxmlformats.org/drawingml/2006/main">
             <a:pPr>
+              <a:buNone/>
               <a:defRPr sz="3300" b="1">
                 <a:solidFill>
                   <a:srgbClr val="102638"/>
@@ -17888,6 +18507,7 @@
               </a:defRPr>
             </a:defPPr>
             <a:lvl1pPr>
+              <a:buNone/>
               <a:defRPr sz="1275" b="0">
                 <a:solidFill>
                   <a:srgbClr val="476071"/>
@@ -17898,6 +18518,7 @@
               </a:defRPr>
             </a:lvl1pPr>
             <a:lvl2pPr>
+              <a:buNone/>
               <a:defRPr sz="1275" b="0">
                 <a:solidFill>
                   <a:srgbClr val="476071"/>
@@ -17908,6 +18529,7 @@
               </a:defRPr>
             </a:lvl2pPr>
             <a:lvl3pPr>
+              <a:buNone/>
               <a:defRPr sz="1275" b="0">
                 <a:solidFill>
                   <a:srgbClr val="476071"/>
@@ -17918,6 +18540,7 @@
               </a:defRPr>
             </a:lvl3pPr>
             <a:lvl4pPr>
+              <a:buNone/>
               <a:defRPr sz="1275" b="0">
                 <a:solidFill>
                   <a:srgbClr val="476071"/>
@@ -17928,6 +18551,7 @@
               </a:defRPr>
             </a:lvl4pPr>
             <a:lvl5pPr>
+              <a:buNone/>
               <a:defRPr sz="1275" b="0">
                 <a:solidFill>
                   <a:srgbClr val="476071"/>
@@ -17938,6 +18562,7 @@
               </a:defRPr>
             </a:lvl5pPr>
             <a:lvl6pPr>
+              <a:buNone/>
               <a:defRPr sz="1275" b="0">
                 <a:solidFill>
                   <a:srgbClr val="476071"/>
@@ -17948,6 +18573,7 @@
               </a:defRPr>
             </a:lvl6pPr>
             <a:lvl7pPr>
+              <a:buNone/>
               <a:defRPr sz="1275" b="0">
                 <a:solidFill>
                   <a:srgbClr val="476071"/>
@@ -17958,6 +18584,7 @@
               </a:defRPr>
             </a:lvl7pPr>
             <a:lvl8pPr>
+              <a:buNone/>
               <a:defRPr sz="1275" b="0">
                 <a:solidFill>
                   <a:srgbClr val="476071"/>
@@ -17968,6 +18595,7 @@
               </a:defRPr>
             </a:lvl8pPr>
             <a:lvl9pPr>
+              <a:buNone/>
               <a:defRPr sz="1275" b="0">
                 <a:solidFill>
                   <a:srgbClr val="476071"/>
@@ -17980,6 +18608,7 @@
           </a:lstStyle>
           <a:p xmlns:a="http://schemas.openxmlformats.org/drawingml/2006/main">
             <a:pPr>
+              <a:buNone/>
               <a:defRPr sz="1275" b="0">
                 <a:solidFill>
                   <a:srgbClr val="476071"/>
@@ -18047,6 +18676,7 @@
               </a:defRPr>
             </a:defPPr>
             <a:lvl1pPr>
+              <a:buNone/>
               <a:defRPr sz="2100" b="1">
                 <a:solidFill>
                   <a:srgbClr val="007E87"/>
@@ -18057,6 +18687,7 @@
               </a:defRPr>
             </a:lvl1pPr>
             <a:lvl2pPr>
+              <a:buNone/>
               <a:defRPr sz="2100" b="1">
                 <a:solidFill>
                   <a:srgbClr val="007E87"/>
@@ -18067,6 +18698,7 @@
               </a:defRPr>
             </a:lvl2pPr>
             <a:lvl3pPr>
+              <a:buNone/>
               <a:defRPr sz="2100" b="1">
                 <a:solidFill>
                   <a:srgbClr val="007E87"/>
@@ -18077,6 +18709,7 @@
               </a:defRPr>
             </a:lvl3pPr>
             <a:lvl4pPr>
+              <a:buNone/>
               <a:defRPr sz="2100" b="1">
                 <a:solidFill>
                   <a:srgbClr val="007E87"/>
@@ -18087,6 +18720,7 @@
               </a:defRPr>
             </a:lvl4pPr>
             <a:lvl5pPr>
+              <a:buNone/>
               <a:defRPr sz="2100" b="1">
                 <a:solidFill>
                   <a:srgbClr val="007E87"/>
@@ -18097,6 +18731,7 @@
               </a:defRPr>
             </a:lvl5pPr>
             <a:lvl6pPr>
+              <a:buNone/>
               <a:defRPr sz="2100" b="1">
                 <a:solidFill>
                   <a:srgbClr val="007E87"/>
@@ -18107,6 +18742,7 @@
               </a:defRPr>
             </a:lvl6pPr>
             <a:lvl7pPr>
+              <a:buNone/>
               <a:defRPr sz="2100" b="1">
                 <a:solidFill>
                   <a:srgbClr val="007E87"/>
@@ -18117,6 +18753,7 @@
               </a:defRPr>
             </a:lvl7pPr>
             <a:lvl8pPr>
+              <a:buNone/>
               <a:defRPr sz="2100" b="1">
                 <a:solidFill>
                   <a:srgbClr val="007E87"/>
@@ -18127,6 +18764,7 @@
               </a:defRPr>
             </a:lvl8pPr>
             <a:lvl9pPr>
+              <a:buNone/>
               <a:defRPr sz="2100" b="1">
                 <a:solidFill>
                   <a:srgbClr val="007E87"/>
@@ -18139,6 +18777,7 @@
           </a:lstStyle>
           <a:p xmlns:a="http://schemas.openxmlformats.org/drawingml/2006/main">
             <a:pPr>
+              <a:buNone/>
               <a:defRPr sz="2100" b="1">
                 <a:solidFill>
                   <a:srgbClr val="007E87"/>
@@ -18206,6 +18845,7 @@
               </a:defRPr>
             </a:defPPr>
             <a:lvl1pPr>
+              <a:buNone/>
               <a:defRPr sz="1950" b="0">
                 <a:solidFill>
                   <a:srgbClr val="102638"/>
@@ -18216,6 +18856,7 @@
               </a:defRPr>
             </a:lvl1pPr>
             <a:lvl2pPr>
+              <a:buNone/>
               <a:defRPr sz="1950" b="0">
                 <a:solidFill>
                   <a:srgbClr val="102638"/>
@@ -18226,6 +18867,7 @@
               </a:defRPr>
             </a:lvl2pPr>
             <a:lvl3pPr>
+              <a:buNone/>
               <a:defRPr sz="1950" b="0">
                 <a:solidFill>
                   <a:srgbClr val="102638"/>
@@ -18236,6 +18878,7 @@
               </a:defRPr>
             </a:lvl3pPr>
             <a:lvl4pPr>
+              <a:buNone/>
               <a:defRPr sz="1950" b="0">
                 <a:solidFill>
                   <a:srgbClr val="102638"/>
@@ -18246,6 +18889,7 @@
               </a:defRPr>
             </a:lvl4pPr>
             <a:lvl5pPr>
+              <a:buNone/>
               <a:defRPr sz="1950" b="0">
                 <a:solidFill>
                   <a:srgbClr val="102638"/>
@@ -18256,6 +18900,7 @@
               </a:defRPr>
             </a:lvl5pPr>
             <a:lvl6pPr>
+              <a:buNone/>
               <a:defRPr sz="1950" b="0">
                 <a:solidFill>
                   <a:srgbClr val="102638"/>
@@ -18266,6 +18911,7 @@
               </a:defRPr>
             </a:lvl6pPr>
             <a:lvl7pPr>
+              <a:buNone/>
               <a:defRPr sz="1950" b="0">
                 <a:solidFill>
                   <a:srgbClr val="102638"/>
@@ -18276,6 +18922,7 @@
               </a:defRPr>
             </a:lvl7pPr>
             <a:lvl8pPr>
+              <a:buNone/>
               <a:defRPr sz="1950" b="0">
                 <a:solidFill>
                   <a:srgbClr val="102638"/>
@@ -18286,6 +18933,7 @@
               </a:defRPr>
             </a:lvl8pPr>
             <a:lvl9pPr>
+              <a:buNone/>
               <a:defRPr sz="1950" b="0">
                 <a:solidFill>
                   <a:srgbClr val="102638"/>
@@ -18298,6 +18946,7 @@
           </a:lstStyle>
           <a:p xmlns:a="http://schemas.openxmlformats.org/drawingml/2006/main">
             <a:pPr>
+              <a:buNone/>
               <a:defRPr sz="1950" b="0">
                 <a:solidFill>
                   <a:srgbClr val="102638"/>
@@ -18326,6 +18975,7 @@
           </a:p>
           <a:p xmlns:a="http://schemas.openxmlformats.org/drawingml/2006/main">
             <a:pPr>
+              <a:buNone/>
               <a:defRPr sz="1950" b="0">
                 <a:solidFill>
                   <a:srgbClr val="102638"/>
@@ -18393,6 +19043,7 @@
               </a:defRPr>
             </a:defPPr>
             <a:lvl1pPr>
+              <a:buNone/>
               <a:defRPr sz="2100" b="1">
                 <a:solidFill>
                   <a:srgbClr val="007E87"/>
@@ -18403,6 +19054,7 @@
               </a:defRPr>
             </a:lvl1pPr>
             <a:lvl2pPr>
+              <a:buNone/>
               <a:defRPr sz="2100" b="1">
                 <a:solidFill>
                   <a:srgbClr val="007E87"/>
@@ -18413,6 +19065,7 @@
               </a:defRPr>
             </a:lvl2pPr>
             <a:lvl3pPr>
+              <a:buNone/>
               <a:defRPr sz="2100" b="1">
                 <a:solidFill>
                   <a:srgbClr val="007E87"/>
@@ -18423,6 +19076,7 @@
               </a:defRPr>
             </a:lvl3pPr>
             <a:lvl4pPr>
+              <a:buNone/>
               <a:defRPr sz="2100" b="1">
                 <a:solidFill>
                   <a:srgbClr val="007E87"/>
@@ -18433,6 +19087,7 @@
               </a:defRPr>
             </a:lvl4pPr>
             <a:lvl5pPr>
+              <a:buNone/>
               <a:defRPr sz="2100" b="1">
                 <a:solidFill>
                   <a:srgbClr val="007E87"/>
@@ -18443,6 +19098,7 @@
               </a:defRPr>
             </a:lvl5pPr>
             <a:lvl6pPr>
+              <a:buNone/>
               <a:defRPr sz="2100" b="1">
                 <a:solidFill>
                   <a:srgbClr val="007E87"/>
@@ -18453,6 +19109,7 @@
               </a:defRPr>
             </a:lvl6pPr>
             <a:lvl7pPr>
+              <a:buNone/>
               <a:defRPr sz="2100" b="1">
                 <a:solidFill>
                   <a:srgbClr val="007E87"/>
@@ -18463,6 +19120,7 @@
               </a:defRPr>
             </a:lvl7pPr>
             <a:lvl8pPr>
+              <a:buNone/>
               <a:defRPr sz="2100" b="1">
                 <a:solidFill>
                   <a:srgbClr val="007E87"/>
@@ -18473,6 +19131,7 @@
               </a:defRPr>
             </a:lvl8pPr>
             <a:lvl9pPr>
+              <a:buNone/>
               <a:defRPr sz="2100" b="1">
                 <a:solidFill>
                   <a:srgbClr val="007E87"/>
@@ -18485,6 +19144,7 @@
           </a:lstStyle>
           <a:p xmlns:a="http://schemas.openxmlformats.org/drawingml/2006/main">
             <a:pPr>
+              <a:buNone/>
               <a:defRPr sz="2100" b="1">
                 <a:solidFill>
                   <a:srgbClr val="007E87"/>
@@ -18552,6 +19212,7 @@
               </a:defRPr>
             </a:defPPr>
             <a:lvl1pPr>
+              <a:buNone/>
               <a:defRPr sz="1950" b="0">
                 <a:solidFill>
                   <a:srgbClr val="102638"/>
@@ -18562,6 +19223,7 @@
               </a:defRPr>
             </a:lvl1pPr>
             <a:lvl2pPr>
+              <a:buNone/>
               <a:defRPr sz="1950" b="0">
                 <a:solidFill>
                   <a:srgbClr val="102638"/>
@@ -18572,6 +19234,7 @@
               </a:defRPr>
             </a:lvl2pPr>
             <a:lvl3pPr>
+              <a:buNone/>
               <a:defRPr sz="1950" b="0">
                 <a:solidFill>
                   <a:srgbClr val="102638"/>
@@ -18582,6 +19245,7 @@
               </a:defRPr>
             </a:lvl3pPr>
             <a:lvl4pPr>
+              <a:buNone/>
               <a:defRPr sz="1950" b="0">
                 <a:solidFill>
                   <a:srgbClr val="102638"/>
@@ -18592,6 +19256,7 @@
               </a:defRPr>
             </a:lvl4pPr>
             <a:lvl5pPr>
+              <a:buNone/>
               <a:defRPr sz="1950" b="0">
                 <a:solidFill>
                   <a:srgbClr val="102638"/>
@@ -18602,6 +19267,7 @@
               </a:defRPr>
             </a:lvl5pPr>
             <a:lvl6pPr>
+              <a:buNone/>
               <a:defRPr sz="1950" b="0">
                 <a:solidFill>
                   <a:srgbClr val="102638"/>
@@ -18612,6 +19278,7 @@
               </a:defRPr>
             </a:lvl6pPr>
             <a:lvl7pPr>
+              <a:buNone/>
               <a:defRPr sz="1950" b="0">
                 <a:solidFill>
                   <a:srgbClr val="102638"/>
@@ -18622,6 +19289,7 @@
               </a:defRPr>
             </a:lvl7pPr>
             <a:lvl8pPr>
+              <a:buNone/>
               <a:defRPr sz="1950" b="0">
                 <a:solidFill>
                   <a:srgbClr val="102638"/>
@@ -18632,6 +19300,7 @@
               </a:defRPr>
             </a:lvl8pPr>
             <a:lvl9pPr>
+              <a:buNone/>
               <a:defRPr sz="1950" b="0">
                 <a:solidFill>
                   <a:srgbClr val="102638"/>
@@ -18644,6 +19313,7 @@
           </a:lstStyle>
           <a:p xmlns:a="http://schemas.openxmlformats.org/drawingml/2006/main">
             <a:pPr>
+              <a:buNone/>
               <a:defRPr sz="1950" b="0">
                 <a:solidFill>
                   <a:srgbClr val="102638"/>
@@ -18672,6 +19342,7 @@
           </a:p>
           <a:p xmlns:a="http://schemas.openxmlformats.org/drawingml/2006/main">
             <a:pPr>
+              <a:buNone/>
               <a:defRPr sz="1950" b="0">
                 <a:solidFill>
                   <a:srgbClr val="102638"/>
@@ -18739,6 +19410,7 @@
               </a:defRPr>
             </a:defPPr>
             <a:lvl1pPr>
+              <a:buNone/>
               <a:defRPr sz="2250" b="1">
                 <a:solidFill>
                   <a:srgbClr val="007E87"/>
@@ -18749,6 +19421,7 @@
               </a:defRPr>
             </a:lvl1pPr>
             <a:lvl2pPr>
+              <a:buNone/>
               <a:defRPr sz="2250" b="1">
                 <a:solidFill>
                   <a:srgbClr val="007E87"/>
@@ -18759,6 +19432,7 @@
               </a:defRPr>
             </a:lvl2pPr>
             <a:lvl3pPr>
+              <a:buNone/>
               <a:defRPr sz="2250" b="1">
                 <a:solidFill>
                   <a:srgbClr val="007E87"/>
@@ -18769,6 +19443,7 @@
               </a:defRPr>
             </a:lvl3pPr>
             <a:lvl4pPr>
+              <a:buNone/>
               <a:defRPr sz="2250" b="1">
                 <a:solidFill>
                   <a:srgbClr val="007E87"/>
@@ -18779,6 +19454,7 @@
               </a:defRPr>
             </a:lvl4pPr>
             <a:lvl5pPr>
+              <a:buNone/>
               <a:defRPr sz="2250" b="1">
                 <a:solidFill>
                   <a:srgbClr val="007E87"/>
@@ -18789,6 +19465,7 @@
               </a:defRPr>
             </a:lvl5pPr>
             <a:lvl6pPr>
+              <a:buNone/>
               <a:defRPr sz="2250" b="1">
                 <a:solidFill>
                   <a:srgbClr val="007E87"/>
@@ -18799,6 +19476,7 @@
               </a:defRPr>
             </a:lvl6pPr>
             <a:lvl7pPr>
+              <a:buNone/>
               <a:defRPr sz="2250" b="1">
                 <a:solidFill>
                   <a:srgbClr val="007E87"/>
@@ -18809,6 +19487,7 @@
               </a:defRPr>
             </a:lvl7pPr>
             <a:lvl8pPr>
+              <a:buNone/>
               <a:defRPr sz="2250" b="1">
                 <a:solidFill>
                   <a:srgbClr val="007E87"/>
@@ -18819,6 +19498,7 @@
               </a:defRPr>
             </a:lvl8pPr>
             <a:lvl9pPr>
+              <a:buNone/>
               <a:defRPr sz="2250" b="1">
                 <a:solidFill>
                   <a:srgbClr val="007E87"/>
@@ -18831,6 +19511,7 @@
           </a:lstStyle>
           <a:p xmlns:a="http://schemas.openxmlformats.org/drawingml/2006/main">
             <a:pPr>
+              <a:buNone/>
               <a:defRPr sz="2250" b="1">
                 <a:solidFill>
                   <a:srgbClr val="007E87"/>
@@ -18898,6 +19579,7 @@
               </a:defRPr>
             </a:defPPr>
             <a:lvl1pPr>
+              <a:buNone/>
               <a:defRPr sz="1350" b="0">
                 <a:solidFill>
                   <a:srgbClr val="476071"/>
@@ -18908,6 +19590,7 @@
               </a:defRPr>
             </a:lvl1pPr>
             <a:lvl2pPr>
+              <a:buNone/>
               <a:defRPr sz="1350" b="0">
                 <a:solidFill>
                   <a:srgbClr val="476071"/>
@@ -18918,6 +19601,7 @@
               </a:defRPr>
             </a:lvl2pPr>
             <a:lvl3pPr>
+              <a:buNone/>
               <a:defRPr sz="1350" b="0">
                 <a:solidFill>
                   <a:srgbClr val="476071"/>
@@ -18928,6 +19612,7 @@
               </a:defRPr>
             </a:lvl3pPr>
             <a:lvl4pPr>
+              <a:buNone/>
               <a:defRPr sz="1350" b="0">
                 <a:solidFill>
                   <a:srgbClr val="476071"/>
@@ -18938,6 +19623,7 @@
               </a:defRPr>
             </a:lvl4pPr>
             <a:lvl5pPr>
+              <a:buNone/>
               <a:defRPr sz="1350" b="0">
                 <a:solidFill>
                   <a:srgbClr val="476071"/>
@@ -18948,6 +19634,7 @@
               </a:defRPr>
             </a:lvl5pPr>
             <a:lvl6pPr>
+              <a:buNone/>
               <a:defRPr sz="1350" b="0">
                 <a:solidFill>
                   <a:srgbClr val="476071"/>
@@ -18958,6 +19645,7 @@
               </a:defRPr>
             </a:lvl6pPr>
             <a:lvl7pPr>
+              <a:buNone/>
               <a:defRPr sz="1350" b="0">
                 <a:solidFill>
                   <a:srgbClr val="476071"/>
@@ -18968,6 +19656,7 @@
               </a:defRPr>
             </a:lvl7pPr>
             <a:lvl8pPr>
+              <a:buNone/>
               <a:defRPr sz="1350" b="0">
                 <a:solidFill>
                   <a:srgbClr val="476071"/>
@@ -18978,6 +19667,7 @@
               </a:defRPr>
             </a:lvl8pPr>
             <a:lvl9pPr>
+              <a:buNone/>
               <a:defRPr sz="1350" b="0">
                 <a:solidFill>
                   <a:srgbClr val="476071"/>
@@ -18990,6 +19680,7 @@
           </a:lstStyle>
           <a:p xmlns:a="http://schemas.openxmlformats.org/drawingml/2006/main">
             <a:pPr>
+              <a:buNone/>
               <a:defRPr sz="1350" b="0">
                 <a:solidFill>
                   <a:srgbClr val="476071"/>
@@ -19086,6 +19777,7 @@
               </a:defRPr>
             </a:defPPr>
             <a:lvl1pPr>
+              <a:buNone/>
               <a:defRPr sz="3300" b="1">
                 <a:solidFill>
                   <a:srgbClr val="102638"/>
@@ -19096,6 +19788,7 @@
               </a:defRPr>
             </a:lvl1pPr>
             <a:lvl2pPr>
+              <a:buNone/>
               <a:defRPr sz="3300" b="1">
                 <a:solidFill>
                   <a:srgbClr val="102638"/>
@@ -19106,6 +19799,7 @@
               </a:defRPr>
             </a:lvl2pPr>
             <a:lvl3pPr>
+              <a:buNone/>
               <a:defRPr sz="3300" b="1">
                 <a:solidFill>
                   <a:srgbClr val="102638"/>
@@ -19116,6 +19810,7 @@
               </a:defRPr>
             </a:lvl3pPr>
             <a:lvl4pPr>
+              <a:buNone/>
               <a:defRPr sz="3300" b="1">
                 <a:solidFill>
                   <a:srgbClr val="102638"/>
@@ -19126,6 +19821,7 @@
               </a:defRPr>
             </a:lvl4pPr>
             <a:lvl5pPr>
+              <a:buNone/>
               <a:defRPr sz="3300" b="1">
                 <a:solidFill>
                   <a:srgbClr val="102638"/>
@@ -19136,6 +19832,7 @@
               </a:defRPr>
             </a:lvl5pPr>
             <a:lvl6pPr>
+              <a:buNone/>
               <a:defRPr sz="3300" b="1">
                 <a:solidFill>
                   <a:srgbClr val="102638"/>
@@ -19146,6 +19843,7 @@
               </a:defRPr>
             </a:lvl6pPr>
             <a:lvl7pPr>
+              <a:buNone/>
               <a:defRPr sz="3300" b="1">
                 <a:solidFill>
                   <a:srgbClr val="102638"/>
@@ -19156,6 +19854,7 @@
               </a:defRPr>
             </a:lvl7pPr>
             <a:lvl8pPr>
+              <a:buNone/>
               <a:defRPr sz="3300" b="1">
                 <a:solidFill>
                   <a:srgbClr val="102638"/>
@@ -19166,6 +19865,7 @@
               </a:defRPr>
             </a:lvl8pPr>
             <a:lvl9pPr>
+              <a:buNone/>
               <a:defRPr sz="3300" b="1">
                 <a:solidFill>
                   <a:srgbClr val="102638"/>
@@ -19178,6 +19878,7 @@
           </a:lstStyle>
           <a:p xmlns:a="http://schemas.openxmlformats.org/drawingml/2006/main">
             <a:pPr>
+              <a:buNone/>
               <a:defRPr sz="3300" b="1">
                 <a:solidFill>
                   <a:srgbClr val="102638"/>
@@ -19245,6 +19946,7 @@
               </a:defRPr>
             </a:defPPr>
             <a:lvl1pPr>
+              <a:buNone/>
               <a:defRPr sz="1275" b="0">
                 <a:solidFill>
                   <a:srgbClr val="476071"/>
@@ -19255,6 +19957,7 @@
               </a:defRPr>
             </a:lvl1pPr>
             <a:lvl2pPr>
+              <a:buNone/>
               <a:defRPr sz="1275" b="0">
                 <a:solidFill>
                   <a:srgbClr val="476071"/>
@@ -19265,6 +19968,7 @@
               </a:defRPr>
             </a:lvl2pPr>
             <a:lvl3pPr>
+              <a:buNone/>
               <a:defRPr sz="1275" b="0">
                 <a:solidFill>
                   <a:srgbClr val="476071"/>
@@ -19275,6 +19979,7 @@
               </a:defRPr>
             </a:lvl3pPr>
             <a:lvl4pPr>
+              <a:buNone/>
               <a:defRPr sz="1275" b="0">
                 <a:solidFill>
                   <a:srgbClr val="476071"/>
@@ -19285,6 +19990,7 @@
               </a:defRPr>
             </a:lvl4pPr>
             <a:lvl5pPr>
+              <a:buNone/>
               <a:defRPr sz="1275" b="0">
                 <a:solidFill>
                   <a:srgbClr val="476071"/>
@@ -19295,6 +20001,7 @@
               </a:defRPr>
             </a:lvl5pPr>
             <a:lvl6pPr>
+              <a:buNone/>
               <a:defRPr sz="1275" b="0">
                 <a:solidFill>
                   <a:srgbClr val="476071"/>
@@ -19305,6 +20012,7 @@
               </a:defRPr>
             </a:lvl6pPr>
             <a:lvl7pPr>
+              <a:buNone/>
               <a:defRPr sz="1275" b="0">
                 <a:solidFill>
                   <a:srgbClr val="476071"/>
@@ -19315,6 +20023,7 @@
               </a:defRPr>
             </a:lvl7pPr>
             <a:lvl8pPr>
+              <a:buNone/>
               <a:defRPr sz="1275" b="0">
                 <a:solidFill>
                   <a:srgbClr val="476071"/>
@@ -19325,6 +20034,7 @@
               </a:defRPr>
             </a:lvl8pPr>
             <a:lvl9pPr>
+              <a:buNone/>
               <a:defRPr sz="1275" b="0">
                 <a:solidFill>
                   <a:srgbClr val="476071"/>
@@ -19337,6 +20047,7 @@
           </a:lstStyle>
           <a:p xmlns:a="http://schemas.openxmlformats.org/drawingml/2006/main">
             <a:pPr>
+              <a:buNone/>
               <a:defRPr sz="1275" b="0">
                 <a:solidFill>
                   <a:srgbClr val="476071"/>
@@ -19365,7 +20076,7 @@
           <p:cNvPr id="3" name="">
             <a:extLst xmlns:a="http://schemas.openxmlformats.org/drawingml/2006/main">
               <a:ext uri="{FF2B5EF4-FFF2-40B4-BE49-F238E27FC236}">
-                <a16:creationId xmlns:a16="http://schemas.microsoft.com/office/drawing/2014/main" id="{9609310D-657B-4D94-81D2-7BD013D32E95}"/>
+                <a16:creationId xmlns:a16="http://schemas.microsoft.com/office/drawing/2014/main" id="{F0D9DCE3-B152-43E9-8732-9B7832B12BC9}"/>
               </a:ext>
             </a:extLst>
           </p:cNvPr>
@@ -19844,6 +20555,7 @@
               </a:defRPr>
             </a:defPPr>
             <a:lvl1pPr>
+              <a:buNone/>
               <a:defRPr sz="2175" b="1">
                 <a:solidFill>
                   <a:srgbClr val="007E87"/>
@@ -19854,6 +20566,7 @@
               </a:defRPr>
             </a:lvl1pPr>
             <a:lvl2pPr>
+              <a:buNone/>
               <a:defRPr sz="2175" b="1">
                 <a:solidFill>
                   <a:srgbClr val="007E87"/>
@@ -19864,6 +20577,7 @@
               </a:defRPr>
             </a:lvl2pPr>
             <a:lvl3pPr>
+              <a:buNone/>
               <a:defRPr sz="2175" b="1">
                 <a:solidFill>
                   <a:srgbClr val="007E87"/>
@@ -19874,6 +20588,7 @@
               </a:defRPr>
             </a:lvl3pPr>
             <a:lvl4pPr>
+              <a:buNone/>
               <a:defRPr sz="2175" b="1">
                 <a:solidFill>
                   <a:srgbClr val="007E87"/>
@@ -19884,6 +20599,7 @@
               </a:defRPr>
             </a:lvl4pPr>
             <a:lvl5pPr>
+              <a:buNone/>
               <a:defRPr sz="2175" b="1">
                 <a:solidFill>
                   <a:srgbClr val="007E87"/>
@@ -19894,6 +20610,7 @@
               </a:defRPr>
             </a:lvl5pPr>
             <a:lvl6pPr>
+              <a:buNone/>
               <a:defRPr sz="2175" b="1">
                 <a:solidFill>
                   <a:srgbClr val="007E87"/>
@@ -19904,6 +20621,7 @@
               </a:defRPr>
             </a:lvl6pPr>
             <a:lvl7pPr>
+              <a:buNone/>
               <a:defRPr sz="2175" b="1">
                 <a:solidFill>
                   <a:srgbClr val="007E87"/>
@@ -19914,6 +20632,7 @@
               </a:defRPr>
             </a:lvl7pPr>
             <a:lvl8pPr>
+              <a:buNone/>
               <a:defRPr sz="2175" b="1">
                 <a:solidFill>
                   <a:srgbClr val="007E87"/>
@@ -19924,6 +20643,7 @@
               </a:defRPr>
             </a:lvl8pPr>
             <a:lvl9pPr>
+              <a:buNone/>
               <a:defRPr sz="2175" b="1">
                 <a:solidFill>
                   <a:srgbClr val="007E87"/>
@@ -19936,6 +20656,7 @@
           </a:lstStyle>
           <a:p xmlns:a="http://schemas.openxmlformats.org/drawingml/2006/main">
             <a:pPr>
+              <a:buNone/>
               <a:defRPr sz="2175" b="1">
                 <a:solidFill>
                   <a:srgbClr val="007E87"/>
@@ -19953,7 +20674,7 @@
                 <a:latin typeface="DejaVu Sans"/>
                 <a:ea typeface="DejaVu Sans"/>
                 <a:cs typeface="DejaVu Sans"/>
-                <a:hlinkClick xmlns:r="http://schemas.openxmlformats.org/officeDocument/2006/relationships" r:id="R7dee3f55b8854e8f"/>
+                <a:hlinkClick xmlns:r="http://schemas.openxmlformats.org/officeDocument/2006/relationships" r:id="Rb40bdec3a1244a95"/>
               </a:rPr>
               <a:t>Abrir simulador</a:t>
             </a:r>
@@ -20004,6 +20725,7 @@
               </a:defRPr>
             </a:defPPr>
             <a:lvl1pPr>
+              <a:buNone/>
               <a:defRPr sz="1350" b="0">
                 <a:solidFill>
                   <a:srgbClr val="476071"/>
@@ -20014,6 +20736,7 @@
               </a:defRPr>
             </a:lvl1pPr>
             <a:lvl2pPr>
+              <a:buNone/>
               <a:defRPr sz="1350" b="0">
                 <a:solidFill>
                   <a:srgbClr val="476071"/>
@@ -20024,6 +20747,7 @@
               </a:defRPr>
             </a:lvl2pPr>
             <a:lvl3pPr>
+              <a:buNone/>
               <a:defRPr sz="1350" b="0">
                 <a:solidFill>
                   <a:srgbClr val="476071"/>
@@ -20034,6 +20758,7 @@
               </a:defRPr>
             </a:lvl3pPr>
             <a:lvl4pPr>
+              <a:buNone/>
               <a:defRPr sz="1350" b="0">
                 <a:solidFill>
                   <a:srgbClr val="476071"/>
@@ -20044,6 +20769,7 @@
               </a:defRPr>
             </a:lvl4pPr>
             <a:lvl5pPr>
+              <a:buNone/>
               <a:defRPr sz="1350" b="0">
                 <a:solidFill>
                   <a:srgbClr val="476071"/>
@@ -20054,6 +20780,7 @@
               </a:defRPr>
             </a:lvl5pPr>
             <a:lvl6pPr>
+              <a:buNone/>
               <a:defRPr sz="1350" b="0">
                 <a:solidFill>
                   <a:srgbClr val="476071"/>
@@ -20064,6 +20791,7 @@
               </a:defRPr>
             </a:lvl6pPr>
             <a:lvl7pPr>
+              <a:buNone/>
               <a:defRPr sz="1350" b="0">
                 <a:solidFill>
                   <a:srgbClr val="476071"/>
@@ -20074,6 +20802,7 @@
               </a:defRPr>
             </a:lvl7pPr>
             <a:lvl8pPr>
+              <a:buNone/>
               <a:defRPr sz="1350" b="0">
                 <a:solidFill>
                   <a:srgbClr val="476071"/>
@@ -20084,6 +20813,7 @@
               </a:defRPr>
             </a:lvl8pPr>
             <a:lvl9pPr>
+              <a:buNone/>
               <a:defRPr sz="1350" b="0">
                 <a:solidFill>
                   <a:srgbClr val="476071"/>
@@ -20096,6 +20826,7 @@
           </a:lstStyle>
           <a:p xmlns:a="http://schemas.openxmlformats.org/drawingml/2006/main">
             <a:pPr>
+              <a:buNone/>
               <a:defRPr sz="1350" b="0">
                 <a:solidFill>
                   <a:srgbClr val="476071"/>

--- a/Presentacion/Avance_Financiera_Pacifico_30_oct_2026.pptx
+++ b/Presentacion/Avance_Financiera_Pacifico_30_oct_2026.pptx
@@ -2,26 +2,26 @@
 <file path=ppt/presentation.xml><?xml version="1.0" encoding="utf-8"?>
 <p:presentation xmlns:p="http://schemas.openxmlformats.org/presentationml/2006/main">
   <p:sldMasterIdLst>
-    <p:sldMasterId xmlns:r="http://schemas.openxmlformats.org/officeDocument/2006/relationships" id="2147483648" r:id="R4194250760f1496e"/>
+    <p:sldMasterId xmlns:r="http://schemas.openxmlformats.org/officeDocument/2006/relationships" id="2147483648" r:id="R2426cf42b274414d"/>
   </p:sldMasterIdLst>
   <p:notesMasterIdLst>
-    <p:notesMasterId xmlns:r="http://schemas.openxmlformats.org/officeDocument/2006/relationships" r:id="R6800d4dd78f74b75"/>
+    <p:notesMasterId xmlns:r="http://schemas.openxmlformats.org/officeDocument/2006/relationships" r:id="R0099701976364e86"/>
   </p:notesMasterIdLst>
   <p:sldIdLst>
-    <p:sldId xmlns:r="http://schemas.openxmlformats.org/officeDocument/2006/relationships" id="256" r:id="Rdc8a833493c5495b"/>
-    <p:sldId xmlns:r="http://schemas.openxmlformats.org/officeDocument/2006/relationships" id="257" r:id="Ra61ab16fc3c24ad1"/>
-    <p:sldId xmlns:r="http://schemas.openxmlformats.org/officeDocument/2006/relationships" id="258" r:id="Rbea6848bb9694cc0"/>
-    <p:sldId xmlns:r="http://schemas.openxmlformats.org/officeDocument/2006/relationships" id="259" r:id="Rc8490331ed0a4248"/>
-    <p:sldId xmlns:r="http://schemas.openxmlformats.org/officeDocument/2006/relationships" id="260" r:id="R0d7f5b678c1943e3"/>
-    <p:sldId xmlns:r="http://schemas.openxmlformats.org/officeDocument/2006/relationships" id="261" r:id="R9f46d9a3632442ba"/>
-    <p:sldId xmlns:r="http://schemas.openxmlformats.org/officeDocument/2006/relationships" id="262" r:id="R6d854621f4bb48fe"/>
-    <p:sldId xmlns:r="http://schemas.openxmlformats.org/officeDocument/2006/relationships" id="263" r:id="R980d1c69d5bd4119"/>
-    <p:sldId xmlns:r="http://schemas.openxmlformats.org/officeDocument/2006/relationships" id="264" r:id="R109199951c134ff4"/>
-    <p:sldId xmlns:r="http://schemas.openxmlformats.org/officeDocument/2006/relationships" id="265" r:id="Rb1c78414f18b43be"/>
-    <p:sldId xmlns:r="http://schemas.openxmlformats.org/officeDocument/2006/relationships" id="266" r:id="Rc928f2831ece4646"/>
-    <p:sldId xmlns:r="http://schemas.openxmlformats.org/officeDocument/2006/relationships" id="267" r:id="R72c9c9547ffa4959"/>
-    <p:sldId xmlns:r="http://schemas.openxmlformats.org/officeDocument/2006/relationships" id="268" r:id="R268228a686b84254"/>
-    <p:sldId xmlns:r="http://schemas.openxmlformats.org/officeDocument/2006/relationships" id="269" r:id="Rcd35af32d4b64e49"/>
+    <p:sldId xmlns:r="http://schemas.openxmlformats.org/officeDocument/2006/relationships" id="256" r:id="R6b9bcfe8ed9f4198"/>
+    <p:sldId xmlns:r="http://schemas.openxmlformats.org/officeDocument/2006/relationships" id="257" r:id="R6d73c6e6a71f434b"/>
+    <p:sldId xmlns:r="http://schemas.openxmlformats.org/officeDocument/2006/relationships" id="258" r:id="Rb85a1ef04f97420b"/>
+    <p:sldId xmlns:r="http://schemas.openxmlformats.org/officeDocument/2006/relationships" id="259" r:id="R5e5c988fe3454b88"/>
+    <p:sldId xmlns:r="http://schemas.openxmlformats.org/officeDocument/2006/relationships" id="260" r:id="R4ac866e75b824053"/>
+    <p:sldId xmlns:r="http://schemas.openxmlformats.org/officeDocument/2006/relationships" id="261" r:id="R5cc3bea3ff0c4a08"/>
+    <p:sldId xmlns:r="http://schemas.openxmlformats.org/officeDocument/2006/relationships" id="262" r:id="Rbfb1b700ff5d4a8c"/>
+    <p:sldId xmlns:r="http://schemas.openxmlformats.org/officeDocument/2006/relationships" id="263" r:id="R00a8153f18194ed0"/>
+    <p:sldId xmlns:r="http://schemas.openxmlformats.org/officeDocument/2006/relationships" id="264" r:id="R5e6a9b189c9c4b2f"/>
+    <p:sldId xmlns:r="http://schemas.openxmlformats.org/officeDocument/2006/relationships" id="265" r:id="R75faf32fc9094834"/>
+    <p:sldId xmlns:r="http://schemas.openxmlformats.org/officeDocument/2006/relationships" id="266" r:id="R697f7770760640eb"/>
+    <p:sldId xmlns:r="http://schemas.openxmlformats.org/officeDocument/2006/relationships" id="267" r:id="Rf13310b468a9467b"/>
+    <p:sldId xmlns:r="http://schemas.openxmlformats.org/officeDocument/2006/relationships" id="268" r:id="Rcd6c1636b84f403c"/>
+    <p:sldId xmlns:r="http://schemas.openxmlformats.org/officeDocument/2006/relationships" id="269" r:id="R4156cc30ff474c53"/>
   </p:sldIdLst>
   <p:sldSz cx="12192000" cy="6858000"/>
   <p:notesSz cx="6858000" cy="9144000"/>
@@ -455,7 +455,7 @@
           <a:lstStyle xmlns:a="http://schemas.openxmlformats.org/drawingml/2006/main"/>
           <a:p xmlns:a="http://schemas.openxmlformats.org/drawingml/2006/main">
             <a:r>
-              <a:t>Fuentes y alcance: https://github.com/hu-herrera/fin/blob/main/docs/entrega-profesor-fuentes/01_Informe_Diagnostico_Propuesta.md</a:t>
+              <a:t>Fuentes y alcance: https://github.com/hu-herrera/financiera-pacifico-entrega-docente/blob/main/01_Informe_Diagnostico_Propuesta.pdf</a:t>
             </a:r>
           </a:p>
         </p:txBody>
@@ -525,7 +525,12 @@
           <a:lstStyle xmlns:a="http://schemas.openxmlformats.org/drawingml/2006/main"/>
           <a:p xmlns:a="http://schemas.openxmlformats.org/drawingml/2006/main">
             <a:r>
-              <a:t>Fuentes y alcance: https://github.com/hu-herrera/fin/blob/main/docs/entrega-profesor-fuentes/Entregable-6.md. Commit de red 228ec2674d2b784b4cb67dab1128e969f681d3aa.</a:t>
+              <a:t>Fuentes y alcance: https://github.com/hu-herrera/financiera-pacifico-entrega-docente/blob/main/02_Entregables/Entregable_6.pdf. Commit de red 228ec2674d2b784b4cb67dab1128e969f681d3aa.</a:t>
+            </a:r>
+          </a:p>
+          <a:p xmlns:a="http://schemas.openxmlformats.org/drawingml/2006/main">
+            <a:r>
+              <a:t>Actualización del 25/10: https://github.com/hu-herrera/financiera-pacifico-entrega-docente/blob/main/Anexos/Cierre_25_oct_2026.md. Los resultados de 93 Node y 151 navegador tienen cortes y alcances separados. La admisión de video es política propuesta, sin control automático de una aplicación real.</a:t>
             </a:r>
           </a:p>
         </p:txBody>
@@ -595,7 +600,7 @@
           <a:lstStyle xmlns:a="http://schemas.openxmlformats.org/drawingml/2006/main"/>
           <a:p xmlns:a="http://schemas.openxmlformats.org/drawingml/2006/main">
             <a:r>
-              <a:t>Fuentes y alcance: https://github.com/hu-herrera/fin/blob/main/docs/entrega-profesor-fuentes/Entregable-7.md y Anexos/Presupuesto_Inventario.xlsx.</a:t>
+              <a:t>Fuentes y alcance: https://github.com/hu-herrera/financiera-pacifico-entrega-docente/blob/main/02_Entregables/Entregable_7.pdf y Anexos/Presupuesto_Inventario.xlsx.</a:t>
             </a:r>
           </a:p>
         </p:txBody>
@@ -665,7 +670,12 @@
           <a:lstStyle xmlns:a="http://schemas.openxmlformats.org/drawingml/2006/main"/>
           <a:p xmlns:a="http://schemas.openxmlformats.org/drawingml/2006/main">
             <a:r>
-              <a:t>Fuentes y alcance: https://github.com/hu-herrera/fin/blob/main/docs/entrega-profesor-fuentes/Entregable-3.md, https://github.com/hu-herrera/fin/blob/main/docs/entrega-profesor-fuentes/Entregable-7.md y solicitud de distribuidores de otra marca en ambas opciones.</a:t>
+              <a:t>Fuentes y alcance: https://github.com/hu-herrera/financiera-pacifico-entrega-docente/blob/main/02_Entregables/Entregable_3.pdf, https://github.com/hu-herrera/financiera-pacifico-entrega-docente/blob/main/02_Entregables/Entregable_7.pdf y solicitud de distribuidores de otra marca en ambas opciones.</a:t>
+            </a:r>
+          </a:p>
+          <a:p xmlns:a="http://schemas.openxmlformats.org/drawingml/2006/main">
+            <a:r>
+              <a:t>Actualización del 25/10: https://github.com/hu-herrera/financiera-pacifico-entrega-docente/blob/main/Anexos/Cierre_25_oct_2026.md. Los resultados de 93 Node y 151 navegador tienen cortes y alcances separados. La admisión de video es política propuesta, sin control automático de una aplicación real.</a:t>
             </a:r>
           </a:p>
         </p:txBody>
@@ -735,7 +745,7 @@
           <a:lstStyle xmlns:a="http://schemas.openxmlformats.org/drawingml/2006/main"/>
           <a:p xmlns:a="http://schemas.openxmlformats.org/drawingml/2006/main">
             <a:r>
-              <a:t>Fuentes y alcance: https://github.com/hu-herrera/fin/blob/main/docs/entrega-profesor-fuentes/Entregable-7.md</a:t>
+              <a:t>Fuentes y alcance: https://github.com/hu-herrera/financiera-pacifico-entrega-docente/blob/main/02_Entregables/Entregable_7.pdf</a:t>
             </a:r>
           </a:p>
         </p:txBody>
@@ -875,7 +885,7 @@
           <a:lstStyle xmlns:a="http://schemas.openxmlformats.org/drawingml/2006/main"/>
           <a:p xmlns:a="http://schemas.openxmlformats.org/drawingml/2006/main">
             <a:r>
-              <a:t>Fuentes y alcance: https://github.com/hu-herrera/fin/blob/main/docs/entrega-profesor-fuentes/Entregable-6.md y https://github.com/hu-herrera/fin/blob/main/docs/entrega-profesor-fuentes/03_Bitacora.md</a:t>
+              <a:t>Fuentes y alcance: https://github.com/hu-herrera/financiera-pacifico-entrega-docente/blob/main/02_Entregables/Entregable_6.pdf y https://github.com/hu-herrera/financiera-pacifico-entrega-docente/blob/main/03_Bitacora.pdf</a:t>
             </a:r>
           </a:p>
         </p:txBody>
@@ -945,7 +955,7 @@
           <a:lstStyle xmlns:a="http://schemas.openxmlformats.org/drawingml/2006/main"/>
           <a:p xmlns:a="http://schemas.openxmlformats.org/drawingml/2006/main">
             <a:r>
-              <a:t>Fuentes y alcance: https://github.com/hu-herrera/fin/blob/main/docs/entrega-profesor-fuentes/00_Caso_Oficial.md y https://github.com/hu-herrera/fin/blob/main/docs/entrega-profesor-fuentes/01_Informe_Diagnostico_Propuesta.md</a:t>
+              <a:t>Fuentes y alcance: https://github.com/hu-herrera/financiera-pacifico-entrega-docente/blob/main/00_Caso_Oficial.pdf y https://github.com/hu-herrera/financiera-pacifico-entrega-docente/blob/main/01_Informe_Diagnostico_Propuesta.pdf</a:t>
             </a:r>
           </a:p>
         </p:txBody>
@@ -1015,7 +1025,7 @@
           <a:lstStyle xmlns:a="http://schemas.openxmlformats.org/drawingml/2006/main"/>
           <a:p xmlns:a="http://schemas.openxmlformats.org/drawingml/2006/main">
             <a:r>
-              <a:t>Fuentes y alcance: https://github.com/hu-herrera/fin/blob/main/docs/entrega-profesor-fuentes/Entregable-1.md y https://github.com/hu-herrera/fin/blob/main/docs/entrega-profesor-fuentes/Entregable-3.md</a:t>
+              <a:t>Fuentes y alcance: https://github.com/hu-herrera/financiera-pacifico-entrega-docente/blob/main/02_Entregables/Entregable_1.pdf y https://github.com/hu-herrera/financiera-pacifico-entrega-docente/blob/main/02_Entregables/Entregable_3.pdf</a:t>
             </a:r>
           </a:p>
         </p:txBody>
@@ -1085,7 +1095,7 @@
           <a:lstStyle xmlns:a="http://schemas.openxmlformats.org/drawingml/2006/main"/>
           <a:p xmlns:a="http://schemas.openxmlformats.org/drawingml/2006/main">
             <a:r>
-              <a:t>Fuentes y alcance: https://github.com/hu-herrera/fin/blob/main/docs/entrega-profesor-fuentes/Entregable-3.md. Extracto del plano S06, alternativa B, Anexos/Topologias_ANTES_A_B.pdf.</a:t>
+              <a:t>Fuentes y alcance: https://github.com/hu-herrera/financiera-pacifico-entrega-docente/blob/main/02_Entregables/Entregable_3.pdf. Extracto del plano S06, alternativa B, Anexos/Topologias_ANTES_A_B.pdf.</a:t>
             </a:r>
           </a:p>
         </p:txBody>
@@ -1155,7 +1165,7 @@
           <a:lstStyle xmlns:a="http://schemas.openxmlformats.org/drawingml/2006/main"/>
           <a:p xmlns:a="http://schemas.openxmlformats.org/drawingml/2006/main">
             <a:r>
-              <a:t>Fuentes y alcance: https://github.com/hu-herrera/fin/blob/main/docs/entrega-profesor-fuentes/Entregable-2.md y https://github.com/hu-herrera/fin/blob/main/docs/entrega-profesor-fuentes/Entregable-7.md</a:t>
+              <a:t>Fuentes y alcance: https://github.com/hu-herrera/financiera-pacifico-entrega-docente/blob/main/02_Entregables/Entregable_2.pdf y https://github.com/hu-herrera/financiera-pacifico-entrega-docente/blob/main/02_Entregables/Entregable_7.pdf</a:t>
             </a:r>
           </a:p>
         </p:txBody>
@@ -1225,7 +1235,7 @@
           <a:lstStyle xmlns:a="http://schemas.openxmlformats.org/drawingml/2006/main"/>
           <a:p xmlns:a="http://schemas.openxmlformats.org/drawingml/2006/main">
             <a:r>
-              <a:t>Fuentes y alcance: https://github.com/hu-herrera/fin/blob/main/docs/entrega-profesor-fuentes/Entregable-4.md</a:t>
+              <a:t>Fuentes y alcance: https://github.com/hu-herrera/financiera-pacifico-entrega-docente/blob/main/02_Entregables/Entregable_4.pdf</a:t>
             </a:r>
           </a:p>
         </p:txBody>
@@ -1295,7 +1305,7 @@
           <a:lstStyle xmlns:a="http://schemas.openxmlformats.org/drawingml/2006/main"/>
           <a:p xmlns:a="http://schemas.openxmlformats.org/drawingml/2006/main">
             <a:r>
-              <a:t>Fuentes y alcance: https://github.com/hu-herrera/fin/blob/main/docs/entrega-profesor-fuentes/Entregable-3.md y https://github.com/hu-herrera/fin/blob/main/docs/entrega-profesor-fuentes/Entregable-4.md</a:t>
+              <a:t>Fuentes y alcance: https://github.com/hu-herrera/financiera-pacifico-entrega-docente/blob/main/02_Entregables/Entregable_3.pdf y https://github.com/hu-herrera/financiera-pacifico-entrega-docente/blob/main/02_Entregables/Entregable_4.pdf</a:t>
             </a:r>
           </a:p>
         </p:txBody>
@@ -1365,7 +1375,7 @@
           <a:lstStyle xmlns:a="http://schemas.openxmlformats.org/drawingml/2006/main"/>
           <a:p xmlns:a="http://schemas.openxmlformats.org/drawingml/2006/main">
             <a:r>
-              <a:t>Fuentes y alcance: https://github.com/hu-herrera/fin/blob/main/docs/entrega-profesor-fuentes/Entregable-5.md y https://github.com/hu-herrera/fin/blob/main/docs/entrega-profesor-fuentes/Entregable-6.md</a:t>
+              <a:t>Fuentes y alcance: https://github.com/hu-herrera/financiera-pacifico-entrega-docente/blob/main/02_Entregables/Entregable_5.pdf y https://github.com/hu-herrera/financiera-pacifico-entrega-docente/blob/main/02_Entregables/Entregable_6.pdf</a:t>
             </a:r>
           </a:p>
         </p:txBody>
@@ -3808,12 +3818,12 @@
   </p:cSld>
   <p:clrMap bg1="lt1" tx1="dk1" bg2="lt2" tx2="dk2" accent1="accent1" accent2="accent2" accent3="accent3" accent4="accent4" accent5="accent5" accent6="accent6" hlink="hlink" folHlink="folHlink"/>
   <p:sldLayoutIdLst>
-    <p:sldLayoutId xmlns:r="http://schemas.openxmlformats.org/officeDocument/2006/relationships" id="2147483649" r:id="R8c9c75c0fa814769"/>
-    <p:sldLayoutId xmlns:r="http://schemas.openxmlformats.org/officeDocument/2006/relationships" id="2147483650" r:id="Re54f8c1ea9db4c01"/>
-    <p:sldLayoutId xmlns:r="http://schemas.openxmlformats.org/officeDocument/2006/relationships" id="2147483651" r:id="Rfaa6b279bd0649df"/>
-    <p:sldLayoutId xmlns:r="http://schemas.openxmlformats.org/officeDocument/2006/relationships" id="2147483652" r:id="R3ee270e1cac34c50"/>
-    <p:sldLayoutId xmlns:r="http://schemas.openxmlformats.org/officeDocument/2006/relationships" id="2147483653" r:id="R8c5ddb07b9514e1e"/>
-    <p:sldLayoutId xmlns:r="http://schemas.openxmlformats.org/officeDocument/2006/relationships" id="2147483654" r:id="R2bc3785d87234d5d"/>
+    <p:sldLayoutId xmlns:r="http://schemas.openxmlformats.org/officeDocument/2006/relationships" id="2147483649" r:id="R95ea0e5c5e25448f"/>
+    <p:sldLayoutId xmlns:r="http://schemas.openxmlformats.org/officeDocument/2006/relationships" id="2147483650" r:id="Re13105d7362f4e78"/>
+    <p:sldLayoutId xmlns:r="http://schemas.openxmlformats.org/officeDocument/2006/relationships" id="2147483651" r:id="Rb70f73a2f9014486"/>
+    <p:sldLayoutId xmlns:r="http://schemas.openxmlformats.org/officeDocument/2006/relationships" id="2147483652" r:id="R0e004ae721bf4537"/>
+    <p:sldLayoutId xmlns:r="http://schemas.openxmlformats.org/officeDocument/2006/relationships" id="2147483653" r:id="R9376881f133140ff"/>
+    <p:sldLayoutId xmlns:r="http://schemas.openxmlformats.org/officeDocument/2006/relationships" id="2147483654" r:id="Rd581e3a0471c4549"/>
   </p:sldLayoutIdLst>
   <p:txStyles>
     <p:titleStyle>
@@ -7198,7 +7208,7 @@
           <p:cNvPr id="3" name="">
             <a:extLst xmlns:a="http://schemas.openxmlformats.org/drawingml/2006/main">
               <a:ext uri="{FF2B5EF4-FFF2-40B4-BE49-F238E27FC236}">
-                <a16:creationId xmlns:a16="http://schemas.microsoft.com/office/drawing/2014/main" id="{F46F360E-4600-4DFD-B1E4-7A5AD475DEF6}"/>
+                <a16:creationId xmlns:a16="http://schemas.microsoft.com/office/drawing/2014/main" id="{C1419A5E-A742-4158-AE22-0BDCBE0625C9}"/>
               </a:ext>
             </a:extLst>
           </p:cNvPr>
@@ -9911,7 +9921,7 @@
           <p:cNvPr id="3" name="">
             <a:extLst xmlns:a="http://schemas.openxmlformats.org/drawingml/2006/main">
               <a:ext uri="{FF2B5EF4-FFF2-40B4-BE49-F238E27FC236}">
-                <a16:creationId xmlns:a16="http://schemas.microsoft.com/office/drawing/2014/main" id="{EA0E5162-0247-4ACF-9595-18D42FA79D3C}"/>
+                <a16:creationId xmlns:a16="http://schemas.microsoft.com/office/drawing/2014/main" id="{8428CC72-24AC-4035-9212-323D33020BDB}"/>
               </a:ext>
             </a:extLst>
           </p:cNvPr>
@@ -10807,7 +10817,7 @@
           <p:cNvPr id="3" name="">
             <a:extLst xmlns:a="http://schemas.openxmlformats.org/drawingml/2006/main">
               <a:ext uri="{FF2B5EF4-FFF2-40B4-BE49-F238E27FC236}">
-                <a16:creationId xmlns:a16="http://schemas.microsoft.com/office/drawing/2014/main" id="{0D36082B-F320-4230-9C2E-B5A9ED483774}"/>
+                <a16:creationId xmlns:a16="http://schemas.microsoft.com/office/drawing/2014/main" id="{0AAE8C88-E4A8-412A-A030-6F516A80497D}"/>
               </a:ext>
             </a:extLst>
           </p:cNvPr>
@@ -14630,7 +14640,7 @@
           <p:cNvPr id="3" name="">
             <a:extLst xmlns:a="http://schemas.openxmlformats.org/drawingml/2006/main">
               <a:ext uri="{FF2B5EF4-FFF2-40B4-BE49-F238E27FC236}">
-                <a16:creationId xmlns:a16="http://schemas.microsoft.com/office/drawing/2014/main" id="{0FC5E5EB-57C5-4CA5-8A6F-DC73F0627014}"/>
+                <a16:creationId xmlns:a16="http://schemas.microsoft.com/office/drawing/2014/main" id="{4741B710-BECF-4BD7-BA09-5B203699E257}"/>
               </a:ext>
             </a:extLst>
           </p:cNvPr>
@@ -15526,7 +15536,7 @@
           <p:cNvPr id="3" name="">
             <a:extLst xmlns:a="http://schemas.openxmlformats.org/drawingml/2006/main">
               <a:ext uri="{FF2B5EF4-FFF2-40B4-BE49-F238E27FC236}">
-                <a16:creationId xmlns:a16="http://schemas.microsoft.com/office/drawing/2014/main" id="{44D5990C-D816-46BD-98C1-E0F1D006D72E}"/>
+                <a16:creationId xmlns:a16="http://schemas.microsoft.com/office/drawing/2014/main" id="{BDAD1A1A-70C3-4870-A9F9-9F6AB225D683}"/>
               </a:ext>
             </a:extLst>
           </p:cNvPr>
@@ -15536,7 +15546,7 @@
           <p:nvPr/>
         </p:nvPicPr>
         <p:blipFill>
-          <a:blip xmlns:r="http://schemas.openxmlformats.org/officeDocument/2006/relationships" xmlns:a="http://schemas.openxmlformats.org/drawingml/2006/main" r:embed="Rb644e37ffee04c07"/>
+          <a:blip xmlns:r="http://schemas.openxmlformats.org/officeDocument/2006/relationships" xmlns:a="http://schemas.openxmlformats.org/drawingml/2006/main" r:embed="R6ef150b843ae4dc0"/>
           <a:stretch xmlns:a="http://schemas.openxmlformats.org/drawingml/2006/main"/>
         </p:blipFill>
         <p:spPr>
@@ -16259,7 +16269,7 @@
           <p:cNvPr id="3" name="">
             <a:extLst xmlns:a="http://schemas.openxmlformats.org/drawingml/2006/main">
               <a:ext uri="{FF2B5EF4-FFF2-40B4-BE49-F238E27FC236}">
-                <a16:creationId xmlns:a16="http://schemas.microsoft.com/office/drawing/2014/main" id="{41027567-6C69-49E5-9F15-F71E90F03BCC}"/>
+                <a16:creationId xmlns:a16="http://schemas.microsoft.com/office/drawing/2014/main" id="{9F325825-EBFF-43D6-8FC1-53439A445821}"/>
               </a:ext>
             </a:extLst>
           </p:cNvPr>
@@ -17448,7 +17458,7 @@
           <p:cNvPr id="3" name="">
             <a:extLst xmlns:a="http://schemas.openxmlformats.org/drawingml/2006/main">
               <a:ext uri="{FF2B5EF4-FFF2-40B4-BE49-F238E27FC236}">
-                <a16:creationId xmlns:a16="http://schemas.microsoft.com/office/drawing/2014/main" id="{3E31069A-2BC1-43B1-BC7F-C0D021ACD509}"/>
+                <a16:creationId xmlns:a16="http://schemas.microsoft.com/office/drawing/2014/main" id="{B09C9EE7-C46A-431C-8351-1A0DB313404D}"/>
               </a:ext>
             </a:extLst>
           </p:cNvPr>
@@ -20076,7 +20086,7 @@
           <p:cNvPr id="3" name="">
             <a:extLst xmlns:a="http://schemas.openxmlformats.org/drawingml/2006/main">
               <a:ext uri="{FF2B5EF4-FFF2-40B4-BE49-F238E27FC236}">
-                <a16:creationId xmlns:a16="http://schemas.microsoft.com/office/drawing/2014/main" id="{F0D9DCE3-B152-43E9-8732-9B7832B12BC9}"/>
+                <a16:creationId xmlns:a16="http://schemas.microsoft.com/office/drawing/2014/main" id="{E6E8DA35-D29F-4DC9-8150-101E24936C6C}"/>
               </a:ext>
             </a:extLst>
           </p:cNvPr>
@@ -20674,7 +20684,7 @@
                 <a:latin typeface="DejaVu Sans"/>
                 <a:ea typeface="DejaVu Sans"/>
                 <a:cs typeface="DejaVu Sans"/>
-                <a:hlinkClick xmlns:r="http://schemas.openxmlformats.org/officeDocument/2006/relationships" r:id="Rb40bdec3a1244a95"/>
+                <a:hlinkClick xmlns:r="http://schemas.openxmlformats.org/officeDocument/2006/relationships" r:id="R082913b5666544ec"/>
               </a:rPr>
               <a:t>Abrir simulador</a:t>
             </a:r>

--- a/Presentacion/Avance_Financiera_Pacifico_30_oct_2026.pptx
+++ b/Presentacion/Avance_Financiera_Pacifico_30_oct_2026.pptx
@@ -2,26 +2,26 @@
 <file path=ppt/presentation.xml><?xml version="1.0" encoding="utf-8"?>
 <p:presentation xmlns:p="http://schemas.openxmlformats.org/presentationml/2006/main">
   <p:sldMasterIdLst>
-    <p:sldMasterId xmlns:r="http://schemas.openxmlformats.org/officeDocument/2006/relationships" id="2147483648" r:id="R2426cf42b274414d"/>
+    <p:sldMasterId xmlns:r="http://schemas.openxmlformats.org/officeDocument/2006/relationships" id="2147483648" r:id="R2891c5164fd449a0"/>
   </p:sldMasterIdLst>
   <p:notesMasterIdLst>
-    <p:notesMasterId xmlns:r="http://schemas.openxmlformats.org/officeDocument/2006/relationships" r:id="R0099701976364e86"/>
+    <p:notesMasterId xmlns:r="http://schemas.openxmlformats.org/officeDocument/2006/relationships" r:id="R6e919be1fee64b82"/>
   </p:notesMasterIdLst>
   <p:sldIdLst>
-    <p:sldId xmlns:r="http://schemas.openxmlformats.org/officeDocument/2006/relationships" id="256" r:id="R6b9bcfe8ed9f4198"/>
-    <p:sldId xmlns:r="http://schemas.openxmlformats.org/officeDocument/2006/relationships" id="257" r:id="R6d73c6e6a71f434b"/>
-    <p:sldId xmlns:r="http://schemas.openxmlformats.org/officeDocument/2006/relationships" id="258" r:id="Rb85a1ef04f97420b"/>
-    <p:sldId xmlns:r="http://schemas.openxmlformats.org/officeDocument/2006/relationships" id="259" r:id="R5e5c988fe3454b88"/>
-    <p:sldId xmlns:r="http://schemas.openxmlformats.org/officeDocument/2006/relationships" id="260" r:id="R4ac866e75b824053"/>
-    <p:sldId xmlns:r="http://schemas.openxmlformats.org/officeDocument/2006/relationships" id="261" r:id="R5cc3bea3ff0c4a08"/>
-    <p:sldId xmlns:r="http://schemas.openxmlformats.org/officeDocument/2006/relationships" id="262" r:id="Rbfb1b700ff5d4a8c"/>
-    <p:sldId xmlns:r="http://schemas.openxmlformats.org/officeDocument/2006/relationships" id="263" r:id="R00a8153f18194ed0"/>
-    <p:sldId xmlns:r="http://schemas.openxmlformats.org/officeDocument/2006/relationships" id="264" r:id="R5e6a9b189c9c4b2f"/>
-    <p:sldId xmlns:r="http://schemas.openxmlformats.org/officeDocument/2006/relationships" id="265" r:id="R75faf32fc9094834"/>
-    <p:sldId xmlns:r="http://schemas.openxmlformats.org/officeDocument/2006/relationships" id="266" r:id="R697f7770760640eb"/>
-    <p:sldId xmlns:r="http://schemas.openxmlformats.org/officeDocument/2006/relationships" id="267" r:id="Rf13310b468a9467b"/>
-    <p:sldId xmlns:r="http://schemas.openxmlformats.org/officeDocument/2006/relationships" id="268" r:id="Rcd6c1636b84f403c"/>
-    <p:sldId xmlns:r="http://schemas.openxmlformats.org/officeDocument/2006/relationships" id="269" r:id="R4156cc30ff474c53"/>
+    <p:sldId xmlns:r="http://schemas.openxmlformats.org/officeDocument/2006/relationships" id="256" r:id="R7dd5a2e4a4434026"/>
+    <p:sldId xmlns:r="http://schemas.openxmlformats.org/officeDocument/2006/relationships" id="257" r:id="R5b564ddf205c4ee5"/>
+    <p:sldId xmlns:r="http://schemas.openxmlformats.org/officeDocument/2006/relationships" id="258" r:id="Rfa2a1cfb49f94742"/>
+    <p:sldId xmlns:r="http://schemas.openxmlformats.org/officeDocument/2006/relationships" id="259" r:id="R7a1b4ad4db9e4bcb"/>
+    <p:sldId xmlns:r="http://schemas.openxmlformats.org/officeDocument/2006/relationships" id="260" r:id="R9b37edb6cfb24f71"/>
+    <p:sldId xmlns:r="http://schemas.openxmlformats.org/officeDocument/2006/relationships" id="261" r:id="R66cf02a52bd744a3"/>
+    <p:sldId xmlns:r="http://schemas.openxmlformats.org/officeDocument/2006/relationships" id="262" r:id="R0ade0ea8c03f4a01"/>
+    <p:sldId xmlns:r="http://schemas.openxmlformats.org/officeDocument/2006/relationships" id="263" r:id="Rc5806a58639241f2"/>
+    <p:sldId xmlns:r="http://schemas.openxmlformats.org/officeDocument/2006/relationships" id="264" r:id="R0c6c1d96a5f746ac"/>
+    <p:sldId xmlns:r="http://schemas.openxmlformats.org/officeDocument/2006/relationships" id="265" r:id="Rd7a5d9c5be4f4128"/>
+    <p:sldId xmlns:r="http://schemas.openxmlformats.org/officeDocument/2006/relationships" id="266" r:id="Rd70ef328d5484118"/>
+    <p:sldId xmlns:r="http://schemas.openxmlformats.org/officeDocument/2006/relationships" id="267" r:id="R6d387f63cbf44361"/>
+    <p:sldId xmlns:r="http://schemas.openxmlformats.org/officeDocument/2006/relationships" id="268" r:id="R0ccd83569c444ed9"/>
+    <p:sldId xmlns:r="http://schemas.openxmlformats.org/officeDocument/2006/relationships" id="269" r:id="R8606a73d627e4a56"/>
   </p:sldIdLst>
   <p:sldSz cx="12192000" cy="6858000"/>
   <p:notesSz cx="6858000" cy="9144000"/>
@@ -458,6 +458,11 @@
               <a:t>Fuentes y alcance: https://github.com/hu-herrera/financiera-pacifico-entrega-docente/blob/main/01_Informe_Diagnostico_Propuesta.pdf</a:t>
             </a:r>
           </a:p>
+          <a:p xmlns:a="http://schemas.openxmlformats.org/drawingml/2006/main">
+            <a:r>
+              <a:t>Revisión WAN-3: cuatro transportes en central y sucursales. Fuente: https://github.com/hu-herrera/financiera-pacifico-entrega-docente/blob/main/Anexos/Continuidad_Cuatro_WAN_25_oct_2026.md</a:t>
+            </a:r>
+          </a:p>
         </p:txBody>
       </p:sp>
       <p:sp>
@@ -533,6 +538,11 @@
               <a:t>Actualización del 25/10: https://github.com/hu-herrera/financiera-pacifico-entrega-docente/blob/main/Anexos/Cierre_25_oct_2026.md. Los resultados de 93 Node y 151 navegador tienen cortes y alcances separados. La admisión de video es política propuesta, sin control automático de una aplicación real.</a:t>
             </a:r>
           </a:p>
+          <a:p xmlns:a="http://schemas.openxmlformats.org/drawingml/2006/main">
+            <a:r>
+              <a:t>Revisión WAN-3: cuatro transportes en central y sucursales. Fuente: https://github.com/hu-herrera/financiera-pacifico-entrega-docente/blob/main/Anexos/Continuidad_Cuatro_WAN_25_oct_2026.md</a:t>
+            </a:r>
+          </a:p>
         </p:txBody>
       </p:sp>
       <p:sp>
@@ -601,6 +611,11 @@
           <a:p xmlns:a="http://schemas.openxmlformats.org/drawingml/2006/main">
             <a:r>
               <a:t>Fuentes y alcance: https://github.com/hu-herrera/financiera-pacifico-entrega-docente/blob/main/02_Entregables/Entregable_7.pdf y Anexos/Presupuesto_Inventario.xlsx.</a:t>
+            </a:r>
+          </a:p>
+          <a:p xmlns:a="http://schemas.openxmlformats.org/drawingml/2006/main">
+            <a:r>
+              <a:t>Revisión WAN-3: cuatro transportes en central y sucursales. Fuente: https://github.com/hu-herrera/financiera-pacifico-entrega-docente/blob/main/Anexos/Continuidad_Cuatro_WAN_25_oct_2026.md</a:t>
             </a:r>
           </a:p>
         </p:txBody>
@@ -678,6 +693,11 @@
               <a:t>Actualización del 25/10: https://github.com/hu-herrera/financiera-pacifico-entrega-docente/blob/main/Anexos/Cierre_25_oct_2026.md. Los resultados de 93 Node y 151 navegador tienen cortes y alcances separados. La admisión de video es política propuesta, sin control automático de una aplicación real.</a:t>
             </a:r>
           </a:p>
+          <a:p xmlns:a="http://schemas.openxmlformats.org/drawingml/2006/main">
+            <a:r>
+              <a:t>Revisión WAN-3: cuatro transportes en central y sucursales. Fuente: https://github.com/hu-herrera/financiera-pacifico-entrega-docente/blob/main/Anexos/Continuidad_Cuatro_WAN_25_oct_2026.md</a:t>
+            </a:r>
+          </a:p>
         </p:txBody>
       </p:sp>
       <p:sp>
@@ -746,6 +766,11 @@
           <a:p xmlns:a="http://schemas.openxmlformats.org/drawingml/2006/main">
             <a:r>
               <a:t>Fuentes y alcance: https://github.com/hu-herrera/financiera-pacifico-entrega-docente/blob/main/02_Entregables/Entregable_7.pdf</a:t>
+            </a:r>
+          </a:p>
+          <a:p xmlns:a="http://schemas.openxmlformats.org/drawingml/2006/main">
+            <a:r>
+              <a:t>Revisión WAN-3: cuatro transportes en central y sucursales. Fuente: https://github.com/hu-herrera/financiera-pacifico-entrega-docente/blob/main/Anexos/Continuidad_Cuatro_WAN_25_oct_2026.md</a:t>
             </a:r>
           </a:p>
         </p:txBody>
@@ -818,6 +843,11 @@
               <a:t>Fuentes y alcance: Aviso docente recibido el 23/10/2026: video y PPT por AVA, plazo viernes 30/10/2026. Fechas intermedias propuestas para organizar el trabajo.</a:t>
             </a:r>
           </a:p>
+          <a:p xmlns:a="http://schemas.openxmlformats.org/drawingml/2006/main">
+            <a:r>
+              <a:t>Revisión WAN-3: cuatro transportes en central y sucursales. Fuente: https://github.com/hu-herrera/financiera-pacifico-entrega-docente/blob/main/Anexos/Continuidad_Cuatro_WAN_25_oct_2026.md</a:t>
+            </a:r>
+          </a:p>
         </p:txBody>
       </p:sp>
       <p:sp>
@@ -886,6 +916,11 @@
           <a:p xmlns:a="http://schemas.openxmlformats.org/drawingml/2006/main">
             <a:r>
               <a:t>Fuentes y alcance: https://github.com/hu-herrera/financiera-pacifico-entrega-docente/blob/main/02_Entregables/Entregable_6.pdf y https://github.com/hu-herrera/financiera-pacifico-entrega-docente/blob/main/03_Bitacora.pdf</a:t>
+            </a:r>
+          </a:p>
+          <a:p xmlns:a="http://schemas.openxmlformats.org/drawingml/2006/main">
+            <a:r>
+              <a:t>Revisión WAN-3: cuatro transportes en central y sucursales. Fuente: https://github.com/hu-herrera/financiera-pacifico-entrega-docente/blob/main/Anexos/Continuidad_Cuatro_WAN_25_oct_2026.md</a:t>
             </a:r>
           </a:p>
         </p:txBody>
@@ -958,6 +993,11 @@
               <a:t>Fuentes y alcance: https://github.com/hu-herrera/financiera-pacifico-entrega-docente/blob/main/00_Caso_Oficial.pdf y https://github.com/hu-herrera/financiera-pacifico-entrega-docente/blob/main/01_Informe_Diagnostico_Propuesta.pdf</a:t>
             </a:r>
           </a:p>
+          <a:p xmlns:a="http://schemas.openxmlformats.org/drawingml/2006/main">
+            <a:r>
+              <a:t>Revisión WAN-3: cuatro transportes en central y sucursales. Fuente: https://github.com/hu-herrera/financiera-pacifico-entrega-docente/blob/main/Anexos/Continuidad_Cuatro_WAN_25_oct_2026.md</a:t>
+            </a:r>
+          </a:p>
         </p:txBody>
       </p:sp>
       <p:sp>
@@ -1026,6 +1066,11 @@
           <a:p xmlns:a="http://schemas.openxmlformats.org/drawingml/2006/main">
             <a:r>
               <a:t>Fuentes y alcance: https://github.com/hu-herrera/financiera-pacifico-entrega-docente/blob/main/02_Entregables/Entregable_1.pdf y https://github.com/hu-herrera/financiera-pacifico-entrega-docente/blob/main/02_Entregables/Entregable_3.pdf</a:t>
+            </a:r>
+          </a:p>
+          <a:p xmlns:a="http://schemas.openxmlformats.org/drawingml/2006/main">
+            <a:r>
+              <a:t>Revisión WAN-3: cuatro transportes en central y sucursales. Fuente: https://github.com/hu-herrera/financiera-pacifico-entrega-docente/blob/main/Anexos/Continuidad_Cuatro_WAN_25_oct_2026.md</a:t>
             </a:r>
           </a:p>
         </p:txBody>
@@ -1098,6 +1143,11 @@
               <a:t>Fuentes y alcance: https://github.com/hu-herrera/financiera-pacifico-entrega-docente/blob/main/02_Entregables/Entregable_3.pdf. Extracto del plano S06, alternativa B, Anexos/Topologias_ANTES_A_B.pdf.</a:t>
             </a:r>
           </a:p>
+          <a:p xmlns:a="http://schemas.openxmlformats.org/drawingml/2006/main">
+            <a:r>
+              <a:t>Revisión WAN-3: cuatro transportes en central y sucursales. Fuente: https://github.com/hu-herrera/financiera-pacifico-entrega-docente/blob/main/Anexos/Continuidad_Cuatro_WAN_25_oct_2026.md</a:t>
+            </a:r>
+          </a:p>
         </p:txBody>
       </p:sp>
       <p:sp>
@@ -1166,6 +1216,11 @@
           <a:p xmlns:a="http://schemas.openxmlformats.org/drawingml/2006/main">
             <a:r>
               <a:t>Fuentes y alcance: https://github.com/hu-herrera/financiera-pacifico-entrega-docente/blob/main/02_Entregables/Entregable_2.pdf y https://github.com/hu-herrera/financiera-pacifico-entrega-docente/blob/main/02_Entregables/Entregable_7.pdf</a:t>
+            </a:r>
+          </a:p>
+          <a:p xmlns:a="http://schemas.openxmlformats.org/drawingml/2006/main">
+            <a:r>
+              <a:t>Revisión WAN-3: cuatro transportes en central y sucursales. Fuente: https://github.com/hu-herrera/financiera-pacifico-entrega-docente/blob/main/Anexos/Continuidad_Cuatro_WAN_25_oct_2026.md</a:t>
             </a:r>
           </a:p>
         </p:txBody>
@@ -1238,6 +1293,11 @@
               <a:t>Fuentes y alcance: https://github.com/hu-herrera/financiera-pacifico-entrega-docente/blob/main/02_Entregables/Entregable_4.pdf</a:t>
             </a:r>
           </a:p>
+          <a:p xmlns:a="http://schemas.openxmlformats.org/drawingml/2006/main">
+            <a:r>
+              <a:t>Revisión WAN-3: cuatro transportes en central y sucursales. Fuente: https://github.com/hu-herrera/financiera-pacifico-entrega-docente/blob/main/Anexos/Continuidad_Cuatro_WAN_25_oct_2026.md</a:t>
+            </a:r>
+          </a:p>
         </p:txBody>
       </p:sp>
       <p:sp>
@@ -1308,6 +1368,11 @@
               <a:t>Fuentes y alcance: https://github.com/hu-herrera/financiera-pacifico-entrega-docente/blob/main/02_Entregables/Entregable_3.pdf y https://github.com/hu-herrera/financiera-pacifico-entrega-docente/blob/main/02_Entregables/Entregable_4.pdf</a:t>
             </a:r>
           </a:p>
+          <a:p xmlns:a="http://schemas.openxmlformats.org/drawingml/2006/main">
+            <a:r>
+              <a:t>Revisión WAN-3: cuatro transportes en central y sucursales. Fuente: https://github.com/hu-herrera/financiera-pacifico-entrega-docente/blob/main/Anexos/Continuidad_Cuatro_WAN_25_oct_2026.md</a:t>
+            </a:r>
+          </a:p>
         </p:txBody>
       </p:sp>
       <p:sp>
@@ -1376,6 +1441,11 @@
           <a:p xmlns:a="http://schemas.openxmlformats.org/drawingml/2006/main">
             <a:r>
               <a:t>Fuentes y alcance: https://github.com/hu-herrera/financiera-pacifico-entrega-docente/blob/main/02_Entregables/Entregable_5.pdf y https://github.com/hu-herrera/financiera-pacifico-entrega-docente/blob/main/02_Entregables/Entregable_6.pdf</a:t>
+            </a:r>
+          </a:p>
+          <a:p xmlns:a="http://schemas.openxmlformats.org/drawingml/2006/main">
+            <a:r>
+              <a:t>Revisión WAN-3: cuatro transportes en central y sucursales. Fuente: https://github.com/hu-herrera/financiera-pacifico-entrega-docente/blob/main/Anexos/Continuidad_Cuatro_WAN_25_oct_2026.md</a:t>
             </a:r>
           </a:p>
         </p:txBody>
@@ -3818,12 +3888,12 @@
   </p:cSld>
   <p:clrMap bg1="lt1" tx1="dk1" bg2="lt2" tx2="dk2" accent1="accent1" accent2="accent2" accent3="accent3" accent4="accent4" accent5="accent5" accent6="accent6" hlink="hlink" folHlink="folHlink"/>
   <p:sldLayoutIdLst>
-    <p:sldLayoutId xmlns:r="http://schemas.openxmlformats.org/officeDocument/2006/relationships" id="2147483649" r:id="R95ea0e5c5e25448f"/>
-    <p:sldLayoutId xmlns:r="http://schemas.openxmlformats.org/officeDocument/2006/relationships" id="2147483650" r:id="Re13105d7362f4e78"/>
-    <p:sldLayoutId xmlns:r="http://schemas.openxmlformats.org/officeDocument/2006/relationships" id="2147483651" r:id="Rb70f73a2f9014486"/>
-    <p:sldLayoutId xmlns:r="http://schemas.openxmlformats.org/officeDocument/2006/relationships" id="2147483652" r:id="R0e004ae721bf4537"/>
-    <p:sldLayoutId xmlns:r="http://schemas.openxmlformats.org/officeDocument/2006/relationships" id="2147483653" r:id="R9376881f133140ff"/>
-    <p:sldLayoutId xmlns:r="http://schemas.openxmlformats.org/officeDocument/2006/relationships" id="2147483654" r:id="Rd581e3a0471c4549"/>
+    <p:sldLayoutId xmlns:r="http://schemas.openxmlformats.org/officeDocument/2006/relationships" id="2147483649" r:id="R425b135a31f44906"/>
+    <p:sldLayoutId xmlns:r="http://schemas.openxmlformats.org/officeDocument/2006/relationships" id="2147483650" r:id="Rfe0936ba58554621"/>
+    <p:sldLayoutId xmlns:r="http://schemas.openxmlformats.org/officeDocument/2006/relationships" id="2147483651" r:id="Rd565e80b8ff6449d"/>
+    <p:sldLayoutId xmlns:r="http://schemas.openxmlformats.org/officeDocument/2006/relationships" id="2147483652" r:id="Rb2f942bbaeb6492a"/>
+    <p:sldLayoutId xmlns:r="http://schemas.openxmlformats.org/officeDocument/2006/relationships" id="2147483653" r:id="Rec3727f1fbef44b7"/>
+    <p:sldLayoutId xmlns:r="http://schemas.openxmlformats.org/officeDocument/2006/relationships" id="2147483654" r:id="R0bb65f2a5880480d"/>
   </p:sldLayoutIdLst>
   <p:txStyles>
     <p:titleStyle>
@@ -5793,7 +5863,7 @@
                 <a:ea typeface="DejaVu Sans"/>
                 <a:cs typeface="DejaVu Sans"/>
               </a:rPr>
-              <a:t>93</a:t>
+              <a:t>99</a:t>
             </a:r>
           </a:p>
         </p:txBody>
@@ -6131,7 +6201,7 @@
                 <a:ea typeface="DejaVu Sans"/>
                 <a:cs typeface="DejaVu Sans"/>
               </a:rPr>
-              <a:t>151</a:t>
+              <a:t>44</a:t>
             </a:r>
           </a:p>
         </p:txBody>
@@ -6300,7 +6370,7 @@
                 <a:ea typeface="DejaVu Sans"/>
                 <a:cs typeface="DejaVu Sans"/>
               </a:rPr>
-              <a:t>pruebas de navegador en la pasada general</a:t>
+              <a:t>pruebas de navegador en esta revisión</a:t>
             </a:r>
           </a:p>
         </p:txBody>
@@ -7208,7 +7278,7 @@
           <p:cNvPr id="3" name="">
             <a:extLst xmlns:a="http://schemas.openxmlformats.org/drawingml/2006/main">
               <a:ext uri="{FF2B5EF4-FFF2-40B4-BE49-F238E27FC236}">
-                <a16:creationId xmlns:a16="http://schemas.microsoft.com/office/drawing/2014/main" id="{C1419A5E-A742-4158-AE22-0BDCBE0625C9}"/>
+                <a16:creationId xmlns:a16="http://schemas.microsoft.com/office/drawing/2014/main" id="{DFDCAC1B-6449-4D53-B254-B60816088A6D}"/>
               </a:ext>
             </a:extLst>
           </p:cNvPr>
@@ -7419,7 +7489,7 @@
                           <a:ea typeface="DejaVu Sans"/>
                           <a:cs typeface="DejaVu Sans"/>
                         </a:rPr>
-                        <a:t>792.550.011</a:t>
+                        <a:t>793.126.897</a:t>
                       </a:r>
                     </a:p>
                   </a:txBody>
@@ -7455,7 +7525,7 @@
                           <a:ea typeface="DejaVu Sans"/>
                           <a:cs typeface="DejaVu Sans"/>
                         </a:rPr>
-                        <a:t>280.617.592</a:t>
+                        <a:t>281.194.478</a:t>
                       </a:r>
                     </a:p>
                   </a:txBody>
@@ -7535,7 +7605,7 @@
                           <a:ea typeface="DejaVu Sans"/>
                           <a:cs typeface="DejaVu Sans"/>
                         </a:rPr>
-                        <a:t>658.885.320</a:t>
+                        <a:t>660.607.380</a:t>
                       </a:r>
                     </a:p>
                   </a:txBody>
@@ -7571,7 +7641,7 @@
                           <a:ea typeface="DejaVu Sans"/>
                           <a:cs typeface="DejaVu Sans"/>
                         </a:rPr>
-                        <a:t>658.885.320</a:t>
+                        <a:t>660.607.380</a:t>
                       </a:r>
                     </a:p>
                   </a:txBody>
@@ -7767,7 +7837,7 @@
                           <a:ea typeface="DejaVu Sans"/>
                           <a:cs typeface="DejaVu Sans"/>
                         </a:rPr>
-                        <a:t>1.501.435.331</a:t>
+                        <a:t>1.503.734.277</a:t>
                       </a:r>
                     </a:p>
                   </a:txBody>
@@ -7803,7 +7873,7 @@
                           <a:ea typeface="DejaVu Sans"/>
                           <a:cs typeface="DejaVu Sans"/>
                         </a:rPr>
-                        <a:t>964.502.912</a:t>
+                        <a:t>966.801.858</a:t>
                       </a:r>
                     </a:p>
                   </a:txBody>
@@ -8163,7 +8233,29 @@
                 <a:ea typeface="DejaVu Sans"/>
                 <a:cs typeface="DejaVu Sans"/>
               </a:rPr>
-              <a:t>Incluye el inicial una vez. WAN común: CLP 10.981.422/mes. Valores referenciales, no contratos ni compras ejecutadas.</a:t>
+              <a:t>Incluye el inicial una vez. WAN común: CLP </a:t>
+            </a:r>
+            <a:r>
+              <a:rPr sz="1350" b="0">
+                <a:solidFill>
+                  <a:srgbClr val="476071"/>
+                </a:solidFill>
+                <a:latin typeface="DejaVu Sans"/>
+                <a:ea typeface="DejaVu Sans"/>
+                <a:cs typeface="DejaVu Sans"/>
+              </a:rPr>
+              <a:t>11.010.123</a:t>
+            </a:r>
+            <a:r>
+              <a:rPr sz="1350" b="0">
+                <a:solidFill>
+                  <a:srgbClr val="476071"/>
+                </a:solidFill>
+                <a:latin typeface="DejaVu Sans"/>
+                <a:ea typeface="DejaVu Sans"/>
+                <a:cs typeface="DejaVu Sans"/>
+              </a:rPr>
+              <a:t>/mes. Valores referenciales, no contratos ni compras ejecutadas.</a:t>
             </a:r>
           </a:p>
         </p:txBody>
@@ -8699,7 +8791,7 @@
                 <a:ea typeface="DejaVu Sans"/>
                 <a:cs typeface="DejaVu Sans"/>
               </a:rPr>
-              <a:t>Ajuste WAN cerrado</a:t>
+              <a:t>Cuatro accesos de extremo a extremo</a:t>
             </a:r>
           </a:p>
         </p:txBody>
@@ -8868,7 +8960,7 @@
                 <a:ea typeface="DejaVu Sans"/>
                 <a:cs typeface="DejaVu Sans"/>
               </a:rPr>
-              <a:t>A y B ya usan distribuidores MikroTik. La revisión WAN-2 concilia modelos, puertos, inventario y presupuesto.</a:t>
+              <a:t>Casa Matriz también tiene Starlink, Leo, Entel y WOM. El diseño conserva camino con un acceso disponible en cada extremo, incluso de distinto proveedor.</a:t>
             </a:r>
           </a:p>
         </p:txBody>
@@ -9921,7 +10013,7 @@
           <p:cNvPr id="3" name="">
             <a:extLst xmlns:a="http://schemas.openxmlformats.org/drawingml/2006/main">
               <a:ext uri="{FF2B5EF4-FFF2-40B4-BE49-F238E27FC236}">
-                <a16:creationId xmlns:a16="http://schemas.microsoft.com/office/drawing/2014/main" id="{8428CC72-24AC-4035-9212-323D33020BDB}"/>
+                <a16:creationId xmlns:a16="http://schemas.microsoft.com/office/drawing/2014/main" id="{5244B5C5-0D36-4744-8B62-FD1F83B4A6CE}"/>
               </a:ext>
             </a:extLst>
           </p:cNvPr>
@@ -10817,7 +10909,7 @@
           <p:cNvPr id="3" name="">
             <a:extLst xmlns:a="http://schemas.openxmlformats.org/drawingml/2006/main">
               <a:ext uri="{FF2B5EF4-FFF2-40B4-BE49-F238E27FC236}">
-                <a16:creationId xmlns:a16="http://schemas.microsoft.com/office/drawing/2014/main" id="{0AAE8C88-E4A8-412A-A030-6F516A80497D}"/>
+                <a16:creationId xmlns:a16="http://schemas.microsoft.com/office/drawing/2014/main" id="{6339AED5-155E-4D1E-8FEB-3C8368E155BE}"/>
               </a:ext>
             </a:extLst>
           </p:cNvPr>
@@ -14640,7 +14732,7 @@
           <p:cNvPr id="3" name="">
             <a:extLst xmlns:a="http://schemas.openxmlformats.org/drawingml/2006/main">
               <a:ext uri="{FF2B5EF4-FFF2-40B4-BE49-F238E27FC236}">
-                <a16:creationId xmlns:a16="http://schemas.microsoft.com/office/drawing/2014/main" id="{4741B710-BECF-4BD7-BA09-5B203699E257}"/>
+                <a16:creationId xmlns:a16="http://schemas.microsoft.com/office/drawing/2014/main" id="{3DE0469C-7CEB-43AE-B8F5-3821C2211175}"/>
               </a:ext>
             </a:extLst>
           </p:cNvPr>
@@ -15536,7 +15628,7 @@
           <p:cNvPr id="3" name="">
             <a:extLst xmlns:a="http://schemas.openxmlformats.org/drawingml/2006/main">
               <a:ext uri="{FF2B5EF4-FFF2-40B4-BE49-F238E27FC236}">
-                <a16:creationId xmlns:a16="http://schemas.microsoft.com/office/drawing/2014/main" id="{BDAD1A1A-70C3-4870-A9F9-9F6AB225D683}"/>
+                <a16:creationId xmlns:a16="http://schemas.microsoft.com/office/drawing/2014/main" id="{8427292D-BC60-4F05-BA41-CC772F013530}"/>
               </a:ext>
             </a:extLst>
           </p:cNvPr>
@@ -15546,7 +15638,7 @@
           <p:nvPr/>
         </p:nvPicPr>
         <p:blipFill>
-          <a:blip xmlns:r="http://schemas.openxmlformats.org/officeDocument/2006/relationships" xmlns:a="http://schemas.openxmlformats.org/drawingml/2006/main" r:embed="R6ef150b843ae4dc0"/>
+          <a:blip xmlns:r="http://schemas.openxmlformats.org/officeDocument/2006/relationships" xmlns:a="http://schemas.openxmlformats.org/drawingml/2006/main" r:embed="R5edf9c0a27ae4908"/>
           <a:stretch xmlns:a="http://schemas.openxmlformats.org/drawingml/2006/main"/>
         </p:blipFill>
         <p:spPr>
@@ -16269,7 +16361,7 @@
           <p:cNvPr id="3" name="">
             <a:extLst xmlns:a="http://schemas.openxmlformats.org/drawingml/2006/main">
               <a:ext uri="{FF2B5EF4-FFF2-40B4-BE49-F238E27FC236}">
-                <a16:creationId xmlns:a16="http://schemas.microsoft.com/office/drawing/2014/main" id="{9F325825-EBFF-43D6-8FC1-53439A445821}"/>
+                <a16:creationId xmlns:a16="http://schemas.microsoft.com/office/drawing/2014/main" id="{7DC68A18-420E-4403-A9F9-47F172B3F9F4}"/>
               </a:ext>
             </a:extLst>
           </p:cNvPr>
@@ -17458,7 +17550,7 @@
           <p:cNvPr id="3" name="">
             <a:extLst xmlns:a="http://schemas.openxmlformats.org/drawingml/2006/main">
               <a:ext uri="{FF2B5EF4-FFF2-40B4-BE49-F238E27FC236}">
-                <a16:creationId xmlns:a16="http://schemas.microsoft.com/office/drawing/2014/main" id="{B09C9EE7-C46A-431C-8351-1A0DB313404D}"/>
+                <a16:creationId xmlns:a16="http://schemas.microsoft.com/office/drawing/2014/main" id="{DBEE6D71-5664-486B-9B53-F18E25C5EBF6}"/>
               </a:ext>
             </a:extLst>
           </p:cNvPr>
@@ -20086,7 +20178,7 @@
           <p:cNvPr id="3" name="">
             <a:extLst xmlns:a="http://schemas.openxmlformats.org/drawingml/2006/main">
               <a:ext uri="{FF2B5EF4-FFF2-40B4-BE49-F238E27FC236}">
-                <a16:creationId xmlns:a16="http://schemas.microsoft.com/office/drawing/2014/main" id="{E6E8DA35-D29F-4DC9-8150-101E24936C6C}"/>
+                <a16:creationId xmlns:a16="http://schemas.microsoft.com/office/drawing/2014/main" id="{710FFCC5-17A8-4EE2-BE55-0E1BA9EADFA4}"/>
               </a:ext>
             </a:extLst>
           </p:cNvPr>
@@ -20684,7 +20776,7 @@
                 <a:latin typeface="DejaVu Sans"/>
                 <a:ea typeface="DejaVu Sans"/>
                 <a:cs typeface="DejaVu Sans"/>
-                <a:hlinkClick xmlns:r="http://schemas.openxmlformats.org/officeDocument/2006/relationships" r:id="R082913b5666544ec"/>
+                <a:hlinkClick xmlns:r="http://schemas.openxmlformats.org/officeDocument/2006/relationships" r:id="Rfe17472e1059402f"/>
               </a:rPr>
               <a:t>Abrir simulador</a:t>
             </a:r>

--- a/Presentacion/Avance_Financiera_Pacifico_30_oct_2026.pptx
+++ b/Presentacion/Avance_Financiera_Pacifico_30_oct_2026.pptx
@@ -2,26 +2,26 @@
 <file path=ppt/presentation.xml><?xml version="1.0" encoding="utf-8"?>
 <p:presentation xmlns:p="http://schemas.openxmlformats.org/presentationml/2006/main">
   <p:sldMasterIdLst>
-    <p:sldMasterId xmlns:r="http://schemas.openxmlformats.org/officeDocument/2006/relationships" id="2147483648" r:id="R2891c5164fd449a0"/>
+    <p:sldMasterId xmlns:r="http://schemas.openxmlformats.org/officeDocument/2006/relationships" id="2147483648" r:id="R9f1b36d94fe04497"/>
   </p:sldMasterIdLst>
   <p:notesMasterIdLst>
-    <p:notesMasterId xmlns:r="http://schemas.openxmlformats.org/officeDocument/2006/relationships" r:id="R6e919be1fee64b82"/>
+    <p:notesMasterId xmlns:r="http://schemas.openxmlformats.org/officeDocument/2006/relationships" r:id="R6bb2ffd53c8f4e22"/>
   </p:notesMasterIdLst>
   <p:sldIdLst>
-    <p:sldId xmlns:r="http://schemas.openxmlformats.org/officeDocument/2006/relationships" id="256" r:id="R7dd5a2e4a4434026"/>
-    <p:sldId xmlns:r="http://schemas.openxmlformats.org/officeDocument/2006/relationships" id="257" r:id="R5b564ddf205c4ee5"/>
-    <p:sldId xmlns:r="http://schemas.openxmlformats.org/officeDocument/2006/relationships" id="258" r:id="Rfa2a1cfb49f94742"/>
-    <p:sldId xmlns:r="http://schemas.openxmlformats.org/officeDocument/2006/relationships" id="259" r:id="R7a1b4ad4db9e4bcb"/>
-    <p:sldId xmlns:r="http://schemas.openxmlformats.org/officeDocument/2006/relationships" id="260" r:id="R9b37edb6cfb24f71"/>
-    <p:sldId xmlns:r="http://schemas.openxmlformats.org/officeDocument/2006/relationships" id="261" r:id="R66cf02a52bd744a3"/>
-    <p:sldId xmlns:r="http://schemas.openxmlformats.org/officeDocument/2006/relationships" id="262" r:id="R0ade0ea8c03f4a01"/>
-    <p:sldId xmlns:r="http://schemas.openxmlformats.org/officeDocument/2006/relationships" id="263" r:id="Rc5806a58639241f2"/>
-    <p:sldId xmlns:r="http://schemas.openxmlformats.org/officeDocument/2006/relationships" id="264" r:id="R0c6c1d96a5f746ac"/>
-    <p:sldId xmlns:r="http://schemas.openxmlformats.org/officeDocument/2006/relationships" id="265" r:id="Rd7a5d9c5be4f4128"/>
-    <p:sldId xmlns:r="http://schemas.openxmlformats.org/officeDocument/2006/relationships" id="266" r:id="Rd70ef328d5484118"/>
-    <p:sldId xmlns:r="http://schemas.openxmlformats.org/officeDocument/2006/relationships" id="267" r:id="R6d387f63cbf44361"/>
-    <p:sldId xmlns:r="http://schemas.openxmlformats.org/officeDocument/2006/relationships" id="268" r:id="R0ccd83569c444ed9"/>
-    <p:sldId xmlns:r="http://schemas.openxmlformats.org/officeDocument/2006/relationships" id="269" r:id="R8606a73d627e4a56"/>
+    <p:sldId xmlns:r="http://schemas.openxmlformats.org/officeDocument/2006/relationships" id="256" r:id="R2b64bd8c9a954ac7"/>
+    <p:sldId xmlns:r="http://schemas.openxmlformats.org/officeDocument/2006/relationships" id="257" r:id="R99f25bf119df49ea"/>
+    <p:sldId xmlns:r="http://schemas.openxmlformats.org/officeDocument/2006/relationships" id="258" r:id="R777caa8094dd4cec"/>
+    <p:sldId xmlns:r="http://schemas.openxmlformats.org/officeDocument/2006/relationships" id="259" r:id="R43287bd3c32f4108"/>
+    <p:sldId xmlns:r="http://schemas.openxmlformats.org/officeDocument/2006/relationships" id="260" r:id="Rcca6e4e416ab4b15"/>
+    <p:sldId xmlns:r="http://schemas.openxmlformats.org/officeDocument/2006/relationships" id="261" r:id="R950f7c73b0854698"/>
+    <p:sldId xmlns:r="http://schemas.openxmlformats.org/officeDocument/2006/relationships" id="262" r:id="R3cdfbed6db1248af"/>
+    <p:sldId xmlns:r="http://schemas.openxmlformats.org/officeDocument/2006/relationships" id="263" r:id="R70e1df89794b4f7d"/>
+    <p:sldId xmlns:r="http://schemas.openxmlformats.org/officeDocument/2006/relationships" id="264" r:id="R9b20bad75f85410c"/>
+    <p:sldId xmlns:r="http://schemas.openxmlformats.org/officeDocument/2006/relationships" id="265" r:id="R622a98de7ec84c73"/>
+    <p:sldId xmlns:r="http://schemas.openxmlformats.org/officeDocument/2006/relationships" id="266" r:id="R32b433a851294ade"/>
+    <p:sldId xmlns:r="http://schemas.openxmlformats.org/officeDocument/2006/relationships" id="267" r:id="Rdd363cadc9ca4be7"/>
+    <p:sldId xmlns:r="http://schemas.openxmlformats.org/officeDocument/2006/relationships" id="268" r:id="R6bbc11dbffed459e"/>
+    <p:sldId xmlns:r="http://schemas.openxmlformats.org/officeDocument/2006/relationships" id="269" r:id="R0579ea71abdf4821"/>
   </p:sldIdLst>
   <p:sldSz cx="12192000" cy="6858000"/>
   <p:notesSz cx="6858000" cy="9144000"/>
@@ -463,6 +463,11 @@
               <a:t>Revisión WAN-3: cuatro transportes en central y sucursales. Fuente: https://github.com/hu-herrera/financiera-pacifico-entrega-docente/blob/main/Anexos/Continuidad_Cuatro_WAN_25_oct_2026.md</a:t>
             </a:r>
           </a:p>
+          <a:p xmlns:a="http://schemas.openxmlformats.org/drawingml/2006/main">
+            <a:r>
+              <a:t>Cierre documental 27/10/2026. Verificación pública: https://github.com/hu-herrera/financiera-pacifico-entrega-docente/blob/main/Anexos/Evidencia_Pruebas_27_oct_2026.md. Las 30 pruebas de modelo incluyen la matriz WAN, recuperación e inventario. Los 16 casos de interfaz tienen ejecución y resultado identificados por SHA en ese anexo. No se suman con las pasadas históricas ni certifican hardware.</a:t>
+            </a:r>
+          </a:p>
         </p:txBody>
       </p:sp>
       <p:sp>
@@ -541,6 +546,11 @@
           <a:p xmlns:a="http://schemas.openxmlformats.org/drawingml/2006/main">
             <a:r>
               <a:t>Revisión WAN-3: cuatro transportes en central y sucursales. Fuente: https://github.com/hu-herrera/financiera-pacifico-entrega-docente/blob/main/Anexos/Continuidad_Cuatro_WAN_25_oct_2026.md</a:t>
+            </a:r>
+          </a:p>
+          <a:p xmlns:a="http://schemas.openxmlformats.org/drawingml/2006/main">
+            <a:r>
+              <a:t>Cierre documental 27/10/2026. Verificación pública: https://github.com/hu-herrera/financiera-pacifico-entrega-docente/blob/main/Anexos/Evidencia_Pruebas_27_oct_2026.md. Las 30 pruebas de modelo incluyen la matriz WAN, recuperación e inventario. Los 16 casos de interfaz tienen ejecución y resultado identificados por SHA en ese anexo. No se suman con las pasadas históricas ni certifican hardware.</a:t>
             </a:r>
           </a:p>
         </p:txBody>
@@ -3888,12 +3898,12 @@
   </p:cSld>
   <p:clrMap bg1="lt1" tx1="dk1" bg2="lt2" tx2="dk2" accent1="accent1" accent2="accent2" accent3="accent3" accent4="accent4" accent5="accent5" accent6="accent6" hlink="hlink" folHlink="folHlink"/>
   <p:sldLayoutIdLst>
-    <p:sldLayoutId xmlns:r="http://schemas.openxmlformats.org/officeDocument/2006/relationships" id="2147483649" r:id="R425b135a31f44906"/>
-    <p:sldLayoutId xmlns:r="http://schemas.openxmlformats.org/officeDocument/2006/relationships" id="2147483650" r:id="Rfe0936ba58554621"/>
-    <p:sldLayoutId xmlns:r="http://schemas.openxmlformats.org/officeDocument/2006/relationships" id="2147483651" r:id="Rd565e80b8ff6449d"/>
-    <p:sldLayoutId xmlns:r="http://schemas.openxmlformats.org/officeDocument/2006/relationships" id="2147483652" r:id="Rb2f942bbaeb6492a"/>
-    <p:sldLayoutId xmlns:r="http://schemas.openxmlformats.org/officeDocument/2006/relationships" id="2147483653" r:id="Rec3727f1fbef44b7"/>
-    <p:sldLayoutId xmlns:r="http://schemas.openxmlformats.org/officeDocument/2006/relationships" id="2147483654" r:id="R0bb65f2a5880480d"/>
+    <p:sldLayoutId xmlns:r="http://schemas.openxmlformats.org/officeDocument/2006/relationships" id="2147483649" r:id="R2ef964131fab4995"/>
+    <p:sldLayoutId xmlns:r="http://schemas.openxmlformats.org/officeDocument/2006/relationships" id="2147483650" r:id="Reae22f9b6c53488a"/>
+    <p:sldLayoutId xmlns:r="http://schemas.openxmlformats.org/officeDocument/2006/relationships" id="2147483651" r:id="R28ddd3462d854559"/>
+    <p:sldLayoutId xmlns:r="http://schemas.openxmlformats.org/officeDocument/2006/relationships" id="2147483652" r:id="Rf989c59553864179"/>
+    <p:sldLayoutId xmlns:r="http://schemas.openxmlformats.org/officeDocument/2006/relationships" id="2147483653" r:id="Ra6a4ef02936b40d1"/>
+    <p:sldLayoutId xmlns:r="http://schemas.openxmlformats.org/officeDocument/2006/relationships" id="2147483654" r:id="R76e6133889324e86"/>
   </p:sldLayoutIdLst>
   <p:txStyles>
     <p:titleStyle>
@@ -5134,7 +5144,7 @@
                 <a:ea typeface="DejaVu Sans"/>
                 <a:cs typeface="DejaVu Sans"/>
               </a:rPr>
-              <a:t>Avance Capstone al 25 de octubre de 2026</a:t>
+              <a:t>Avance Capstone al 27 de octubre de 2026</a:t>
             </a:r>
           </a:p>
         </p:txBody>
@@ -5863,7 +5873,7 @@
                 <a:ea typeface="DejaVu Sans"/>
                 <a:cs typeface="DejaVu Sans"/>
               </a:rPr>
-              <a:t>99</a:t>
+              <a:t>30</a:t>
             </a:r>
           </a:p>
         </p:txBody>
@@ -6032,7 +6042,7 @@
                 <a:ea typeface="DejaVu Sans"/>
                 <a:cs typeface="DejaVu Sans"/>
               </a:rPr>
-              <a:t>pruebas de lógica aprobadas</a:t>
+              <a:t>pruebas públicas de modelo aprobadas</a:t>
             </a:r>
           </a:p>
         </p:txBody>
@@ -6201,7 +6211,7 @@
                 <a:ea typeface="DejaVu Sans"/>
                 <a:cs typeface="DejaVu Sans"/>
               </a:rPr>
-              <a:t>44</a:t>
+              <a:t>16</a:t>
             </a:r>
           </a:p>
         </p:txBody>
@@ -6370,7 +6380,7 @@
                 <a:ea typeface="DejaVu Sans"/>
                 <a:cs typeface="DejaVu Sans"/>
               </a:rPr>
-              <a:t>pruebas de navegador en esta revisión</a:t>
+              <a:t>casos de interfaz publicados</a:t>
             </a:r>
           </a:p>
         </p:txBody>
@@ -6539,7 +6549,7 @@
                 <a:ea typeface="DejaVu Sans"/>
                 <a:cs typeface="DejaVu Sans"/>
               </a:rPr>
-              <a:t>1.351 comprobaciones adicionales de caminos A/B</a:t>
+              <a:t>9.900 combinaciones WAN dentro de las pruebas de modelo</a:t>
             </a:r>
           </a:p>
         </p:txBody>
@@ -6708,7 +6718,7 @@
                 <a:ea typeface="DejaVu Sans"/>
                 <a:cs typeface="DejaVu Sans"/>
               </a:rPr>
-              <a:t>QoS, VPN y HA cuentan con regresiones adicionales.</a:t>
+              <a:t>Los registros históricos tienen cortes distintos.</a:t>
             </a:r>
           </a:p>
           <a:p xmlns:a="http://schemas.openxmlformats.org/drawingml/2006/main">
@@ -6732,7 +6742,7 @@
                 <a:ea typeface="DejaVu Sans"/>
                 <a:cs typeface="DejaVu Sans"/>
               </a:rPr>
-              <a:t>Los conteos describen pasadas de software, sin sumarlas.</a:t>
+              <a:t>Los resultados por SHA están en el anexo público de evidencia.</a:t>
             </a:r>
           </a:p>
         </p:txBody>
@@ -7278,7 +7288,7 @@
           <p:cNvPr id="3" name="">
             <a:extLst xmlns:a="http://schemas.openxmlformats.org/drawingml/2006/main">
               <a:ext uri="{FF2B5EF4-FFF2-40B4-BE49-F238E27FC236}">
-                <a16:creationId xmlns:a16="http://schemas.microsoft.com/office/drawing/2014/main" id="{DFDCAC1B-6449-4D53-B254-B60816088A6D}"/>
+                <a16:creationId xmlns:a16="http://schemas.microsoft.com/office/drawing/2014/main" id="{B6FF6D45-E115-44AD-84B4-73BE26B149CF}"/>
               </a:ext>
             </a:extLst>
           </p:cNvPr>
@@ -10013,7 +10023,7 @@
           <p:cNvPr id="3" name="">
             <a:extLst xmlns:a="http://schemas.openxmlformats.org/drawingml/2006/main">
               <a:ext uri="{FF2B5EF4-FFF2-40B4-BE49-F238E27FC236}">
-                <a16:creationId xmlns:a16="http://schemas.microsoft.com/office/drawing/2014/main" id="{5244B5C5-0D36-4744-8B62-FD1F83B4A6CE}"/>
+                <a16:creationId xmlns:a16="http://schemas.microsoft.com/office/drawing/2014/main" id="{10796B85-5EB4-4B77-8C42-026C980E2BBC}"/>
               </a:ext>
             </a:extLst>
           </p:cNvPr>
@@ -10909,7 +10919,7 @@
           <p:cNvPr id="3" name="">
             <a:extLst xmlns:a="http://schemas.openxmlformats.org/drawingml/2006/main">
               <a:ext uri="{FF2B5EF4-FFF2-40B4-BE49-F238E27FC236}">
-                <a16:creationId xmlns:a16="http://schemas.microsoft.com/office/drawing/2014/main" id="{6339AED5-155E-4D1E-8FEB-3C8368E155BE}"/>
+                <a16:creationId xmlns:a16="http://schemas.microsoft.com/office/drawing/2014/main" id="{1FE30422-4A1E-46E7-819B-0484007EF0C4}"/>
               </a:ext>
             </a:extLst>
           </p:cNvPr>
@@ -14732,7 +14742,7 @@
           <p:cNvPr id="3" name="">
             <a:extLst xmlns:a="http://schemas.openxmlformats.org/drawingml/2006/main">
               <a:ext uri="{FF2B5EF4-FFF2-40B4-BE49-F238E27FC236}">
-                <a16:creationId xmlns:a16="http://schemas.microsoft.com/office/drawing/2014/main" id="{3DE0469C-7CEB-43AE-B8F5-3821C2211175}"/>
+                <a16:creationId xmlns:a16="http://schemas.microsoft.com/office/drawing/2014/main" id="{735B11CB-B044-47FF-BF99-45F8DFD85DBA}"/>
               </a:ext>
             </a:extLst>
           </p:cNvPr>
@@ -15628,7 +15638,7 @@
           <p:cNvPr id="3" name="">
             <a:extLst xmlns:a="http://schemas.openxmlformats.org/drawingml/2006/main">
               <a:ext uri="{FF2B5EF4-FFF2-40B4-BE49-F238E27FC236}">
-                <a16:creationId xmlns:a16="http://schemas.microsoft.com/office/drawing/2014/main" id="{8427292D-BC60-4F05-BA41-CC772F013530}"/>
+                <a16:creationId xmlns:a16="http://schemas.microsoft.com/office/drawing/2014/main" id="{09DB58CC-0121-42BD-9454-BE545040389D}"/>
               </a:ext>
             </a:extLst>
           </p:cNvPr>
@@ -15638,7 +15648,7 @@
           <p:nvPr/>
         </p:nvPicPr>
         <p:blipFill>
-          <a:blip xmlns:r="http://schemas.openxmlformats.org/officeDocument/2006/relationships" xmlns:a="http://schemas.openxmlformats.org/drawingml/2006/main" r:embed="R5edf9c0a27ae4908"/>
+          <a:blip xmlns:r="http://schemas.openxmlformats.org/officeDocument/2006/relationships" xmlns:a="http://schemas.openxmlformats.org/drawingml/2006/main" r:embed="Re1186f7c508c4aa8"/>
           <a:stretch xmlns:a="http://schemas.openxmlformats.org/drawingml/2006/main"/>
         </p:blipFill>
         <p:spPr>
@@ -16361,7 +16371,7 @@
           <p:cNvPr id="3" name="">
             <a:extLst xmlns:a="http://schemas.openxmlformats.org/drawingml/2006/main">
               <a:ext uri="{FF2B5EF4-FFF2-40B4-BE49-F238E27FC236}">
-                <a16:creationId xmlns:a16="http://schemas.microsoft.com/office/drawing/2014/main" id="{7DC68A18-420E-4403-A9F9-47F172B3F9F4}"/>
+                <a16:creationId xmlns:a16="http://schemas.microsoft.com/office/drawing/2014/main" id="{1DD59EB0-37C5-4552-A690-DEA74CEEB0CC}"/>
               </a:ext>
             </a:extLst>
           </p:cNvPr>
@@ -17550,7 +17560,7 @@
           <p:cNvPr id="3" name="">
             <a:extLst xmlns:a="http://schemas.openxmlformats.org/drawingml/2006/main">
               <a:ext uri="{FF2B5EF4-FFF2-40B4-BE49-F238E27FC236}">
-                <a16:creationId xmlns:a16="http://schemas.microsoft.com/office/drawing/2014/main" id="{DBEE6D71-5664-486B-9B53-F18E25C5EBF6}"/>
+                <a16:creationId xmlns:a16="http://schemas.microsoft.com/office/drawing/2014/main" id="{14101F32-475C-4087-A488-F935E64134B2}"/>
               </a:ext>
             </a:extLst>
           </p:cNvPr>
@@ -20178,7 +20188,7 @@
           <p:cNvPr id="3" name="">
             <a:extLst xmlns:a="http://schemas.openxmlformats.org/drawingml/2006/main">
               <a:ext uri="{FF2B5EF4-FFF2-40B4-BE49-F238E27FC236}">
-                <a16:creationId xmlns:a16="http://schemas.microsoft.com/office/drawing/2014/main" id="{710FFCC5-17A8-4EE2-BE55-0E1BA9EADFA4}"/>
+                <a16:creationId xmlns:a16="http://schemas.microsoft.com/office/drawing/2014/main" id="{4FBAA30C-62B4-4DED-85CE-8A935022B5CE}"/>
               </a:ext>
             </a:extLst>
           </p:cNvPr>
@@ -20776,7 +20786,7 @@
                 <a:latin typeface="DejaVu Sans"/>
                 <a:ea typeface="DejaVu Sans"/>
                 <a:cs typeface="DejaVu Sans"/>
-                <a:hlinkClick xmlns:r="http://schemas.openxmlformats.org/officeDocument/2006/relationships" r:id="Rfe17472e1059402f"/>
+                <a:hlinkClick xmlns:r="http://schemas.openxmlformats.org/officeDocument/2006/relationships" r:id="Rb2294dfe434949fb"/>
               </a:rPr>
               <a:t>Abrir simulador</a:t>
             </a:r>

--- a/Presentacion/Avance_Financiera_Pacifico_30_oct_2026.pptx
+++ b/Presentacion/Avance_Financiera_Pacifico_30_oct_2026.pptx
@@ -2,26 +2,27 @@
 <file path=ppt/presentation.xml><?xml version="1.0" encoding="utf-8"?>
 <p:presentation xmlns:p="http://schemas.openxmlformats.org/presentationml/2006/main">
   <p:sldMasterIdLst>
-    <p:sldMasterId xmlns:r="http://schemas.openxmlformats.org/officeDocument/2006/relationships" id="2147483648" r:id="R9f1b36d94fe04497"/>
+    <p:sldMasterId xmlns:r="http://schemas.openxmlformats.org/officeDocument/2006/relationships" id="2147483648" r:id="R53f694a1267b4e9f"/>
   </p:sldMasterIdLst>
   <p:notesMasterIdLst>
-    <p:notesMasterId xmlns:r="http://schemas.openxmlformats.org/officeDocument/2006/relationships" r:id="R6bb2ffd53c8f4e22"/>
+    <p:notesMasterId xmlns:r="http://schemas.openxmlformats.org/officeDocument/2006/relationships" r:id="R036b62ef53074137"/>
   </p:notesMasterIdLst>
   <p:sldIdLst>
-    <p:sldId xmlns:r="http://schemas.openxmlformats.org/officeDocument/2006/relationships" id="256" r:id="R2b64bd8c9a954ac7"/>
-    <p:sldId xmlns:r="http://schemas.openxmlformats.org/officeDocument/2006/relationships" id="257" r:id="R99f25bf119df49ea"/>
-    <p:sldId xmlns:r="http://schemas.openxmlformats.org/officeDocument/2006/relationships" id="258" r:id="R777caa8094dd4cec"/>
-    <p:sldId xmlns:r="http://schemas.openxmlformats.org/officeDocument/2006/relationships" id="259" r:id="R43287bd3c32f4108"/>
-    <p:sldId xmlns:r="http://schemas.openxmlformats.org/officeDocument/2006/relationships" id="260" r:id="Rcca6e4e416ab4b15"/>
-    <p:sldId xmlns:r="http://schemas.openxmlformats.org/officeDocument/2006/relationships" id="261" r:id="R950f7c73b0854698"/>
-    <p:sldId xmlns:r="http://schemas.openxmlformats.org/officeDocument/2006/relationships" id="262" r:id="R3cdfbed6db1248af"/>
-    <p:sldId xmlns:r="http://schemas.openxmlformats.org/officeDocument/2006/relationships" id="263" r:id="R70e1df89794b4f7d"/>
-    <p:sldId xmlns:r="http://schemas.openxmlformats.org/officeDocument/2006/relationships" id="264" r:id="R9b20bad75f85410c"/>
-    <p:sldId xmlns:r="http://schemas.openxmlformats.org/officeDocument/2006/relationships" id="265" r:id="R622a98de7ec84c73"/>
-    <p:sldId xmlns:r="http://schemas.openxmlformats.org/officeDocument/2006/relationships" id="266" r:id="R32b433a851294ade"/>
-    <p:sldId xmlns:r="http://schemas.openxmlformats.org/officeDocument/2006/relationships" id="267" r:id="Rdd363cadc9ca4be7"/>
-    <p:sldId xmlns:r="http://schemas.openxmlformats.org/officeDocument/2006/relationships" id="268" r:id="R6bbc11dbffed459e"/>
-    <p:sldId xmlns:r="http://schemas.openxmlformats.org/officeDocument/2006/relationships" id="269" r:id="R0579ea71abdf4821"/>
+    <p:sldId xmlns:r="http://schemas.openxmlformats.org/officeDocument/2006/relationships" id="256" r:id="R28348abfcc02438c"/>
+    <p:sldId xmlns:r="http://schemas.openxmlformats.org/officeDocument/2006/relationships" id="257" r:id="Rd114121f39c64dd7"/>
+    <p:sldId xmlns:r="http://schemas.openxmlformats.org/officeDocument/2006/relationships" id="258" r:id="Rcc3b089c93854733"/>
+    <p:sldId xmlns:r="http://schemas.openxmlformats.org/officeDocument/2006/relationships" id="259" r:id="R377019ac3782431a"/>
+    <p:sldId xmlns:r="http://schemas.openxmlformats.org/officeDocument/2006/relationships" id="260" r:id="Rcb357d0db9124e4f"/>
+    <p:sldId xmlns:r="http://schemas.openxmlformats.org/officeDocument/2006/relationships" id="261" r:id="R9ce8df91c2c94dd9"/>
+    <p:sldId xmlns:r="http://schemas.openxmlformats.org/officeDocument/2006/relationships" id="262" r:id="R92a3fb970e5547ff"/>
+    <p:sldId xmlns:r="http://schemas.openxmlformats.org/officeDocument/2006/relationships" id="263" r:id="Rc40eeaf135f14153"/>
+    <p:sldId xmlns:r="http://schemas.openxmlformats.org/officeDocument/2006/relationships" id="264" r:id="R47589fe4a92e4971"/>
+    <p:sldId xmlns:r="http://schemas.openxmlformats.org/officeDocument/2006/relationships" id="265" r:id="R7112d9fe97f9425a"/>
+    <p:sldId xmlns:r="http://schemas.openxmlformats.org/officeDocument/2006/relationships" id="266" r:id="Rb007af21902e42f8"/>
+    <p:sldId xmlns:r="http://schemas.openxmlformats.org/officeDocument/2006/relationships" id="267" r:id="R5e19e5b04c684532"/>
+    <p:sldId xmlns:r="http://schemas.openxmlformats.org/officeDocument/2006/relationships" id="268" r:id="R5fc50320a2ca435d"/>
+    <p:sldId xmlns:r="http://schemas.openxmlformats.org/officeDocument/2006/relationships" id="269" r:id="Rfb8e495ca97148eb"/>
+    <p:sldId xmlns:r="http://schemas.openxmlformats.org/officeDocument/2006/relationships" id="270" r:id="Re0578db8e86d4b24"/>
   </p:sldIdLst>
   <p:sldSz cx="12192000" cy="6858000"/>
   <p:notesSz cx="6858000" cy="9144000"/>
@@ -535,22 +536,7 @@
           <a:lstStyle xmlns:a="http://schemas.openxmlformats.org/drawingml/2006/main"/>
           <a:p xmlns:a="http://schemas.openxmlformats.org/drawingml/2006/main">
             <a:r>
-              <a:t>Fuentes y alcance: https://github.com/hu-herrera/financiera-pacifico-entrega-docente/blob/main/02_Entregables/Entregable_6.pdf. Commit de red 228ec2674d2b784b4cb67dab1128e969f681d3aa.</a:t>
-            </a:r>
-          </a:p>
-          <a:p xmlns:a="http://schemas.openxmlformats.org/drawingml/2006/main">
-            <a:r>
-              <a:t>Actualización del 25/10: https://github.com/hu-herrera/financiera-pacifico-entrega-docente/blob/main/Anexos/Cierre_25_oct_2026.md. Los resultados de 93 Node y 151 navegador tienen cortes y alcances separados. La admisión de video es política propuesta, sin control automático de una aplicación real.</a:t>
-            </a:r>
-          </a:p>
-          <a:p xmlns:a="http://schemas.openxmlformats.org/drawingml/2006/main">
-            <a:r>
-              <a:t>Revisión WAN-3: cuatro transportes en central y sucursales. Fuente: https://github.com/hu-herrera/financiera-pacifico-entrega-docente/blob/main/Anexos/Continuidad_Cuatro_WAN_25_oct_2026.md</a:t>
-            </a:r>
-          </a:p>
-          <a:p xmlns:a="http://schemas.openxmlformats.org/drawingml/2006/main">
-            <a:r>
-              <a:t>Cierre documental 27/10/2026. Verificación pública: https://github.com/hu-herrera/financiera-pacifico-entrega-docente/blob/main/Anexos/Evidencia_Pruebas_27_oct_2026.md. Las 30 pruebas de modelo incluyen la matriz WAN, recuperación e inventario. Los 16 casos de interfaz tienen ejecución y resultado identificados por SHA en ese anexo. No se suman con las pasadas históricas ni certifican hardware.</a:t>
+              <a:t>Evidencia C5-OPERACION-2: 60 pruebas de modelo, incluidas 9.900 combinaciones de accesos WAN, y 52 pruebas de navegador A/B. Las pruebas acreditan la simulación funcional y la interfaz. No constituyen mediciones de firmware ni certificación de hardware. Fuentes: Verificacion/modelo.test.cjs, protocolos.test.cjs, interfaz.spec.cjs y operacion.spec.cjs.</a:t>
             </a:r>
           </a:p>
         </p:txBody>
@@ -856,6 +842,76 @@
           <a:p xmlns:a="http://schemas.openxmlformats.org/drawingml/2006/main">
             <a:r>
               <a:t>Revisión WAN-3: cuatro transportes en central y sucursales. Fuente: https://github.com/hu-herrera/financiera-pacifico-entrega-docente/blob/main/Anexos/Continuidad_Cuatro_WAN_25_oct_2026.md</a:t>
+            </a:r>
+          </a:p>
+        </p:txBody>
+      </p:sp>
+      <p:sp>
+        <p:nvSpPr>
+          <p:cNvPr id="4" name="Slide Number Placeholder 3"/>
+          <p:cNvSpPr>
+            <a:spLocks xmlns:a="http://schemas.openxmlformats.org/drawingml/2006/main" noGrp="1"/>
+          </p:cNvSpPr>
+          <p:nvPr>
+            <p:ph type="sldNum" idx="5"/>
+          </p:nvPr>
+        </p:nvSpPr>
+        <p:spPr/>
+        <p:txBody>
+          <a:bodyPr xmlns:a="http://schemas.openxmlformats.org/drawingml/2006/main"/>
+          <a:lstStyle xmlns:a="http://schemas.openxmlformats.org/drawingml/2006/main"/>
+          <a:p xmlns:a="http://schemas.openxmlformats.org/drawingml/2006/main"/>
+        </p:txBody>
+      </p:sp>
+    </p:spTree>
+  </p:cSld>
+  <p:clrMapOvr>
+    <a:masterClrMapping xmlns:a="http://schemas.openxmlformats.org/drawingml/2006/main"/>
+  </p:clrMapOvr>
+</p:notes>
+</file>
+
+<file path=ppt/notesSlides/notesSlide15.xml><?xml version="1.0" encoding="utf-8"?>
+<p:notes xmlns:p="http://schemas.openxmlformats.org/presentationml/2006/main">
+  <p:cSld>
+    <p:spTree>
+      <p:nvGrpSpPr>
+        <p:cNvPr id="1" name=""/>
+        <p:cNvGrpSpPr/>
+        <p:nvPr/>
+      </p:nvGrpSpPr>
+      <p:grpSpPr>
+        <a:xfrm xmlns:a="http://schemas.openxmlformats.org/drawingml/2006/main"/>
+      </p:grpSpPr>
+      <p:sp>
+        <p:nvSpPr>
+          <p:cNvPr id="2" name="Slide Image Placeholder 1"/>
+          <p:cNvSpPr>
+            <a:spLocks xmlns:a="http://schemas.openxmlformats.org/drawingml/2006/main" noGrp="1"/>
+          </p:cNvSpPr>
+          <p:nvPr>
+            <p:ph type="sldImg" idx="0"/>
+          </p:nvPr>
+        </p:nvSpPr>
+        <p:spPr/>
+      </p:sp>
+      <p:sp>
+        <p:nvSpPr>
+          <p:cNvPr id="3" name="Notes Placeholder 2"/>
+          <p:cNvSpPr>
+            <a:spLocks xmlns:a="http://schemas.openxmlformats.org/drawingml/2006/main" noGrp="1"/>
+          </p:cNvSpPr>
+          <p:nvPr>
+            <p:ph type="body" idx="1"/>
+          </p:nvPr>
+        </p:nvSpPr>
+        <p:spPr/>
+        <p:txBody>
+          <a:bodyPr xmlns:a="http://schemas.openxmlformats.org/drawingml/2006/main"/>
+          <a:lstStyle xmlns:a="http://schemas.openxmlformats.org/drawingml/2006/main"/>
+          <a:p xmlns:a="http://schemas.openxmlformats.org/drawingml/2006/main">
+            <a:r>
+              <a:t>Para finalizar, la propuesta busca sostener la atención mediante caminos alternativos, acceso controlado y recuperación de los servicios centrales. Cada decisión debe responder a una dependencia identificada y a una necesidad de operación. Presentamos dos alternativas de inversión para evaluar junto con su soporte y mantenimiento. Muchas gracias; quedamos disponibles para preguntas y pruebas sobre el simulador.</a:t>
             </a:r>
           </a:p>
         </p:txBody>
@@ -1375,12 +1431,7 @@
           <a:lstStyle xmlns:a="http://schemas.openxmlformats.org/drawingml/2006/main"/>
           <a:p xmlns:a="http://schemas.openxmlformats.org/drawingml/2006/main">
             <a:r>
-              <a:t>Fuentes y alcance: https://github.com/hu-herrera/financiera-pacifico-entrega-docente/blob/main/02_Entregables/Entregable_3.pdf y https://github.com/hu-herrera/financiera-pacifico-entrega-docente/blob/main/02_Entregables/Entregable_4.pdf</a:t>
-            </a:r>
-          </a:p>
-          <a:p xmlns:a="http://schemas.openxmlformats.org/drawingml/2006/main">
-            <a:r>
-              <a:t>Revisión WAN-3: cuatro transportes en central y sucursales. Fuente: https://github.com/hu-herrera/financiera-pacifico-entrega-docente/blob/main/Anexos/Continuidad_Cuatro_WAN_25_oct_2026.md</a:t>
+              <a:t>El ejercicio base inicia operaciones cada 10 s y réplica cada 60 s, con 4 s para completarla. Falla en t=157 s; conserva la copia de t=120 s completada en t=124 s. Quedan 12 de 15 operaciones y 3 por conciliar. RPO observado 150-120=30 s. Detección 5 s, aislamiento 5 s, arranque 30 s y validación HTTPS 10 s: RTO observado 50 s virtuales. Fuente: código y Anexos/Ejercicios_Recuperacion_C5.json del corte C5-OPERACION-2.</a:t>
             </a:r>
           </a:p>
         </p:txBody>
@@ -3898,12 +3949,12 @@
   </p:cSld>
   <p:clrMap bg1="lt1" tx1="dk1" bg2="lt2" tx2="dk2" accent1="accent1" accent2="accent2" accent3="accent3" accent4="accent4" accent5="accent5" accent6="accent6" hlink="hlink" folHlink="folHlink"/>
   <p:sldLayoutIdLst>
-    <p:sldLayoutId xmlns:r="http://schemas.openxmlformats.org/officeDocument/2006/relationships" id="2147483649" r:id="R2ef964131fab4995"/>
-    <p:sldLayoutId xmlns:r="http://schemas.openxmlformats.org/officeDocument/2006/relationships" id="2147483650" r:id="Reae22f9b6c53488a"/>
-    <p:sldLayoutId xmlns:r="http://schemas.openxmlformats.org/officeDocument/2006/relationships" id="2147483651" r:id="R28ddd3462d854559"/>
-    <p:sldLayoutId xmlns:r="http://schemas.openxmlformats.org/officeDocument/2006/relationships" id="2147483652" r:id="Rf989c59553864179"/>
-    <p:sldLayoutId xmlns:r="http://schemas.openxmlformats.org/officeDocument/2006/relationships" id="2147483653" r:id="Ra6a4ef02936b40d1"/>
-    <p:sldLayoutId xmlns:r="http://schemas.openxmlformats.org/officeDocument/2006/relationships" id="2147483654" r:id="R76e6133889324e86"/>
+    <p:sldLayoutId xmlns:r="http://schemas.openxmlformats.org/officeDocument/2006/relationships" id="2147483649" r:id="Re9d7c74ded1b486f"/>
+    <p:sldLayoutId xmlns:r="http://schemas.openxmlformats.org/officeDocument/2006/relationships" id="2147483650" r:id="R50c0ee8a59514125"/>
+    <p:sldLayoutId xmlns:r="http://schemas.openxmlformats.org/officeDocument/2006/relationships" id="2147483651" r:id="Re04823970be340f0"/>
+    <p:sldLayoutId xmlns:r="http://schemas.openxmlformats.org/officeDocument/2006/relationships" id="2147483652" r:id="Rdf8fce1d44234314"/>
+    <p:sldLayoutId xmlns:r="http://schemas.openxmlformats.org/officeDocument/2006/relationships" id="2147483653" r:id="R1f9fb0c2aa834846"/>
+    <p:sldLayoutId xmlns:r="http://schemas.openxmlformats.org/officeDocument/2006/relationships" id="2147483654" r:id="Rae2db2f5c6294545"/>
   </p:sldLayoutIdLst>
   <p:txStyles>
     <p:titleStyle>
@@ -5144,7 +5195,7 @@
                 <a:ea typeface="DejaVu Sans"/>
                 <a:cs typeface="DejaVu Sans"/>
               </a:rPr>
-              <a:t>Avance Capstone al 27 de octubre de 2026</a:t>
+              <a:t>Avance Capstone al 28 de octubre de 2026</a:t>
             </a:r>
           </a:p>
         </p:txBody>
@@ -5535,7 +5586,7 @@
                 <a:ea typeface="DejaVu Sans"/>
                 <a:cs typeface="DejaVu Sans"/>
               </a:rPr>
-              <a:t>Evidencia y límites de los resultados</a:t>
+              <a:t>Pruebas de operación del prototipo</a:t>
             </a:r>
           </a:p>
         </p:txBody>
@@ -5873,7 +5924,7 @@
                 <a:ea typeface="DejaVu Sans"/>
                 <a:cs typeface="DejaVu Sans"/>
               </a:rPr>
-              <a:t>30</a:t>
+              <a:t>60</a:t>
             </a:r>
           </a:p>
         </p:txBody>
@@ -6211,7 +6262,7 @@
                 <a:ea typeface="DejaVu Sans"/>
                 <a:cs typeface="DejaVu Sans"/>
               </a:rPr>
-              <a:t>16</a:t>
+              <a:t>52</a:t>
             </a:r>
           </a:p>
         </p:txBody>
@@ -6718,7 +6769,7 @@
                 <a:ea typeface="DejaVu Sans"/>
                 <a:cs typeface="DejaVu Sans"/>
               </a:rPr>
-              <a:t>Los registros históricos tienen cortes distintos.</a:t>
+              <a:t>Interfaces, OSPF, VPN, permisos, servicios y recuperación.</a:t>
             </a:r>
           </a:p>
           <a:p xmlns:a="http://schemas.openxmlformats.org/drawingml/2006/main">
@@ -6742,7 +6793,7 @@
                 <a:ea typeface="DejaVu Sans"/>
                 <a:cs typeface="DejaVu Sans"/>
               </a:rPr>
-              <a:t>Los resultados por SHA están en el anexo público de evidencia.</a:t>
+              <a:t>El cierre vigente conserva resultados y comandos reproducibles.</a:t>
             </a:r>
           </a:p>
         </p:txBody>
@@ -7288,7 +7339,7 @@
           <p:cNvPr id="3" name="">
             <a:extLst xmlns:a="http://schemas.openxmlformats.org/drawingml/2006/main">
               <a:ext uri="{FF2B5EF4-FFF2-40B4-BE49-F238E27FC236}">
-                <a16:creationId xmlns:a16="http://schemas.microsoft.com/office/drawing/2014/main" id="{B6FF6D45-E115-44AD-84B4-73BE26B149CF}"/>
+                <a16:creationId xmlns:a16="http://schemas.microsoft.com/office/drawing/2014/main" id="{70907D4D-1B45-4976-BA55-0156874B67FF}"/>
               </a:ext>
             </a:extLst>
           </p:cNvPr>
@@ -10023,7 +10074,7 @@
           <p:cNvPr id="3" name="">
             <a:extLst xmlns:a="http://schemas.openxmlformats.org/drawingml/2006/main">
               <a:ext uri="{FF2B5EF4-FFF2-40B4-BE49-F238E27FC236}">
-                <a16:creationId xmlns:a16="http://schemas.microsoft.com/office/drawing/2014/main" id="{10796B85-5EB4-4B77-8C42-026C980E2BBC}"/>
+                <a16:creationId xmlns:a16="http://schemas.microsoft.com/office/drawing/2014/main" id="{76D4C787-CB2E-4A00-836A-D3517C0F335F}"/>
               </a:ext>
             </a:extLst>
           </p:cNvPr>
@@ -10919,7 +10970,7 @@
           <p:cNvPr id="3" name="">
             <a:extLst xmlns:a="http://schemas.openxmlformats.org/drawingml/2006/main">
               <a:ext uri="{FF2B5EF4-FFF2-40B4-BE49-F238E27FC236}">
-                <a16:creationId xmlns:a16="http://schemas.microsoft.com/office/drawing/2014/main" id="{1FE30422-4A1E-46E7-819B-0484007EF0C4}"/>
+                <a16:creationId xmlns:a16="http://schemas.microsoft.com/office/drawing/2014/main" id="{B97CF428-0419-4CEB-8A57-750DA211087C}"/>
               </a:ext>
             </a:extLst>
           </p:cNvPr>
@@ -11613,6 +11664,977 @@
 </p:sld>
 </file>
 
+<file path=ppt/slides/slide15.xml><?xml version="1.0" encoding="utf-8"?>
+<p:sld xmlns:p="http://schemas.openxmlformats.org/presentationml/2006/main">
+  <p:cSld>
+    <p:bg>
+      <p:bgPr>
+        <a:solidFill xmlns:a="http://schemas.openxmlformats.org/drawingml/2006/main">
+          <a:srgbClr val="F5F7F5"/>
+        </a:solidFill>
+      </p:bgPr>
+    </p:bg>
+    <p:spTree>
+      <p:nvGrpSpPr>
+        <p:cNvPr id="1" name=""/>
+        <p:cNvGrpSpPr/>
+        <p:nvPr/>
+      </p:nvGrpSpPr>
+      <p:grpSpPr>
+        <a:xfrm xmlns:a="http://schemas.openxmlformats.org/drawingml/2006/main"/>
+      </p:grpSpPr>
+      <p:sp>
+        <p:nvSpPr>
+          <p:cNvPr id="7" name="closing-title">
+            <a:extLst xmlns:a="http://schemas.openxmlformats.org/drawingml/2006/main">
+              <a:ext uri="{FF2B5EF4-FFF2-40B4-BE49-F238E27FC236}">
+                <a16:creationId xmlns:a16="http://schemas.microsoft.com/office/drawing/2014/main" id="{3FF9DA87-A473-40FB-92B3-974B8014F5F9}"/>
+              </a:ext>
+            </a:extLst>
+          </p:cNvPr>
+          <p:cNvSpPr>
+            <a:spLocks xmlns:a="http://schemas.openxmlformats.org/drawingml/2006/main" noGrp="1"/>
+          </p:cNvSpPr>
+          <p:nvPr/>
+        </p:nvSpPr>
+        <p:spPr>
+          <a:xfrm xmlns:a="http://schemas.openxmlformats.org/drawingml/2006/main">
+            <a:off x="609600" y="428625"/>
+            <a:ext cx="10953750" cy="952500"/>
+          </a:xfrm>
+          <a:prstGeom xmlns:a="http://schemas.openxmlformats.org/drawingml/2006/main" prst="rect">
+            <a:avLst/>
+          </a:prstGeom>
+          <a:noFill xmlns:a="http://schemas.openxmlformats.org/drawingml/2006/main"/>
+          <a:ln xmlns:a="http://schemas.openxmlformats.org/drawingml/2006/main" w="0">
+            <a:noFill/>
+            <a:prstDash val="solid"/>
+          </a:ln>
+        </p:spPr>
+        <p:txBody>
+          <a:bodyPr xmlns:a="http://schemas.openxmlformats.org/drawingml/2006/main"/>
+          <a:lstStyle xmlns:a="http://schemas.openxmlformats.org/drawingml/2006/main">
+            <a:defPPr>
+              <a:defRPr sz="3600" b="1">
+                <a:solidFill>
+                  <a:srgbClr val="112A3A"/>
+                </a:solidFill>
+                <a:latin typeface="DejaVu Sans"/>
+                <a:ea typeface="DejaVu Sans"/>
+                <a:cs typeface="DejaVu Sans"/>
+              </a:defRPr>
+            </a:defPPr>
+            <a:lvl1pPr>
+              <a:defRPr sz="3600" b="1">
+                <a:solidFill>
+                  <a:srgbClr val="112A3A"/>
+                </a:solidFill>
+                <a:latin typeface="DejaVu Sans"/>
+                <a:ea typeface="DejaVu Sans"/>
+                <a:cs typeface="DejaVu Sans"/>
+              </a:defRPr>
+            </a:lvl1pPr>
+            <a:lvl2pPr>
+              <a:defRPr sz="3600" b="1">
+                <a:solidFill>
+                  <a:srgbClr val="112A3A"/>
+                </a:solidFill>
+                <a:latin typeface="DejaVu Sans"/>
+                <a:ea typeface="DejaVu Sans"/>
+                <a:cs typeface="DejaVu Sans"/>
+              </a:defRPr>
+            </a:lvl2pPr>
+            <a:lvl3pPr>
+              <a:defRPr sz="3600" b="1">
+                <a:solidFill>
+                  <a:srgbClr val="112A3A"/>
+                </a:solidFill>
+                <a:latin typeface="DejaVu Sans"/>
+                <a:ea typeface="DejaVu Sans"/>
+                <a:cs typeface="DejaVu Sans"/>
+              </a:defRPr>
+            </a:lvl3pPr>
+            <a:lvl4pPr>
+              <a:defRPr sz="3600" b="1">
+                <a:solidFill>
+                  <a:srgbClr val="112A3A"/>
+                </a:solidFill>
+                <a:latin typeface="DejaVu Sans"/>
+                <a:ea typeface="DejaVu Sans"/>
+                <a:cs typeface="DejaVu Sans"/>
+              </a:defRPr>
+            </a:lvl4pPr>
+            <a:lvl5pPr>
+              <a:defRPr sz="3600" b="1">
+                <a:solidFill>
+                  <a:srgbClr val="112A3A"/>
+                </a:solidFill>
+                <a:latin typeface="DejaVu Sans"/>
+                <a:ea typeface="DejaVu Sans"/>
+                <a:cs typeface="DejaVu Sans"/>
+              </a:defRPr>
+            </a:lvl5pPr>
+            <a:lvl6pPr>
+              <a:defRPr sz="3600" b="1">
+                <a:solidFill>
+                  <a:srgbClr val="112A3A"/>
+                </a:solidFill>
+                <a:latin typeface="DejaVu Sans"/>
+                <a:ea typeface="DejaVu Sans"/>
+                <a:cs typeface="DejaVu Sans"/>
+              </a:defRPr>
+            </a:lvl6pPr>
+            <a:lvl7pPr>
+              <a:defRPr sz="3600" b="1">
+                <a:solidFill>
+                  <a:srgbClr val="112A3A"/>
+                </a:solidFill>
+                <a:latin typeface="DejaVu Sans"/>
+                <a:ea typeface="DejaVu Sans"/>
+                <a:cs typeface="DejaVu Sans"/>
+              </a:defRPr>
+            </a:lvl7pPr>
+            <a:lvl8pPr>
+              <a:defRPr sz="3600" b="1">
+                <a:solidFill>
+                  <a:srgbClr val="112A3A"/>
+                </a:solidFill>
+                <a:latin typeface="DejaVu Sans"/>
+                <a:ea typeface="DejaVu Sans"/>
+                <a:cs typeface="DejaVu Sans"/>
+              </a:defRPr>
+            </a:lvl8pPr>
+            <a:lvl9pPr>
+              <a:defRPr sz="3600" b="1">
+                <a:solidFill>
+                  <a:srgbClr val="112A3A"/>
+                </a:solidFill>
+                <a:latin typeface="DejaVu Sans"/>
+                <a:ea typeface="DejaVu Sans"/>
+                <a:cs typeface="DejaVu Sans"/>
+              </a:defRPr>
+            </a:lvl9pPr>
+          </a:lstStyle>
+          <a:p xmlns:a="http://schemas.openxmlformats.org/drawingml/2006/main">
+            <a:pPr>
+              <a:defRPr sz="3600" b="1">
+                <a:solidFill>
+                  <a:srgbClr val="112A3A"/>
+                </a:solidFill>
+                <a:latin typeface="DejaVu Sans"/>
+                <a:ea typeface="DejaVu Sans"/>
+                <a:cs typeface="DejaVu Sans"/>
+              </a:defRPr>
+            </a:pPr>
+            <a:r>
+              <a:rPr sz="3600" b="1">
+                <a:solidFill>
+                  <a:srgbClr val="112A3A"/>
+                </a:solidFill>
+                <a:latin typeface="DejaVu Sans"/>
+                <a:ea typeface="DejaVu Sans"/>
+                <a:cs typeface="DejaVu Sans"/>
+              </a:rPr>
+              <a:t>Para finalizar</a:t>
+            </a:r>
+          </a:p>
+        </p:txBody>
+      </p:sp>
+      <p:sp>
+        <p:nvSpPr>
+          <p:cNvPr id="2" name="closing-statement">
+            <a:extLst xmlns:a="http://schemas.openxmlformats.org/drawingml/2006/main">
+              <a:ext uri="{FF2B5EF4-FFF2-40B4-BE49-F238E27FC236}">
+                <a16:creationId xmlns:a16="http://schemas.microsoft.com/office/drawing/2014/main" id="{777CE9EA-FBE8-4C7B-BEDA-5B7FDF0EA88E}"/>
+              </a:ext>
+            </a:extLst>
+          </p:cNvPr>
+          <p:cNvSpPr>
+            <a:spLocks xmlns:a="http://schemas.openxmlformats.org/drawingml/2006/main" noGrp="1"/>
+          </p:cNvSpPr>
+          <p:nvPr/>
+        </p:nvSpPr>
+        <p:spPr>
+          <a:xfrm xmlns:a="http://schemas.openxmlformats.org/drawingml/2006/main">
+            <a:off x="609600" y="1924050"/>
+            <a:ext cx="10668000" cy="838200"/>
+          </a:xfrm>
+          <a:prstGeom xmlns:a="http://schemas.openxmlformats.org/drawingml/2006/main" prst="rect">
+            <a:avLst/>
+          </a:prstGeom>
+          <a:noFill xmlns:a="http://schemas.openxmlformats.org/drawingml/2006/main"/>
+          <a:ln xmlns:a="http://schemas.openxmlformats.org/drawingml/2006/main" w="0">
+            <a:noFill/>
+            <a:prstDash val="solid"/>
+          </a:ln>
+        </p:spPr>
+        <p:txBody>
+          <a:bodyPr xmlns:a="http://schemas.openxmlformats.org/drawingml/2006/main"/>
+          <a:lstStyle xmlns:a="http://schemas.openxmlformats.org/drawingml/2006/main">
+            <a:defPPr>
+              <a:defRPr sz="3150" b="1">
+                <a:solidFill>
+                  <a:srgbClr val="00888A"/>
+                </a:solidFill>
+                <a:latin typeface="DejaVu Sans"/>
+                <a:ea typeface="DejaVu Sans"/>
+                <a:cs typeface="DejaVu Sans"/>
+              </a:defRPr>
+            </a:defPPr>
+            <a:lvl1pPr>
+              <a:defRPr sz="3150" b="1">
+                <a:solidFill>
+                  <a:srgbClr val="00888A"/>
+                </a:solidFill>
+                <a:latin typeface="DejaVu Sans"/>
+                <a:ea typeface="DejaVu Sans"/>
+                <a:cs typeface="DejaVu Sans"/>
+              </a:defRPr>
+            </a:lvl1pPr>
+            <a:lvl2pPr>
+              <a:defRPr sz="3150" b="1">
+                <a:solidFill>
+                  <a:srgbClr val="00888A"/>
+                </a:solidFill>
+                <a:latin typeface="DejaVu Sans"/>
+                <a:ea typeface="DejaVu Sans"/>
+                <a:cs typeface="DejaVu Sans"/>
+              </a:defRPr>
+            </a:lvl2pPr>
+            <a:lvl3pPr>
+              <a:defRPr sz="3150" b="1">
+                <a:solidFill>
+                  <a:srgbClr val="00888A"/>
+                </a:solidFill>
+                <a:latin typeface="DejaVu Sans"/>
+                <a:ea typeface="DejaVu Sans"/>
+                <a:cs typeface="DejaVu Sans"/>
+              </a:defRPr>
+            </a:lvl3pPr>
+            <a:lvl4pPr>
+              <a:defRPr sz="3150" b="1">
+                <a:solidFill>
+                  <a:srgbClr val="00888A"/>
+                </a:solidFill>
+                <a:latin typeface="DejaVu Sans"/>
+                <a:ea typeface="DejaVu Sans"/>
+                <a:cs typeface="DejaVu Sans"/>
+              </a:defRPr>
+            </a:lvl4pPr>
+            <a:lvl5pPr>
+              <a:defRPr sz="3150" b="1">
+                <a:solidFill>
+                  <a:srgbClr val="00888A"/>
+                </a:solidFill>
+                <a:latin typeface="DejaVu Sans"/>
+                <a:ea typeface="DejaVu Sans"/>
+                <a:cs typeface="DejaVu Sans"/>
+              </a:defRPr>
+            </a:lvl5pPr>
+            <a:lvl6pPr>
+              <a:defRPr sz="3150" b="1">
+                <a:solidFill>
+                  <a:srgbClr val="00888A"/>
+                </a:solidFill>
+                <a:latin typeface="DejaVu Sans"/>
+                <a:ea typeface="DejaVu Sans"/>
+                <a:cs typeface="DejaVu Sans"/>
+              </a:defRPr>
+            </a:lvl6pPr>
+            <a:lvl7pPr>
+              <a:defRPr sz="3150" b="1">
+                <a:solidFill>
+                  <a:srgbClr val="00888A"/>
+                </a:solidFill>
+                <a:latin typeface="DejaVu Sans"/>
+                <a:ea typeface="DejaVu Sans"/>
+                <a:cs typeface="DejaVu Sans"/>
+              </a:defRPr>
+            </a:lvl7pPr>
+            <a:lvl8pPr>
+              <a:defRPr sz="3150" b="1">
+                <a:solidFill>
+                  <a:srgbClr val="00888A"/>
+                </a:solidFill>
+                <a:latin typeface="DejaVu Sans"/>
+                <a:ea typeface="DejaVu Sans"/>
+                <a:cs typeface="DejaVu Sans"/>
+              </a:defRPr>
+            </a:lvl8pPr>
+            <a:lvl9pPr>
+              <a:defRPr sz="3150" b="1">
+                <a:solidFill>
+                  <a:srgbClr val="00888A"/>
+                </a:solidFill>
+                <a:latin typeface="DejaVu Sans"/>
+                <a:ea typeface="DejaVu Sans"/>
+                <a:cs typeface="DejaVu Sans"/>
+              </a:defRPr>
+            </a:lvl9pPr>
+          </a:lstStyle>
+          <a:p xmlns:a="http://schemas.openxmlformats.org/drawingml/2006/main">
+            <a:pPr>
+              <a:defRPr sz="3150" b="1">
+                <a:solidFill>
+                  <a:srgbClr val="00888A"/>
+                </a:solidFill>
+                <a:latin typeface="DejaVu Sans"/>
+                <a:ea typeface="DejaVu Sans"/>
+                <a:cs typeface="DejaVu Sans"/>
+              </a:defRPr>
+            </a:pPr>
+            <a:r>
+              <a:rPr sz="3150" b="1">
+                <a:solidFill>
+                  <a:srgbClr val="00888A"/>
+                </a:solidFill>
+                <a:latin typeface="DejaVu Sans"/>
+                <a:ea typeface="DejaVu Sans"/>
+                <a:cs typeface="DejaVu Sans"/>
+              </a:rPr>
+              <a:t>Continuidad con alternativas y control</a:t>
+            </a:r>
+          </a:p>
+        </p:txBody>
+      </p:sp>
+      <p:sp>
+        <p:nvSpPr>
+          <p:cNvPr id="3" name="closing-body">
+            <a:extLst xmlns:a="http://schemas.openxmlformats.org/drawingml/2006/main">
+              <a:ext uri="{FF2B5EF4-FFF2-40B4-BE49-F238E27FC236}">
+                <a16:creationId xmlns:a16="http://schemas.microsoft.com/office/drawing/2014/main" id="{E61E9815-14B6-4414-A1AE-DD61E472DFBC}"/>
+              </a:ext>
+            </a:extLst>
+          </p:cNvPr>
+          <p:cNvSpPr>
+            <a:spLocks xmlns:a="http://schemas.openxmlformats.org/drawingml/2006/main" noGrp="1"/>
+          </p:cNvSpPr>
+          <p:nvPr/>
+        </p:nvSpPr>
+        <p:spPr>
+          <a:xfrm xmlns:a="http://schemas.openxmlformats.org/drawingml/2006/main">
+            <a:off x="609600" y="3095625"/>
+            <a:ext cx="10477500" cy="1381125"/>
+          </a:xfrm>
+          <a:prstGeom xmlns:a="http://schemas.openxmlformats.org/drawingml/2006/main" prst="rect">
+            <a:avLst/>
+          </a:prstGeom>
+          <a:noFill xmlns:a="http://schemas.openxmlformats.org/drawingml/2006/main"/>
+          <a:ln xmlns:a="http://schemas.openxmlformats.org/drawingml/2006/main" w="0">
+            <a:noFill/>
+            <a:prstDash val="solid"/>
+          </a:ln>
+        </p:spPr>
+        <p:txBody>
+          <a:bodyPr xmlns:a="http://schemas.openxmlformats.org/drawingml/2006/main"/>
+          <a:lstStyle xmlns:a="http://schemas.openxmlformats.org/drawingml/2006/main">
+            <a:defPPr>
+              <a:defRPr sz="2250" b="0">
+                <a:solidFill>
+                  <a:srgbClr val="112A3A"/>
+                </a:solidFill>
+                <a:latin typeface="DejaVu Sans"/>
+                <a:ea typeface="DejaVu Sans"/>
+                <a:cs typeface="DejaVu Sans"/>
+              </a:defRPr>
+            </a:defPPr>
+            <a:lvl1pPr>
+              <a:defRPr sz="2250" b="0">
+                <a:solidFill>
+                  <a:srgbClr val="112A3A"/>
+                </a:solidFill>
+                <a:latin typeface="DejaVu Sans"/>
+                <a:ea typeface="DejaVu Sans"/>
+                <a:cs typeface="DejaVu Sans"/>
+              </a:defRPr>
+            </a:lvl1pPr>
+            <a:lvl2pPr>
+              <a:defRPr sz="2250" b="0">
+                <a:solidFill>
+                  <a:srgbClr val="112A3A"/>
+                </a:solidFill>
+                <a:latin typeface="DejaVu Sans"/>
+                <a:ea typeface="DejaVu Sans"/>
+                <a:cs typeface="DejaVu Sans"/>
+              </a:defRPr>
+            </a:lvl2pPr>
+            <a:lvl3pPr>
+              <a:defRPr sz="2250" b="0">
+                <a:solidFill>
+                  <a:srgbClr val="112A3A"/>
+                </a:solidFill>
+                <a:latin typeface="DejaVu Sans"/>
+                <a:ea typeface="DejaVu Sans"/>
+                <a:cs typeface="DejaVu Sans"/>
+              </a:defRPr>
+            </a:lvl3pPr>
+            <a:lvl4pPr>
+              <a:defRPr sz="2250" b="0">
+                <a:solidFill>
+                  <a:srgbClr val="112A3A"/>
+                </a:solidFill>
+                <a:latin typeface="DejaVu Sans"/>
+                <a:ea typeface="DejaVu Sans"/>
+                <a:cs typeface="DejaVu Sans"/>
+              </a:defRPr>
+            </a:lvl4pPr>
+            <a:lvl5pPr>
+              <a:defRPr sz="2250" b="0">
+                <a:solidFill>
+                  <a:srgbClr val="112A3A"/>
+                </a:solidFill>
+                <a:latin typeface="DejaVu Sans"/>
+                <a:ea typeface="DejaVu Sans"/>
+                <a:cs typeface="DejaVu Sans"/>
+              </a:defRPr>
+            </a:lvl5pPr>
+            <a:lvl6pPr>
+              <a:defRPr sz="2250" b="0">
+                <a:solidFill>
+                  <a:srgbClr val="112A3A"/>
+                </a:solidFill>
+                <a:latin typeface="DejaVu Sans"/>
+                <a:ea typeface="DejaVu Sans"/>
+                <a:cs typeface="DejaVu Sans"/>
+              </a:defRPr>
+            </a:lvl6pPr>
+            <a:lvl7pPr>
+              <a:defRPr sz="2250" b="0">
+                <a:solidFill>
+                  <a:srgbClr val="112A3A"/>
+                </a:solidFill>
+                <a:latin typeface="DejaVu Sans"/>
+                <a:ea typeface="DejaVu Sans"/>
+                <a:cs typeface="DejaVu Sans"/>
+              </a:defRPr>
+            </a:lvl7pPr>
+            <a:lvl8pPr>
+              <a:defRPr sz="2250" b="0">
+                <a:solidFill>
+                  <a:srgbClr val="112A3A"/>
+                </a:solidFill>
+                <a:latin typeface="DejaVu Sans"/>
+                <a:ea typeface="DejaVu Sans"/>
+                <a:cs typeface="DejaVu Sans"/>
+              </a:defRPr>
+            </a:lvl8pPr>
+            <a:lvl9pPr>
+              <a:defRPr sz="2250" b="0">
+                <a:solidFill>
+                  <a:srgbClr val="112A3A"/>
+                </a:solidFill>
+                <a:latin typeface="DejaVu Sans"/>
+                <a:ea typeface="DejaVu Sans"/>
+                <a:cs typeface="DejaVu Sans"/>
+              </a:defRPr>
+            </a:lvl9pPr>
+          </a:lstStyle>
+          <a:p xmlns:a="http://schemas.openxmlformats.org/drawingml/2006/main">
+            <a:pPr>
+              <a:defRPr sz="2250" b="0">
+                <a:solidFill>
+                  <a:srgbClr val="112A3A"/>
+                </a:solidFill>
+                <a:latin typeface="DejaVu Sans"/>
+                <a:ea typeface="DejaVu Sans"/>
+                <a:cs typeface="DejaVu Sans"/>
+              </a:defRPr>
+            </a:pPr>
+            <a:r>
+              <a:rPr sz="2250" b="0">
+                <a:solidFill>
+                  <a:srgbClr val="112A3A"/>
+                </a:solidFill>
+                <a:latin typeface="DejaVu Sans"/>
+                <a:ea typeface="DejaVu Sans"/>
+                <a:cs typeface="DejaVu Sans"/>
+              </a:rPr>
+              <a:t>La propuesta busca sostener la atención con caminos alternativos, permisos por servicio y recuperación condicionada de los sistemas centrales.</a:t>
+            </a:r>
+          </a:p>
+        </p:txBody>
+      </p:sp>
+      <p:sp>
+        <p:nvSpPr>
+          <p:cNvPr id="4" name="closing-scope">
+            <a:extLst xmlns:a="http://schemas.openxmlformats.org/drawingml/2006/main">
+              <a:ext uri="{FF2B5EF4-FFF2-40B4-BE49-F238E27FC236}">
+                <a16:creationId xmlns:a16="http://schemas.microsoft.com/office/drawing/2014/main" id="{C6E1F466-672D-45D3-869E-DF623654E6F5}"/>
+              </a:ext>
+            </a:extLst>
+          </p:cNvPr>
+          <p:cNvSpPr>
+            <a:spLocks xmlns:a="http://schemas.openxmlformats.org/drawingml/2006/main" noGrp="1"/>
+          </p:cNvSpPr>
+          <p:nvPr/>
+        </p:nvSpPr>
+        <p:spPr>
+          <a:xfrm xmlns:a="http://schemas.openxmlformats.org/drawingml/2006/main">
+            <a:off x="609600" y="4857750"/>
+            <a:ext cx="10572750" cy="523875"/>
+          </a:xfrm>
+          <a:prstGeom xmlns:a="http://schemas.openxmlformats.org/drawingml/2006/main" prst="rect">
+            <a:avLst/>
+          </a:prstGeom>
+          <a:noFill xmlns:a="http://schemas.openxmlformats.org/drawingml/2006/main"/>
+          <a:ln xmlns:a="http://schemas.openxmlformats.org/drawingml/2006/main" w="0">
+            <a:noFill/>
+            <a:prstDash val="solid"/>
+          </a:ln>
+        </p:spPr>
+        <p:txBody>
+          <a:bodyPr xmlns:a="http://schemas.openxmlformats.org/drawingml/2006/main"/>
+          <a:lstStyle xmlns:a="http://schemas.openxmlformats.org/drawingml/2006/main">
+            <a:defPPr>
+              <a:defRPr sz="2025" b="0">
+                <a:solidFill>
+                  <a:srgbClr val="112A3A"/>
+                </a:solidFill>
+                <a:latin typeface="DejaVu Sans"/>
+                <a:ea typeface="DejaVu Sans"/>
+                <a:cs typeface="DejaVu Sans"/>
+              </a:defRPr>
+            </a:defPPr>
+            <a:lvl1pPr>
+              <a:defRPr sz="2025" b="0">
+                <a:solidFill>
+                  <a:srgbClr val="112A3A"/>
+                </a:solidFill>
+                <a:latin typeface="DejaVu Sans"/>
+                <a:ea typeface="DejaVu Sans"/>
+                <a:cs typeface="DejaVu Sans"/>
+              </a:defRPr>
+            </a:lvl1pPr>
+            <a:lvl2pPr>
+              <a:defRPr sz="2025" b="0">
+                <a:solidFill>
+                  <a:srgbClr val="112A3A"/>
+                </a:solidFill>
+                <a:latin typeface="DejaVu Sans"/>
+                <a:ea typeface="DejaVu Sans"/>
+                <a:cs typeface="DejaVu Sans"/>
+              </a:defRPr>
+            </a:lvl2pPr>
+            <a:lvl3pPr>
+              <a:defRPr sz="2025" b="0">
+                <a:solidFill>
+                  <a:srgbClr val="112A3A"/>
+                </a:solidFill>
+                <a:latin typeface="DejaVu Sans"/>
+                <a:ea typeface="DejaVu Sans"/>
+                <a:cs typeface="DejaVu Sans"/>
+              </a:defRPr>
+            </a:lvl3pPr>
+            <a:lvl4pPr>
+              <a:defRPr sz="2025" b="0">
+                <a:solidFill>
+                  <a:srgbClr val="112A3A"/>
+                </a:solidFill>
+                <a:latin typeface="DejaVu Sans"/>
+                <a:ea typeface="DejaVu Sans"/>
+                <a:cs typeface="DejaVu Sans"/>
+              </a:defRPr>
+            </a:lvl4pPr>
+            <a:lvl5pPr>
+              <a:defRPr sz="2025" b="0">
+                <a:solidFill>
+                  <a:srgbClr val="112A3A"/>
+                </a:solidFill>
+                <a:latin typeface="DejaVu Sans"/>
+                <a:ea typeface="DejaVu Sans"/>
+                <a:cs typeface="DejaVu Sans"/>
+              </a:defRPr>
+            </a:lvl5pPr>
+            <a:lvl6pPr>
+              <a:defRPr sz="2025" b="0">
+                <a:solidFill>
+                  <a:srgbClr val="112A3A"/>
+                </a:solidFill>
+                <a:latin typeface="DejaVu Sans"/>
+                <a:ea typeface="DejaVu Sans"/>
+                <a:cs typeface="DejaVu Sans"/>
+              </a:defRPr>
+            </a:lvl6pPr>
+            <a:lvl7pPr>
+              <a:defRPr sz="2025" b="0">
+                <a:solidFill>
+                  <a:srgbClr val="112A3A"/>
+                </a:solidFill>
+                <a:latin typeface="DejaVu Sans"/>
+                <a:ea typeface="DejaVu Sans"/>
+                <a:cs typeface="DejaVu Sans"/>
+              </a:defRPr>
+            </a:lvl7pPr>
+            <a:lvl8pPr>
+              <a:defRPr sz="2025" b="0">
+                <a:solidFill>
+                  <a:srgbClr val="112A3A"/>
+                </a:solidFill>
+                <a:latin typeface="DejaVu Sans"/>
+                <a:ea typeface="DejaVu Sans"/>
+                <a:cs typeface="DejaVu Sans"/>
+              </a:defRPr>
+            </a:lvl8pPr>
+            <a:lvl9pPr>
+              <a:defRPr sz="2025" b="0">
+                <a:solidFill>
+                  <a:srgbClr val="112A3A"/>
+                </a:solidFill>
+                <a:latin typeface="DejaVu Sans"/>
+                <a:ea typeface="DejaVu Sans"/>
+                <a:cs typeface="DejaVu Sans"/>
+              </a:defRPr>
+            </a:lvl9pPr>
+          </a:lstStyle>
+          <a:p xmlns:a="http://schemas.openxmlformats.org/drawingml/2006/main">
+            <a:pPr>
+              <a:defRPr sz="2025" b="0">
+                <a:solidFill>
+                  <a:srgbClr val="112A3A"/>
+                </a:solidFill>
+                <a:latin typeface="DejaVu Sans"/>
+                <a:ea typeface="DejaVu Sans"/>
+                <a:cs typeface="DejaVu Sans"/>
+              </a:defRPr>
+            </a:pPr>
+            <a:r>
+              <a:rPr sz="2025" b="0">
+                <a:solidFill>
+                  <a:srgbClr val="112A3A"/>
+                </a:solidFill>
+                <a:latin typeface="DejaVu Sans"/>
+                <a:ea typeface="DejaVu Sans"/>
+                <a:cs typeface="DejaVu Sans"/>
+              </a:rPr>
+              <a:t>23 sedes · 650 puestos · alternativas A y B</a:t>
+            </a:r>
+          </a:p>
+        </p:txBody>
+      </p:sp>
+      <p:sp>
+        <p:nvSpPr>
+          <p:cNvPr id="5" name="closing-questions">
+            <a:extLst xmlns:a="http://schemas.openxmlformats.org/drawingml/2006/main">
+              <a:ext uri="{FF2B5EF4-FFF2-40B4-BE49-F238E27FC236}">
+                <a16:creationId xmlns:a16="http://schemas.microsoft.com/office/drawing/2014/main" id="{225DF9F7-0582-4F24-AFE8-05AE603CD844}"/>
+              </a:ext>
+            </a:extLst>
+          </p:cNvPr>
+          <p:cNvSpPr>
+            <a:spLocks xmlns:a="http://schemas.openxmlformats.org/drawingml/2006/main" noGrp="1"/>
+          </p:cNvSpPr>
+          <p:nvPr/>
+        </p:nvSpPr>
+        <p:spPr>
+          <a:xfrm xmlns:a="http://schemas.openxmlformats.org/drawingml/2006/main">
+            <a:off x="609600" y="5819775"/>
+            <a:ext cx="10668000" cy="476250"/>
+          </a:xfrm>
+          <a:prstGeom xmlns:a="http://schemas.openxmlformats.org/drawingml/2006/main" prst="rect">
+            <a:avLst/>
+          </a:prstGeom>
+          <a:noFill xmlns:a="http://schemas.openxmlformats.org/drawingml/2006/main"/>
+          <a:ln xmlns:a="http://schemas.openxmlformats.org/drawingml/2006/main" w="0">
+            <a:noFill/>
+            <a:prstDash val="solid"/>
+          </a:ln>
+        </p:spPr>
+        <p:txBody>
+          <a:bodyPr xmlns:a="http://schemas.openxmlformats.org/drawingml/2006/main"/>
+          <a:lstStyle xmlns:a="http://schemas.openxmlformats.org/drawingml/2006/main">
+            <a:defPPr>
+              <a:defRPr sz="1800" b="0">
+                <a:solidFill>
+                  <a:srgbClr val="112A3A"/>
+                </a:solidFill>
+                <a:latin typeface="DejaVu Sans"/>
+                <a:ea typeface="DejaVu Sans"/>
+                <a:cs typeface="DejaVu Sans"/>
+              </a:defRPr>
+            </a:defPPr>
+            <a:lvl1pPr>
+              <a:defRPr sz="1800" b="0">
+                <a:solidFill>
+                  <a:srgbClr val="112A3A"/>
+                </a:solidFill>
+                <a:latin typeface="DejaVu Sans"/>
+                <a:ea typeface="DejaVu Sans"/>
+                <a:cs typeface="DejaVu Sans"/>
+              </a:defRPr>
+            </a:lvl1pPr>
+            <a:lvl2pPr>
+              <a:defRPr sz="1800" b="0">
+                <a:solidFill>
+                  <a:srgbClr val="112A3A"/>
+                </a:solidFill>
+                <a:latin typeface="DejaVu Sans"/>
+                <a:ea typeface="DejaVu Sans"/>
+                <a:cs typeface="DejaVu Sans"/>
+              </a:defRPr>
+            </a:lvl2pPr>
+            <a:lvl3pPr>
+              <a:defRPr sz="1800" b="0">
+                <a:solidFill>
+                  <a:srgbClr val="112A3A"/>
+                </a:solidFill>
+                <a:latin typeface="DejaVu Sans"/>
+                <a:ea typeface="DejaVu Sans"/>
+                <a:cs typeface="DejaVu Sans"/>
+              </a:defRPr>
+            </a:lvl3pPr>
+            <a:lvl4pPr>
+              <a:defRPr sz="1800" b="0">
+                <a:solidFill>
+                  <a:srgbClr val="112A3A"/>
+                </a:solidFill>
+                <a:latin typeface="DejaVu Sans"/>
+                <a:ea typeface="DejaVu Sans"/>
+                <a:cs typeface="DejaVu Sans"/>
+              </a:defRPr>
+            </a:lvl4pPr>
+            <a:lvl5pPr>
+              <a:defRPr sz="1800" b="0">
+                <a:solidFill>
+                  <a:srgbClr val="112A3A"/>
+                </a:solidFill>
+                <a:latin typeface="DejaVu Sans"/>
+                <a:ea typeface="DejaVu Sans"/>
+                <a:cs typeface="DejaVu Sans"/>
+              </a:defRPr>
+            </a:lvl5pPr>
+            <a:lvl6pPr>
+              <a:defRPr sz="1800" b="0">
+                <a:solidFill>
+                  <a:srgbClr val="112A3A"/>
+                </a:solidFill>
+                <a:latin typeface="DejaVu Sans"/>
+                <a:ea typeface="DejaVu Sans"/>
+                <a:cs typeface="DejaVu Sans"/>
+              </a:defRPr>
+            </a:lvl6pPr>
+            <a:lvl7pPr>
+              <a:defRPr sz="1800" b="0">
+                <a:solidFill>
+                  <a:srgbClr val="112A3A"/>
+                </a:solidFill>
+                <a:latin typeface="DejaVu Sans"/>
+                <a:ea typeface="DejaVu Sans"/>
+                <a:cs typeface="DejaVu Sans"/>
+              </a:defRPr>
+            </a:lvl7pPr>
+            <a:lvl8pPr>
+              <a:defRPr sz="1800" b="0">
+                <a:solidFill>
+                  <a:srgbClr val="112A3A"/>
+                </a:solidFill>
+                <a:latin typeface="DejaVu Sans"/>
+                <a:ea typeface="DejaVu Sans"/>
+                <a:cs typeface="DejaVu Sans"/>
+              </a:defRPr>
+            </a:lvl8pPr>
+            <a:lvl9pPr>
+              <a:defRPr sz="1800" b="0">
+                <a:solidFill>
+                  <a:srgbClr val="112A3A"/>
+                </a:solidFill>
+                <a:latin typeface="DejaVu Sans"/>
+                <a:ea typeface="DejaVu Sans"/>
+                <a:cs typeface="DejaVu Sans"/>
+              </a:defRPr>
+            </a:lvl9pPr>
+          </a:lstStyle>
+          <a:p xmlns:a="http://schemas.openxmlformats.org/drawingml/2006/main">
+            <a:pPr>
+              <a:defRPr sz="1800" b="0">
+                <a:solidFill>
+                  <a:srgbClr val="112A3A"/>
+                </a:solidFill>
+                <a:latin typeface="DejaVu Sans"/>
+                <a:ea typeface="DejaVu Sans"/>
+                <a:cs typeface="DejaVu Sans"/>
+              </a:defRPr>
+            </a:pPr>
+            <a:r>
+              <a:rPr sz="1800" b="0">
+                <a:solidFill>
+                  <a:srgbClr val="112A3A"/>
+                </a:solidFill>
+                <a:latin typeface="DejaVu Sans"/>
+                <a:ea typeface="DejaVu Sans"/>
+                <a:cs typeface="DejaVu Sans"/>
+              </a:rPr>
+              <a:t>Muchas gracias. Preguntas y demostración del simulador.</a:t>
+            </a:r>
+          </a:p>
+        </p:txBody>
+      </p:sp>
+      <p:sp>
+        <p:nvSpPr>
+          <p:cNvPr id="6" name="closing-number">
+            <a:extLst xmlns:a="http://schemas.openxmlformats.org/drawingml/2006/main">
+              <a:ext uri="{FF2B5EF4-FFF2-40B4-BE49-F238E27FC236}">
+                <a16:creationId xmlns:a16="http://schemas.microsoft.com/office/drawing/2014/main" id="{3370B82D-7EE5-4225-8E2E-231FD3F38DE5}"/>
+              </a:ext>
+            </a:extLst>
+          </p:cNvPr>
+          <p:cNvSpPr>
+            <a:spLocks xmlns:a="http://schemas.openxmlformats.org/drawingml/2006/main" noGrp="1"/>
+          </p:cNvSpPr>
+          <p:nvPr/>
+        </p:nvSpPr>
+        <p:spPr>
+          <a:xfrm xmlns:a="http://schemas.openxmlformats.org/drawingml/2006/main">
+            <a:off x="11287125" y="6353175"/>
+            <a:ext cx="476250" cy="238125"/>
+          </a:xfrm>
+          <a:prstGeom xmlns:a="http://schemas.openxmlformats.org/drawingml/2006/main" prst="rect">
+            <a:avLst/>
+          </a:prstGeom>
+          <a:noFill xmlns:a="http://schemas.openxmlformats.org/drawingml/2006/main"/>
+          <a:ln xmlns:a="http://schemas.openxmlformats.org/drawingml/2006/main" w="0">
+            <a:noFill/>
+            <a:prstDash val="solid"/>
+          </a:ln>
+        </p:spPr>
+        <p:txBody>
+          <a:bodyPr xmlns:a="http://schemas.openxmlformats.org/drawingml/2006/main"/>
+          <a:lstStyle xmlns:a="http://schemas.openxmlformats.org/drawingml/2006/main">
+            <a:defPPr>
+              <a:defRPr sz="1350" b="0">
+                <a:solidFill>
+                  <a:srgbClr val="456278"/>
+                </a:solidFill>
+                <a:latin typeface="DejaVu Sans"/>
+                <a:ea typeface="DejaVu Sans"/>
+                <a:cs typeface="DejaVu Sans"/>
+              </a:defRPr>
+            </a:defPPr>
+            <a:lvl1pPr>
+              <a:defRPr sz="1350" b="0">
+                <a:solidFill>
+                  <a:srgbClr val="456278"/>
+                </a:solidFill>
+                <a:latin typeface="DejaVu Sans"/>
+                <a:ea typeface="DejaVu Sans"/>
+                <a:cs typeface="DejaVu Sans"/>
+              </a:defRPr>
+            </a:lvl1pPr>
+            <a:lvl2pPr>
+              <a:defRPr sz="1350" b="0">
+                <a:solidFill>
+                  <a:srgbClr val="456278"/>
+                </a:solidFill>
+                <a:latin typeface="DejaVu Sans"/>
+                <a:ea typeface="DejaVu Sans"/>
+                <a:cs typeface="DejaVu Sans"/>
+              </a:defRPr>
+            </a:lvl2pPr>
+            <a:lvl3pPr>
+              <a:defRPr sz="1350" b="0">
+                <a:solidFill>
+                  <a:srgbClr val="456278"/>
+                </a:solidFill>
+                <a:latin typeface="DejaVu Sans"/>
+                <a:ea typeface="DejaVu Sans"/>
+                <a:cs typeface="DejaVu Sans"/>
+              </a:defRPr>
+            </a:lvl3pPr>
+            <a:lvl4pPr>
+              <a:defRPr sz="1350" b="0">
+                <a:solidFill>
+                  <a:srgbClr val="456278"/>
+                </a:solidFill>
+                <a:latin typeface="DejaVu Sans"/>
+                <a:ea typeface="DejaVu Sans"/>
+                <a:cs typeface="DejaVu Sans"/>
+              </a:defRPr>
+            </a:lvl4pPr>
+            <a:lvl5pPr>
+              <a:defRPr sz="1350" b="0">
+                <a:solidFill>
+                  <a:srgbClr val="456278"/>
+                </a:solidFill>
+                <a:latin typeface="DejaVu Sans"/>
+                <a:ea typeface="DejaVu Sans"/>
+                <a:cs typeface="DejaVu Sans"/>
+              </a:defRPr>
+            </a:lvl5pPr>
+            <a:lvl6pPr>
+              <a:defRPr sz="1350" b="0">
+                <a:solidFill>
+                  <a:srgbClr val="456278"/>
+                </a:solidFill>
+                <a:latin typeface="DejaVu Sans"/>
+                <a:ea typeface="DejaVu Sans"/>
+                <a:cs typeface="DejaVu Sans"/>
+              </a:defRPr>
+            </a:lvl6pPr>
+            <a:lvl7pPr>
+              <a:defRPr sz="1350" b="0">
+                <a:solidFill>
+                  <a:srgbClr val="456278"/>
+                </a:solidFill>
+                <a:latin typeface="DejaVu Sans"/>
+                <a:ea typeface="DejaVu Sans"/>
+                <a:cs typeface="DejaVu Sans"/>
+              </a:defRPr>
+            </a:lvl7pPr>
+            <a:lvl8pPr>
+              <a:defRPr sz="1350" b="0">
+                <a:solidFill>
+                  <a:srgbClr val="456278"/>
+                </a:solidFill>
+                <a:latin typeface="DejaVu Sans"/>
+                <a:ea typeface="DejaVu Sans"/>
+                <a:cs typeface="DejaVu Sans"/>
+              </a:defRPr>
+            </a:lvl8pPr>
+            <a:lvl9pPr>
+              <a:defRPr sz="1350" b="0">
+                <a:solidFill>
+                  <a:srgbClr val="456278"/>
+                </a:solidFill>
+                <a:latin typeface="DejaVu Sans"/>
+                <a:ea typeface="DejaVu Sans"/>
+                <a:cs typeface="DejaVu Sans"/>
+              </a:defRPr>
+            </a:lvl9pPr>
+          </a:lstStyle>
+          <a:p xmlns:a="http://schemas.openxmlformats.org/drawingml/2006/main">
+            <a:pPr>
+              <a:defRPr sz="1350" b="0">
+                <a:solidFill>
+                  <a:srgbClr val="456278"/>
+                </a:solidFill>
+                <a:latin typeface="DejaVu Sans"/>
+                <a:ea typeface="DejaVu Sans"/>
+                <a:cs typeface="DejaVu Sans"/>
+              </a:defRPr>
+            </a:pPr>
+            <a:r>
+              <a:rPr sz="1350" b="0">
+                <a:solidFill>
+                  <a:srgbClr val="456278"/>
+                </a:solidFill>
+                <a:latin typeface="DejaVu Sans"/>
+                <a:ea typeface="DejaVu Sans"/>
+                <a:cs typeface="DejaVu Sans"/>
+              </a:rPr>
+              <a:t>15</a:t>
+            </a:r>
+          </a:p>
+        </p:txBody>
+      </p:sp>
+    </p:spTree>
+    <p:extLst>
+      <p:ext uri="{BB962C8B-B14F-4D97-AF65-F5344CB8AC3E}">
+        <p14:creationId xmlns:p14="http://schemas.microsoft.com/office/powerpoint/2010/main" val="1284621736"/>
+      </p:ext>
+    </p:extLst>
+  </p:cSld>
+</p:sld>
+</file>
+
 <file path=ppt/slides/slide2.xml><?xml version="1.0" encoding="utf-8"?>
 <p:sld xmlns:p="http://schemas.openxmlformats.org/presentationml/2006/main">
   <p:cSld>
@@ -12303,7 +13325,7 @@
                 <a:ea typeface="DejaVu Sans"/>
                 <a:cs typeface="DejaVu Sans"/>
               </a:rPr>
-              <a:t>Simulador web con ANTES y rediseño A/B.</a:t>
+              <a:t>Simulador ANTES y A/B con 13 escenas.</a:t>
             </a:r>
           </a:p>
           <a:p xmlns:a="http://schemas.openxmlformats.org/drawingml/2006/main">
@@ -12332,7 +13354,7 @@
                 <a:ea typeface="DejaVu Sans"/>
                 <a:cs typeface="DejaVu Sans"/>
               </a:rPr>
-              <a:t>Dispositivos con modelo, IP, VLAN, interfaces y puertos.</a:t>
+              <a:t>Interfaces, OSPF, VPN y servicios comparten el estado del tráfico.</a:t>
             </a:r>
           </a:p>
         </p:txBody>
@@ -12868,7 +13890,7 @@
                 <a:ea typeface="DejaVu Sans"/>
                 <a:cs typeface="DejaVu Sans"/>
               </a:rPr>
-              <a:t>Pruebas de caminos, políticas de acceso y fallas registradas</a:t>
+              <a:t>Operación por consola, fallas y recuperación con tiempo virtual</a:t>
             </a:r>
           </a:p>
         </p:txBody>
@@ -14742,7 +15764,7 @@
           <p:cNvPr id="3" name="">
             <a:extLst xmlns:a="http://schemas.openxmlformats.org/drawingml/2006/main">
               <a:ext uri="{FF2B5EF4-FFF2-40B4-BE49-F238E27FC236}">
-                <a16:creationId xmlns:a16="http://schemas.microsoft.com/office/drawing/2014/main" id="{735B11CB-B044-47FF-BF99-45F8DFD85DBA}"/>
+                <a16:creationId xmlns:a16="http://schemas.microsoft.com/office/drawing/2014/main" id="{DA2FB4EF-6D7E-43AB-942A-CBD2177F0F94}"/>
               </a:ext>
             </a:extLst>
           </p:cNvPr>
@@ -15638,7 +16660,7 @@
           <p:cNvPr id="3" name="">
             <a:extLst xmlns:a="http://schemas.openxmlformats.org/drawingml/2006/main">
               <a:ext uri="{FF2B5EF4-FFF2-40B4-BE49-F238E27FC236}">
-                <a16:creationId xmlns:a16="http://schemas.microsoft.com/office/drawing/2014/main" id="{09DB58CC-0121-42BD-9454-BE545040389D}"/>
+                <a16:creationId xmlns:a16="http://schemas.microsoft.com/office/drawing/2014/main" id="{56F7D091-B404-4272-AC7B-7739C2BDB870}"/>
               </a:ext>
             </a:extLst>
           </p:cNvPr>
@@ -15648,7 +16670,7 @@
           <p:nvPr/>
         </p:nvPicPr>
         <p:blipFill>
-          <a:blip xmlns:r="http://schemas.openxmlformats.org/officeDocument/2006/relationships" xmlns:a="http://schemas.openxmlformats.org/drawingml/2006/main" r:embed="Re1186f7c508c4aa8"/>
+          <a:blip xmlns:r="http://schemas.openxmlformats.org/officeDocument/2006/relationships" xmlns:a="http://schemas.openxmlformats.org/drawingml/2006/main" r:embed="R74cabc0a671e4450"/>
           <a:stretch xmlns:a="http://schemas.openxmlformats.org/drawingml/2006/main"/>
         </p:blipFill>
         <p:spPr>
@@ -16371,7 +17393,7 @@
           <p:cNvPr id="3" name="">
             <a:extLst xmlns:a="http://schemas.openxmlformats.org/drawingml/2006/main">
               <a:ext uri="{FF2B5EF4-FFF2-40B4-BE49-F238E27FC236}">
-                <a16:creationId xmlns:a16="http://schemas.microsoft.com/office/drawing/2014/main" id="{1DD59EB0-37C5-4552-A690-DEA74CEEB0CC}"/>
+                <a16:creationId xmlns:a16="http://schemas.microsoft.com/office/drawing/2014/main" id="{82A6FFDD-F939-4CC1-9C84-458E10812083}"/>
               </a:ext>
             </a:extLst>
           </p:cNvPr>
@@ -17560,7 +18582,7 @@
           <p:cNvPr id="3" name="">
             <a:extLst xmlns:a="http://schemas.openxmlformats.org/drawingml/2006/main">
               <a:ext uri="{FF2B5EF4-FFF2-40B4-BE49-F238E27FC236}">
-                <a16:creationId xmlns:a16="http://schemas.microsoft.com/office/drawing/2014/main" id="{14101F32-475C-4087-A488-F935E64134B2}"/>
+                <a16:creationId xmlns:a16="http://schemas.microsoft.com/office/drawing/2014/main" id="{E0C63C48-8A4B-46D8-849B-A2C42C70B683}"/>
               </a:ext>
             </a:extLst>
           </p:cNvPr>
@@ -19811,7 +20833,7 @@
                 <a:ea typeface="DejaVu Sans"/>
                 <a:cs typeface="DejaVu Sans"/>
               </a:rPr>
-              <a:t>RPO y recuperación son objetivos del diseño. El modelo no garantiza sesiones ni recuperación ante pérdida de toda CM.</a:t>
+              <a:t>Ejercicio base: RTO observado 50 s y RPO 30 s de tiempo virtual. Objetivos de diseño: 300 s y 60 s.</a:t>
             </a:r>
           </a:p>
         </p:txBody>
@@ -20188,7 +21210,7 @@
           <p:cNvPr id="3" name="">
             <a:extLst xmlns:a="http://schemas.openxmlformats.org/drawingml/2006/main">
               <a:ext uri="{FF2B5EF4-FFF2-40B4-BE49-F238E27FC236}">
-                <a16:creationId xmlns:a16="http://schemas.microsoft.com/office/drawing/2014/main" id="{4FBAA30C-62B4-4DED-85CE-8A935022B5CE}"/>
+                <a16:creationId xmlns:a16="http://schemas.microsoft.com/office/drawing/2014/main" id="{C3BA14FC-45EF-4ACA-8AFA-7B6D6FDDC395}"/>
               </a:ext>
             </a:extLst>
           </p:cNvPr>
@@ -20786,7 +21808,7 @@
                 <a:latin typeface="DejaVu Sans"/>
                 <a:ea typeface="DejaVu Sans"/>
                 <a:cs typeface="DejaVu Sans"/>
-                <a:hlinkClick xmlns:r="http://schemas.openxmlformats.org/officeDocument/2006/relationships" r:id="Rb2294dfe434949fb"/>
+                <a:hlinkClick xmlns:r="http://schemas.openxmlformats.org/officeDocument/2006/relationships" r:id="Rd480fa0fbb52441d"/>
               </a:rPr>
               <a:t>Abrir simulador</a:t>
             </a:r>

--- a/Presentacion/Avance_Financiera_Pacifico_30_oct_2026.pptx
+++ b/Presentacion/Avance_Financiera_Pacifico_30_oct_2026.pptx
@@ -2,21 +2,18 @@
 <file path=ppt/presentation.xml><?xml version="1.0" encoding="utf-8"?>
 <p:presentation xmlns:p="http://schemas.openxmlformats.org/presentationml/2006/main">
   <p:sldMasterIdLst>
-    <p:sldMasterId xmlns:r="http://schemas.openxmlformats.org/officeDocument/2006/relationships" id="2147483648" r:id="R64edd6450ccd40d6"/>
+    <p:sldMasterId xmlns:r="http://schemas.openxmlformats.org/officeDocument/2006/relationships" id="2147483648" r:id="Rfa0a8a683aaa4bcd"/>
   </p:sldMasterIdLst>
   <p:notesMasterIdLst>
-    <p:notesMasterId xmlns:r="http://schemas.openxmlformats.org/officeDocument/2006/relationships" r:id="R953f345dcaf0404d"/>
+    <p:notesMasterId xmlns:r="http://schemas.openxmlformats.org/officeDocument/2006/relationships" r:id="Rb96ba321e5544be0"/>
   </p:notesMasterIdLst>
   <p:sldIdLst>
-    <p:sldId xmlns:r="http://schemas.openxmlformats.org/officeDocument/2006/relationships" id="256" r:id="Ra856f2d00bd74be9"/>
-    <p:sldId xmlns:r="http://schemas.openxmlformats.org/officeDocument/2006/relationships" id="257" r:id="R68b131b883854d92"/>
-    <p:sldId xmlns:r="http://schemas.openxmlformats.org/officeDocument/2006/relationships" id="258" r:id="Re9c7cde5b6a54b2a"/>
-    <p:sldId xmlns:r="http://schemas.openxmlformats.org/officeDocument/2006/relationships" id="259" r:id="R7192eb24cf9f4b22"/>
-    <p:sldId xmlns:r="http://schemas.openxmlformats.org/officeDocument/2006/relationships" id="260" r:id="Rcddc9b0f67e44cb1"/>
-    <p:sldId xmlns:r="http://schemas.openxmlformats.org/officeDocument/2006/relationships" id="261" r:id="R18a06094ded34315"/>
-    <p:sldId xmlns:r="http://schemas.openxmlformats.org/officeDocument/2006/relationships" id="262" r:id="R5b39cce0966a4c63"/>
-    <p:sldId xmlns:r="http://schemas.openxmlformats.org/officeDocument/2006/relationships" id="263" r:id="R152a117971554bdc"/>
-    <p:sldId xmlns:r="http://schemas.openxmlformats.org/officeDocument/2006/relationships" id="264" r:id="R933a6dea615a4c0e"/>
+    <p:sldId xmlns:r="http://schemas.openxmlformats.org/officeDocument/2006/relationships" id="256" r:id="R8556fd0d80c64104"/>
+    <p:sldId xmlns:r="http://schemas.openxmlformats.org/officeDocument/2006/relationships" id="257" r:id="Ra7da00e1db74438e"/>
+    <p:sldId xmlns:r="http://schemas.openxmlformats.org/officeDocument/2006/relationships" id="258" r:id="Rf53c22501d1c46e7"/>
+    <p:sldId xmlns:r="http://schemas.openxmlformats.org/officeDocument/2006/relationships" id="259" r:id="Re450e42c8d2a49e0"/>
+    <p:sldId xmlns:r="http://schemas.openxmlformats.org/officeDocument/2006/relationships" id="260" r:id="R525f13047a77482b"/>
+    <p:sldId xmlns:r="http://schemas.openxmlformats.org/officeDocument/2006/relationships" id="261" r:id="Reb40a7bb87b54eeb"/>
   </p:sldIdLst>
   <p:sldSz cx="12192000" cy="6858000"/>
   <p:notesSz cx="6858000" cy="9144000"/>
@@ -450,12 +447,7 @@
           <a:lstStyle xmlns:a="http://schemas.openxmlformats.org/drawingml/2006/main"/>
           <a:p xmlns:a="http://schemas.openxmlformats.org/drawingml/2006/main">
             <a:r>
-              <a:t>Diapositiva 1 de 9. El avance del proyecto. El avance reúne la propuesta de red, sus costos y las pruebas de funcionamiento.</a:t>
-            </a:r>
-          </a:p>
-          <a:p xmlns:a="http://schemas.openxmlformats.org/drawingml/2006/main">
-            <a:r>
-              <a:t>Fuente: simulador network/client-story.js y documentación de Financiera Pacífico. Corte C5-BREVE-20261029. La narración personal se entrega separadamente.</a:t>
+              <a:t>Fuente: diseño, inventario y presupuesto de Financiera Pacífico. Simulador network/client-story.js. Avance del 29 de octubre de 2026.</a:t>
             </a:r>
           </a:p>
         </p:txBody>
@@ -525,12 +517,7 @@
           <a:lstStyle xmlns:a="http://schemas.openxmlformats.org/drawingml/2006/main"/>
           <a:p xmlns:a="http://schemas.openxmlformats.org/drawingml/2006/main">
             <a:r>
-              <a:t>Diapositiva 2 de 9. El problema de la red actual. Seguimos una comunicación desde Arica y después interrumpimos su enlace MPLS.</a:t>
-            </a:r>
-          </a:p>
-          <a:p xmlns:a="http://schemas.openxmlformats.org/drawingml/2006/main">
-            <a:r>
-              <a:t>Fuente: simulador network/client-story.js y documentación de Financiera Pacífico. Corte C5-BREVE-20261029. La narración personal se entrega separadamente.</a:t>
+              <a:t>Fuente: diseño, inventario y presupuesto de Financiera Pacífico. Simulador network/client-story.js. Avance del 29 de octubre de 2026.</a:t>
             </a:r>
           </a:p>
         </p:txBody>
@@ -600,12 +587,7 @@
           <a:lstStyle xmlns:a="http://schemas.openxmlformats.org/drawingml/2006/main"/>
           <a:p xmlns:a="http://schemas.openxmlformats.org/drawingml/2006/main">
             <a:r>
-              <a:t>Diapositiva 3 de 9. La solución propuesta. WAN-A reúne Starlink y Entel; WAN-B, Leo y WOM. Ambos conectan a los dos routers.</a:t>
-            </a:r>
-          </a:p>
-          <a:p xmlns:a="http://schemas.openxmlformats.org/drawingml/2006/main">
-            <a:r>
-              <a:t>Fuente: simulador network/client-story.js y documentación de Financiera Pacífico. Corte C5-BREVE-20261029. La narración personal se entrega separadamente.</a:t>
+              <a:t>Fuente: diseño, inventario y presupuesto de Financiera Pacífico. Simulador network/client-story.js. Avance del 29 de octubre de 2026.</a:t>
             </a:r>
           </a:p>
         </p:txBody>
@@ -675,12 +657,7 @@
           <a:lstStyle xmlns:a="http://schemas.openxmlformats.org/drawingml/2006/main"/>
           <a:p xmlns:a="http://schemas.openxmlformats.org/drawingml/2006/main">
             <a:r>
-              <a:t>Diapositiva 4 de 9. Una falla con respaldo. Comparamos una comunicación normal con otra después de interrumpir Starlink en Arica.</a:t>
-            </a:r>
-          </a:p>
-          <a:p xmlns:a="http://schemas.openxmlformats.org/drawingml/2006/main">
-            <a:r>
-              <a:t>Fuente: simulador network/client-story.js y documentación de Financiera Pacífico. Corte C5-BREVE-20261029. La narración personal se entrega separadamente.</a:t>
+              <a:t>Fuente: diseño, inventario y presupuesto de Financiera Pacífico. Simulador network/client-story.js. Avance del 29 de octubre de 2026.</a:t>
             </a:r>
           </a:p>
         </p:txBody>
@@ -750,12 +727,7 @@
           <a:lstStyle xmlns:a="http://schemas.openxmlformats.org/drawingml/2006/main"/>
           <a:p xmlns:a="http://schemas.openxmlformats.org/drawingml/2006/main">
             <a:r>
-              <a:t>Diapositiva 5 de 9. Acceso seguro a los servicios. La aplicación atiende al usuario; la base de datos recibe consultas de la aplicación.</a:t>
-            </a:r>
-          </a:p>
-          <a:p xmlns:a="http://schemas.openxmlformats.org/drawingml/2006/main">
-            <a:r>
-              <a:t>Fuente: simulador network/client-story.js y documentación de Financiera Pacífico. Corte C5-BREVE-20261029. La narración personal se entrega separadamente.</a:t>
+              <a:t>Fuente: diseño, inventario y presupuesto de Financiera Pacífico. Simulador network/client-story.js. Avance del 29 de octubre de 2026.</a:t>
             </a:r>
           </a:p>
         </p:txBody>
@@ -825,237 +797,7 @@
           <a:lstStyle xmlns:a="http://schemas.openxmlformats.org/drawingml/2006/main"/>
           <a:p xmlns:a="http://schemas.openxmlformats.org/drawingml/2006/main">
             <a:r>
-              <a:t>Diapositiva 6 de 9. Recuperación de la aplicación. El ejercicio aplica la caída de DC-01 y comprueba las condiciones para continuar en DC-02.</a:t>
-            </a:r>
-          </a:p>
-          <a:p xmlns:a="http://schemas.openxmlformats.org/drawingml/2006/main">
-            <a:r>
-              <a:t>Fuente: simulador network/client-story.js y documentación de Financiera Pacífico. Corte C5-BREVE-20261029. La narración personal se entrega separadamente.</a:t>
-            </a:r>
-          </a:p>
-        </p:txBody>
-      </p:sp>
-      <p:sp>
-        <p:nvSpPr>
-          <p:cNvPr id="4" name="Slide Number Placeholder 3"/>
-          <p:cNvSpPr>
-            <a:spLocks xmlns:a="http://schemas.openxmlformats.org/drawingml/2006/main" noGrp="1"/>
-          </p:cNvSpPr>
-          <p:nvPr>
-            <p:ph type="sldNum" idx="5"/>
-          </p:nvPr>
-        </p:nvSpPr>
-        <p:spPr/>
-        <p:txBody>
-          <a:bodyPr xmlns:a="http://schemas.openxmlformats.org/drawingml/2006/main"/>
-          <a:lstStyle xmlns:a="http://schemas.openxmlformats.org/drawingml/2006/main"/>
-          <a:p xmlns:a="http://schemas.openxmlformats.org/drawingml/2006/main"/>
-        </p:txBody>
-      </p:sp>
-    </p:spTree>
-  </p:cSld>
-  <p:clrMapOvr>
-    <a:masterClrMapping xmlns:a="http://schemas.openxmlformats.org/drawingml/2006/main"/>
-  </p:clrMapOvr>
-</p:notes>
-</file>
-
-<file path=ppt/notesSlides/notesSlide7.xml><?xml version="1.0" encoding="utf-8"?>
-<p:notes xmlns:p="http://schemas.openxmlformats.org/presentationml/2006/main">
-  <p:cSld>
-    <p:spTree>
-      <p:nvGrpSpPr>
-        <p:cNvPr id="1" name=""/>
-        <p:cNvGrpSpPr/>
-        <p:nvPr/>
-      </p:nvGrpSpPr>
-      <p:grpSpPr>
-        <a:xfrm xmlns:a="http://schemas.openxmlformats.org/drawingml/2006/main"/>
-      </p:grpSpPr>
-      <p:sp>
-        <p:nvSpPr>
-          <p:cNvPr id="2" name="Slide Image Placeholder 1"/>
-          <p:cNvSpPr>
-            <a:spLocks xmlns:a="http://schemas.openxmlformats.org/drawingml/2006/main" noGrp="1"/>
-          </p:cNvSpPr>
-          <p:nvPr>
-            <p:ph type="sldImg" idx="0"/>
-          </p:nvPr>
-        </p:nvSpPr>
-        <p:spPr/>
-      </p:sp>
-      <p:sp>
-        <p:nvSpPr>
-          <p:cNvPr id="3" name="Notes Placeholder 2"/>
-          <p:cNvSpPr>
-            <a:spLocks xmlns:a="http://schemas.openxmlformats.org/drawingml/2006/main" noGrp="1"/>
-          </p:cNvSpPr>
-          <p:nvPr>
-            <p:ph type="body" idx="1"/>
-          </p:nvPr>
-        </p:nvSpPr>
-        <p:spPr/>
-        <p:txBody>
-          <a:bodyPr xmlns:a="http://schemas.openxmlformats.org/drawingml/2006/main"/>
-          <a:lstStyle xmlns:a="http://schemas.openxmlformats.org/drawingml/2006/main"/>
-          <a:p xmlns:a="http://schemas.openxmlformats.org/drawingml/2006/main">
-            <a:r>
-              <a:t>Diapositiva 7 de 9. Capacidad y puesta en marcha. La oficina tipo demanda 26,4 Mbps frente a 100 Mbps de MPLS. Central concentra el tráfico de las sedes y la navegación.</a:t>
-            </a:r>
-          </a:p>
-          <a:p xmlns:a="http://schemas.openxmlformats.org/drawingml/2006/main">
-            <a:r>
-              <a:t>Fuente: simulador network/client-story.js y documentación de Financiera Pacífico. Corte C5-BREVE-20261029. La narración personal se entrega separadamente.</a:t>
-            </a:r>
-          </a:p>
-        </p:txBody>
-      </p:sp>
-      <p:sp>
-        <p:nvSpPr>
-          <p:cNvPr id="4" name="Slide Number Placeholder 3"/>
-          <p:cNvSpPr>
-            <a:spLocks xmlns:a="http://schemas.openxmlformats.org/drawingml/2006/main" noGrp="1"/>
-          </p:cNvSpPr>
-          <p:nvPr>
-            <p:ph type="sldNum" idx="5"/>
-          </p:nvPr>
-        </p:nvSpPr>
-        <p:spPr/>
-        <p:txBody>
-          <a:bodyPr xmlns:a="http://schemas.openxmlformats.org/drawingml/2006/main"/>
-          <a:lstStyle xmlns:a="http://schemas.openxmlformats.org/drawingml/2006/main"/>
-          <a:p xmlns:a="http://schemas.openxmlformats.org/drawingml/2006/main"/>
-        </p:txBody>
-      </p:sp>
-    </p:spTree>
-  </p:cSld>
-  <p:clrMapOvr>
-    <a:masterClrMapping xmlns:a="http://schemas.openxmlformats.org/drawingml/2006/main"/>
-  </p:clrMapOvr>
-</p:notes>
-</file>
-
-<file path=ppt/notesSlides/notesSlide8.xml><?xml version="1.0" encoding="utf-8"?>
-<p:notes xmlns:p="http://schemas.openxmlformats.org/presentationml/2006/main">
-  <p:cSld>
-    <p:spTree>
-      <p:nvGrpSpPr>
-        <p:cNvPr id="1" name=""/>
-        <p:cNvGrpSpPr/>
-        <p:nvPr/>
-      </p:nvGrpSpPr>
-      <p:grpSpPr>
-        <a:xfrm xmlns:a="http://schemas.openxmlformats.org/drawingml/2006/main"/>
-      </p:grpSpPr>
-      <p:sp>
-        <p:nvSpPr>
-          <p:cNvPr id="2" name="Slide Image Placeholder 1"/>
-          <p:cNvSpPr>
-            <a:spLocks xmlns:a="http://schemas.openxmlformats.org/drawingml/2006/main" noGrp="1"/>
-          </p:cNvSpPr>
-          <p:nvPr>
-            <p:ph type="sldImg" idx="0"/>
-          </p:nvPr>
-        </p:nvSpPr>
-        <p:spPr/>
-      </p:sp>
-      <p:sp>
-        <p:nvSpPr>
-          <p:cNvPr id="3" name="Notes Placeholder 2"/>
-          <p:cNvSpPr>
-            <a:spLocks xmlns:a="http://schemas.openxmlformats.org/drawingml/2006/main" noGrp="1"/>
-          </p:cNvSpPr>
-          <p:nvPr>
-            <p:ph type="body" idx="1"/>
-          </p:nvPr>
-        </p:nvSpPr>
-        <p:spPr/>
-        <p:txBody>
-          <a:bodyPr xmlns:a="http://schemas.openxmlformats.org/drawingml/2006/main"/>
-          <a:lstStyle xmlns:a="http://schemas.openxmlformats.org/drawingml/2006/main"/>
-          <a:p xmlns:a="http://schemas.openxmlformats.org/drawingml/2006/main">
-            <a:r>
-              <a:t>Diapositiva 8 de 9. Dos alternativas de inversión. La comparación incluye la inversión inicial, cinco años de conectividad y reservas de operación.</a:t>
-            </a:r>
-          </a:p>
-          <a:p xmlns:a="http://schemas.openxmlformats.org/drawingml/2006/main">
-            <a:r>
-              <a:t>Fuente: simulador network/client-story.js y documentación de Financiera Pacífico. Corte C5-BREVE-20261029. La narración personal se entrega separadamente.</a:t>
-            </a:r>
-          </a:p>
-        </p:txBody>
-      </p:sp>
-      <p:sp>
-        <p:nvSpPr>
-          <p:cNvPr id="4" name="Slide Number Placeholder 3"/>
-          <p:cNvSpPr>
-            <a:spLocks xmlns:a="http://schemas.openxmlformats.org/drawingml/2006/main" noGrp="1"/>
-          </p:cNvSpPr>
-          <p:nvPr>
-            <p:ph type="sldNum" idx="5"/>
-          </p:nvPr>
-        </p:nvSpPr>
-        <p:spPr/>
-        <p:txBody>
-          <a:bodyPr xmlns:a="http://schemas.openxmlformats.org/drawingml/2006/main"/>
-          <a:lstStyle xmlns:a="http://schemas.openxmlformats.org/drawingml/2006/main"/>
-          <a:p xmlns:a="http://schemas.openxmlformats.org/drawingml/2006/main"/>
-        </p:txBody>
-      </p:sp>
-    </p:spTree>
-  </p:cSld>
-  <p:clrMapOvr>
-    <a:masterClrMapping xmlns:a="http://schemas.openxmlformats.org/drawingml/2006/main"/>
-  </p:clrMapOvr>
-</p:notes>
-</file>
-
-<file path=ppt/notesSlides/notesSlide9.xml><?xml version="1.0" encoding="utf-8"?>
-<p:notes xmlns:p="http://schemas.openxmlformats.org/presentationml/2006/main">
-  <p:cSld>
-    <p:spTree>
-      <p:nvGrpSpPr>
-        <p:cNvPr id="1" name=""/>
-        <p:cNvGrpSpPr/>
-        <p:nvPr/>
-      </p:nvGrpSpPr>
-      <p:grpSpPr>
-        <a:xfrm xmlns:a="http://schemas.openxmlformats.org/drawingml/2006/main"/>
-      </p:grpSpPr>
-      <p:sp>
-        <p:nvSpPr>
-          <p:cNvPr id="2" name="Slide Image Placeholder 1"/>
-          <p:cNvSpPr>
-            <a:spLocks xmlns:a="http://schemas.openxmlformats.org/drawingml/2006/main" noGrp="1"/>
-          </p:cNvSpPr>
-          <p:nvPr>
-            <p:ph type="sldImg" idx="0"/>
-          </p:nvPr>
-        </p:nvSpPr>
-        <p:spPr/>
-      </p:sp>
-      <p:sp>
-        <p:nvSpPr>
-          <p:cNvPr id="3" name="Notes Placeholder 2"/>
-          <p:cNvSpPr>
-            <a:spLocks xmlns:a="http://schemas.openxmlformats.org/drawingml/2006/main" noGrp="1"/>
-          </p:cNvSpPr>
-          <p:nvPr>
-            <p:ph type="body" idx="1"/>
-          </p:nvPr>
-        </p:nvSpPr>
-        <p:spPr/>
-        <p:txBody>
-          <a:bodyPr xmlns:a="http://schemas.openxmlformats.org/drawingml/2006/main"/>
-          <a:lstStyle xmlns:a="http://schemas.openxmlformats.org/drawingml/2006/main"/>
-          <a:p xmlns:a="http://schemas.openxmlformats.org/drawingml/2006/main">
-            <a:r>
-              <a:t>Diapositiva 9 de 9. Para finalizar. Una base de diseño y pruebas para evaluar la solución antes de implementarla.</a:t>
-            </a:r>
-          </a:p>
-          <a:p xmlns:a="http://schemas.openxmlformats.org/drawingml/2006/main">
-            <a:r>
-              <a:t>Fuente: simulador network/client-story.js y documentación de Financiera Pacífico. Corte C5-BREVE-20261029. La narración personal se entrega separadamente.</a:t>
+              <a:t>Fuente: diseño, inventario y presupuesto de Financiera Pacífico. Simulador network/client-story.js. Avance del 29 de octubre de 2026.</a:t>
             </a:r>
           </a:p>
         </p:txBody>
@@ -3498,12 +3240,12 @@
   </p:cSld>
   <p:clrMap bg1="lt1" tx1="dk1" bg2="lt2" tx2="dk2" accent1="accent1" accent2="accent2" accent3="accent3" accent4="accent4" accent5="accent5" accent6="accent6" hlink="hlink" folHlink="folHlink"/>
   <p:sldLayoutIdLst>
-    <p:sldLayoutId xmlns:r="http://schemas.openxmlformats.org/officeDocument/2006/relationships" id="2147483649" r:id="R3db3dd38145a4144"/>
-    <p:sldLayoutId xmlns:r="http://schemas.openxmlformats.org/officeDocument/2006/relationships" id="2147483650" r:id="Raf0a174bd84d4a6c"/>
-    <p:sldLayoutId xmlns:r="http://schemas.openxmlformats.org/officeDocument/2006/relationships" id="2147483651" r:id="Rf1dd8e55878c40d7"/>
-    <p:sldLayoutId xmlns:r="http://schemas.openxmlformats.org/officeDocument/2006/relationships" id="2147483652" r:id="R2d8bdac3efd04d1f"/>
-    <p:sldLayoutId xmlns:r="http://schemas.openxmlformats.org/officeDocument/2006/relationships" id="2147483653" r:id="Rd205688013a1426e"/>
-    <p:sldLayoutId xmlns:r="http://schemas.openxmlformats.org/officeDocument/2006/relationships" id="2147483654" r:id="R8cb0c20a6db14218"/>
+    <p:sldLayoutId xmlns:r="http://schemas.openxmlformats.org/officeDocument/2006/relationships" id="2147483649" r:id="R87bfae4efd83402b"/>
+    <p:sldLayoutId xmlns:r="http://schemas.openxmlformats.org/officeDocument/2006/relationships" id="2147483650" r:id="R5c83f40baeeb426f"/>
+    <p:sldLayoutId xmlns:r="http://schemas.openxmlformats.org/officeDocument/2006/relationships" id="2147483651" r:id="Rb5f6cc96b5534604"/>
+    <p:sldLayoutId xmlns:r="http://schemas.openxmlformats.org/officeDocument/2006/relationships" id="2147483652" r:id="R83819e3fe8ec42ae"/>
+    <p:sldLayoutId xmlns:r="http://schemas.openxmlformats.org/officeDocument/2006/relationships" id="2147483653" r:id="R4eedcec1dbb24378"/>
+    <p:sldLayoutId xmlns:r="http://schemas.openxmlformats.org/officeDocument/2006/relationships" id="2147483654" r:id="R498413f120ca495b"/>
   </p:sldLayoutIdLst>
   <p:txStyles>
     <p:titleStyle>
@@ -4091,6 +3833,7 @@
               </a:defRPr>
             </a:defPPr>
             <a:lvl1pPr>
+              <a:buNone/>
               <a:defRPr sz="3300" b="1">
                 <a:solidFill>
                   <a:srgbClr val="112A3A"/>
@@ -4101,6 +3844,7 @@
               </a:defRPr>
             </a:lvl1pPr>
             <a:lvl2pPr>
+              <a:buNone/>
               <a:defRPr sz="3300" b="1">
                 <a:solidFill>
                   <a:srgbClr val="112A3A"/>
@@ -4111,6 +3855,7 @@
               </a:defRPr>
             </a:lvl2pPr>
             <a:lvl3pPr>
+              <a:buNone/>
               <a:defRPr sz="3300" b="1">
                 <a:solidFill>
                   <a:srgbClr val="112A3A"/>
@@ -4121,6 +3866,7 @@
               </a:defRPr>
             </a:lvl3pPr>
             <a:lvl4pPr>
+              <a:buNone/>
               <a:defRPr sz="3300" b="1">
                 <a:solidFill>
                   <a:srgbClr val="112A3A"/>
@@ -4131,6 +3877,7 @@
               </a:defRPr>
             </a:lvl4pPr>
             <a:lvl5pPr>
+              <a:buNone/>
               <a:defRPr sz="3300" b="1">
                 <a:solidFill>
                   <a:srgbClr val="112A3A"/>
@@ -4141,6 +3888,7 @@
               </a:defRPr>
             </a:lvl5pPr>
             <a:lvl6pPr>
+              <a:buNone/>
               <a:defRPr sz="3300" b="1">
                 <a:solidFill>
                   <a:srgbClr val="112A3A"/>
@@ -4151,6 +3899,7 @@
               </a:defRPr>
             </a:lvl6pPr>
             <a:lvl7pPr>
+              <a:buNone/>
               <a:defRPr sz="3300" b="1">
                 <a:solidFill>
                   <a:srgbClr val="112A3A"/>
@@ -4161,6 +3910,7 @@
               </a:defRPr>
             </a:lvl7pPr>
             <a:lvl8pPr>
+              <a:buNone/>
               <a:defRPr sz="3300" b="1">
                 <a:solidFill>
                   <a:srgbClr val="112A3A"/>
@@ -4171,6 +3921,7 @@
               </a:defRPr>
             </a:lvl8pPr>
             <a:lvl9pPr>
+              <a:buNone/>
               <a:defRPr sz="3300" b="1">
                 <a:solidFill>
                   <a:srgbClr val="112A3A"/>
@@ -4183,6 +3934,7 @@
           </a:lstStyle>
           <a:p xmlns:a="http://schemas.openxmlformats.org/drawingml/2006/main">
             <a:pPr>
+              <a:buNone/>
               <a:defRPr sz="3300" b="1">
                 <a:solidFill>
                   <a:srgbClr val="112A3A"/>
@@ -4201,7 +3953,7 @@
                 <a:ea typeface="DejaVu Sans"/>
                 <a:cs typeface="DejaVu Sans"/>
               </a:rPr>
-              <a:t>El avance del proyecto</a:t>
+              <a:t>Financiera Pacífico hoy</a:t>
             </a:r>
           </a:p>
         </p:txBody>
@@ -4248,6 +4000,7 @@
               </a:defRPr>
             </a:defPPr>
             <a:lvl1pPr>
+              <a:buNone/>
               <a:defRPr sz="2025" b="0">
                 <a:solidFill>
                   <a:srgbClr val="31515E"/>
@@ -4258,6 +4011,7 @@
               </a:defRPr>
             </a:lvl1pPr>
             <a:lvl2pPr>
+              <a:buNone/>
               <a:defRPr sz="2025" b="0">
                 <a:solidFill>
                   <a:srgbClr val="31515E"/>
@@ -4268,6 +4022,7 @@
               </a:defRPr>
             </a:lvl2pPr>
             <a:lvl3pPr>
+              <a:buNone/>
               <a:defRPr sz="2025" b="0">
                 <a:solidFill>
                   <a:srgbClr val="31515E"/>
@@ -4278,6 +4033,7 @@
               </a:defRPr>
             </a:lvl3pPr>
             <a:lvl4pPr>
+              <a:buNone/>
               <a:defRPr sz="2025" b="0">
                 <a:solidFill>
                   <a:srgbClr val="31515E"/>
@@ -4288,6 +4044,7 @@
               </a:defRPr>
             </a:lvl4pPr>
             <a:lvl5pPr>
+              <a:buNone/>
               <a:defRPr sz="2025" b="0">
                 <a:solidFill>
                   <a:srgbClr val="31515E"/>
@@ -4298,6 +4055,7 @@
               </a:defRPr>
             </a:lvl5pPr>
             <a:lvl6pPr>
+              <a:buNone/>
               <a:defRPr sz="2025" b="0">
                 <a:solidFill>
                   <a:srgbClr val="31515E"/>
@@ -4308,6 +4066,7 @@
               </a:defRPr>
             </a:lvl6pPr>
             <a:lvl7pPr>
+              <a:buNone/>
               <a:defRPr sz="2025" b="0">
                 <a:solidFill>
                   <a:srgbClr val="31515E"/>
@@ -4318,6 +4077,7 @@
               </a:defRPr>
             </a:lvl7pPr>
             <a:lvl8pPr>
+              <a:buNone/>
               <a:defRPr sz="2025" b="0">
                 <a:solidFill>
                   <a:srgbClr val="31515E"/>
@@ -4328,6 +4088,7 @@
               </a:defRPr>
             </a:lvl8pPr>
             <a:lvl9pPr>
+              <a:buNone/>
               <a:defRPr sz="2025" b="0">
                 <a:solidFill>
                   <a:srgbClr val="31515E"/>
@@ -4340,6 +4101,7 @@
           </a:lstStyle>
           <a:p xmlns:a="http://schemas.openxmlformats.org/drawingml/2006/main">
             <a:pPr>
+              <a:buNone/>
               <a:defRPr sz="2025" b="0">
                 <a:solidFill>
                   <a:srgbClr val="31515E"/>
@@ -4358,7 +4120,7 @@
                 <a:ea typeface="DejaVu Sans"/>
                 <a:cs typeface="DejaVu Sans"/>
               </a:rPr>
-              <a:t>Una red que permita seguir atendiendo cuando algo falla.</a:t>
+              <a:t>La atención de las sucursales depende de los servicios de Casa Matriz.</a:t>
             </a:r>
           </a:p>
         </p:txBody>
@@ -4405,6 +4167,7 @@
               </a:defRPr>
             </a:defPPr>
             <a:lvl1pPr>
+              <a:buNone/>
               <a:defRPr sz="1275" b="0">
                 <a:solidFill>
                   <a:srgbClr val="456278"/>
@@ -4415,6 +4178,7 @@
               </a:defRPr>
             </a:lvl1pPr>
             <a:lvl2pPr>
+              <a:buNone/>
               <a:defRPr sz="1275" b="0">
                 <a:solidFill>
                   <a:srgbClr val="456278"/>
@@ -4425,6 +4189,7 @@
               </a:defRPr>
             </a:lvl2pPr>
             <a:lvl3pPr>
+              <a:buNone/>
               <a:defRPr sz="1275" b="0">
                 <a:solidFill>
                   <a:srgbClr val="456278"/>
@@ -4435,6 +4200,7 @@
               </a:defRPr>
             </a:lvl3pPr>
             <a:lvl4pPr>
+              <a:buNone/>
               <a:defRPr sz="1275" b="0">
                 <a:solidFill>
                   <a:srgbClr val="456278"/>
@@ -4445,6 +4211,7 @@
               </a:defRPr>
             </a:lvl4pPr>
             <a:lvl5pPr>
+              <a:buNone/>
               <a:defRPr sz="1275" b="0">
                 <a:solidFill>
                   <a:srgbClr val="456278"/>
@@ -4455,6 +4222,7 @@
               </a:defRPr>
             </a:lvl5pPr>
             <a:lvl6pPr>
+              <a:buNone/>
               <a:defRPr sz="1275" b="0">
                 <a:solidFill>
                   <a:srgbClr val="456278"/>
@@ -4465,6 +4233,7 @@
               </a:defRPr>
             </a:lvl6pPr>
             <a:lvl7pPr>
+              <a:buNone/>
               <a:defRPr sz="1275" b="0">
                 <a:solidFill>
                   <a:srgbClr val="456278"/>
@@ -4475,6 +4244,7 @@
               </a:defRPr>
             </a:lvl7pPr>
             <a:lvl8pPr>
+              <a:buNone/>
               <a:defRPr sz="1275" b="0">
                 <a:solidFill>
                   <a:srgbClr val="456278"/>
@@ -4485,6 +4255,7 @@
               </a:defRPr>
             </a:lvl8pPr>
             <a:lvl9pPr>
+              <a:buNone/>
               <a:defRPr sz="1275" b="0">
                 <a:solidFill>
                   <a:srgbClr val="456278"/>
@@ -4497,6 +4268,7 @@
           </a:lstStyle>
           <a:p xmlns:a="http://schemas.openxmlformats.org/drawingml/2006/main">
             <a:pPr>
+              <a:buNone/>
               <a:defRPr sz="1275" b="0">
                 <a:solidFill>
                   <a:srgbClr val="456278"/>
@@ -4515,7 +4287,7 @@
                 <a:ea typeface="DejaVu Sans"/>
                 <a:cs typeface="DejaVu Sans"/>
               </a:rPr>
-              <a:t>01 / 9</a:t>
+              <a:t>01 / 6</a:t>
             </a:r>
           </a:p>
         </p:txBody>
@@ -4562,6 +4334,7 @@
               </a:defRPr>
             </a:defPPr>
             <a:lvl1pPr>
+              <a:buNone/>
               <a:defRPr sz="1200" b="0">
                 <a:solidFill>
                   <a:srgbClr val="456278"/>
@@ -4572,6 +4345,7 @@
               </a:defRPr>
             </a:lvl1pPr>
             <a:lvl2pPr>
+              <a:buNone/>
               <a:defRPr sz="1200" b="0">
                 <a:solidFill>
                   <a:srgbClr val="456278"/>
@@ -4582,6 +4356,7 @@
               </a:defRPr>
             </a:lvl2pPr>
             <a:lvl3pPr>
+              <a:buNone/>
               <a:defRPr sz="1200" b="0">
                 <a:solidFill>
                   <a:srgbClr val="456278"/>
@@ -4592,6 +4367,7 @@
               </a:defRPr>
             </a:lvl3pPr>
             <a:lvl4pPr>
+              <a:buNone/>
               <a:defRPr sz="1200" b="0">
                 <a:solidFill>
                   <a:srgbClr val="456278"/>
@@ -4602,6 +4378,7 @@
               </a:defRPr>
             </a:lvl4pPr>
             <a:lvl5pPr>
+              <a:buNone/>
               <a:defRPr sz="1200" b="0">
                 <a:solidFill>
                   <a:srgbClr val="456278"/>
@@ -4612,6 +4389,7 @@
               </a:defRPr>
             </a:lvl5pPr>
             <a:lvl6pPr>
+              <a:buNone/>
               <a:defRPr sz="1200" b="0">
                 <a:solidFill>
                   <a:srgbClr val="456278"/>
@@ -4622,6 +4400,7 @@
               </a:defRPr>
             </a:lvl6pPr>
             <a:lvl7pPr>
+              <a:buNone/>
               <a:defRPr sz="1200" b="0">
                 <a:solidFill>
                   <a:srgbClr val="456278"/>
@@ -4632,6 +4411,7 @@
               </a:defRPr>
             </a:lvl7pPr>
             <a:lvl8pPr>
+              <a:buNone/>
               <a:defRPr sz="1200" b="0">
                 <a:solidFill>
                   <a:srgbClr val="456278"/>
@@ -4642,6 +4422,7 @@
               </a:defRPr>
             </a:lvl8pPr>
             <a:lvl9pPr>
+              <a:buNone/>
               <a:defRPr sz="1200" b="0">
                 <a:solidFill>
                   <a:srgbClr val="456278"/>
@@ -4654,6 +4435,7 @@
           </a:lstStyle>
           <a:p xmlns:a="http://schemas.openxmlformats.org/drawingml/2006/main">
             <a:pPr>
+              <a:buNone/>
               <a:defRPr sz="1200" b="0">
                 <a:solidFill>
                   <a:srgbClr val="456278"/>
@@ -4719,6 +4501,7 @@
               </a:defRPr>
             </a:defPPr>
             <a:lvl1pPr>
+              <a:buNone/>
               <a:defRPr sz="3150" b="1">
                 <a:solidFill>
                   <a:srgbClr val="00888A"/>
@@ -4729,6 +4512,7 @@
               </a:defRPr>
             </a:lvl1pPr>
             <a:lvl2pPr>
+              <a:buNone/>
               <a:defRPr sz="3150" b="1">
                 <a:solidFill>
                   <a:srgbClr val="00888A"/>
@@ -4739,6 +4523,7 @@
               </a:defRPr>
             </a:lvl2pPr>
             <a:lvl3pPr>
+              <a:buNone/>
               <a:defRPr sz="3150" b="1">
                 <a:solidFill>
                   <a:srgbClr val="00888A"/>
@@ -4749,6 +4534,7 @@
               </a:defRPr>
             </a:lvl3pPr>
             <a:lvl4pPr>
+              <a:buNone/>
               <a:defRPr sz="3150" b="1">
                 <a:solidFill>
                   <a:srgbClr val="00888A"/>
@@ -4759,6 +4545,7 @@
               </a:defRPr>
             </a:lvl4pPr>
             <a:lvl5pPr>
+              <a:buNone/>
               <a:defRPr sz="3150" b="1">
                 <a:solidFill>
                   <a:srgbClr val="00888A"/>
@@ -4769,6 +4556,7 @@
               </a:defRPr>
             </a:lvl5pPr>
             <a:lvl6pPr>
+              <a:buNone/>
               <a:defRPr sz="3150" b="1">
                 <a:solidFill>
                   <a:srgbClr val="00888A"/>
@@ -4779,6 +4567,7 @@
               </a:defRPr>
             </a:lvl6pPr>
             <a:lvl7pPr>
+              <a:buNone/>
               <a:defRPr sz="3150" b="1">
                 <a:solidFill>
                   <a:srgbClr val="00888A"/>
@@ -4789,6 +4578,7 @@
               </a:defRPr>
             </a:lvl7pPr>
             <a:lvl8pPr>
+              <a:buNone/>
               <a:defRPr sz="3150" b="1">
                 <a:solidFill>
                   <a:srgbClr val="00888A"/>
@@ -4799,6 +4589,7 @@
               </a:defRPr>
             </a:lvl8pPr>
             <a:lvl9pPr>
+              <a:buNone/>
               <a:defRPr sz="3150" b="1">
                 <a:solidFill>
                   <a:srgbClr val="00888A"/>
@@ -4811,6 +4602,7 @@
           </a:lstStyle>
           <a:p xmlns:a="http://schemas.openxmlformats.org/drawingml/2006/main">
             <a:pPr>
+              <a:buNone/>
               <a:defRPr sz="3150" b="1">
                 <a:solidFill>
                   <a:srgbClr val="00888A"/>
@@ -4876,6 +4668,7 @@
               </a:defRPr>
             </a:defPPr>
             <a:lvl1pPr>
+              <a:buNone/>
               <a:defRPr sz="2250" b="0">
                 <a:solidFill>
                   <a:srgbClr val="112A3A"/>
@@ -4886,6 +4679,7 @@
               </a:defRPr>
             </a:lvl1pPr>
             <a:lvl2pPr>
+              <a:buNone/>
               <a:defRPr sz="2250" b="0">
                 <a:solidFill>
                   <a:srgbClr val="112A3A"/>
@@ -4896,6 +4690,7 @@
               </a:defRPr>
             </a:lvl2pPr>
             <a:lvl3pPr>
+              <a:buNone/>
               <a:defRPr sz="2250" b="0">
                 <a:solidFill>
                   <a:srgbClr val="112A3A"/>
@@ -4906,6 +4701,7 @@
               </a:defRPr>
             </a:lvl3pPr>
             <a:lvl4pPr>
+              <a:buNone/>
               <a:defRPr sz="2250" b="0">
                 <a:solidFill>
                   <a:srgbClr val="112A3A"/>
@@ -4916,6 +4712,7 @@
               </a:defRPr>
             </a:lvl4pPr>
             <a:lvl5pPr>
+              <a:buNone/>
               <a:defRPr sz="2250" b="0">
                 <a:solidFill>
                   <a:srgbClr val="112A3A"/>
@@ -4926,6 +4723,7 @@
               </a:defRPr>
             </a:lvl5pPr>
             <a:lvl6pPr>
+              <a:buNone/>
               <a:defRPr sz="2250" b="0">
                 <a:solidFill>
                   <a:srgbClr val="112A3A"/>
@@ -4936,6 +4734,7 @@
               </a:defRPr>
             </a:lvl6pPr>
             <a:lvl7pPr>
+              <a:buNone/>
               <a:defRPr sz="2250" b="0">
                 <a:solidFill>
                   <a:srgbClr val="112A3A"/>
@@ -4946,6 +4745,7 @@
               </a:defRPr>
             </a:lvl7pPr>
             <a:lvl8pPr>
+              <a:buNone/>
               <a:defRPr sz="2250" b="0">
                 <a:solidFill>
                   <a:srgbClr val="112A3A"/>
@@ -4956,6 +4756,7 @@
               </a:defRPr>
             </a:lvl8pPr>
             <a:lvl9pPr>
+              <a:buNone/>
               <a:defRPr sz="2250" b="0">
                 <a:solidFill>
                   <a:srgbClr val="112A3A"/>
@@ -4968,6 +4769,7 @@
           </a:lstStyle>
           <a:p xmlns:a="http://schemas.openxmlformats.org/drawingml/2006/main">
             <a:pPr>
+              <a:buNone/>
               <a:defRPr sz="2250" b="0">
                 <a:solidFill>
                   <a:srgbClr val="112A3A"/>
@@ -4986,7 +4788,7 @@
                 <a:ea typeface="DejaVu Sans"/>
                 <a:cs typeface="DejaVu Sans"/>
               </a:rPr>
-              <a:t>Diseño de red, simulador, inventario y presupuesto.</a:t>
+              <a:t>Diseño y prototipo desarrollados para revisar el enfoque.</a:t>
             </a:r>
           </a:p>
         </p:txBody>
@@ -5033,6 +4835,7 @@
               </a:defRPr>
             </a:defPPr>
             <a:lvl1pPr>
+              <a:buNone/>
               <a:defRPr sz="2025" b="0">
                 <a:solidFill>
                   <a:srgbClr val="112A3A"/>
@@ -5043,6 +4846,7 @@
               </a:defRPr>
             </a:lvl1pPr>
             <a:lvl2pPr>
+              <a:buNone/>
               <a:defRPr sz="2025" b="0">
                 <a:solidFill>
                   <a:srgbClr val="112A3A"/>
@@ -5053,6 +4857,7 @@
               </a:defRPr>
             </a:lvl2pPr>
             <a:lvl3pPr>
+              <a:buNone/>
               <a:defRPr sz="2025" b="0">
                 <a:solidFill>
                   <a:srgbClr val="112A3A"/>
@@ -5063,6 +4868,7 @@
               </a:defRPr>
             </a:lvl3pPr>
             <a:lvl4pPr>
+              <a:buNone/>
               <a:defRPr sz="2025" b="0">
                 <a:solidFill>
                   <a:srgbClr val="112A3A"/>
@@ -5073,6 +4879,7 @@
               </a:defRPr>
             </a:lvl4pPr>
             <a:lvl5pPr>
+              <a:buNone/>
               <a:defRPr sz="2025" b="0">
                 <a:solidFill>
                   <a:srgbClr val="112A3A"/>
@@ -5083,6 +4890,7 @@
               </a:defRPr>
             </a:lvl5pPr>
             <a:lvl6pPr>
+              <a:buNone/>
               <a:defRPr sz="2025" b="0">
                 <a:solidFill>
                   <a:srgbClr val="112A3A"/>
@@ -5093,6 +4901,7 @@
               </a:defRPr>
             </a:lvl6pPr>
             <a:lvl7pPr>
+              <a:buNone/>
               <a:defRPr sz="2025" b="0">
                 <a:solidFill>
                   <a:srgbClr val="112A3A"/>
@@ -5103,6 +4912,7 @@
               </a:defRPr>
             </a:lvl7pPr>
             <a:lvl8pPr>
+              <a:buNone/>
               <a:defRPr sz="2025" b="0">
                 <a:solidFill>
                   <a:srgbClr val="112A3A"/>
@@ -5113,6 +4923,7 @@
               </a:defRPr>
             </a:lvl8pPr>
             <a:lvl9pPr>
+              <a:buNone/>
               <a:defRPr sz="2025" b="0">
                 <a:solidFill>
                   <a:srgbClr val="112A3A"/>
@@ -5125,6 +4936,7 @@
           </a:lstStyle>
           <a:p xmlns:a="http://schemas.openxmlformats.org/drawingml/2006/main">
             <a:pPr>
+              <a:buNone/>
               <a:defRPr sz="2025" b="0">
                 <a:solidFill>
                   <a:srgbClr val="112A3A"/>
@@ -5190,6 +5002,7 @@
               </a:defRPr>
             </a:defPPr>
             <a:lvl1pPr>
+              <a:buNone/>
               <a:defRPr sz="1650" b="0">
                 <a:solidFill>
                   <a:srgbClr val="112A3A"/>
@@ -5200,6 +5013,7 @@
               </a:defRPr>
             </a:lvl1pPr>
             <a:lvl2pPr>
+              <a:buNone/>
               <a:defRPr sz="1650" b="0">
                 <a:solidFill>
                   <a:srgbClr val="112A3A"/>
@@ -5210,6 +5024,7 @@
               </a:defRPr>
             </a:lvl2pPr>
             <a:lvl3pPr>
+              <a:buNone/>
               <a:defRPr sz="1650" b="0">
                 <a:solidFill>
                   <a:srgbClr val="112A3A"/>
@@ -5220,6 +5035,7 @@
               </a:defRPr>
             </a:lvl3pPr>
             <a:lvl4pPr>
+              <a:buNone/>
               <a:defRPr sz="1650" b="0">
                 <a:solidFill>
                   <a:srgbClr val="112A3A"/>
@@ -5230,6 +5046,7 @@
               </a:defRPr>
             </a:lvl4pPr>
             <a:lvl5pPr>
+              <a:buNone/>
               <a:defRPr sz="1650" b="0">
                 <a:solidFill>
                   <a:srgbClr val="112A3A"/>
@@ -5240,6 +5057,7 @@
               </a:defRPr>
             </a:lvl5pPr>
             <a:lvl6pPr>
+              <a:buNone/>
               <a:defRPr sz="1650" b="0">
                 <a:solidFill>
                   <a:srgbClr val="112A3A"/>
@@ -5250,6 +5068,7 @@
               </a:defRPr>
             </a:lvl6pPr>
             <a:lvl7pPr>
+              <a:buNone/>
               <a:defRPr sz="1650" b="0">
                 <a:solidFill>
                   <a:srgbClr val="112A3A"/>
@@ -5260,6 +5079,7 @@
               </a:defRPr>
             </a:lvl7pPr>
             <a:lvl8pPr>
+              <a:buNone/>
               <a:defRPr sz="1650" b="0">
                 <a:solidFill>
                   <a:srgbClr val="112A3A"/>
@@ -5270,6 +5090,7 @@
               </a:defRPr>
             </a:lvl8pPr>
             <a:lvl9pPr>
+              <a:buNone/>
               <a:defRPr sz="1650" b="0">
                 <a:solidFill>
                   <a:srgbClr val="112A3A"/>
@@ -5282,6 +5103,7 @@
           </a:lstStyle>
           <a:p xmlns:a="http://schemas.openxmlformats.org/drawingml/2006/main">
             <a:pPr>
+              <a:buNone/>
               <a:defRPr sz="1650" b="0">
                 <a:solidFill>
                   <a:srgbClr val="112A3A"/>
@@ -5376,6 +5198,7 @@
               </a:defRPr>
             </a:defPPr>
             <a:lvl1pPr>
+              <a:buNone/>
               <a:defRPr sz="3300" b="1">
                 <a:solidFill>
                   <a:srgbClr val="112A3A"/>
@@ -5386,6 +5209,7 @@
               </a:defRPr>
             </a:lvl1pPr>
             <a:lvl2pPr>
+              <a:buNone/>
               <a:defRPr sz="3300" b="1">
                 <a:solidFill>
                   <a:srgbClr val="112A3A"/>
@@ -5396,6 +5220,7 @@
               </a:defRPr>
             </a:lvl2pPr>
             <a:lvl3pPr>
+              <a:buNone/>
               <a:defRPr sz="3300" b="1">
                 <a:solidFill>
                   <a:srgbClr val="112A3A"/>
@@ -5406,6 +5231,7 @@
               </a:defRPr>
             </a:lvl3pPr>
             <a:lvl4pPr>
+              <a:buNone/>
               <a:defRPr sz="3300" b="1">
                 <a:solidFill>
                   <a:srgbClr val="112A3A"/>
@@ -5416,6 +5242,7 @@
               </a:defRPr>
             </a:lvl4pPr>
             <a:lvl5pPr>
+              <a:buNone/>
               <a:defRPr sz="3300" b="1">
                 <a:solidFill>
                   <a:srgbClr val="112A3A"/>
@@ -5426,6 +5253,7 @@
               </a:defRPr>
             </a:lvl5pPr>
             <a:lvl6pPr>
+              <a:buNone/>
               <a:defRPr sz="3300" b="1">
                 <a:solidFill>
                   <a:srgbClr val="112A3A"/>
@@ -5436,6 +5264,7 @@
               </a:defRPr>
             </a:lvl6pPr>
             <a:lvl7pPr>
+              <a:buNone/>
               <a:defRPr sz="3300" b="1">
                 <a:solidFill>
                   <a:srgbClr val="112A3A"/>
@@ -5446,6 +5275,7 @@
               </a:defRPr>
             </a:lvl7pPr>
             <a:lvl8pPr>
+              <a:buNone/>
               <a:defRPr sz="3300" b="1">
                 <a:solidFill>
                   <a:srgbClr val="112A3A"/>
@@ -5456,6 +5286,7 @@
               </a:defRPr>
             </a:lvl8pPr>
             <a:lvl9pPr>
+              <a:buNone/>
               <a:defRPr sz="3300" b="1">
                 <a:solidFill>
                   <a:srgbClr val="112A3A"/>
@@ -5468,6 +5299,7 @@
           </a:lstStyle>
           <a:p xmlns:a="http://schemas.openxmlformats.org/drawingml/2006/main">
             <a:pPr>
+              <a:buNone/>
               <a:defRPr sz="3300" b="1">
                 <a:solidFill>
                   <a:srgbClr val="112A3A"/>
@@ -5533,6 +5365,7 @@
               </a:defRPr>
             </a:defPPr>
             <a:lvl1pPr>
+              <a:buNone/>
               <a:defRPr sz="2025" b="0">
                 <a:solidFill>
                   <a:srgbClr val="31515E"/>
@@ -5543,6 +5376,7 @@
               </a:defRPr>
             </a:lvl1pPr>
             <a:lvl2pPr>
+              <a:buNone/>
               <a:defRPr sz="2025" b="0">
                 <a:solidFill>
                   <a:srgbClr val="31515E"/>
@@ -5553,6 +5387,7 @@
               </a:defRPr>
             </a:lvl2pPr>
             <a:lvl3pPr>
+              <a:buNone/>
               <a:defRPr sz="2025" b="0">
                 <a:solidFill>
                   <a:srgbClr val="31515E"/>
@@ -5563,6 +5398,7 @@
               </a:defRPr>
             </a:lvl3pPr>
             <a:lvl4pPr>
+              <a:buNone/>
               <a:defRPr sz="2025" b="0">
                 <a:solidFill>
                   <a:srgbClr val="31515E"/>
@@ -5573,6 +5409,7 @@
               </a:defRPr>
             </a:lvl4pPr>
             <a:lvl5pPr>
+              <a:buNone/>
               <a:defRPr sz="2025" b="0">
                 <a:solidFill>
                   <a:srgbClr val="31515E"/>
@@ -5583,6 +5420,7 @@
               </a:defRPr>
             </a:lvl5pPr>
             <a:lvl6pPr>
+              <a:buNone/>
               <a:defRPr sz="2025" b="0">
                 <a:solidFill>
                   <a:srgbClr val="31515E"/>
@@ -5593,6 +5431,7 @@
               </a:defRPr>
             </a:lvl6pPr>
             <a:lvl7pPr>
+              <a:buNone/>
               <a:defRPr sz="2025" b="0">
                 <a:solidFill>
                   <a:srgbClr val="31515E"/>
@@ -5603,6 +5442,7 @@
               </a:defRPr>
             </a:lvl7pPr>
             <a:lvl8pPr>
+              <a:buNone/>
               <a:defRPr sz="2025" b="0">
                 <a:solidFill>
                   <a:srgbClr val="31515E"/>
@@ -5613,6 +5453,7 @@
               </a:defRPr>
             </a:lvl8pPr>
             <a:lvl9pPr>
+              <a:buNone/>
               <a:defRPr sz="2025" b="0">
                 <a:solidFill>
                   <a:srgbClr val="31515E"/>
@@ -5625,6 +5466,7 @@
           </a:lstStyle>
           <a:p xmlns:a="http://schemas.openxmlformats.org/drawingml/2006/main">
             <a:pPr>
+              <a:buNone/>
               <a:defRPr sz="2025" b="0">
                 <a:solidFill>
                   <a:srgbClr val="31515E"/>
@@ -5643,7 +5485,7 @@
                 <a:ea typeface="DejaVu Sans"/>
                 <a:cs typeface="DejaVu Sans"/>
               </a:rPr>
-              <a:t>Una sola conexión deja a la sucursal sin otra salida.</a:t>
+              <a:t>Cada sucursal depende de una sola salida hacia central.</a:t>
             </a:r>
           </a:p>
         </p:txBody>
@@ -5690,6 +5532,7 @@
               </a:defRPr>
             </a:defPPr>
             <a:lvl1pPr>
+              <a:buNone/>
               <a:defRPr sz="1275" b="0">
                 <a:solidFill>
                   <a:srgbClr val="456278"/>
@@ -5700,6 +5543,7 @@
               </a:defRPr>
             </a:lvl1pPr>
             <a:lvl2pPr>
+              <a:buNone/>
               <a:defRPr sz="1275" b="0">
                 <a:solidFill>
                   <a:srgbClr val="456278"/>
@@ -5710,6 +5554,7 @@
               </a:defRPr>
             </a:lvl2pPr>
             <a:lvl3pPr>
+              <a:buNone/>
               <a:defRPr sz="1275" b="0">
                 <a:solidFill>
                   <a:srgbClr val="456278"/>
@@ -5720,6 +5565,7 @@
               </a:defRPr>
             </a:lvl3pPr>
             <a:lvl4pPr>
+              <a:buNone/>
               <a:defRPr sz="1275" b="0">
                 <a:solidFill>
                   <a:srgbClr val="456278"/>
@@ -5730,6 +5576,7 @@
               </a:defRPr>
             </a:lvl4pPr>
             <a:lvl5pPr>
+              <a:buNone/>
               <a:defRPr sz="1275" b="0">
                 <a:solidFill>
                   <a:srgbClr val="456278"/>
@@ -5740,6 +5587,7 @@
               </a:defRPr>
             </a:lvl5pPr>
             <a:lvl6pPr>
+              <a:buNone/>
               <a:defRPr sz="1275" b="0">
                 <a:solidFill>
                   <a:srgbClr val="456278"/>
@@ -5750,6 +5598,7 @@
               </a:defRPr>
             </a:lvl6pPr>
             <a:lvl7pPr>
+              <a:buNone/>
               <a:defRPr sz="1275" b="0">
                 <a:solidFill>
                   <a:srgbClr val="456278"/>
@@ -5760,6 +5609,7 @@
               </a:defRPr>
             </a:lvl7pPr>
             <a:lvl8pPr>
+              <a:buNone/>
               <a:defRPr sz="1275" b="0">
                 <a:solidFill>
                   <a:srgbClr val="456278"/>
@@ -5770,6 +5620,7 @@
               </a:defRPr>
             </a:lvl8pPr>
             <a:lvl9pPr>
+              <a:buNone/>
               <a:defRPr sz="1275" b="0">
                 <a:solidFill>
                   <a:srgbClr val="456278"/>
@@ -5782,6 +5633,7 @@
           </a:lstStyle>
           <a:p xmlns:a="http://schemas.openxmlformats.org/drawingml/2006/main">
             <a:pPr>
+              <a:buNone/>
               <a:defRPr sz="1275" b="0">
                 <a:solidFill>
                   <a:srgbClr val="456278"/>
@@ -5800,7 +5652,7 @@
                 <a:ea typeface="DejaVu Sans"/>
                 <a:cs typeface="DejaVu Sans"/>
               </a:rPr>
-              <a:t>02 / 9</a:t>
+              <a:t>02 / 6</a:t>
             </a:r>
           </a:p>
         </p:txBody>
@@ -5847,6 +5699,7 @@
               </a:defRPr>
             </a:defPPr>
             <a:lvl1pPr>
+              <a:buNone/>
               <a:defRPr sz="1200" b="0">
                 <a:solidFill>
                   <a:srgbClr val="456278"/>
@@ -5857,6 +5710,7 @@
               </a:defRPr>
             </a:lvl1pPr>
             <a:lvl2pPr>
+              <a:buNone/>
               <a:defRPr sz="1200" b="0">
                 <a:solidFill>
                   <a:srgbClr val="456278"/>
@@ -5867,6 +5721,7 @@
               </a:defRPr>
             </a:lvl2pPr>
             <a:lvl3pPr>
+              <a:buNone/>
               <a:defRPr sz="1200" b="0">
                 <a:solidFill>
                   <a:srgbClr val="456278"/>
@@ -5877,6 +5732,7 @@
               </a:defRPr>
             </a:lvl3pPr>
             <a:lvl4pPr>
+              <a:buNone/>
               <a:defRPr sz="1200" b="0">
                 <a:solidFill>
                   <a:srgbClr val="456278"/>
@@ -5887,6 +5743,7 @@
               </a:defRPr>
             </a:lvl4pPr>
             <a:lvl5pPr>
+              <a:buNone/>
               <a:defRPr sz="1200" b="0">
                 <a:solidFill>
                   <a:srgbClr val="456278"/>
@@ -5897,6 +5754,7 @@
               </a:defRPr>
             </a:lvl5pPr>
             <a:lvl6pPr>
+              <a:buNone/>
               <a:defRPr sz="1200" b="0">
                 <a:solidFill>
                   <a:srgbClr val="456278"/>
@@ -5907,6 +5765,7 @@
               </a:defRPr>
             </a:lvl6pPr>
             <a:lvl7pPr>
+              <a:buNone/>
               <a:defRPr sz="1200" b="0">
                 <a:solidFill>
                   <a:srgbClr val="456278"/>
@@ -5917,6 +5776,7 @@
               </a:defRPr>
             </a:lvl7pPr>
             <a:lvl8pPr>
+              <a:buNone/>
               <a:defRPr sz="1200" b="0">
                 <a:solidFill>
                   <a:srgbClr val="456278"/>
@@ -5927,6 +5787,7 @@
               </a:defRPr>
             </a:lvl8pPr>
             <a:lvl9pPr>
+              <a:buNone/>
               <a:defRPr sz="1200" b="0">
                 <a:solidFill>
                   <a:srgbClr val="456278"/>
@@ -5939,6 +5800,7 @@
           </a:lstStyle>
           <a:p xmlns:a="http://schemas.openxmlformats.org/drawingml/2006/main">
             <a:pPr>
+              <a:buNone/>
               <a:defRPr sz="1200" b="0">
                 <a:solidFill>
                   <a:srgbClr val="456278"/>
@@ -5967,7 +5829,7 @@
           <p:cNvPr id="5" name="">
             <a:extLst xmlns:a="http://schemas.openxmlformats.org/drawingml/2006/main">
               <a:ext uri="{FF2B5EF4-FFF2-40B4-BE49-F238E27FC236}">
-                <a16:creationId xmlns:a16="http://schemas.microsoft.com/office/drawing/2014/main" id="{44271AE0-E147-4C6A-AFFA-BBCF08CB03C9}"/>
+                <a16:creationId xmlns:a16="http://schemas.microsoft.com/office/drawing/2014/main" id="{D59EDF21-D1AA-4C86-B66E-ECB93B409F99}"/>
               </a:ext>
             </a:extLst>
           </p:cNvPr>
@@ -6001,7 +5863,7 @@
                           <a:ea typeface="DejaVu Sans"/>
                           <a:cs typeface="DejaVu Sans"/>
                         </a:rPr>
-                        <a:t>La misma sucursal</a:t>
+                        <a:t>Elemento</a:t>
                       </a:r>
                     </a:p>
                   </a:txBody>
@@ -6049,7 +5911,7 @@
                           <a:ea typeface="DejaVu Sans"/>
                           <a:cs typeface="DejaVu Sans"/>
                         </a:rPr>
-                        <a:t>Resultado</a:t>
+                        <a:t>Dependencia actual</a:t>
                       </a:r>
                     </a:p>
                   </a:txBody>
@@ -6093,7 +5955,7 @@
                           <a:ea typeface="DejaVu Sans"/>
                           <a:cs typeface="DejaVu Sans"/>
                         </a:rPr>
-                        <a:t>MPLS disponible</a:t>
+                        <a:t>Salida de la sucursal</a:t>
                       </a:r>
                     </a:p>
                   </a:txBody>
@@ -6135,7 +5997,7 @@
                           <a:ea typeface="DejaVu Sans"/>
                           <a:cs typeface="DejaVu Sans"/>
                         </a:rPr>
-                        <a:t>La solicitud llega y recibe respuesta</a:t>
+                        <a:t>Un solo enlace MPLS</a:t>
                       </a:r>
                     </a:p>
                   </a:txBody>
@@ -6173,7 +6035,7 @@
                           <a:ea typeface="DejaVu Sans"/>
                           <a:cs typeface="DejaVu Sans"/>
                         </a:rPr>
-                        <a:t>MPLS interrumpido</a:t>
+                        <a:t>Equipos de acceso</a:t>
                       </a:r>
                     </a:p>
                   </a:txBody>
@@ -6215,7 +6077,7 @@
                           <a:ea typeface="DejaVu Sans"/>
                           <a:cs typeface="DejaVu Sans"/>
                         </a:rPr>
-                        <a:t>No hay otra salida hacia central</a:t>
+                        <a:t>Un router y un switch</a:t>
                       </a:r>
                     </a:p>
                   </a:txBody>
@@ -6284,6 +6146,7 @@
               </a:defRPr>
             </a:defPPr>
             <a:lvl1pPr>
+              <a:buNone/>
               <a:defRPr sz="2025" b="1">
                 <a:solidFill>
                   <a:srgbClr val="00888A"/>
@@ -6294,6 +6157,7 @@
               </a:defRPr>
             </a:lvl1pPr>
             <a:lvl2pPr>
+              <a:buNone/>
               <a:defRPr sz="2025" b="1">
                 <a:solidFill>
                   <a:srgbClr val="00888A"/>
@@ -6304,6 +6168,7 @@
               </a:defRPr>
             </a:lvl2pPr>
             <a:lvl3pPr>
+              <a:buNone/>
               <a:defRPr sz="2025" b="1">
                 <a:solidFill>
                   <a:srgbClr val="00888A"/>
@@ -6314,6 +6179,7 @@
               </a:defRPr>
             </a:lvl3pPr>
             <a:lvl4pPr>
+              <a:buNone/>
               <a:defRPr sz="2025" b="1">
                 <a:solidFill>
                   <a:srgbClr val="00888A"/>
@@ -6324,6 +6190,7 @@
               </a:defRPr>
             </a:lvl4pPr>
             <a:lvl5pPr>
+              <a:buNone/>
               <a:defRPr sz="2025" b="1">
                 <a:solidFill>
                   <a:srgbClr val="00888A"/>
@@ -6334,6 +6201,7 @@
               </a:defRPr>
             </a:lvl5pPr>
             <a:lvl6pPr>
+              <a:buNone/>
               <a:defRPr sz="2025" b="1">
                 <a:solidFill>
                   <a:srgbClr val="00888A"/>
@@ -6344,6 +6212,7 @@
               </a:defRPr>
             </a:lvl6pPr>
             <a:lvl7pPr>
+              <a:buNone/>
               <a:defRPr sz="2025" b="1">
                 <a:solidFill>
                   <a:srgbClr val="00888A"/>
@@ -6354,6 +6223,7 @@
               </a:defRPr>
             </a:lvl7pPr>
             <a:lvl8pPr>
+              <a:buNone/>
               <a:defRPr sz="2025" b="1">
                 <a:solidFill>
                   <a:srgbClr val="00888A"/>
@@ -6364,6 +6234,7 @@
               </a:defRPr>
             </a:lvl8pPr>
             <a:lvl9pPr>
+              <a:buNone/>
               <a:defRPr sz="2025" b="1">
                 <a:solidFill>
                   <a:srgbClr val="00888A"/>
@@ -6376,6 +6247,7 @@
           </a:lstStyle>
           <a:p xmlns:a="http://schemas.openxmlformats.org/drawingml/2006/main">
             <a:pPr>
+              <a:buNone/>
               <a:defRPr sz="2025" b="1">
                 <a:solidFill>
                   <a:srgbClr val="00888A"/>
@@ -6470,6 +6342,7 @@
               </a:defRPr>
             </a:defPPr>
             <a:lvl1pPr>
+              <a:buNone/>
               <a:defRPr sz="3300" b="1">
                 <a:solidFill>
                   <a:srgbClr val="112A3A"/>
@@ -6480,6 +6353,7 @@
               </a:defRPr>
             </a:lvl1pPr>
             <a:lvl2pPr>
+              <a:buNone/>
               <a:defRPr sz="3300" b="1">
                 <a:solidFill>
                   <a:srgbClr val="112A3A"/>
@@ -6490,6 +6364,7 @@
               </a:defRPr>
             </a:lvl2pPr>
             <a:lvl3pPr>
+              <a:buNone/>
               <a:defRPr sz="3300" b="1">
                 <a:solidFill>
                   <a:srgbClr val="112A3A"/>
@@ -6500,6 +6375,7 @@
               </a:defRPr>
             </a:lvl3pPr>
             <a:lvl4pPr>
+              <a:buNone/>
               <a:defRPr sz="3300" b="1">
                 <a:solidFill>
                   <a:srgbClr val="112A3A"/>
@@ -6510,6 +6386,7 @@
               </a:defRPr>
             </a:lvl4pPr>
             <a:lvl5pPr>
+              <a:buNone/>
               <a:defRPr sz="3300" b="1">
                 <a:solidFill>
                   <a:srgbClr val="112A3A"/>
@@ -6520,6 +6397,7 @@
               </a:defRPr>
             </a:lvl5pPr>
             <a:lvl6pPr>
+              <a:buNone/>
               <a:defRPr sz="3300" b="1">
                 <a:solidFill>
                   <a:srgbClr val="112A3A"/>
@@ -6530,6 +6408,7 @@
               </a:defRPr>
             </a:lvl6pPr>
             <a:lvl7pPr>
+              <a:buNone/>
               <a:defRPr sz="3300" b="1">
                 <a:solidFill>
                   <a:srgbClr val="112A3A"/>
@@ -6540,6 +6419,7 @@
               </a:defRPr>
             </a:lvl7pPr>
             <a:lvl8pPr>
+              <a:buNone/>
               <a:defRPr sz="3300" b="1">
                 <a:solidFill>
                   <a:srgbClr val="112A3A"/>
@@ -6550,6 +6430,7 @@
               </a:defRPr>
             </a:lvl8pPr>
             <a:lvl9pPr>
+              <a:buNone/>
               <a:defRPr sz="3300" b="1">
                 <a:solidFill>
                   <a:srgbClr val="112A3A"/>
@@ -6562,6 +6443,7 @@
           </a:lstStyle>
           <a:p xmlns:a="http://schemas.openxmlformats.org/drawingml/2006/main">
             <a:pPr>
+              <a:buNone/>
               <a:defRPr sz="3300" b="1">
                 <a:solidFill>
                   <a:srgbClr val="112A3A"/>
@@ -6627,6 +6509,7 @@
               </a:defRPr>
             </a:defPPr>
             <a:lvl1pPr>
+              <a:buNone/>
               <a:defRPr sz="2025" b="0">
                 <a:solidFill>
                   <a:srgbClr val="31515E"/>
@@ -6637,6 +6520,7 @@
               </a:defRPr>
             </a:lvl1pPr>
             <a:lvl2pPr>
+              <a:buNone/>
               <a:defRPr sz="2025" b="0">
                 <a:solidFill>
                   <a:srgbClr val="31515E"/>
@@ -6647,6 +6531,7 @@
               </a:defRPr>
             </a:lvl2pPr>
             <a:lvl3pPr>
+              <a:buNone/>
               <a:defRPr sz="2025" b="0">
                 <a:solidFill>
                   <a:srgbClr val="31515E"/>
@@ -6657,6 +6542,7 @@
               </a:defRPr>
             </a:lvl3pPr>
             <a:lvl4pPr>
+              <a:buNone/>
               <a:defRPr sz="2025" b="0">
                 <a:solidFill>
                   <a:srgbClr val="31515E"/>
@@ -6667,6 +6553,7 @@
               </a:defRPr>
             </a:lvl4pPr>
             <a:lvl5pPr>
+              <a:buNone/>
               <a:defRPr sz="2025" b="0">
                 <a:solidFill>
                   <a:srgbClr val="31515E"/>
@@ -6677,6 +6564,7 @@
               </a:defRPr>
             </a:lvl5pPr>
             <a:lvl6pPr>
+              <a:buNone/>
               <a:defRPr sz="2025" b="0">
                 <a:solidFill>
                   <a:srgbClr val="31515E"/>
@@ -6687,6 +6575,7 @@
               </a:defRPr>
             </a:lvl6pPr>
             <a:lvl7pPr>
+              <a:buNone/>
               <a:defRPr sz="2025" b="0">
                 <a:solidFill>
                   <a:srgbClr val="31515E"/>
@@ -6697,6 +6586,7 @@
               </a:defRPr>
             </a:lvl7pPr>
             <a:lvl8pPr>
+              <a:buNone/>
               <a:defRPr sz="2025" b="0">
                 <a:solidFill>
                   <a:srgbClr val="31515E"/>
@@ -6707,6 +6597,7 @@
               </a:defRPr>
             </a:lvl8pPr>
             <a:lvl9pPr>
+              <a:buNone/>
               <a:defRPr sz="2025" b="0">
                 <a:solidFill>
                   <a:srgbClr val="31515E"/>
@@ -6719,6 +6610,7 @@
           </a:lstStyle>
           <a:p xmlns:a="http://schemas.openxmlformats.org/drawingml/2006/main">
             <a:pPr>
+              <a:buNone/>
               <a:defRPr sz="2025" b="0">
                 <a:solidFill>
                   <a:srgbClr val="31515E"/>
@@ -6784,6 +6676,7 @@
               </a:defRPr>
             </a:defPPr>
             <a:lvl1pPr>
+              <a:buNone/>
               <a:defRPr sz="1275" b="0">
                 <a:solidFill>
                   <a:srgbClr val="456278"/>
@@ -6794,6 +6687,7 @@
               </a:defRPr>
             </a:lvl1pPr>
             <a:lvl2pPr>
+              <a:buNone/>
               <a:defRPr sz="1275" b="0">
                 <a:solidFill>
                   <a:srgbClr val="456278"/>
@@ -6804,6 +6698,7 @@
               </a:defRPr>
             </a:lvl2pPr>
             <a:lvl3pPr>
+              <a:buNone/>
               <a:defRPr sz="1275" b="0">
                 <a:solidFill>
                   <a:srgbClr val="456278"/>
@@ -6814,6 +6709,7 @@
               </a:defRPr>
             </a:lvl3pPr>
             <a:lvl4pPr>
+              <a:buNone/>
               <a:defRPr sz="1275" b="0">
                 <a:solidFill>
                   <a:srgbClr val="456278"/>
@@ -6824,6 +6720,7 @@
               </a:defRPr>
             </a:lvl4pPr>
             <a:lvl5pPr>
+              <a:buNone/>
               <a:defRPr sz="1275" b="0">
                 <a:solidFill>
                   <a:srgbClr val="456278"/>
@@ -6834,6 +6731,7 @@
               </a:defRPr>
             </a:lvl5pPr>
             <a:lvl6pPr>
+              <a:buNone/>
               <a:defRPr sz="1275" b="0">
                 <a:solidFill>
                   <a:srgbClr val="456278"/>
@@ -6844,6 +6742,7 @@
               </a:defRPr>
             </a:lvl6pPr>
             <a:lvl7pPr>
+              <a:buNone/>
               <a:defRPr sz="1275" b="0">
                 <a:solidFill>
                   <a:srgbClr val="456278"/>
@@ -6854,6 +6753,7 @@
               </a:defRPr>
             </a:lvl7pPr>
             <a:lvl8pPr>
+              <a:buNone/>
               <a:defRPr sz="1275" b="0">
                 <a:solidFill>
                   <a:srgbClr val="456278"/>
@@ -6864,6 +6764,7 @@
               </a:defRPr>
             </a:lvl8pPr>
             <a:lvl9pPr>
+              <a:buNone/>
               <a:defRPr sz="1275" b="0">
                 <a:solidFill>
                   <a:srgbClr val="456278"/>
@@ -6876,6 +6777,7 @@
           </a:lstStyle>
           <a:p xmlns:a="http://schemas.openxmlformats.org/drawingml/2006/main">
             <a:pPr>
+              <a:buNone/>
               <a:defRPr sz="1275" b="0">
                 <a:solidFill>
                   <a:srgbClr val="456278"/>
@@ -6894,7 +6796,7 @@
                 <a:ea typeface="DejaVu Sans"/>
                 <a:cs typeface="DejaVu Sans"/>
               </a:rPr>
-              <a:t>03 / 9</a:t>
+              <a:t>03 / 6</a:t>
             </a:r>
           </a:p>
         </p:txBody>
@@ -6941,6 +6843,7 @@
               </a:defRPr>
             </a:defPPr>
             <a:lvl1pPr>
+              <a:buNone/>
               <a:defRPr sz="1200" b="0">
                 <a:solidFill>
                   <a:srgbClr val="456278"/>
@@ -6951,6 +6854,7 @@
               </a:defRPr>
             </a:lvl1pPr>
             <a:lvl2pPr>
+              <a:buNone/>
               <a:defRPr sz="1200" b="0">
                 <a:solidFill>
                   <a:srgbClr val="456278"/>
@@ -6961,6 +6865,7 @@
               </a:defRPr>
             </a:lvl2pPr>
             <a:lvl3pPr>
+              <a:buNone/>
               <a:defRPr sz="1200" b="0">
                 <a:solidFill>
                   <a:srgbClr val="456278"/>
@@ -6971,6 +6876,7 @@
               </a:defRPr>
             </a:lvl3pPr>
             <a:lvl4pPr>
+              <a:buNone/>
               <a:defRPr sz="1200" b="0">
                 <a:solidFill>
                   <a:srgbClr val="456278"/>
@@ -6981,6 +6887,7 @@
               </a:defRPr>
             </a:lvl4pPr>
             <a:lvl5pPr>
+              <a:buNone/>
               <a:defRPr sz="1200" b="0">
                 <a:solidFill>
                   <a:srgbClr val="456278"/>
@@ -6991,6 +6898,7 @@
               </a:defRPr>
             </a:lvl5pPr>
             <a:lvl6pPr>
+              <a:buNone/>
               <a:defRPr sz="1200" b="0">
                 <a:solidFill>
                   <a:srgbClr val="456278"/>
@@ -7001,6 +6909,7 @@
               </a:defRPr>
             </a:lvl6pPr>
             <a:lvl7pPr>
+              <a:buNone/>
               <a:defRPr sz="1200" b="0">
                 <a:solidFill>
                   <a:srgbClr val="456278"/>
@@ -7011,6 +6920,7 @@
               </a:defRPr>
             </a:lvl7pPr>
             <a:lvl8pPr>
+              <a:buNone/>
               <a:defRPr sz="1200" b="0">
                 <a:solidFill>
                   <a:srgbClr val="456278"/>
@@ -7021,6 +6931,7 @@
               </a:defRPr>
             </a:lvl8pPr>
             <a:lvl9pPr>
+              <a:buNone/>
               <a:defRPr sz="1200" b="0">
                 <a:solidFill>
                   <a:srgbClr val="456278"/>
@@ -7033,6 +6944,7 @@
           </a:lstStyle>
           <a:p xmlns:a="http://schemas.openxmlformats.org/drawingml/2006/main">
             <a:pPr>
+              <a:buNone/>
               <a:defRPr sz="1200" b="0">
                 <a:solidFill>
                   <a:srgbClr val="456278"/>
@@ -7098,6 +7010,7 @@
               </a:defRPr>
             </a:defPPr>
             <a:lvl1pPr>
+              <a:buNone/>
               <a:defRPr sz="2100" b="1">
                 <a:solidFill>
                   <a:srgbClr val="00888A"/>
@@ -7108,6 +7021,7 @@
               </a:defRPr>
             </a:lvl1pPr>
             <a:lvl2pPr>
+              <a:buNone/>
               <a:defRPr sz="2100" b="1">
                 <a:solidFill>
                   <a:srgbClr val="00888A"/>
@@ -7118,6 +7032,7 @@
               </a:defRPr>
             </a:lvl2pPr>
             <a:lvl3pPr>
+              <a:buNone/>
               <a:defRPr sz="2100" b="1">
                 <a:solidFill>
                   <a:srgbClr val="00888A"/>
@@ -7128,6 +7043,7 @@
               </a:defRPr>
             </a:lvl3pPr>
             <a:lvl4pPr>
+              <a:buNone/>
               <a:defRPr sz="2100" b="1">
                 <a:solidFill>
                   <a:srgbClr val="00888A"/>
@@ -7138,6 +7054,7 @@
               </a:defRPr>
             </a:lvl4pPr>
             <a:lvl5pPr>
+              <a:buNone/>
               <a:defRPr sz="2100" b="1">
                 <a:solidFill>
                   <a:srgbClr val="00888A"/>
@@ -7148,6 +7065,7 @@
               </a:defRPr>
             </a:lvl5pPr>
             <a:lvl6pPr>
+              <a:buNone/>
               <a:defRPr sz="2100" b="1">
                 <a:solidFill>
                   <a:srgbClr val="00888A"/>
@@ -7158,6 +7076,7 @@
               </a:defRPr>
             </a:lvl6pPr>
             <a:lvl7pPr>
+              <a:buNone/>
               <a:defRPr sz="2100" b="1">
                 <a:solidFill>
                   <a:srgbClr val="00888A"/>
@@ -7168,6 +7087,7 @@
               </a:defRPr>
             </a:lvl7pPr>
             <a:lvl8pPr>
+              <a:buNone/>
               <a:defRPr sz="2100" b="1">
                 <a:solidFill>
                   <a:srgbClr val="00888A"/>
@@ -7178,6 +7098,7 @@
               </a:defRPr>
             </a:lvl8pPr>
             <a:lvl9pPr>
+              <a:buNone/>
               <a:defRPr sz="2100" b="1">
                 <a:solidFill>
                   <a:srgbClr val="00888A"/>
@@ -7190,6 +7111,7 @@
           </a:lstStyle>
           <a:p xmlns:a="http://schemas.openxmlformats.org/drawingml/2006/main">
             <a:pPr>
+              <a:buNone/>
               <a:defRPr sz="2100" b="1">
                 <a:solidFill>
                   <a:srgbClr val="00888A"/>
@@ -7213,6 +7135,7 @@
           </a:p>
           <a:p xmlns:a="http://schemas.openxmlformats.org/drawingml/2006/main">
             <a:pPr>
+              <a:buNone/>
               <a:defRPr sz="2100" b="1">
                 <a:solidFill>
                   <a:srgbClr val="00888A"/>
@@ -7278,6 +7201,7 @@
               </a:defRPr>
             </a:defPPr>
             <a:lvl1pPr>
+              <a:buNone/>
               <a:defRPr sz="1875" b="0">
                 <a:solidFill>
                   <a:srgbClr val="112A3A"/>
@@ -7288,6 +7212,7 @@
               </a:defRPr>
             </a:lvl1pPr>
             <a:lvl2pPr>
+              <a:buNone/>
               <a:defRPr sz="1875" b="0">
                 <a:solidFill>
                   <a:srgbClr val="112A3A"/>
@@ -7298,6 +7223,7 @@
               </a:defRPr>
             </a:lvl2pPr>
             <a:lvl3pPr>
+              <a:buNone/>
               <a:defRPr sz="1875" b="0">
                 <a:solidFill>
                   <a:srgbClr val="112A3A"/>
@@ -7308,6 +7234,7 @@
               </a:defRPr>
             </a:lvl3pPr>
             <a:lvl4pPr>
+              <a:buNone/>
               <a:defRPr sz="1875" b="0">
                 <a:solidFill>
                   <a:srgbClr val="112A3A"/>
@@ -7318,6 +7245,7 @@
               </a:defRPr>
             </a:lvl4pPr>
             <a:lvl5pPr>
+              <a:buNone/>
               <a:defRPr sz="1875" b="0">
                 <a:solidFill>
                   <a:srgbClr val="112A3A"/>
@@ -7328,6 +7256,7 @@
               </a:defRPr>
             </a:lvl5pPr>
             <a:lvl6pPr>
+              <a:buNone/>
               <a:defRPr sz="1875" b="0">
                 <a:solidFill>
                   <a:srgbClr val="112A3A"/>
@@ -7338,6 +7267,7 @@
               </a:defRPr>
             </a:lvl6pPr>
             <a:lvl7pPr>
+              <a:buNone/>
               <a:defRPr sz="1875" b="0">
                 <a:solidFill>
                   <a:srgbClr val="112A3A"/>
@@ -7348,6 +7278,7 @@
               </a:defRPr>
             </a:lvl7pPr>
             <a:lvl8pPr>
+              <a:buNone/>
               <a:defRPr sz="1875" b="0">
                 <a:solidFill>
                   <a:srgbClr val="112A3A"/>
@@ -7358,6 +7289,7 @@
               </a:defRPr>
             </a:lvl8pPr>
             <a:lvl9pPr>
+              <a:buNone/>
               <a:defRPr sz="1875" b="0">
                 <a:solidFill>
                   <a:srgbClr val="112A3A"/>
@@ -7370,6 +7302,7 @@
           </a:lstStyle>
           <a:p xmlns:a="http://schemas.openxmlformats.org/drawingml/2006/main">
             <a:pPr>
+              <a:buNone/>
               <a:defRPr sz="1875" b="0">
                 <a:solidFill>
                   <a:srgbClr val="112A3A"/>
@@ -7398,6 +7331,7 @@
           </a:p>
           <a:p xmlns:a="http://schemas.openxmlformats.org/drawingml/2006/main">
             <a:pPr>
+              <a:buNone/>
               <a:defRPr sz="1875" b="0">
                 <a:solidFill>
                   <a:srgbClr val="112A3A"/>
@@ -7426,6 +7360,7 @@
           </a:p>
           <a:p xmlns:a="http://schemas.openxmlformats.org/drawingml/2006/main">
             <a:pPr>
+              <a:buNone/>
               <a:defRPr sz="1875" b="0">
                 <a:solidFill>
                   <a:srgbClr val="112A3A"/>
@@ -7454,7 +7389,7 @@
           <p:cNvPr id="7" name="">
             <a:extLst xmlns:a="http://schemas.openxmlformats.org/drawingml/2006/main">
               <a:ext uri="{FF2B5EF4-FFF2-40B4-BE49-F238E27FC236}">
-                <a16:creationId xmlns:a16="http://schemas.microsoft.com/office/drawing/2014/main" id="{71792513-DB2A-42F2-9AEA-0390A48F35E0}"/>
+                <a16:creationId xmlns:a16="http://schemas.microsoft.com/office/drawing/2014/main" id="{F9A1C70E-B139-4057-B52F-FE907E6ED8AB}"/>
               </a:ext>
             </a:extLst>
           </p:cNvPr>
@@ -7464,7 +7399,7 @@
           <p:nvPr/>
         </p:nvPicPr>
         <p:blipFill>
-          <a:blip xmlns:r="http://schemas.openxmlformats.org/officeDocument/2006/relationships" xmlns:a="http://schemas.openxmlformats.org/drawingml/2006/main" r:embed="R62f0a43ac1824e8f"/>
+          <a:blip xmlns:r="http://schemas.openxmlformats.org/officeDocument/2006/relationships" xmlns:a="http://schemas.openxmlformats.org/drawingml/2006/main" r:embed="Ra340cf38ce7e4bd2"/>
           <a:stretch xmlns:a="http://schemas.openxmlformats.org/drawingml/2006/main"/>
         </p:blipFill>
         <p:spPr>
@@ -7548,6 +7483,7 @@
               </a:defRPr>
             </a:defPPr>
             <a:lvl1pPr>
+              <a:buNone/>
               <a:defRPr sz="3300" b="1">
                 <a:solidFill>
                   <a:srgbClr val="112A3A"/>
@@ -7558,6 +7494,7 @@
               </a:defRPr>
             </a:lvl1pPr>
             <a:lvl2pPr>
+              <a:buNone/>
               <a:defRPr sz="3300" b="1">
                 <a:solidFill>
                   <a:srgbClr val="112A3A"/>
@@ -7568,6 +7505,7 @@
               </a:defRPr>
             </a:lvl2pPr>
             <a:lvl3pPr>
+              <a:buNone/>
               <a:defRPr sz="3300" b="1">
                 <a:solidFill>
                   <a:srgbClr val="112A3A"/>
@@ -7578,6 +7516,7 @@
               </a:defRPr>
             </a:lvl3pPr>
             <a:lvl4pPr>
+              <a:buNone/>
               <a:defRPr sz="3300" b="1">
                 <a:solidFill>
                   <a:srgbClr val="112A3A"/>
@@ -7588,6 +7527,7 @@
               </a:defRPr>
             </a:lvl4pPr>
             <a:lvl5pPr>
+              <a:buNone/>
               <a:defRPr sz="3300" b="1">
                 <a:solidFill>
                   <a:srgbClr val="112A3A"/>
@@ -7598,6 +7538,7 @@
               </a:defRPr>
             </a:lvl5pPr>
             <a:lvl6pPr>
+              <a:buNone/>
               <a:defRPr sz="3300" b="1">
                 <a:solidFill>
                   <a:srgbClr val="112A3A"/>
@@ -7608,6 +7549,7 @@
               </a:defRPr>
             </a:lvl6pPr>
             <a:lvl7pPr>
+              <a:buNone/>
               <a:defRPr sz="3300" b="1">
                 <a:solidFill>
                   <a:srgbClr val="112A3A"/>
@@ -7618,6 +7560,7 @@
               </a:defRPr>
             </a:lvl7pPr>
             <a:lvl8pPr>
+              <a:buNone/>
               <a:defRPr sz="3300" b="1">
                 <a:solidFill>
                   <a:srgbClr val="112A3A"/>
@@ -7628,6 +7571,7 @@
               </a:defRPr>
             </a:lvl8pPr>
             <a:lvl9pPr>
+              <a:buNone/>
               <a:defRPr sz="3300" b="1">
                 <a:solidFill>
                   <a:srgbClr val="112A3A"/>
@@ -7640,6 +7584,7 @@
           </a:lstStyle>
           <a:p xmlns:a="http://schemas.openxmlformats.org/drawingml/2006/main">
             <a:pPr>
+              <a:buNone/>
               <a:defRPr sz="3300" b="1">
                 <a:solidFill>
                   <a:srgbClr val="112A3A"/>
@@ -7705,6 +7650,7 @@
               </a:defRPr>
             </a:defPPr>
             <a:lvl1pPr>
+              <a:buNone/>
               <a:defRPr sz="2025" b="0">
                 <a:solidFill>
                   <a:srgbClr val="31515E"/>
@@ -7715,6 +7661,7 @@
               </a:defRPr>
             </a:lvl1pPr>
             <a:lvl2pPr>
+              <a:buNone/>
               <a:defRPr sz="2025" b="0">
                 <a:solidFill>
                   <a:srgbClr val="31515E"/>
@@ -7725,6 +7672,7 @@
               </a:defRPr>
             </a:lvl2pPr>
             <a:lvl3pPr>
+              <a:buNone/>
               <a:defRPr sz="2025" b="0">
                 <a:solidFill>
                   <a:srgbClr val="31515E"/>
@@ -7735,6 +7683,7 @@
               </a:defRPr>
             </a:lvl3pPr>
             <a:lvl4pPr>
+              <a:buNone/>
               <a:defRPr sz="2025" b="0">
                 <a:solidFill>
                   <a:srgbClr val="31515E"/>
@@ -7745,6 +7694,7 @@
               </a:defRPr>
             </a:lvl4pPr>
             <a:lvl5pPr>
+              <a:buNone/>
               <a:defRPr sz="2025" b="0">
                 <a:solidFill>
                   <a:srgbClr val="31515E"/>
@@ -7755,6 +7705,7 @@
               </a:defRPr>
             </a:lvl5pPr>
             <a:lvl6pPr>
+              <a:buNone/>
               <a:defRPr sz="2025" b="0">
                 <a:solidFill>
                   <a:srgbClr val="31515E"/>
@@ -7765,6 +7716,7 @@
               </a:defRPr>
             </a:lvl6pPr>
             <a:lvl7pPr>
+              <a:buNone/>
               <a:defRPr sz="2025" b="0">
                 <a:solidFill>
                   <a:srgbClr val="31515E"/>
@@ -7775,6 +7727,7 @@
               </a:defRPr>
             </a:lvl7pPr>
             <a:lvl8pPr>
+              <a:buNone/>
               <a:defRPr sz="2025" b="0">
                 <a:solidFill>
                   <a:srgbClr val="31515E"/>
@@ -7785,6 +7738,7 @@
               </a:defRPr>
             </a:lvl8pPr>
             <a:lvl9pPr>
+              <a:buNone/>
               <a:defRPr sz="2025" b="0">
                 <a:solidFill>
                   <a:srgbClr val="31515E"/>
@@ -7797,6 +7751,7 @@
           </a:lstStyle>
           <a:p xmlns:a="http://schemas.openxmlformats.org/drawingml/2006/main">
             <a:pPr>
+              <a:buNone/>
               <a:defRPr sz="2025" b="0">
                 <a:solidFill>
                   <a:srgbClr val="31515E"/>
@@ -7815,7 +7770,7 @@
                 <a:ea typeface="DejaVu Sans"/>
                 <a:cs typeface="DejaVu Sans"/>
               </a:rPr>
-              <a:t>La sucursal conserva otra salida cuando pierde Starlink.</a:t>
+              <a:t>Una solicitud utiliza Leo mientras Starlink está interrumpido.</a:t>
             </a:r>
           </a:p>
         </p:txBody>
@@ -7862,6 +7817,7 @@
               </a:defRPr>
             </a:defPPr>
             <a:lvl1pPr>
+              <a:buNone/>
               <a:defRPr sz="1275" b="0">
                 <a:solidFill>
                   <a:srgbClr val="456278"/>
@@ -7872,6 +7828,7 @@
               </a:defRPr>
             </a:lvl1pPr>
             <a:lvl2pPr>
+              <a:buNone/>
               <a:defRPr sz="1275" b="0">
                 <a:solidFill>
                   <a:srgbClr val="456278"/>
@@ -7882,6 +7839,7 @@
               </a:defRPr>
             </a:lvl2pPr>
             <a:lvl3pPr>
+              <a:buNone/>
               <a:defRPr sz="1275" b="0">
                 <a:solidFill>
                   <a:srgbClr val="456278"/>
@@ -7892,6 +7850,7 @@
               </a:defRPr>
             </a:lvl3pPr>
             <a:lvl4pPr>
+              <a:buNone/>
               <a:defRPr sz="1275" b="0">
                 <a:solidFill>
                   <a:srgbClr val="456278"/>
@@ -7902,6 +7861,7 @@
               </a:defRPr>
             </a:lvl4pPr>
             <a:lvl5pPr>
+              <a:buNone/>
               <a:defRPr sz="1275" b="0">
                 <a:solidFill>
                   <a:srgbClr val="456278"/>
@@ -7912,6 +7872,7 @@
               </a:defRPr>
             </a:lvl5pPr>
             <a:lvl6pPr>
+              <a:buNone/>
               <a:defRPr sz="1275" b="0">
                 <a:solidFill>
                   <a:srgbClr val="456278"/>
@@ -7922,6 +7883,7 @@
               </a:defRPr>
             </a:lvl6pPr>
             <a:lvl7pPr>
+              <a:buNone/>
               <a:defRPr sz="1275" b="0">
                 <a:solidFill>
                   <a:srgbClr val="456278"/>
@@ -7932,6 +7894,7 @@
               </a:defRPr>
             </a:lvl7pPr>
             <a:lvl8pPr>
+              <a:buNone/>
               <a:defRPr sz="1275" b="0">
                 <a:solidFill>
                   <a:srgbClr val="456278"/>
@@ -7942,6 +7905,7 @@
               </a:defRPr>
             </a:lvl8pPr>
             <a:lvl9pPr>
+              <a:buNone/>
               <a:defRPr sz="1275" b="0">
                 <a:solidFill>
                   <a:srgbClr val="456278"/>
@@ -7954,6 +7918,7 @@
           </a:lstStyle>
           <a:p xmlns:a="http://schemas.openxmlformats.org/drawingml/2006/main">
             <a:pPr>
+              <a:buNone/>
               <a:defRPr sz="1275" b="0">
                 <a:solidFill>
                   <a:srgbClr val="456278"/>
@@ -7972,7 +7937,7 @@
                 <a:ea typeface="DejaVu Sans"/>
                 <a:cs typeface="DejaVu Sans"/>
               </a:rPr>
-              <a:t>04 / 9</a:t>
+              <a:t>04 / 6</a:t>
             </a:r>
           </a:p>
         </p:txBody>
@@ -8019,6 +7984,7 @@
               </a:defRPr>
             </a:defPPr>
             <a:lvl1pPr>
+              <a:buNone/>
               <a:defRPr sz="1200" b="0">
                 <a:solidFill>
                   <a:srgbClr val="456278"/>
@@ -8029,6 +7995,7 @@
               </a:defRPr>
             </a:lvl1pPr>
             <a:lvl2pPr>
+              <a:buNone/>
               <a:defRPr sz="1200" b="0">
                 <a:solidFill>
                   <a:srgbClr val="456278"/>
@@ -8039,6 +8006,7 @@
               </a:defRPr>
             </a:lvl2pPr>
             <a:lvl3pPr>
+              <a:buNone/>
               <a:defRPr sz="1200" b="0">
                 <a:solidFill>
                   <a:srgbClr val="456278"/>
@@ -8049,6 +8017,7 @@
               </a:defRPr>
             </a:lvl3pPr>
             <a:lvl4pPr>
+              <a:buNone/>
               <a:defRPr sz="1200" b="0">
                 <a:solidFill>
                   <a:srgbClr val="456278"/>
@@ -8059,6 +8028,7 @@
               </a:defRPr>
             </a:lvl4pPr>
             <a:lvl5pPr>
+              <a:buNone/>
               <a:defRPr sz="1200" b="0">
                 <a:solidFill>
                   <a:srgbClr val="456278"/>
@@ -8069,6 +8039,7 @@
               </a:defRPr>
             </a:lvl5pPr>
             <a:lvl6pPr>
+              <a:buNone/>
               <a:defRPr sz="1200" b="0">
                 <a:solidFill>
                   <a:srgbClr val="456278"/>
@@ -8079,6 +8050,7 @@
               </a:defRPr>
             </a:lvl6pPr>
             <a:lvl7pPr>
+              <a:buNone/>
               <a:defRPr sz="1200" b="0">
                 <a:solidFill>
                   <a:srgbClr val="456278"/>
@@ -8089,6 +8061,7 @@
               </a:defRPr>
             </a:lvl7pPr>
             <a:lvl8pPr>
+              <a:buNone/>
               <a:defRPr sz="1200" b="0">
                 <a:solidFill>
                   <a:srgbClr val="456278"/>
@@ -8099,6 +8072,7 @@
               </a:defRPr>
             </a:lvl8pPr>
             <a:lvl9pPr>
+              <a:buNone/>
               <a:defRPr sz="1200" b="0">
                 <a:solidFill>
                   <a:srgbClr val="456278"/>
@@ -8111,6 +8085,7 @@
           </a:lstStyle>
           <a:p xmlns:a="http://schemas.openxmlformats.org/drawingml/2006/main">
             <a:pPr>
+              <a:buNone/>
               <a:defRPr sz="1200" b="0">
                 <a:solidFill>
                   <a:srgbClr val="456278"/>
@@ -8139,7 +8114,7 @@
           <p:cNvPr id="5" name="">
             <a:extLst xmlns:a="http://schemas.openxmlformats.org/drawingml/2006/main">
               <a:ext uri="{FF2B5EF4-FFF2-40B4-BE49-F238E27FC236}">
-                <a16:creationId xmlns:a16="http://schemas.microsoft.com/office/drawing/2014/main" id="{708D1C50-8997-43E7-ACA9-08BEFF710AB8}"/>
+                <a16:creationId xmlns:a16="http://schemas.microsoft.com/office/drawing/2014/main" id="{C50DE47C-794A-44B5-8C8D-E8EA895BF9D6}"/>
               </a:ext>
             </a:extLst>
           </p:cNvPr>
@@ -8148,7 +8123,7 @@
         </p:nvGraphicFramePr>
         <p:xfrm>
           <a:off xmlns:a="http://schemas.openxmlformats.org/drawingml/2006/main" x="609600" y="2667000"/>
-          <a:ext xmlns:a="http://schemas.openxmlformats.org/drawingml/2006/main" cx="10972800" cy="2476500"/>
+          <a:ext xmlns:a="http://schemas.openxmlformats.org/drawingml/2006/main" cx="10972800" cy="1651000"/>
         </p:xfrm>
         <a:graphic xmlns:a="http://schemas.openxmlformats.org/drawingml/2006/main">
           <a:graphicData uri="http://schemas.openxmlformats.org/drawingml/2006/table">
@@ -8174,7 +8149,7 @@
                           <a:ea typeface="DejaVu Sans"/>
                           <a:cs typeface="DejaVu Sans"/>
                         </a:rPr>
-                        <a:t>Estado del ejemplo</a:t>
+                        <a:t>Caso del ejemplo</a:t>
                       </a:r>
                     </a:p>
                   </a:txBody>
@@ -8308,122 +8283,6 @@
                           <a:ea typeface="DejaVu Sans"/>
                           <a:cs typeface="DejaVu Sans"/>
                         </a:rPr>
-                        <a:t>Sin falla</a:t>
-                      </a:r>
-                    </a:p>
-                  </a:txBody>
-                  <a:tcPr marL="91440" marR="91440" marT="45720" marB="45720">
-                    <a:lnL w="9525">
-                      <a:solidFill>
-                        <a:srgbClr val="C6D7D7"/>
-                      </a:solidFill>
-                      <a:prstDash val="solid"/>
-                    </a:lnL>
-                    <a:lnR w="9525">
-                      <a:solidFill>
-                        <a:srgbClr val="C6D7D7"/>
-                      </a:solidFill>
-                      <a:prstDash val="solid"/>
-                    </a:lnR>
-                    <a:lnB w="9525">
-                      <a:solidFill>
-                        <a:srgbClr val="C6D7D7"/>
-                      </a:solidFill>
-                      <a:prstDash val="solid"/>
-                    </a:lnB>
-                    <a:solidFill>
-                      <a:srgbClr val="EDF4F2"/>
-                    </a:solidFill>
-                  </a:tcPr>
-                </a:tc>
-                <a:tc>
-                  <a:txBody>
-                    <a:bodyPr/>
-                    <a:lstStyle/>
-                    <a:p>
-                      <a:r>
-                        <a:rPr sz="1950" b="0">
-                          <a:solidFill>
-                            <a:srgbClr val="112A3A"/>
-                          </a:solidFill>
-                          <a:latin typeface="DejaVu Sans"/>
-                          <a:ea typeface="DejaVu Sans"/>
-                          <a:cs typeface="DejaVu Sans"/>
-                        </a:rPr>
-                        <a:t>Starlink</a:t>
-                      </a:r>
-                    </a:p>
-                  </a:txBody>
-                  <a:tcPr marL="91440" marR="91440" marT="45720" marB="45720">
-                    <a:lnR w="9525">
-                      <a:solidFill>
-                        <a:srgbClr val="C6D7D7"/>
-                      </a:solidFill>
-                      <a:prstDash val="solid"/>
-                    </a:lnR>
-                    <a:lnB w="9525">
-                      <a:solidFill>
-                        <a:srgbClr val="C6D7D7"/>
-                      </a:solidFill>
-                      <a:prstDash val="solid"/>
-                    </a:lnB>
-                    <a:solidFill>
-                      <a:srgbClr val="EDF4F2"/>
-                    </a:solidFill>
-                  </a:tcPr>
-                </a:tc>
-                <a:tc>
-                  <a:txBody>
-                    <a:bodyPr/>
-                    <a:lstStyle/>
-                    <a:p>
-                      <a:r>
-                        <a:rPr sz="1950" b="0">
-                          <a:solidFill>
-                            <a:srgbClr val="112A3A"/>
-                          </a:solidFill>
-                          <a:latin typeface="DejaVu Sans"/>
-                          <a:ea typeface="DejaVu Sans"/>
-                          <a:cs typeface="DejaVu Sans"/>
-                        </a:rPr>
-                        <a:t>Respuesta recibida</a:t>
-                      </a:r>
-                    </a:p>
-                  </a:txBody>
-                  <a:tcPr marL="91440" marR="91440" marT="45720" marB="45720">
-                    <a:lnR w="9525">
-                      <a:solidFill>
-                        <a:srgbClr val="C6D7D7"/>
-                      </a:solidFill>
-                      <a:prstDash val="solid"/>
-                    </a:lnR>
-                    <a:lnB w="9525">
-                      <a:solidFill>
-                        <a:srgbClr val="C6D7D7"/>
-                      </a:solidFill>
-                      <a:prstDash val="solid"/>
-                    </a:lnB>
-                    <a:solidFill>
-                      <a:srgbClr val="EDF4F2"/>
-                    </a:solidFill>
-                  </a:tcPr>
-                </a:tc>
-              </a:tr>
-              <a:tr h="825500">
-                <a:tc>
-                  <a:txBody>
-                    <a:bodyPr/>
-                    <a:lstStyle/>
-                    <a:p>
-                      <a:r>
-                        <a:rPr sz="1950" b="0">
-                          <a:solidFill>
-                            <a:srgbClr val="112A3A"/>
-                          </a:solidFill>
-                          <a:latin typeface="DejaVu Sans"/>
-                          <a:ea typeface="DejaVu Sans"/>
-                          <a:cs typeface="DejaVu Sans"/>
-                        </a:rPr>
                         <a:t>Starlink interrumpido</a:t>
                       </a:r>
                     </a:p>
@@ -8502,7 +8361,7 @@
                           <a:ea typeface="DejaVu Sans"/>
                           <a:cs typeface="DejaVu Sans"/>
                         </a:rPr>
-                        <a:t>Respuesta por el respaldo</a:t>
+                        <a:t>Respuesta recibida</a:t>
                       </a:r>
                     </a:p>
                   </a:txBody>
@@ -8571,6 +8430,7 @@
               </a:defRPr>
             </a:defPPr>
             <a:lvl1pPr>
+              <a:buNone/>
               <a:defRPr sz="2025" b="1">
                 <a:solidFill>
                   <a:srgbClr val="00888A"/>
@@ -8581,6 +8441,7 @@
               </a:defRPr>
             </a:lvl1pPr>
             <a:lvl2pPr>
+              <a:buNone/>
               <a:defRPr sz="2025" b="1">
                 <a:solidFill>
                   <a:srgbClr val="00888A"/>
@@ -8591,6 +8452,7 @@
               </a:defRPr>
             </a:lvl2pPr>
             <a:lvl3pPr>
+              <a:buNone/>
               <a:defRPr sz="2025" b="1">
                 <a:solidFill>
                   <a:srgbClr val="00888A"/>
@@ -8601,6 +8463,7 @@
               </a:defRPr>
             </a:lvl3pPr>
             <a:lvl4pPr>
+              <a:buNone/>
               <a:defRPr sz="2025" b="1">
                 <a:solidFill>
                   <a:srgbClr val="00888A"/>
@@ -8611,6 +8474,7 @@
               </a:defRPr>
             </a:lvl4pPr>
             <a:lvl5pPr>
+              <a:buNone/>
               <a:defRPr sz="2025" b="1">
                 <a:solidFill>
                   <a:srgbClr val="00888A"/>
@@ -8621,6 +8485,7 @@
               </a:defRPr>
             </a:lvl5pPr>
             <a:lvl6pPr>
+              <a:buNone/>
               <a:defRPr sz="2025" b="1">
                 <a:solidFill>
                   <a:srgbClr val="00888A"/>
@@ -8631,6 +8496,7 @@
               </a:defRPr>
             </a:lvl6pPr>
             <a:lvl7pPr>
+              <a:buNone/>
               <a:defRPr sz="2025" b="1">
                 <a:solidFill>
                   <a:srgbClr val="00888A"/>
@@ -8641,6 +8507,7 @@
               </a:defRPr>
             </a:lvl7pPr>
             <a:lvl8pPr>
+              <a:buNone/>
               <a:defRPr sz="2025" b="1">
                 <a:solidFill>
                   <a:srgbClr val="00888A"/>
@@ -8651,6 +8518,7 @@
               </a:defRPr>
             </a:lvl8pPr>
             <a:lvl9pPr>
+              <a:buNone/>
               <a:defRPr sz="2025" b="1">
                 <a:solidFill>
                   <a:srgbClr val="00888A"/>
@@ -8663,6 +8531,7 @@
           </a:lstStyle>
           <a:p xmlns:a="http://schemas.openxmlformats.org/drawingml/2006/main">
             <a:pPr>
+              <a:buNone/>
               <a:defRPr sz="2025" b="1">
                 <a:solidFill>
                   <a:srgbClr val="00888A"/>
@@ -8697,3704 +8566,6 @@
 </file>
 
 <file path=ppt/slides/slide5.xml><?xml version="1.0" encoding="utf-8"?>
-<p:sld xmlns:p="http://schemas.openxmlformats.org/presentationml/2006/main">
-  <p:cSld>
-    <p:bg>
-      <p:bgPr>
-        <a:solidFill xmlns:a="http://schemas.openxmlformats.org/drawingml/2006/main">
-          <a:srgbClr val="F5F7F5"/>
-        </a:solidFill>
-      </p:bgPr>
-    </p:bg>
-    <p:spTree>
-      <p:nvGrpSpPr>
-        <p:cNvPr id="1" name=""/>
-        <p:cNvGrpSpPr/>
-        <p:nvPr/>
-      </p:nvGrpSpPr>
-      <p:grpSpPr>
-        <a:xfrm xmlns:a="http://schemas.openxmlformats.org/drawingml/2006/main"/>
-      </p:grpSpPr>
-      <p:sp>
-        <p:nvSpPr>
-          <p:cNvPr id="7" name="title">
-            <a:extLst xmlns:a="http://schemas.openxmlformats.org/drawingml/2006/main">
-              <a:ext uri="{FF2B5EF4-FFF2-40B4-BE49-F238E27FC236}">
-                <a16:creationId xmlns:a16="http://schemas.microsoft.com/office/drawing/2014/main" id="{459B6341-7462-4B9D-9B5C-541D3F93CF2C}"/>
-              </a:ext>
-            </a:extLst>
-          </p:cNvPr>
-          <p:cNvSpPr>
-            <a:spLocks xmlns:a="http://schemas.openxmlformats.org/drawingml/2006/main" noGrp="1"/>
-          </p:cNvSpPr>
-          <p:nvPr/>
-        </p:nvSpPr>
-        <p:spPr>
-          <a:xfrm xmlns:a="http://schemas.openxmlformats.org/drawingml/2006/main">
-            <a:off x="609600" y="381000"/>
-            <a:ext cx="10972800" cy="952500"/>
-          </a:xfrm>
-          <a:prstGeom xmlns:a="http://schemas.openxmlformats.org/drawingml/2006/main" prst="rect">
-            <a:avLst/>
-          </a:prstGeom>
-          <a:noFill xmlns:a="http://schemas.openxmlformats.org/drawingml/2006/main"/>
-          <a:ln xmlns:a="http://schemas.openxmlformats.org/drawingml/2006/main" w="0">
-            <a:noFill/>
-            <a:prstDash val="solid"/>
-          </a:ln>
-        </p:spPr>
-        <p:txBody>
-          <a:bodyPr xmlns:a="http://schemas.openxmlformats.org/drawingml/2006/main"/>
-          <a:lstStyle xmlns:a="http://schemas.openxmlformats.org/drawingml/2006/main">
-            <a:defPPr>
-              <a:defRPr sz="3300" b="1">
-                <a:solidFill>
-                  <a:srgbClr val="112A3A"/>
-                </a:solidFill>
-                <a:latin typeface="DejaVu Sans"/>
-                <a:ea typeface="DejaVu Sans"/>
-                <a:cs typeface="DejaVu Sans"/>
-              </a:defRPr>
-            </a:defPPr>
-            <a:lvl1pPr>
-              <a:defRPr sz="3300" b="1">
-                <a:solidFill>
-                  <a:srgbClr val="112A3A"/>
-                </a:solidFill>
-                <a:latin typeface="DejaVu Sans"/>
-                <a:ea typeface="DejaVu Sans"/>
-                <a:cs typeface="DejaVu Sans"/>
-              </a:defRPr>
-            </a:lvl1pPr>
-            <a:lvl2pPr>
-              <a:defRPr sz="3300" b="1">
-                <a:solidFill>
-                  <a:srgbClr val="112A3A"/>
-                </a:solidFill>
-                <a:latin typeface="DejaVu Sans"/>
-                <a:ea typeface="DejaVu Sans"/>
-                <a:cs typeface="DejaVu Sans"/>
-              </a:defRPr>
-            </a:lvl2pPr>
-            <a:lvl3pPr>
-              <a:defRPr sz="3300" b="1">
-                <a:solidFill>
-                  <a:srgbClr val="112A3A"/>
-                </a:solidFill>
-                <a:latin typeface="DejaVu Sans"/>
-                <a:ea typeface="DejaVu Sans"/>
-                <a:cs typeface="DejaVu Sans"/>
-              </a:defRPr>
-            </a:lvl3pPr>
-            <a:lvl4pPr>
-              <a:defRPr sz="3300" b="1">
-                <a:solidFill>
-                  <a:srgbClr val="112A3A"/>
-                </a:solidFill>
-                <a:latin typeface="DejaVu Sans"/>
-                <a:ea typeface="DejaVu Sans"/>
-                <a:cs typeface="DejaVu Sans"/>
-              </a:defRPr>
-            </a:lvl4pPr>
-            <a:lvl5pPr>
-              <a:defRPr sz="3300" b="1">
-                <a:solidFill>
-                  <a:srgbClr val="112A3A"/>
-                </a:solidFill>
-                <a:latin typeface="DejaVu Sans"/>
-                <a:ea typeface="DejaVu Sans"/>
-                <a:cs typeface="DejaVu Sans"/>
-              </a:defRPr>
-            </a:lvl5pPr>
-            <a:lvl6pPr>
-              <a:defRPr sz="3300" b="1">
-                <a:solidFill>
-                  <a:srgbClr val="112A3A"/>
-                </a:solidFill>
-                <a:latin typeface="DejaVu Sans"/>
-                <a:ea typeface="DejaVu Sans"/>
-                <a:cs typeface="DejaVu Sans"/>
-              </a:defRPr>
-            </a:lvl6pPr>
-            <a:lvl7pPr>
-              <a:defRPr sz="3300" b="1">
-                <a:solidFill>
-                  <a:srgbClr val="112A3A"/>
-                </a:solidFill>
-                <a:latin typeface="DejaVu Sans"/>
-                <a:ea typeface="DejaVu Sans"/>
-                <a:cs typeface="DejaVu Sans"/>
-              </a:defRPr>
-            </a:lvl7pPr>
-            <a:lvl8pPr>
-              <a:defRPr sz="3300" b="1">
-                <a:solidFill>
-                  <a:srgbClr val="112A3A"/>
-                </a:solidFill>
-                <a:latin typeface="DejaVu Sans"/>
-                <a:ea typeface="DejaVu Sans"/>
-                <a:cs typeface="DejaVu Sans"/>
-              </a:defRPr>
-            </a:lvl8pPr>
-            <a:lvl9pPr>
-              <a:defRPr sz="3300" b="1">
-                <a:solidFill>
-                  <a:srgbClr val="112A3A"/>
-                </a:solidFill>
-                <a:latin typeface="DejaVu Sans"/>
-                <a:ea typeface="DejaVu Sans"/>
-                <a:cs typeface="DejaVu Sans"/>
-              </a:defRPr>
-            </a:lvl9pPr>
-          </a:lstStyle>
-          <a:p xmlns:a="http://schemas.openxmlformats.org/drawingml/2006/main">
-            <a:pPr>
-              <a:defRPr sz="3300" b="1">
-                <a:solidFill>
-                  <a:srgbClr val="112A3A"/>
-                </a:solidFill>
-                <a:latin typeface="DejaVu Sans"/>
-                <a:ea typeface="DejaVu Sans"/>
-                <a:cs typeface="DejaVu Sans"/>
-              </a:defRPr>
-            </a:pPr>
-            <a:r>
-              <a:rPr sz="3300" b="1">
-                <a:solidFill>
-                  <a:srgbClr val="112A3A"/>
-                </a:solidFill>
-                <a:latin typeface="DejaVu Sans"/>
-                <a:ea typeface="DejaVu Sans"/>
-                <a:cs typeface="DejaVu Sans"/>
-              </a:rPr>
-              <a:t>Acceso seguro a los servicios</a:t>
-            </a:r>
-          </a:p>
-        </p:txBody>
-      </p:sp>
-      <p:sp>
-        <p:nvSpPr>
-          <p:cNvPr id="2" name="message">
-            <a:extLst xmlns:a="http://schemas.openxmlformats.org/drawingml/2006/main">
-              <a:ext uri="{FF2B5EF4-FFF2-40B4-BE49-F238E27FC236}">
-                <a16:creationId xmlns:a16="http://schemas.microsoft.com/office/drawing/2014/main" id="{45D0FF0D-44DF-4265-9226-B8184D583CAA}"/>
-              </a:ext>
-            </a:extLst>
-          </p:cNvPr>
-          <p:cNvSpPr>
-            <a:spLocks xmlns:a="http://schemas.openxmlformats.org/drawingml/2006/main" noGrp="1"/>
-          </p:cNvSpPr>
-          <p:nvPr/>
-        </p:nvSpPr>
-        <p:spPr>
-          <a:xfrm xmlns:a="http://schemas.openxmlformats.org/drawingml/2006/main">
-            <a:off x="609600" y="1524000"/>
-            <a:ext cx="10972800" cy="666750"/>
-          </a:xfrm>
-          <a:prstGeom xmlns:a="http://schemas.openxmlformats.org/drawingml/2006/main" prst="rect">
-            <a:avLst/>
-          </a:prstGeom>
-          <a:noFill xmlns:a="http://schemas.openxmlformats.org/drawingml/2006/main"/>
-          <a:ln xmlns:a="http://schemas.openxmlformats.org/drawingml/2006/main" w="0">
-            <a:noFill/>
-            <a:prstDash val="solid"/>
-          </a:ln>
-        </p:spPr>
-        <p:txBody>
-          <a:bodyPr xmlns:a="http://schemas.openxmlformats.org/drawingml/2006/main"/>
-          <a:lstStyle xmlns:a="http://schemas.openxmlformats.org/drawingml/2006/main">
-            <a:defPPr>
-              <a:defRPr sz="2025" b="0">
-                <a:solidFill>
-                  <a:srgbClr val="31515E"/>
-                </a:solidFill>
-                <a:latin typeface="DejaVu Sans"/>
-                <a:ea typeface="DejaVu Sans"/>
-                <a:cs typeface="DejaVu Sans"/>
-              </a:defRPr>
-            </a:defPPr>
-            <a:lvl1pPr>
-              <a:defRPr sz="2025" b="0">
-                <a:solidFill>
-                  <a:srgbClr val="31515E"/>
-                </a:solidFill>
-                <a:latin typeface="DejaVu Sans"/>
-                <a:ea typeface="DejaVu Sans"/>
-                <a:cs typeface="DejaVu Sans"/>
-              </a:defRPr>
-            </a:lvl1pPr>
-            <a:lvl2pPr>
-              <a:defRPr sz="2025" b="0">
-                <a:solidFill>
-                  <a:srgbClr val="31515E"/>
-                </a:solidFill>
-                <a:latin typeface="DejaVu Sans"/>
-                <a:ea typeface="DejaVu Sans"/>
-                <a:cs typeface="DejaVu Sans"/>
-              </a:defRPr>
-            </a:lvl2pPr>
-            <a:lvl3pPr>
-              <a:defRPr sz="2025" b="0">
-                <a:solidFill>
-                  <a:srgbClr val="31515E"/>
-                </a:solidFill>
-                <a:latin typeface="DejaVu Sans"/>
-                <a:ea typeface="DejaVu Sans"/>
-                <a:cs typeface="DejaVu Sans"/>
-              </a:defRPr>
-            </a:lvl3pPr>
-            <a:lvl4pPr>
-              <a:defRPr sz="2025" b="0">
-                <a:solidFill>
-                  <a:srgbClr val="31515E"/>
-                </a:solidFill>
-                <a:latin typeface="DejaVu Sans"/>
-                <a:ea typeface="DejaVu Sans"/>
-                <a:cs typeface="DejaVu Sans"/>
-              </a:defRPr>
-            </a:lvl4pPr>
-            <a:lvl5pPr>
-              <a:defRPr sz="2025" b="0">
-                <a:solidFill>
-                  <a:srgbClr val="31515E"/>
-                </a:solidFill>
-                <a:latin typeface="DejaVu Sans"/>
-                <a:ea typeface="DejaVu Sans"/>
-                <a:cs typeface="DejaVu Sans"/>
-              </a:defRPr>
-            </a:lvl5pPr>
-            <a:lvl6pPr>
-              <a:defRPr sz="2025" b="0">
-                <a:solidFill>
-                  <a:srgbClr val="31515E"/>
-                </a:solidFill>
-                <a:latin typeface="DejaVu Sans"/>
-                <a:ea typeface="DejaVu Sans"/>
-                <a:cs typeface="DejaVu Sans"/>
-              </a:defRPr>
-            </a:lvl6pPr>
-            <a:lvl7pPr>
-              <a:defRPr sz="2025" b="0">
-                <a:solidFill>
-                  <a:srgbClr val="31515E"/>
-                </a:solidFill>
-                <a:latin typeface="DejaVu Sans"/>
-                <a:ea typeface="DejaVu Sans"/>
-                <a:cs typeface="DejaVu Sans"/>
-              </a:defRPr>
-            </a:lvl7pPr>
-            <a:lvl8pPr>
-              <a:defRPr sz="2025" b="0">
-                <a:solidFill>
-                  <a:srgbClr val="31515E"/>
-                </a:solidFill>
-                <a:latin typeface="DejaVu Sans"/>
-                <a:ea typeface="DejaVu Sans"/>
-                <a:cs typeface="DejaVu Sans"/>
-              </a:defRPr>
-            </a:lvl8pPr>
-            <a:lvl9pPr>
-              <a:defRPr sz="2025" b="0">
-                <a:solidFill>
-                  <a:srgbClr val="31515E"/>
-                </a:solidFill>
-                <a:latin typeface="DejaVu Sans"/>
-                <a:ea typeface="DejaVu Sans"/>
-                <a:cs typeface="DejaVu Sans"/>
-              </a:defRPr>
-            </a:lvl9pPr>
-          </a:lstStyle>
-          <a:p xmlns:a="http://schemas.openxmlformats.org/drawingml/2006/main">
-            <a:pPr>
-              <a:defRPr sz="2025" b="0">
-                <a:solidFill>
-                  <a:srgbClr val="31515E"/>
-                </a:solidFill>
-                <a:latin typeface="DejaVu Sans"/>
-                <a:ea typeface="DejaVu Sans"/>
-                <a:cs typeface="DejaVu Sans"/>
-              </a:defRPr>
-            </a:pPr>
-            <a:r>
-              <a:rPr sz="2025" b="0">
-                <a:solidFill>
-                  <a:srgbClr val="31515E"/>
-                </a:solidFill>
-                <a:latin typeface="DejaVu Sans"/>
-                <a:ea typeface="DejaVu Sans"/>
-                <a:cs typeface="DejaVu Sans"/>
-              </a:rPr>
-              <a:t>Poder conectarse no significa tener permiso para entrar a todo.</a:t>
-            </a:r>
-          </a:p>
-        </p:txBody>
-      </p:sp>
-      <p:sp>
-        <p:nvSpPr>
-          <p:cNvPr id="3" name="number">
-            <a:extLst xmlns:a="http://schemas.openxmlformats.org/drawingml/2006/main">
-              <a:ext uri="{FF2B5EF4-FFF2-40B4-BE49-F238E27FC236}">
-                <a16:creationId xmlns:a16="http://schemas.microsoft.com/office/drawing/2014/main" id="{7E96C9AA-A6C3-4FD6-80DA-CE9C1B18F95A}"/>
-              </a:ext>
-            </a:extLst>
-          </p:cNvPr>
-          <p:cNvSpPr>
-            <a:spLocks xmlns:a="http://schemas.openxmlformats.org/drawingml/2006/main" noGrp="1"/>
-          </p:cNvSpPr>
-          <p:nvPr/>
-        </p:nvSpPr>
-        <p:spPr>
-          <a:xfrm xmlns:a="http://schemas.openxmlformats.org/drawingml/2006/main">
-            <a:off x="10477500" y="6448425"/>
-            <a:ext cx="1123950" cy="238125"/>
-          </a:xfrm>
-          <a:prstGeom xmlns:a="http://schemas.openxmlformats.org/drawingml/2006/main" prst="rect">
-            <a:avLst/>
-          </a:prstGeom>
-          <a:noFill xmlns:a="http://schemas.openxmlformats.org/drawingml/2006/main"/>
-          <a:ln xmlns:a="http://schemas.openxmlformats.org/drawingml/2006/main" w="0">
-            <a:noFill/>
-            <a:prstDash val="solid"/>
-          </a:ln>
-        </p:spPr>
-        <p:txBody>
-          <a:bodyPr xmlns:a="http://schemas.openxmlformats.org/drawingml/2006/main"/>
-          <a:lstStyle xmlns:a="http://schemas.openxmlformats.org/drawingml/2006/main">
-            <a:defPPr>
-              <a:defRPr sz="1275" b="0">
-                <a:solidFill>
-                  <a:srgbClr val="456278"/>
-                </a:solidFill>
-                <a:latin typeface="DejaVu Sans"/>
-                <a:ea typeface="DejaVu Sans"/>
-                <a:cs typeface="DejaVu Sans"/>
-              </a:defRPr>
-            </a:defPPr>
-            <a:lvl1pPr>
-              <a:defRPr sz="1275" b="0">
-                <a:solidFill>
-                  <a:srgbClr val="456278"/>
-                </a:solidFill>
-                <a:latin typeface="DejaVu Sans"/>
-                <a:ea typeface="DejaVu Sans"/>
-                <a:cs typeface="DejaVu Sans"/>
-              </a:defRPr>
-            </a:lvl1pPr>
-            <a:lvl2pPr>
-              <a:defRPr sz="1275" b="0">
-                <a:solidFill>
-                  <a:srgbClr val="456278"/>
-                </a:solidFill>
-                <a:latin typeface="DejaVu Sans"/>
-                <a:ea typeface="DejaVu Sans"/>
-                <a:cs typeface="DejaVu Sans"/>
-              </a:defRPr>
-            </a:lvl2pPr>
-            <a:lvl3pPr>
-              <a:defRPr sz="1275" b="0">
-                <a:solidFill>
-                  <a:srgbClr val="456278"/>
-                </a:solidFill>
-                <a:latin typeface="DejaVu Sans"/>
-                <a:ea typeface="DejaVu Sans"/>
-                <a:cs typeface="DejaVu Sans"/>
-              </a:defRPr>
-            </a:lvl3pPr>
-            <a:lvl4pPr>
-              <a:defRPr sz="1275" b="0">
-                <a:solidFill>
-                  <a:srgbClr val="456278"/>
-                </a:solidFill>
-                <a:latin typeface="DejaVu Sans"/>
-                <a:ea typeface="DejaVu Sans"/>
-                <a:cs typeface="DejaVu Sans"/>
-              </a:defRPr>
-            </a:lvl4pPr>
-            <a:lvl5pPr>
-              <a:defRPr sz="1275" b="0">
-                <a:solidFill>
-                  <a:srgbClr val="456278"/>
-                </a:solidFill>
-                <a:latin typeface="DejaVu Sans"/>
-                <a:ea typeface="DejaVu Sans"/>
-                <a:cs typeface="DejaVu Sans"/>
-              </a:defRPr>
-            </a:lvl5pPr>
-            <a:lvl6pPr>
-              <a:defRPr sz="1275" b="0">
-                <a:solidFill>
-                  <a:srgbClr val="456278"/>
-                </a:solidFill>
-                <a:latin typeface="DejaVu Sans"/>
-                <a:ea typeface="DejaVu Sans"/>
-                <a:cs typeface="DejaVu Sans"/>
-              </a:defRPr>
-            </a:lvl6pPr>
-            <a:lvl7pPr>
-              <a:defRPr sz="1275" b="0">
-                <a:solidFill>
-                  <a:srgbClr val="456278"/>
-                </a:solidFill>
-                <a:latin typeface="DejaVu Sans"/>
-                <a:ea typeface="DejaVu Sans"/>
-                <a:cs typeface="DejaVu Sans"/>
-              </a:defRPr>
-            </a:lvl7pPr>
-            <a:lvl8pPr>
-              <a:defRPr sz="1275" b="0">
-                <a:solidFill>
-                  <a:srgbClr val="456278"/>
-                </a:solidFill>
-                <a:latin typeface="DejaVu Sans"/>
-                <a:ea typeface="DejaVu Sans"/>
-                <a:cs typeface="DejaVu Sans"/>
-              </a:defRPr>
-            </a:lvl8pPr>
-            <a:lvl9pPr>
-              <a:defRPr sz="1275" b="0">
-                <a:solidFill>
-                  <a:srgbClr val="456278"/>
-                </a:solidFill>
-                <a:latin typeface="DejaVu Sans"/>
-                <a:ea typeface="DejaVu Sans"/>
-                <a:cs typeface="DejaVu Sans"/>
-              </a:defRPr>
-            </a:lvl9pPr>
-          </a:lstStyle>
-          <a:p xmlns:a="http://schemas.openxmlformats.org/drawingml/2006/main">
-            <a:pPr>
-              <a:defRPr sz="1275" b="0">
-                <a:solidFill>
-                  <a:srgbClr val="456278"/>
-                </a:solidFill>
-                <a:latin typeface="DejaVu Sans"/>
-                <a:ea typeface="DejaVu Sans"/>
-                <a:cs typeface="DejaVu Sans"/>
-              </a:defRPr>
-            </a:pPr>
-            <a:r>
-              <a:rPr sz="1275" b="0">
-                <a:solidFill>
-                  <a:srgbClr val="456278"/>
-                </a:solidFill>
-                <a:latin typeface="DejaVu Sans"/>
-                <a:ea typeface="DejaVu Sans"/>
-                <a:cs typeface="DejaVu Sans"/>
-              </a:rPr>
-              <a:t>05 / 9</a:t>
-            </a:r>
-          </a:p>
-        </p:txBody>
-      </p:sp>
-      <p:sp>
-        <p:nvSpPr>
-          <p:cNvPr id="4" name="project">
-            <a:extLst xmlns:a="http://schemas.openxmlformats.org/drawingml/2006/main">
-              <a:ext uri="{FF2B5EF4-FFF2-40B4-BE49-F238E27FC236}">
-                <a16:creationId xmlns:a16="http://schemas.microsoft.com/office/drawing/2014/main" id="{17942313-FBF1-4ADA-A210-F71C348BC4BD}"/>
-              </a:ext>
-            </a:extLst>
-          </p:cNvPr>
-          <p:cNvSpPr>
-            <a:spLocks xmlns:a="http://schemas.openxmlformats.org/drawingml/2006/main" noGrp="1"/>
-          </p:cNvSpPr>
-          <p:nvPr/>
-        </p:nvSpPr>
-        <p:spPr>
-          <a:xfrm xmlns:a="http://schemas.openxmlformats.org/drawingml/2006/main">
-            <a:off x="609600" y="6477000"/>
-            <a:ext cx="8382000" cy="228600"/>
-          </a:xfrm>
-          <a:prstGeom xmlns:a="http://schemas.openxmlformats.org/drawingml/2006/main" prst="rect">
-            <a:avLst/>
-          </a:prstGeom>
-          <a:noFill xmlns:a="http://schemas.openxmlformats.org/drawingml/2006/main"/>
-          <a:ln xmlns:a="http://schemas.openxmlformats.org/drawingml/2006/main" w="0">
-            <a:noFill/>
-            <a:prstDash val="solid"/>
-          </a:ln>
-        </p:spPr>
-        <p:txBody>
-          <a:bodyPr xmlns:a="http://schemas.openxmlformats.org/drawingml/2006/main"/>
-          <a:lstStyle xmlns:a="http://schemas.openxmlformats.org/drawingml/2006/main">
-            <a:defPPr>
-              <a:defRPr sz="1200" b="0">
-                <a:solidFill>
-                  <a:srgbClr val="456278"/>
-                </a:solidFill>
-                <a:latin typeface="DejaVu Sans"/>
-                <a:ea typeface="DejaVu Sans"/>
-                <a:cs typeface="DejaVu Sans"/>
-              </a:defRPr>
-            </a:defPPr>
-            <a:lvl1pPr>
-              <a:defRPr sz="1200" b="0">
-                <a:solidFill>
-                  <a:srgbClr val="456278"/>
-                </a:solidFill>
-                <a:latin typeface="DejaVu Sans"/>
-                <a:ea typeface="DejaVu Sans"/>
-                <a:cs typeface="DejaVu Sans"/>
-              </a:defRPr>
-            </a:lvl1pPr>
-            <a:lvl2pPr>
-              <a:defRPr sz="1200" b="0">
-                <a:solidFill>
-                  <a:srgbClr val="456278"/>
-                </a:solidFill>
-                <a:latin typeface="DejaVu Sans"/>
-                <a:ea typeface="DejaVu Sans"/>
-                <a:cs typeface="DejaVu Sans"/>
-              </a:defRPr>
-            </a:lvl2pPr>
-            <a:lvl3pPr>
-              <a:defRPr sz="1200" b="0">
-                <a:solidFill>
-                  <a:srgbClr val="456278"/>
-                </a:solidFill>
-                <a:latin typeface="DejaVu Sans"/>
-                <a:ea typeface="DejaVu Sans"/>
-                <a:cs typeface="DejaVu Sans"/>
-              </a:defRPr>
-            </a:lvl3pPr>
-            <a:lvl4pPr>
-              <a:defRPr sz="1200" b="0">
-                <a:solidFill>
-                  <a:srgbClr val="456278"/>
-                </a:solidFill>
-                <a:latin typeface="DejaVu Sans"/>
-                <a:ea typeface="DejaVu Sans"/>
-                <a:cs typeface="DejaVu Sans"/>
-              </a:defRPr>
-            </a:lvl4pPr>
-            <a:lvl5pPr>
-              <a:defRPr sz="1200" b="0">
-                <a:solidFill>
-                  <a:srgbClr val="456278"/>
-                </a:solidFill>
-                <a:latin typeface="DejaVu Sans"/>
-                <a:ea typeface="DejaVu Sans"/>
-                <a:cs typeface="DejaVu Sans"/>
-              </a:defRPr>
-            </a:lvl5pPr>
-            <a:lvl6pPr>
-              <a:defRPr sz="1200" b="0">
-                <a:solidFill>
-                  <a:srgbClr val="456278"/>
-                </a:solidFill>
-                <a:latin typeface="DejaVu Sans"/>
-                <a:ea typeface="DejaVu Sans"/>
-                <a:cs typeface="DejaVu Sans"/>
-              </a:defRPr>
-            </a:lvl6pPr>
-            <a:lvl7pPr>
-              <a:defRPr sz="1200" b="0">
-                <a:solidFill>
-                  <a:srgbClr val="456278"/>
-                </a:solidFill>
-                <a:latin typeface="DejaVu Sans"/>
-                <a:ea typeface="DejaVu Sans"/>
-                <a:cs typeface="DejaVu Sans"/>
-              </a:defRPr>
-            </a:lvl7pPr>
-            <a:lvl8pPr>
-              <a:defRPr sz="1200" b="0">
-                <a:solidFill>
-                  <a:srgbClr val="456278"/>
-                </a:solidFill>
-                <a:latin typeface="DejaVu Sans"/>
-                <a:ea typeface="DejaVu Sans"/>
-                <a:cs typeface="DejaVu Sans"/>
-              </a:defRPr>
-            </a:lvl8pPr>
-            <a:lvl9pPr>
-              <a:defRPr sz="1200" b="0">
-                <a:solidFill>
-                  <a:srgbClr val="456278"/>
-                </a:solidFill>
-                <a:latin typeface="DejaVu Sans"/>
-                <a:ea typeface="DejaVu Sans"/>
-                <a:cs typeface="DejaVu Sans"/>
-              </a:defRPr>
-            </a:lvl9pPr>
-          </a:lstStyle>
-          <a:p xmlns:a="http://schemas.openxmlformats.org/drawingml/2006/main">
-            <a:pPr>
-              <a:defRPr sz="1200" b="0">
-                <a:solidFill>
-                  <a:srgbClr val="456278"/>
-                </a:solidFill>
-                <a:latin typeface="DejaVu Sans"/>
-                <a:ea typeface="DejaVu Sans"/>
-                <a:cs typeface="DejaVu Sans"/>
-              </a:defRPr>
-            </a:pPr>
-            <a:r>
-              <a:rPr sz="1200" b="0">
-                <a:solidFill>
-                  <a:srgbClr val="456278"/>
-                </a:solidFill>
-                <a:latin typeface="DejaVu Sans"/>
-                <a:ea typeface="DejaVu Sans"/>
-                <a:cs typeface="DejaVu Sans"/>
-              </a:rPr>
-              <a:t>Financiera Pacífico</a:t>
-            </a:r>
-          </a:p>
-        </p:txBody>
-      </p:sp>
-      <p:graphicFrame>
-        <p:nvGraphicFramePr>
-          <p:cNvPr id="5" name="">
-            <a:extLst xmlns:a="http://schemas.openxmlformats.org/drawingml/2006/main">
-              <a:ext uri="{FF2B5EF4-FFF2-40B4-BE49-F238E27FC236}">
-                <a16:creationId xmlns:a16="http://schemas.microsoft.com/office/drawing/2014/main" id="{46747573-EBF6-48F7-BAC1-76EC6CAB4886}"/>
-              </a:ext>
-            </a:extLst>
-          </p:cNvPr>
-          <p:cNvGraphicFramePr/>
-          <p:nvPr/>
-        </p:nvGraphicFramePr>
-        <p:xfrm>
-          <a:off xmlns:a="http://schemas.openxmlformats.org/drawingml/2006/main" x="609600" y="2667000"/>
-          <a:ext xmlns:a="http://schemas.openxmlformats.org/drawingml/2006/main" cx="10972800" cy="2476500"/>
-        </p:xfrm>
-        <a:graphic xmlns:a="http://schemas.openxmlformats.org/drawingml/2006/main">
-          <a:graphicData uri="http://schemas.openxmlformats.org/drawingml/2006/table">
-            <a:tbl>
-              <a:tblPr/>
-              <a:tblGrid>
-                <a:gridCol w="7810500"/>
-                <a:gridCol w="3162300"/>
-              </a:tblGrid>
-              <a:tr h="825500">
-                <a:tc>
-                  <a:txBody>
-                    <a:bodyPr/>
-                    <a:lstStyle/>
-                    <a:p>
-                      <a:r>
-                        <a:rPr sz="1950" b="1">
-                          <a:solidFill>
-                            <a:srgbClr val="FFFFFF"/>
-                          </a:solidFill>
-                          <a:latin typeface="DejaVu Sans"/>
-                          <a:ea typeface="DejaVu Sans"/>
-                          <a:cs typeface="DejaVu Sans"/>
-                        </a:rPr>
-                        <a:t>Intento del colaborador</a:t>
-                      </a:r>
-                    </a:p>
-                  </a:txBody>
-                  <a:tcPr marL="91440" marR="91440" marT="45720" marB="45720">
-                    <a:lnL w="9525">
-                      <a:solidFill>
-                        <a:srgbClr val="C6D7D7"/>
-                      </a:solidFill>
-                      <a:prstDash val="solid"/>
-                    </a:lnL>
-                    <a:lnR w="9525">
-                      <a:solidFill>
-                        <a:srgbClr val="C6D7D7"/>
-                      </a:solidFill>
-                      <a:prstDash val="solid"/>
-                    </a:lnR>
-                    <a:lnT w="9525">
-                      <a:solidFill>
-                        <a:srgbClr val="C6D7D7"/>
-                      </a:solidFill>
-                      <a:prstDash val="solid"/>
-                    </a:lnT>
-                    <a:lnB w="9525">
-                      <a:solidFill>
-                        <a:srgbClr val="C6D7D7"/>
-                      </a:solidFill>
-                      <a:prstDash val="solid"/>
-                    </a:lnB>
-                    <a:solidFill>
-                      <a:srgbClr val="112A3A"/>
-                    </a:solidFill>
-                  </a:tcPr>
-                </a:tc>
-                <a:tc>
-                  <a:txBody>
-                    <a:bodyPr/>
-                    <a:lstStyle/>
-                    <a:p>
-                      <a:r>
-                        <a:rPr sz="1950" b="1">
-                          <a:solidFill>
-                            <a:srgbClr val="FFFFFF"/>
-                          </a:solidFill>
-                          <a:latin typeface="DejaVu Sans"/>
-                          <a:ea typeface="DejaVu Sans"/>
-                          <a:cs typeface="DejaVu Sans"/>
-                        </a:rPr>
-                        <a:t>Resultado</a:t>
-                      </a:r>
-                    </a:p>
-                  </a:txBody>
-                  <a:tcPr marL="91440" marR="91440" marT="45720" marB="45720">
-                    <a:lnR w="9525">
-                      <a:solidFill>
-                        <a:srgbClr val="C6D7D7"/>
-                      </a:solidFill>
-                      <a:prstDash val="solid"/>
-                    </a:lnR>
-                    <a:lnT w="9525">
-                      <a:solidFill>
-                        <a:srgbClr val="C6D7D7"/>
-                      </a:solidFill>
-                      <a:prstDash val="solid"/>
-                    </a:lnT>
-                    <a:lnB w="9525">
-                      <a:solidFill>
-                        <a:srgbClr val="C6D7D7"/>
-                      </a:solidFill>
-                      <a:prstDash val="solid"/>
-                    </a:lnB>
-                    <a:solidFill>
-                      <a:srgbClr val="112A3A"/>
-                    </a:solidFill>
-                  </a:tcPr>
-                </a:tc>
-              </a:tr>
-              <a:tr h="825500">
-                <a:tc>
-                  <a:txBody>
-                    <a:bodyPr/>
-                    <a:lstStyle/>
-                    <a:p>
-                      <a:r>
-                        <a:rPr sz="1950" b="0">
-                          <a:solidFill>
-                            <a:srgbClr val="112A3A"/>
-                          </a:solidFill>
-                          <a:latin typeface="DejaVu Sans"/>
-                          <a:ea typeface="DejaVu Sans"/>
-                          <a:cs typeface="DejaVu Sans"/>
-                        </a:rPr>
-                        <a:t>Abrir la aplicación por HTTPS</a:t>
-                      </a:r>
-                    </a:p>
-                  </a:txBody>
-                  <a:tcPr marL="91440" marR="91440" marT="45720" marB="45720">
-                    <a:lnL w="9525">
-                      <a:solidFill>
-                        <a:srgbClr val="C6D7D7"/>
-                      </a:solidFill>
-                      <a:prstDash val="solid"/>
-                    </a:lnL>
-                    <a:lnR w="9525">
-                      <a:solidFill>
-                        <a:srgbClr val="C6D7D7"/>
-                      </a:solidFill>
-                      <a:prstDash val="solid"/>
-                    </a:lnR>
-                    <a:lnB w="9525">
-                      <a:solidFill>
-                        <a:srgbClr val="C6D7D7"/>
-                      </a:solidFill>
-                      <a:prstDash val="solid"/>
-                    </a:lnB>
-                    <a:solidFill>
-                      <a:srgbClr val="EDF4F2"/>
-                    </a:solidFill>
-                  </a:tcPr>
-                </a:tc>
-                <a:tc>
-                  <a:txBody>
-                    <a:bodyPr/>
-                    <a:lstStyle/>
-                    <a:p>
-                      <a:r>
-                        <a:rPr sz="1950" b="0">
-                          <a:solidFill>
-                            <a:srgbClr val="112A3A"/>
-                          </a:solidFill>
-                          <a:latin typeface="DejaVu Sans"/>
-                          <a:ea typeface="DejaVu Sans"/>
-                          <a:cs typeface="DejaVu Sans"/>
-                        </a:rPr>
-                        <a:t>Permitido</a:t>
-                      </a:r>
-                    </a:p>
-                  </a:txBody>
-                  <a:tcPr marL="91440" marR="91440" marT="45720" marB="45720">
-                    <a:lnR w="9525">
-                      <a:solidFill>
-                        <a:srgbClr val="C6D7D7"/>
-                      </a:solidFill>
-                      <a:prstDash val="solid"/>
-                    </a:lnR>
-                    <a:lnB w="9525">
-                      <a:solidFill>
-                        <a:srgbClr val="C6D7D7"/>
-                      </a:solidFill>
-                      <a:prstDash val="solid"/>
-                    </a:lnB>
-                    <a:solidFill>
-                      <a:srgbClr val="EDF4F2"/>
-                    </a:solidFill>
-                  </a:tcPr>
-                </a:tc>
-              </a:tr>
-              <a:tr h="825500">
-                <a:tc>
-                  <a:txBody>
-                    <a:bodyPr/>
-                    <a:lstStyle/>
-                    <a:p>
-                      <a:r>
-                        <a:rPr sz="1950" b="0">
-                          <a:solidFill>
-                            <a:srgbClr val="112A3A"/>
-                          </a:solidFill>
-                          <a:latin typeface="DejaVu Sans"/>
-                          <a:ea typeface="DejaVu Sans"/>
-                          <a:cs typeface="DejaVu Sans"/>
-                        </a:rPr>
-                        <a:t>Entrar directamente a la base de datos</a:t>
-                      </a:r>
-                    </a:p>
-                  </a:txBody>
-                  <a:tcPr marL="91440" marR="91440" marT="45720" marB="45720">
-                    <a:lnL w="9525">
-                      <a:solidFill>
-                        <a:srgbClr val="C6D7D7"/>
-                      </a:solidFill>
-                      <a:prstDash val="solid"/>
-                    </a:lnL>
-                    <a:lnR w="9525">
-                      <a:solidFill>
-                        <a:srgbClr val="C6D7D7"/>
-                      </a:solidFill>
-                      <a:prstDash val="solid"/>
-                    </a:lnR>
-                    <a:lnB w="9525">
-                      <a:solidFill>
-                        <a:srgbClr val="C6D7D7"/>
-                      </a:solidFill>
-                      <a:prstDash val="solid"/>
-                    </a:lnB>
-                    <a:solidFill>
-                      <a:srgbClr val="FFFFFF"/>
-                    </a:solidFill>
-                  </a:tcPr>
-                </a:tc>
-                <a:tc>
-                  <a:txBody>
-                    <a:bodyPr/>
-                    <a:lstStyle/>
-                    <a:p>
-                      <a:r>
-                        <a:rPr sz="1950" b="0">
-                          <a:solidFill>
-                            <a:srgbClr val="112A3A"/>
-                          </a:solidFill>
-                          <a:latin typeface="DejaVu Sans"/>
-                          <a:ea typeface="DejaVu Sans"/>
-                          <a:cs typeface="DejaVu Sans"/>
-                        </a:rPr>
-                        <a:t>Bloqueado</a:t>
-                      </a:r>
-                    </a:p>
-                  </a:txBody>
-                  <a:tcPr marL="91440" marR="91440" marT="45720" marB="45720">
-                    <a:lnR w="9525">
-                      <a:solidFill>
-                        <a:srgbClr val="C6D7D7"/>
-                      </a:solidFill>
-                      <a:prstDash val="solid"/>
-                    </a:lnR>
-                    <a:lnB w="9525">
-                      <a:solidFill>
-                        <a:srgbClr val="C6D7D7"/>
-                      </a:solidFill>
-                      <a:prstDash val="solid"/>
-                    </a:lnB>
-                    <a:solidFill>
-                      <a:srgbClr val="FFFFFF"/>
-                    </a:solidFill>
-                  </a:tcPr>
-                </a:tc>
-              </a:tr>
-            </a:tbl>
-          </a:graphicData>
-        </a:graphic>
-      </p:graphicFrame>
-      <p:sp>
-        <p:nvSpPr>
-          <p:cNvPr id="6" name="policy">
-            <a:extLst xmlns:a="http://schemas.openxmlformats.org/drawingml/2006/main">
-              <a:ext uri="{FF2B5EF4-FFF2-40B4-BE49-F238E27FC236}">
-                <a16:creationId xmlns:a16="http://schemas.microsoft.com/office/drawing/2014/main" id="{A99C9C40-B455-47B7-85FE-DE9ECC48C8F5}"/>
-              </a:ext>
-            </a:extLst>
-          </p:cNvPr>
-          <p:cNvSpPr>
-            <a:spLocks xmlns:a="http://schemas.openxmlformats.org/drawingml/2006/main" noGrp="1"/>
-          </p:cNvSpPr>
-          <p:nvPr/>
-        </p:nvSpPr>
-        <p:spPr>
-          <a:xfrm xmlns:a="http://schemas.openxmlformats.org/drawingml/2006/main">
-            <a:off x="609600" y="5638800"/>
-            <a:ext cx="10953750" cy="619125"/>
-          </a:xfrm>
-          <a:prstGeom xmlns:a="http://schemas.openxmlformats.org/drawingml/2006/main" prst="rect">
-            <a:avLst/>
-          </a:prstGeom>
-          <a:noFill xmlns:a="http://schemas.openxmlformats.org/drawingml/2006/main"/>
-          <a:ln xmlns:a="http://schemas.openxmlformats.org/drawingml/2006/main" w="0">
-            <a:noFill/>
-            <a:prstDash val="solid"/>
-          </a:ln>
-        </p:spPr>
-        <p:txBody>
-          <a:bodyPr xmlns:a="http://schemas.openxmlformats.org/drawingml/2006/main"/>
-          <a:lstStyle xmlns:a="http://schemas.openxmlformats.org/drawingml/2006/main">
-            <a:defPPr>
-              <a:defRPr sz="2100" b="1">
-                <a:solidFill>
-                  <a:srgbClr val="00888A"/>
-                </a:solidFill>
-                <a:latin typeface="DejaVu Sans"/>
-                <a:ea typeface="DejaVu Sans"/>
-                <a:cs typeface="DejaVu Sans"/>
-              </a:defRPr>
-            </a:defPPr>
-            <a:lvl1pPr>
-              <a:defRPr sz="2100" b="1">
-                <a:solidFill>
-                  <a:srgbClr val="00888A"/>
-                </a:solidFill>
-                <a:latin typeface="DejaVu Sans"/>
-                <a:ea typeface="DejaVu Sans"/>
-                <a:cs typeface="DejaVu Sans"/>
-              </a:defRPr>
-            </a:lvl1pPr>
-            <a:lvl2pPr>
-              <a:defRPr sz="2100" b="1">
-                <a:solidFill>
-                  <a:srgbClr val="00888A"/>
-                </a:solidFill>
-                <a:latin typeface="DejaVu Sans"/>
-                <a:ea typeface="DejaVu Sans"/>
-                <a:cs typeface="DejaVu Sans"/>
-              </a:defRPr>
-            </a:lvl2pPr>
-            <a:lvl3pPr>
-              <a:defRPr sz="2100" b="1">
-                <a:solidFill>
-                  <a:srgbClr val="00888A"/>
-                </a:solidFill>
-                <a:latin typeface="DejaVu Sans"/>
-                <a:ea typeface="DejaVu Sans"/>
-                <a:cs typeface="DejaVu Sans"/>
-              </a:defRPr>
-            </a:lvl3pPr>
-            <a:lvl4pPr>
-              <a:defRPr sz="2100" b="1">
-                <a:solidFill>
-                  <a:srgbClr val="00888A"/>
-                </a:solidFill>
-                <a:latin typeface="DejaVu Sans"/>
-                <a:ea typeface="DejaVu Sans"/>
-                <a:cs typeface="DejaVu Sans"/>
-              </a:defRPr>
-            </a:lvl4pPr>
-            <a:lvl5pPr>
-              <a:defRPr sz="2100" b="1">
-                <a:solidFill>
-                  <a:srgbClr val="00888A"/>
-                </a:solidFill>
-                <a:latin typeface="DejaVu Sans"/>
-                <a:ea typeface="DejaVu Sans"/>
-                <a:cs typeface="DejaVu Sans"/>
-              </a:defRPr>
-            </a:lvl5pPr>
-            <a:lvl6pPr>
-              <a:defRPr sz="2100" b="1">
-                <a:solidFill>
-                  <a:srgbClr val="00888A"/>
-                </a:solidFill>
-                <a:latin typeface="DejaVu Sans"/>
-                <a:ea typeface="DejaVu Sans"/>
-                <a:cs typeface="DejaVu Sans"/>
-              </a:defRPr>
-            </a:lvl6pPr>
-            <a:lvl7pPr>
-              <a:defRPr sz="2100" b="1">
-                <a:solidFill>
-                  <a:srgbClr val="00888A"/>
-                </a:solidFill>
-                <a:latin typeface="DejaVu Sans"/>
-                <a:ea typeface="DejaVu Sans"/>
-                <a:cs typeface="DejaVu Sans"/>
-              </a:defRPr>
-            </a:lvl7pPr>
-            <a:lvl8pPr>
-              <a:defRPr sz="2100" b="1">
-                <a:solidFill>
-                  <a:srgbClr val="00888A"/>
-                </a:solidFill>
-                <a:latin typeface="DejaVu Sans"/>
-                <a:ea typeface="DejaVu Sans"/>
-                <a:cs typeface="DejaVu Sans"/>
-              </a:defRPr>
-            </a:lvl8pPr>
-            <a:lvl9pPr>
-              <a:defRPr sz="2100" b="1">
-                <a:solidFill>
-                  <a:srgbClr val="00888A"/>
-                </a:solidFill>
-                <a:latin typeface="DejaVu Sans"/>
-                <a:ea typeface="DejaVu Sans"/>
-                <a:cs typeface="DejaVu Sans"/>
-              </a:defRPr>
-            </a:lvl9pPr>
-          </a:lstStyle>
-          <a:p xmlns:a="http://schemas.openxmlformats.org/drawingml/2006/main">
-            <a:pPr>
-              <a:defRPr sz="2100" b="1">
-                <a:solidFill>
-                  <a:srgbClr val="00888A"/>
-                </a:solidFill>
-                <a:latin typeface="DejaVu Sans"/>
-                <a:ea typeface="DejaVu Sans"/>
-                <a:cs typeface="DejaVu Sans"/>
-              </a:defRPr>
-            </a:pPr>
-            <a:r>
-              <a:rPr sz="2100" b="1">
-                <a:solidFill>
-                  <a:srgbClr val="00888A"/>
-                </a:solidFill>
-                <a:latin typeface="DejaVu Sans"/>
-                <a:ea typeface="DejaVu Sans"/>
-                <a:cs typeface="DejaVu Sans"/>
-              </a:rPr>
-              <a:t>Los permisos se mantienen al cambiar de enlace.</a:t>
-            </a:r>
-          </a:p>
-        </p:txBody>
-      </p:sp>
-    </p:spTree>
-    <p:extLst>
-      <p:ext uri="{BB962C8B-B14F-4D97-AF65-F5344CB8AC3E}">
-        <p14:creationId xmlns:p14="http://schemas.microsoft.com/office/powerpoint/2010/main" val="1775693859"/>
-      </p:ext>
-    </p:extLst>
-  </p:cSld>
-</p:sld>
-</file>
-
-<file path=ppt/slides/slide6.xml><?xml version="1.0" encoding="utf-8"?>
-<p:sld xmlns:p="http://schemas.openxmlformats.org/presentationml/2006/main">
-  <p:cSld>
-    <p:bg>
-      <p:bgPr>
-        <a:solidFill xmlns:a="http://schemas.openxmlformats.org/drawingml/2006/main">
-          <a:srgbClr val="F5F7F5"/>
-        </a:solidFill>
-      </p:bgPr>
-    </p:bg>
-    <p:spTree>
-      <p:nvGrpSpPr>
-        <p:cNvPr id="1" name=""/>
-        <p:cNvGrpSpPr/>
-        <p:nvPr/>
-      </p:nvGrpSpPr>
-      <p:grpSpPr>
-        <a:xfrm xmlns:a="http://schemas.openxmlformats.org/drawingml/2006/main"/>
-      </p:grpSpPr>
-      <p:sp>
-        <p:nvSpPr>
-          <p:cNvPr id="8" name="title">
-            <a:extLst xmlns:a="http://schemas.openxmlformats.org/drawingml/2006/main">
-              <a:ext uri="{FF2B5EF4-FFF2-40B4-BE49-F238E27FC236}">
-                <a16:creationId xmlns:a16="http://schemas.microsoft.com/office/drawing/2014/main" id="{58B1FF9A-1281-41FF-A98D-DD7ACAA9B12D}"/>
-              </a:ext>
-            </a:extLst>
-          </p:cNvPr>
-          <p:cNvSpPr>
-            <a:spLocks xmlns:a="http://schemas.openxmlformats.org/drawingml/2006/main" noGrp="1"/>
-          </p:cNvSpPr>
-          <p:nvPr/>
-        </p:nvSpPr>
-        <p:spPr>
-          <a:xfrm xmlns:a="http://schemas.openxmlformats.org/drawingml/2006/main">
-            <a:off x="609600" y="381000"/>
-            <a:ext cx="10972800" cy="952500"/>
-          </a:xfrm>
-          <a:prstGeom xmlns:a="http://schemas.openxmlformats.org/drawingml/2006/main" prst="rect">
-            <a:avLst/>
-          </a:prstGeom>
-          <a:noFill xmlns:a="http://schemas.openxmlformats.org/drawingml/2006/main"/>
-          <a:ln xmlns:a="http://schemas.openxmlformats.org/drawingml/2006/main" w="0">
-            <a:noFill/>
-            <a:prstDash val="solid"/>
-          </a:ln>
-        </p:spPr>
-        <p:txBody>
-          <a:bodyPr xmlns:a="http://schemas.openxmlformats.org/drawingml/2006/main"/>
-          <a:lstStyle xmlns:a="http://schemas.openxmlformats.org/drawingml/2006/main">
-            <a:defPPr>
-              <a:defRPr sz="3300" b="1">
-                <a:solidFill>
-                  <a:srgbClr val="112A3A"/>
-                </a:solidFill>
-                <a:latin typeface="DejaVu Sans"/>
-                <a:ea typeface="DejaVu Sans"/>
-                <a:cs typeface="DejaVu Sans"/>
-              </a:defRPr>
-            </a:defPPr>
-            <a:lvl1pPr>
-              <a:defRPr sz="3300" b="1">
-                <a:solidFill>
-                  <a:srgbClr val="112A3A"/>
-                </a:solidFill>
-                <a:latin typeface="DejaVu Sans"/>
-                <a:ea typeface="DejaVu Sans"/>
-                <a:cs typeface="DejaVu Sans"/>
-              </a:defRPr>
-            </a:lvl1pPr>
-            <a:lvl2pPr>
-              <a:defRPr sz="3300" b="1">
-                <a:solidFill>
-                  <a:srgbClr val="112A3A"/>
-                </a:solidFill>
-                <a:latin typeface="DejaVu Sans"/>
-                <a:ea typeface="DejaVu Sans"/>
-                <a:cs typeface="DejaVu Sans"/>
-              </a:defRPr>
-            </a:lvl2pPr>
-            <a:lvl3pPr>
-              <a:defRPr sz="3300" b="1">
-                <a:solidFill>
-                  <a:srgbClr val="112A3A"/>
-                </a:solidFill>
-                <a:latin typeface="DejaVu Sans"/>
-                <a:ea typeface="DejaVu Sans"/>
-                <a:cs typeface="DejaVu Sans"/>
-              </a:defRPr>
-            </a:lvl3pPr>
-            <a:lvl4pPr>
-              <a:defRPr sz="3300" b="1">
-                <a:solidFill>
-                  <a:srgbClr val="112A3A"/>
-                </a:solidFill>
-                <a:latin typeface="DejaVu Sans"/>
-                <a:ea typeface="DejaVu Sans"/>
-                <a:cs typeface="DejaVu Sans"/>
-              </a:defRPr>
-            </a:lvl4pPr>
-            <a:lvl5pPr>
-              <a:defRPr sz="3300" b="1">
-                <a:solidFill>
-                  <a:srgbClr val="112A3A"/>
-                </a:solidFill>
-                <a:latin typeface="DejaVu Sans"/>
-                <a:ea typeface="DejaVu Sans"/>
-                <a:cs typeface="DejaVu Sans"/>
-              </a:defRPr>
-            </a:lvl5pPr>
-            <a:lvl6pPr>
-              <a:defRPr sz="3300" b="1">
-                <a:solidFill>
-                  <a:srgbClr val="112A3A"/>
-                </a:solidFill>
-                <a:latin typeface="DejaVu Sans"/>
-                <a:ea typeface="DejaVu Sans"/>
-                <a:cs typeface="DejaVu Sans"/>
-              </a:defRPr>
-            </a:lvl6pPr>
-            <a:lvl7pPr>
-              <a:defRPr sz="3300" b="1">
-                <a:solidFill>
-                  <a:srgbClr val="112A3A"/>
-                </a:solidFill>
-                <a:latin typeface="DejaVu Sans"/>
-                <a:ea typeface="DejaVu Sans"/>
-                <a:cs typeface="DejaVu Sans"/>
-              </a:defRPr>
-            </a:lvl7pPr>
-            <a:lvl8pPr>
-              <a:defRPr sz="3300" b="1">
-                <a:solidFill>
-                  <a:srgbClr val="112A3A"/>
-                </a:solidFill>
-                <a:latin typeface="DejaVu Sans"/>
-                <a:ea typeface="DejaVu Sans"/>
-                <a:cs typeface="DejaVu Sans"/>
-              </a:defRPr>
-            </a:lvl8pPr>
-            <a:lvl9pPr>
-              <a:defRPr sz="3300" b="1">
-                <a:solidFill>
-                  <a:srgbClr val="112A3A"/>
-                </a:solidFill>
-                <a:latin typeface="DejaVu Sans"/>
-                <a:ea typeface="DejaVu Sans"/>
-                <a:cs typeface="DejaVu Sans"/>
-              </a:defRPr>
-            </a:lvl9pPr>
-          </a:lstStyle>
-          <a:p xmlns:a="http://schemas.openxmlformats.org/drawingml/2006/main">
-            <a:pPr>
-              <a:defRPr sz="3300" b="1">
-                <a:solidFill>
-                  <a:srgbClr val="112A3A"/>
-                </a:solidFill>
-                <a:latin typeface="DejaVu Sans"/>
-                <a:ea typeface="DejaVu Sans"/>
-                <a:cs typeface="DejaVu Sans"/>
-              </a:defRPr>
-            </a:pPr>
-            <a:r>
-              <a:rPr sz="3300" b="1">
-                <a:solidFill>
-                  <a:srgbClr val="112A3A"/>
-                </a:solidFill>
-                <a:latin typeface="DejaVu Sans"/>
-                <a:ea typeface="DejaVu Sans"/>
-                <a:cs typeface="DejaVu Sans"/>
-              </a:rPr>
-              <a:t>Recuperación de la aplicación</a:t>
-            </a:r>
-          </a:p>
-        </p:txBody>
-      </p:sp>
-      <p:sp>
-        <p:nvSpPr>
-          <p:cNvPr id="2" name="message">
-            <a:extLst xmlns:a="http://schemas.openxmlformats.org/drawingml/2006/main">
-              <a:ext uri="{FF2B5EF4-FFF2-40B4-BE49-F238E27FC236}">
-                <a16:creationId xmlns:a16="http://schemas.microsoft.com/office/drawing/2014/main" id="{4F511003-81DE-4290-8395-1DDB2908BEC7}"/>
-              </a:ext>
-            </a:extLst>
-          </p:cNvPr>
-          <p:cNvSpPr>
-            <a:spLocks xmlns:a="http://schemas.openxmlformats.org/drawingml/2006/main" noGrp="1"/>
-          </p:cNvSpPr>
-          <p:nvPr/>
-        </p:nvSpPr>
-        <p:spPr>
-          <a:xfrm xmlns:a="http://schemas.openxmlformats.org/drawingml/2006/main">
-            <a:off x="609600" y="1524000"/>
-            <a:ext cx="10972800" cy="666750"/>
-          </a:xfrm>
-          <a:prstGeom xmlns:a="http://schemas.openxmlformats.org/drawingml/2006/main" prst="rect">
-            <a:avLst/>
-          </a:prstGeom>
-          <a:noFill xmlns:a="http://schemas.openxmlformats.org/drawingml/2006/main"/>
-          <a:ln xmlns:a="http://schemas.openxmlformats.org/drawingml/2006/main" w="0">
-            <a:noFill/>
-            <a:prstDash val="solid"/>
-          </a:ln>
-        </p:spPr>
-        <p:txBody>
-          <a:bodyPr xmlns:a="http://schemas.openxmlformats.org/drawingml/2006/main"/>
-          <a:lstStyle xmlns:a="http://schemas.openxmlformats.org/drawingml/2006/main">
-            <a:defPPr>
-              <a:defRPr sz="2025" b="0">
-                <a:solidFill>
-                  <a:srgbClr val="31515E"/>
-                </a:solidFill>
-                <a:latin typeface="DejaVu Sans"/>
-                <a:ea typeface="DejaVu Sans"/>
-                <a:cs typeface="DejaVu Sans"/>
-              </a:defRPr>
-            </a:defPPr>
-            <a:lvl1pPr>
-              <a:defRPr sz="2025" b="0">
-                <a:solidFill>
-                  <a:srgbClr val="31515E"/>
-                </a:solidFill>
-                <a:latin typeface="DejaVu Sans"/>
-                <a:ea typeface="DejaVu Sans"/>
-                <a:cs typeface="DejaVu Sans"/>
-              </a:defRPr>
-            </a:lvl1pPr>
-            <a:lvl2pPr>
-              <a:defRPr sz="2025" b="0">
-                <a:solidFill>
-                  <a:srgbClr val="31515E"/>
-                </a:solidFill>
-                <a:latin typeface="DejaVu Sans"/>
-                <a:ea typeface="DejaVu Sans"/>
-                <a:cs typeface="DejaVu Sans"/>
-              </a:defRPr>
-            </a:lvl2pPr>
-            <a:lvl3pPr>
-              <a:defRPr sz="2025" b="0">
-                <a:solidFill>
-                  <a:srgbClr val="31515E"/>
-                </a:solidFill>
-                <a:latin typeface="DejaVu Sans"/>
-                <a:ea typeface="DejaVu Sans"/>
-                <a:cs typeface="DejaVu Sans"/>
-              </a:defRPr>
-            </a:lvl3pPr>
-            <a:lvl4pPr>
-              <a:defRPr sz="2025" b="0">
-                <a:solidFill>
-                  <a:srgbClr val="31515E"/>
-                </a:solidFill>
-                <a:latin typeface="DejaVu Sans"/>
-                <a:ea typeface="DejaVu Sans"/>
-                <a:cs typeface="DejaVu Sans"/>
-              </a:defRPr>
-            </a:lvl4pPr>
-            <a:lvl5pPr>
-              <a:defRPr sz="2025" b="0">
-                <a:solidFill>
-                  <a:srgbClr val="31515E"/>
-                </a:solidFill>
-                <a:latin typeface="DejaVu Sans"/>
-                <a:ea typeface="DejaVu Sans"/>
-                <a:cs typeface="DejaVu Sans"/>
-              </a:defRPr>
-            </a:lvl5pPr>
-            <a:lvl6pPr>
-              <a:defRPr sz="2025" b="0">
-                <a:solidFill>
-                  <a:srgbClr val="31515E"/>
-                </a:solidFill>
-                <a:latin typeface="DejaVu Sans"/>
-                <a:ea typeface="DejaVu Sans"/>
-                <a:cs typeface="DejaVu Sans"/>
-              </a:defRPr>
-            </a:lvl6pPr>
-            <a:lvl7pPr>
-              <a:defRPr sz="2025" b="0">
-                <a:solidFill>
-                  <a:srgbClr val="31515E"/>
-                </a:solidFill>
-                <a:latin typeface="DejaVu Sans"/>
-                <a:ea typeface="DejaVu Sans"/>
-                <a:cs typeface="DejaVu Sans"/>
-              </a:defRPr>
-            </a:lvl7pPr>
-            <a:lvl8pPr>
-              <a:defRPr sz="2025" b="0">
-                <a:solidFill>
-                  <a:srgbClr val="31515E"/>
-                </a:solidFill>
-                <a:latin typeface="DejaVu Sans"/>
-                <a:ea typeface="DejaVu Sans"/>
-                <a:cs typeface="DejaVu Sans"/>
-              </a:defRPr>
-            </a:lvl8pPr>
-            <a:lvl9pPr>
-              <a:defRPr sz="2025" b="0">
-                <a:solidFill>
-                  <a:srgbClr val="31515E"/>
-                </a:solidFill>
-                <a:latin typeface="DejaVu Sans"/>
-                <a:ea typeface="DejaVu Sans"/>
-                <a:cs typeface="DejaVu Sans"/>
-              </a:defRPr>
-            </a:lvl9pPr>
-          </a:lstStyle>
-          <a:p xmlns:a="http://schemas.openxmlformats.org/drawingml/2006/main">
-            <a:pPr>
-              <a:defRPr sz="2025" b="0">
-                <a:solidFill>
-                  <a:srgbClr val="31515E"/>
-                </a:solidFill>
-                <a:latin typeface="DejaVu Sans"/>
-                <a:ea typeface="DejaVu Sans"/>
-                <a:cs typeface="DejaVu Sans"/>
-              </a:defRPr>
-            </a:pPr>
-            <a:r>
-              <a:rPr sz="2025" b="0">
-                <a:solidFill>
-                  <a:srgbClr val="31515E"/>
-                </a:solidFill>
-                <a:latin typeface="DejaVu Sans"/>
-                <a:ea typeface="DejaVu Sans"/>
-                <a:cs typeface="DejaVu Sans"/>
-              </a:rPr>
-              <a:t>El servidor alternativo también necesita datos que se puedan recuperar.</a:t>
-            </a:r>
-          </a:p>
-        </p:txBody>
-      </p:sp>
-      <p:sp>
-        <p:nvSpPr>
-          <p:cNvPr id="3" name="number">
-            <a:extLst xmlns:a="http://schemas.openxmlformats.org/drawingml/2006/main">
-              <a:ext uri="{FF2B5EF4-FFF2-40B4-BE49-F238E27FC236}">
-                <a16:creationId xmlns:a16="http://schemas.microsoft.com/office/drawing/2014/main" id="{063DABFE-684F-449E-9F6E-A097424978A7}"/>
-              </a:ext>
-            </a:extLst>
-          </p:cNvPr>
-          <p:cNvSpPr>
-            <a:spLocks xmlns:a="http://schemas.openxmlformats.org/drawingml/2006/main" noGrp="1"/>
-          </p:cNvSpPr>
-          <p:nvPr/>
-        </p:nvSpPr>
-        <p:spPr>
-          <a:xfrm xmlns:a="http://schemas.openxmlformats.org/drawingml/2006/main">
-            <a:off x="10477500" y="6448425"/>
-            <a:ext cx="1123950" cy="238125"/>
-          </a:xfrm>
-          <a:prstGeom xmlns:a="http://schemas.openxmlformats.org/drawingml/2006/main" prst="rect">
-            <a:avLst/>
-          </a:prstGeom>
-          <a:noFill xmlns:a="http://schemas.openxmlformats.org/drawingml/2006/main"/>
-          <a:ln xmlns:a="http://schemas.openxmlformats.org/drawingml/2006/main" w="0">
-            <a:noFill/>
-            <a:prstDash val="solid"/>
-          </a:ln>
-        </p:spPr>
-        <p:txBody>
-          <a:bodyPr xmlns:a="http://schemas.openxmlformats.org/drawingml/2006/main"/>
-          <a:lstStyle xmlns:a="http://schemas.openxmlformats.org/drawingml/2006/main">
-            <a:defPPr>
-              <a:defRPr sz="1275" b="0">
-                <a:solidFill>
-                  <a:srgbClr val="456278"/>
-                </a:solidFill>
-                <a:latin typeface="DejaVu Sans"/>
-                <a:ea typeface="DejaVu Sans"/>
-                <a:cs typeface="DejaVu Sans"/>
-              </a:defRPr>
-            </a:defPPr>
-            <a:lvl1pPr>
-              <a:defRPr sz="1275" b="0">
-                <a:solidFill>
-                  <a:srgbClr val="456278"/>
-                </a:solidFill>
-                <a:latin typeface="DejaVu Sans"/>
-                <a:ea typeface="DejaVu Sans"/>
-                <a:cs typeface="DejaVu Sans"/>
-              </a:defRPr>
-            </a:lvl1pPr>
-            <a:lvl2pPr>
-              <a:defRPr sz="1275" b="0">
-                <a:solidFill>
-                  <a:srgbClr val="456278"/>
-                </a:solidFill>
-                <a:latin typeface="DejaVu Sans"/>
-                <a:ea typeface="DejaVu Sans"/>
-                <a:cs typeface="DejaVu Sans"/>
-              </a:defRPr>
-            </a:lvl2pPr>
-            <a:lvl3pPr>
-              <a:defRPr sz="1275" b="0">
-                <a:solidFill>
-                  <a:srgbClr val="456278"/>
-                </a:solidFill>
-                <a:latin typeface="DejaVu Sans"/>
-                <a:ea typeface="DejaVu Sans"/>
-                <a:cs typeface="DejaVu Sans"/>
-              </a:defRPr>
-            </a:lvl3pPr>
-            <a:lvl4pPr>
-              <a:defRPr sz="1275" b="0">
-                <a:solidFill>
-                  <a:srgbClr val="456278"/>
-                </a:solidFill>
-                <a:latin typeface="DejaVu Sans"/>
-                <a:ea typeface="DejaVu Sans"/>
-                <a:cs typeface="DejaVu Sans"/>
-              </a:defRPr>
-            </a:lvl4pPr>
-            <a:lvl5pPr>
-              <a:defRPr sz="1275" b="0">
-                <a:solidFill>
-                  <a:srgbClr val="456278"/>
-                </a:solidFill>
-                <a:latin typeface="DejaVu Sans"/>
-                <a:ea typeface="DejaVu Sans"/>
-                <a:cs typeface="DejaVu Sans"/>
-              </a:defRPr>
-            </a:lvl5pPr>
-            <a:lvl6pPr>
-              <a:defRPr sz="1275" b="0">
-                <a:solidFill>
-                  <a:srgbClr val="456278"/>
-                </a:solidFill>
-                <a:latin typeface="DejaVu Sans"/>
-                <a:ea typeface="DejaVu Sans"/>
-                <a:cs typeface="DejaVu Sans"/>
-              </a:defRPr>
-            </a:lvl6pPr>
-            <a:lvl7pPr>
-              <a:defRPr sz="1275" b="0">
-                <a:solidFill>
-                  <a:srgbClr val="456278"/>
-                </a:solidFill>
-                <a:latin typeface="DejaVu Sans"/>
-                <a:ea typeface="DejaVu Sans"/>
-                <a:cs typeface="DejaVu Sans"/>
-              </a:defRPr>
-            </a:lvl7pPr>
-            <a:lvl8pPr>
-              <a:defRPr sz="1275" b="0">
-                <a:solidFill>
-                  <a:srgbClr val="456278"/>
-                </a:solidFill>
-                <a:latin typeface="DejaVu Sans"/>
-                <a:ea typeface="DejaVu Sans"/>
-                <a:cs typeface="DejaVu Sans"/>
-              </a:defRPr>
-            </a:lvl8pPr>
-            <a:lvl9pPr>
-              <a:defRPr sz="1275" b="0">
-                <a:solidFill>
-                  <a:srgbClr val="456278"/>
-                </a:solidFill>
-                <a:latin typeface="DejaVu Sans"/>
-                <a:ea typeface="DejaVu Sans"/>
-                <a:cs typeface="DejaVu Sans"/>
-              </a:defRPr>
-            </a:lvl9pPr>
-          </a:lstStyle>
-          <a:p xmlns:a="http://schemas.openxmlformats.org/drawingml/2006/main">
-            <a:pPr>
-              <a:defRPr sz="1275" b="0">
-                <a:solidFill>
-                  <a:srgbClr val="456278"/>
-                </a:solidFill>
-                <a:latin typeface="DejaVu Sans"/>
-                <a:ea typeface="DejaVu Sans"/>
-                <a:cs typeface="DejaVu Sans"/>
-              </a:defRPr>
-            </a:pPr>
-            <a:r>
-              <a:rPr sz="1275" b="0">
-                <a:solidFill>
-                  <a:srgbClr val="456278"/>
-                </a:solidFill>
-                <a:latin typeface="DejaVu Sans"/>
-                <a:ea typeface="DejaVu Sans"/>
-                <a:cs typeface="DejaVu Sans"/>
-              </a:rPr>
-              <a:t>06 / 9</a:t>
-            </a:r>
-          </a:p>
-        </p:txBody>
-      </p:sp>
-      <p:sp>
-        <p:nvSpPr>
-          <p:cNvPr id="4" name="project">
-            <a:extLst xmlns:a="http://schemas.openxmlformats.org/drawingml/2006/main">
-              <a:ext uri="{FF2B5EF4-FFF2-40B4-BE49-F238E27FC236}">
-                <a16:creationId xmlns:a16="http://schemas.microsoft.com/office/drawing/2014/main" id="{1335214A-0571-42CB-8CA8-A29069026B7F}"/>
-              </a:ext>
-            </a:extLst>
-          </p:cNvPr>
-          <p:cNvSpPr>
-            <a:spLocks xmlns:a="http://schemas.openxmlformats.org/drawingml/2006/main" noGrp="1"/>
-          </p:cNvSpPr>
-          <p:nvPr/>
-        </p:nvSpPr>
-        <p:spPr>
-          <a:xfrm xmlns:a="http://schemas.openxmlformats.org/drawingml/2006/main">
-            <a:off x="609600" y="6477000"/>
-            <a:ext cx="8382000" cy="228600"/>
-          </a:xfrm>
-          <a:prstGeom xmlns:a="http://schemas.openxmlformats.org/drawingml/2006/main" prst="rect">
-            <a:avLst/>
-          </a:prstGeom>
-          <a:noFill xmlns:a="http://schemas.openxmlformats.org/drawingml/2006/main"/>
-          <a:ln xmlns:a="http://schemas.openxmlformats.org/drawingml/2006/main" w="0">
-            <a:noFill/>
-            <a:prstDash val="solid"/>
-          </a:ln>
-        </p:spPr>
-        <p:txBody>
-          <a:bodyPr xmlns:a="http://schemas.openxmlformats.org/drawingml/2006/main"/>
-          <a:lstStyle xmlns:a="http://schemas.openxmlformats.org/drawingml/2006/main">
-            <a:defPPr>
-              <a:defRPr sz="1200" b="0">
-                <a:solidFill>
-                  <a:srgbClr val="456278"/>
-                </a:solidFill>
-                <a:latin typeface="DejaVu Sans"/>
-                <a:ea typeface="DejaVu Sans"/>
-                <a:cs typeface="DejaVu Sans"/>
-              </a:defRPr>
-            </a:defPPr>
-            <a:lvl1pPr>
-              <a:defRPr sz="1200" b="0">
-                <a:solidFill>
-                  <a:srgbClr val="456278"/>
-                </a:solidFill>
-                <a:latin typeface="DejaVu Sans"/>
-                <a:ea typeface="DejaVu Sans"/>
-                <a:cs typeface="DejaVu Sans"/>
-              </a:defRPr>
-            </a:lvl1pPr>
-            <a:lvl2pPr>
-              <a:defRPr sz="1200" b="0">
-                <a:solidFill>
-                  <a:srgbClr val="456278"/>
-                </a:solidFill>
-                <a:latin typeface="DejaVu Sans"/>
-                <a:ea typeface="DejaVu Sans"/>
-                <a:cs typeface="DejaVu Sans"/>
-              </a:defRPr>
-            </a:lvl2pPr>
-            <a:lvl3pPr>
-              <a:defRPr sz="1200" b="0">
-                <a:solidFill>
-                  <a:srgbClr val="456278"/>
-                </a:solidFill>
-                <a:latin typeface="DejaVu Sans"/>
-                <a:ea typeface="DejaVu Sans"/>
-                <a:cs typeface="DejaVu Sans"/>
-              </a:defRPr>
-            </a:lvl3pPr>
-            <a:lvl4pPr>
-              <a:defRPr sz="1200" b="0">
-                <a:solidFill>
-                  <a:srgbClr val="456278"/>
-                </a:solidFill>
-                <a:latin typeface="DejaVu Sans"/>
-                <a:ea typeface="DejaVu Sans"/>
-                <a:cs typeface="DejaVu Sans"/>
-              </a:defRPr>
-            </a:lvl4pPr>
-            <a:lvl5pPr>
-              <a:defRPr sz="1200" b="0">
-                <a:solidFill>
-                  <a:srgbClr val="456278"/>
-                </a:solidFill>
-                <a:latin typeface="DejaVu Sans"/>
-                <a:ea typeface="DejaVu Sans"/>
-                <a:cs typeface="DejaVu Sans"/>
-              </a:defRPr>
-            </a:lvl5pPr>
-            <a:lvl6pPr>
-              <a:defRPr sz="1200" b="0">
-                <a:solidFill>
-                  <a:srgbClr val="456278"/>
-                </a:solidFill>
-                <a:latin typeface="DejaVu Sans"/>
-                <a:ea typeface="DejaVu Sans"/>
-                <a:cs typeface="DejaVu Sans"/>
-              </a:defRPr>
-            </a:lvl6pPr>
-            <a:lvl7pPr>
-              <a:defRPr sz="1200" b="0">
-                <a:solidFill>
-                  <a:srgbClr val="456278"/>
-                </a:solidFill>
-                <a:latin typeface="DejaVu Sans"/>
-                <a:ea typeface="DejaVu Sans"/>
-                <a:cs typeface="DejaVu Sans"/>
-              </a:defRPr>
-            </a:lvl7pPr>
-            <a:lvl8pPr>
-              <a:defRPr sz="1200" b="0">
-                <a:solidFill>
-                  <a:srgbClr val="456278"/>
-                </a:solidFill>
-                <a:latin typeface="DejaVu Sans"/>
-                <a:ea typeface="DejaVu Sans"/>
-                <a:cs typeface="DejaVu Sans"/>
-              </a:defRPr>
-            </a:lvl8pPr>
-            <a:lvl9pPr>
-              <a:defRPr sz="1200" b="0">
-                <a:solidFill>
-                  <a:srgbClr val="456278"/>
-                </a:solidFill>
-                <a:latin typeface="DejaVu Sans"/>
-                <a:ea typeface="DejaVu Sans"/>
-                <a:cs typeface="DejaVu Sans"/>
-              </a:defRPr>
-            </a:lvl9pPr>
-          </a:lstStyle>
-          <a:p xmlns:a="http://schemas.openxmlformats.org/drawingml/2006/main">
-            <a:pPr>
-              <a:defRPr sz="1200" b="0">
-                <a:solidFill>
-                  <a:srgbClr val="456278"/>
-                </a:solidFill>
-                <a:latin typeface="DejaVu Sans"/>
-                <a:ea typeface="DejaVu Sans"/>
-                <a:cs typeface="DejaVu Sans"/>
-              </a:defRPr>
-            </a:pPr>
-            <a:r>
-              <a:rPr sz="1200" b="0">
-                <a:solidFill>
-                  <a:srgbClr val="456278"/>
-                </a:solidFill>
-                <a:latin typeface="DejaVu Sans"/>
-                <a:ea typeface="DejaVu Sans"/>
-                <a:cs typeface="DejaVu Sans"/>
-              </a:rPr>
-              <a:t>Financiera Pacífico</a:t>
-            </a:r>
-          </a:p>
-        </p:txBody>
-      </p:sp>
-      <p:graphicFrame>
-        <p:nvGraphicFramePr>
-          <p:cNvPr id="5" name="">
-            <a:extLst xmlns:a="http://schemas.openxmlformats.org/drawingml/2006/main">
-              <a:ext uri="{FF2B5EF4-FFF2-40B4-BE49-F238E27FC236}">
-                <a16:creationId xmlns:a16="http://schemas.microsoft.com/office/drawing/2014/main" id="{D6E0E7DC-536C-4E30-B013-03AA1B8EC15E}"/>
-              </a:ext>
-            </a:extLst>
-          </p:cNvPr>
-          <p:cNvGraphicFramePr/>
-          <p:nvPr/>
-        </p:nvGraphicFramePr>
-        <p:xfrm>
-          <a:off xmlns:a="http://schemas.openxmlformats.org/drawingml/2006/main" x="609600" y="2667000"/>
-          <a:ext xmlns:a="http://schemas.openxmlformats.org/drawingml/2006/main" cx="10972800" cy="1428750"/>
-        </p:xfrm>
-        <a:graphic xmlns:a="http://schemas.openxmlformats.org/drawingml/2006/main">
-          <a:graphicData uri="http://schemas.openxmlformats.org/drawingml/2006/table">
-            <a:tbl>
-              <a:tblPr/>
-              <a:tblGrid>
-                <a:gridCol w="4572000"/>
-                <a:gridCol w="3143250"/>
-                <a:gridCol w="3257550"/>
-              </a:tblGrid>
-              <a:tr h="714375">
-                <a:tc>
-                  <a:txBody>
-                    <a:bodyPr/>
-                    <a:lstStyle/>
-                    <a:p>
-                      <a:r>
-                        <a:rPr sz="1950" b="1">
-                          <a:solidFill>
-                            <a:srgbClr val="FFFFFF"/>
-                          </a:solidFill>
-                          <a:latin typeface="DejaVu Sans"/>
-                          <a:ea typeface="DejaVu Sans"/>
-                          <a:cs typeface="DejaVu Sans"/>
-                        </a:rPr>
-                        <a:t>Operaciones generadas</a:t>
-                      </a:r>
-                    </a:p>
-                  </a:txBody>
-                  <a:tcPr marL="91440" marR="91440" marT="45720" marB="45720">
-                    <a:lnL w="9525">
-                      <a:solidFill>
-                        <a:srgbClr val="C6D7D7"/>
-                      </a:solidFill>
-                      <a:prstDash val="solid"/>
-                    </a:lnL>
-                    <a:lnR w="9525">
-                      <a:solidFill>
-                        <a:srgbClr val="C6D7D7"/>
-                      </a:solidFill>
-                      <a:prstDash val="solid"/>
-                    </a:lnR>
-                    <a:lnT w="9525">
-                      <a:solidFill>
-                        <a:srgbClr val="C6D7D7"/>
-                      </a:solidFill>
-                      <a:prstDash val="solid"/>
-                    </a:lnT>
-                    <a:lnB w="9525">
-                      <a:solidFill>
-                        <a:srgbClr val="C6D7D7"/>
-                      </a:solidFill>
-                      <a:prstDash val="solid"/>
-                    </a:lnB>
-                    <a:solidFill>
-                      <a:srgbClr val="112A3A"/>
-                    </a:solidFill>
-                  </a:tcPr>
-                </a:tc>
-                <a:tc>
-                  <a:txBody>
-                    <a:bodyPr/>
-                    <a:lstStyle/>
-                    <a:p>
-                      <a:r>
-                        <a:rPr sz="1950" b="1">
-                          <a:solidFill>
-                            <a:srgbClr val="FFFFFF"/>
-                          </a:solidFill>
-                          <a:latin typeface="DejaVu Sans"/>
-                          <a:ea typeface="DejaVu Sans"/>
-                          <a:cs typeface="DejaVu Sans"/>
-                        </a:rPr>
-                        <a:t>En la copia</a:t>
-                      </a:r>
-                    </a:p>
-                  </a:txBody>
-                  <a:tcPr marL="91440" marR="91440" marT="45720" marB="45720">
-                    <a:lnR w="9525">
-                      <a:solidFill>
-                        <a:srgbClr val="C6D7D7"/>
-                      </a:solidFill>
-                      <a:prstDash val="solid"/>
-                    </a:lnR>
-                    <a:lnT w="9525">
-                      <a:solidFill>
-                        <a:srgbClr val="C6D7D7"/>
-                      </a:solidFill>
-                      <a:prstDash val="solid"/>
-                    </a:lnT>
-                    <a:lnB w="9525">
-                      <a:solidFill>
-                        <a:srgbClr val="C6D7D7"/>
-                      </a:solidFill>
-                      <a:prstDash val="solid"/>
-                    </a:lnB>
-                    <a:solidFill>
-                      <a:srgbClr val="112A3A"/>
-                    </a:solidFill>
-                  </a:tcPr>
-                </a:tc>
-                <a:tc>
-                  <a:txBody>
-                    <a:bodyPr/>
-                    <a:lstStyle/>
-                    <a:p>
-                      <a:r>
-                        <a:rPr sz="1950" b="1">
-                          <a:solidFill>
-                            <a:srgbClr val="FFFFFF"/>
-                          </a:solidFill>
-                          <a:latin typeface="DejaVu Sans"/>
-                          <a:ea typeface="DejaVu Sans"/>
-                          <a:cs typeface="DejaVu Sans"/>
-                        </a:rPr>
-                        <a:t>Por conciliar</a:t>
-                      </a:r>
-                    </a:p>
-                  </a:txBody>
-                  <a:tcPr marL="91440" marR="91440" marT="45720" marB="45720">
-                    <a:lnR w="9525">
-                      <a:solidFill>
-                        <a:srgbClr val="C6D7D7"/>
-                      </a:solidFill>
-                      <a:prstDash val="solid"/>
-                    </a:lnR>
-                    <a:lnT w="9525">
-                      <a:solidFill>
-                        <a:srgbClr val="C6D7D7"/>
-                      </a:solidFill>
-                      <a:prstDash val="solid"/>
-                    </a:lnT>
-                    <a:lnB w="9525">
-                      <a:solidFill>
-                        <a:srgbClr val="C6D7D7"/>
-                      </a:solidFill>
-                      <a:prstDash val="solid"/>
-                    </a:lnB>
-                    <a:solidFill>
-                      <a:srgbClr val="112A3A"/>
-                    </a:solidFill>
-                  </a:tcPr>
-                </a:tc>
-              </a:tr>
-              <a:tr h="714375">
-                <a:tc>
-                  <a:txBody>
-                    <a:bodyPr/>
-                    <a:lstStyle/>
-                    <a:p>
-                      <a:r>
-                        <a:rPr sz="1950" b="0">
-                          <a:solidFill>
-                            <a:srgbClr val="112A3A"/>
-                          </a:solidFill>
-                          <a:latin typeface="DejaVu Sans"/>
-                          <a:ea typeface="DejaVu Sans"/>
-                          <a:cs typeface="DejaVu Sans"/>
-                        </a:rPr>
-                        <a:t>15</a:t>
-                      </a:r>
-                    </a:p>
-                  </a:txBody>
-                  <a:tcPr marL="91440" marR="91440" marT="45720" marB="45720">
-                    <a:lnL w="9525">
-                      <a:solidFill>
-                        <a:srgbClr val="C6D7D7"/>
-                      </a:solidFill>
-                      <a:prstDash val="solid"/>
-                    </a:lnL>
-                    <a:lnR w="9525">
-                      <a:solidFill>
-                        <a:srgbClr val="C6D7D7"/>
-                      </a:solidFill>
-                      <a:prstDash val="solid"/>
-                    </a:lnR>
-                    <a:lnB w="9525">
-                      <a:solidFill>
-                        <a:srgbClr val="C6D7D7"/>
-                      </a:solidFill>
-                      <a:prstDash val="solid"/>
-                    </a:lnB>
-                    <a:solidFill>
-                      <a:srgbClr val="EDF4F2"/>
-                    </a:solidFill>
-                  </a:tcPr>
-                </a:tc>
-                <a:tc>
-                  <a:txBody>
-                    <a:bodyPr/>
-                    <a:lstStyle/>
-                    <a:p>
-                      <a:r>
-                        <a:rPr sz="1950" b="0">
-                          <a:solidFill>
-                            <a:srgbClr val="112A3A"/>
-                          </a:solidFill>
-                          <a:latin typeface="DejaVu Sans"/>
-                          <a:ea typeface="DejaVu Sans"/>
-                          <a:cs typeface="DejaVu Sans"/>
-                        </a:rPr>
-                        <a:t>12</a:t>
-                      </a:r>
-                    </a:p>
-                  </a:txBody>
-                  <a:tcPr marL="91440" marR="91440" marT="45720" marB="45720">
-                    <a:lnR w="9525">
-                      <a:solidFill>
-                        <a:srgbClr val="C6D7D7"/>
-                      </a:solidFill>
-                      <a:prstDash val="solid"/>
-                    </a:lnR>
-                    <a:lnB w="9525">
-                      <a:solidFill>
-                        <a:srgbClr val="C6D7D7"/>
-                      </a:solidFill>
-                      <a:prstDash val="solid"/>
-                    </a:lnB>
-                    <a:solidFill>
-                      <a:srgbClr val="EDF4F2"/>
-                    </a:solidFill>
-                  </a:tcPr>
-                </a:tc>
-                <a:tc>
-                  <a:txBody>
-                    <a:bodyPr/>
-                    <a:lstStyle/>
-                    <a:p>
-                      <a:r>
-                        <a:rPr sz="1950" b="0">
-                          <a:solidFill>
-                            <a:srgbClr val="112A3A"/>
-                          </a:solidFill>
-                          <a:latin typeface="DejaVu Sans"/>
-                          <a:ea typeface="DejaVu Sans"/>
-                          <a:cs typeface="DejaVu Sans"/>
-                        </a:rPr>
-                        <a:t>3</a:t>
-                      </a:r>
-                    </a:p>
-                  </a:txBody>
-                  <a:tcPr marL="91440" marR="91440" marT="45720" marB="45720">
-                    <a:lnR w="9525">
-                      <a:solidFill>
-                        <a:srgbClr val="C6D7D7"/>
-                      </a:solidFill>
-                      <a:prstDash val="solid"/>
-                    </a:lnR>
-                    <a:lnB w="9525">
-                      <a:solidFill>
-                        <a:srgbClr val="C6D7D7"/>
-                      </a:solidFill>
-                      <a:prstDash val="solid"/>
-                    </a:lnB>
-                    <a:solidFill>
-                      <a:srgbClr val="EDF4F2"/>
-                    </a:solidFill>
-                  </a:tcPr>
-                </a:tc>
-              </a:tr>
-            </a:tbl>
-          </a:graphicData>
-        </a:graphic>
-      </p:graphicFrame>
-      <p:sp>
-        <p:nvSpPr>
-          <p:cNvPr id="6" name="checks">
-            <a:extLst xmlns:a="http://schemas.openxmlformats.org/drawingml/2006/main">
-              <a:ext uri="{FF2B5EF4-FFF2-40B4-BE49-F238E27FC236}">
-                <a16:creationId xmlns:a16="http://schemas.microsoft.com/office/drawing/2014/main" id="{2048C455-2B5C-41A2-925A-224694310030}"/>
-              </a:ext>
-            </a:extLst>
-          </p:cNvPr>
-          <p:cNvSpPr>
-            <a:spLocks xmlns:a="http://schemas.openxmlformats.org/drawingml/2006/main" noGrp="1"/>
-          </p:cNvSpPr>
-          <p:nvPr/>
-        </p:nvSpPr>
-        <p:spPr>
-          <a:xfrm xmlns:a="http://schemas.openxmlformats.org/drawingml/2006/main">
-            <a:off x="609600" y="4410075"/>
-            <a:ext cx="10953750" cy="666750"/>
-          </a:xfrm>
-          <a:prstGeom xmlns:a="http://schemas.openxmlformats.org/drawingml/2006/main" prst="rect">
-            <a:avLst/>
-          </a:prstGeom>
-          <a:noFill xmlns:a="http://schemas.openxmlformats.org/drawingml/2006/main"/>
-          <a:ln xmlns:a="http://schemas.openxmlformats.org/drawingml/2006/main" w="0">
-            <a:noFill/>
-            <a:prstDash val="solid"/>
-          </a:ln>
-        </p:spPr>
-        <p:txBody>
-          <a:bodyPr xmlns:a="http://schemas.openxmlformats.org/drawingml/2006/main"/>
-          <a:lstStyle xmlns:a="http://schemas.openxmlformats.org/drawingml/2006/main">
-            <a:defPPr>
-              <a:defRPr sz="2100" b="1">
-                <a:solidFill>
-                  <a:srgbClr val="00888A"/>
-                </a:solidFill>
-                <a:latin typeface="DejaVu Sans"/>
-                <a:ea typeface="DejaVu Sans"/>
-                <a:cs typeface="DejaVu Sans"/>
-              </a:defRPr>
-            </a:defPPr>
-            <a:lvl1pPr>
-              <a:defRPr sz="2100" b="1">
-                <a:solidFill>
-                  <a:srgbClr val="00888A"/>
-                </a:solidFill>
-                <a:latin typeface="DejaVu Sans"/>
-                <a:ea typeface="DejaVu Sans"/>
-                <a:cs typeface="DejaVu Sans"/>
-              </a:defRPr>
-            </a:lvl1pPr>
-            <a:lvl2pPr>
-              <a:defRPr sz="2100" b="1">
-                <a:solidFill>
-                  <a:srgbClr val="00888A"/>
-                </a:solidFill>
-                <a:latin typeface="DejaVu Sans"/>
-                <a:ea typeface="DejaVu Sans"/>
-                <a:cs typeface="DejaVu Sans"/>
-              </a:defRPr>
-            </a:lvl2pPr>
-            <a:lvl3pPr>
-              <a:defRPr sz="2100" b="1">
-                <a:solidFill>
-                  <a:srgbClr val="00888A"/>
-                </a:solidFill>
-                <a:latin typeface="DejaVu Sans"/>
-                <a:ea typeface="DejaVu Sans"/>
-                <a:cs typeface="DejaVu Sans"/>
-              </a:defRPr>
-            </a:lvl3pPr>
-            <a:lvl4pPr>
-              <a:defRPr sz="2100" b="1">
-                <a:solidFill>
-                  <a:srgbClr val="00888A"/>
-                </a:solidFill>
-                <a:latin typeface="DejaVu Sans"/>
-                <a:ea typeface="DejaVu Sans"/>
-                <a:cs typeface="DejaVu Sans"/>
-              </a:defRPr>
-            </a:lvl4pPr>
-            <a:lvl5pPr>
-              <a:defRPr sz="2100" b="1">
-                <a:solidFill>
-                  <a:srgbClr val="00888A"/>
-                </a:solidFill>
-                <a:latin typeface="DejaVu Sans"/>
-                <a:ea typeface="DejaVu Sans"/>
-                <a:cs typeface="DejaVu Sans"/>
-              </a:defRPr>
-            </a:lvl5pPr>
-            <a:lvl6pPr>
-              <a:defRPr sz="2100" b="1">
-                <a:solidFill>
-                  <a:srgbClr val="00888A"/>
-                </a:solidFill>
-                <a:latin typeface="DejaVu Sans"/>
-                <a:ea typeface="DejaVu Sans"/>
-                <a:cs typeface="DejaVu Sans"/>
-              </a:defRPr>
-            </a:lvl6pPr>
-            <a:lvl7pPr>
-              <a:defRPr sz="2100" b="1">
-                <a:solidFill>
-                  <a:srgbClr val="00888A"/>
-                </a:solidFill>
-                <a:latin typeface="DejaVu Sans"/>
-                <a:ea typeface="DejaVu Sans"/>
-                <a:cs typeface="DejaVu Sans"/>
-              </a:defRPr>
-            </a:lvl7pPr>
-            <a:lvl8pPr>
-              <a:defRPr sz="2100" b="1">
-                <a:solidFill>
-                  <a:srgbClr val="00888A"/>
-                </a:solidFill>
-                <a:latin typeface="DejaVu Sans"/>
-                <a:ea typeface="DejaVu Sans"/>
-                <a:cs typeface="DejaVu Sans"/>
-              </a:defRPr>
-            </a:lvl8pPr>
-            <a:lvl9pPr>
-              <a:defRPr sz="2100" b="1">
-                <a:solidFill>
-                  <a:srgbClr val="00888A"/>
-                </a:solidFill>
-                <a:latin typeface="DejaVu Sans"/>
-                <a:ea typeface="DejaVu Sans"/>
-                <a:cs typeface="DejaVu Sans"/>
-              </a:defRPr>
-            </a:lvl9pPr>
-          </a:lstStyle>
-          <a:p xmlns:a="http://schemas.openxmlformats.org/drawingml/2006/main">
-            <a:pPr>
-              <a:defRPr sz="2100" b="1">
-                <a:solidFill>
-                  <a:srgbClr val="00888A"/>
-                </a:solidFill>
-                <a:latin typeface="DejaVu Sans"/>
-                <a:ea typeface="DejaVu Sans"/>
-                <a:cs typeface="DejaVu Sans"/>
-              </a:defRPr>
-            </a:pPr>
-            <a:r>
-              <a:rPr sz="2100" b="1">
-                <a:solidFill>
-                  <a:srgbClr val="00888A"/>
-                </a:solidFill>
-                <a:latin typeface="DejaVu Sans"/>
-                <a:ea typeface="DejaVu Sans"/>
-                <a:cs typeface="DejaVu Sans"/>
-              </a:rPr>
-              <a:t>Mayoría de votos, aislamiento, recursos, copia válida y aplicación.</a:t>
-            </a:r>
-          </a:p>
-        </p:txBody>
-      </p:sp>
-      <p:sp>
-        <p:nvSpPr>
-          <p:cNvPr id="7" name="results">
-            <a:extLst xmlns:a="http://schemas.openxmlformats.org/drawingml/2006/main">
-              <a:ext uri="{FF2B5EF4-FFF2-40B4-BE49-F238E27FC236}">
-                <a16:creationId xmlns:a16="http://schemas.microsoft.com/office/drawing/2014/main" id="{06FCBB57-8EBC-4BA6-87FF-B8A2B054FAFE}"/>
-              </a:ext>
-            </a:extLst>
-          </p:cNvPr>
-          <p:cNvSpPr>
-            <a:spLocks xmlns:a="http://schemas.openxmlformats.org/drawingml/2006/main" noGrp="1"/>
-          </p:cNvSpPr>
-          <p:nvPr/>
-        </p:nvSpPr>
-        <p:spPr>
-          <a:xfrm xmlns:a="http://schemas.openxmlformats.org/drawingml/2006/main">
-            <a:off x="609600" y="5381625"/>
-            <a:ext cx="10953750" cy="828675"/>
-          </a:xfrm>
-          <a:prstGeom xmlns:a="http://schemas.openxmlformats.org/drawingml/2006/main" prst="rect">
-            <a:avLst/>
-          </a:prstGeom>
-          <a:noFill xmlns:a="http://schemas.openxmlformats.org/drawingml/2006/main"/>
-          <a:ln xmlns:a="http://schemas.openxmlformats.org/drawingml/2006/main" w="0">
-            <a:noFill/>
-            <a:prstDash val="solid"/>
-          </a:ln>
-        </p:spPr>
-        <p:txBody>
-          <a:bodyPr xmlns:a="http://schemas.openxmlformats.org/drawingml/2006/main"/>
-          <a:lstStyle xmlns:a="http://schemas.openxmlformats.org/drawingml/2006/main">
-            <a:defPPr>
-              <a:defRPr sz="1950" b="0">
-                <a:solidFill>
-                  <a:srgbClr val="112A3A"/>
-                </a:solidFill>
-                <a:latin typeface="DejaVu Sans"/>
-                <a:ea typeface="DejaVu Sans"/>
-                <a:cs typeface="DejaVu Sans"/>
-              </a:defRPr>
-            </a:defPPr>
-            <a:lvl1pPr>
-              <a:defRPr sz="1950" b="0">
-                <a:solidFill>
-                  <a:srgbClr val="112A3A"/>
-                </a:solidFill>
-                <a:latin typeface="DejaVu Sans"/>
-                <a:ea typeface="DejaVu Sans"/>
-                <a:cs typeface="DejaVu Sans"/>
-              </a:defRPr>
-            </a:lvl1pPr>
-            <a:lvl2pPr>
-              <a:defRPr sz="1950" b="0">
-                <a:solidFill>
-                  <a:srgbClr val="112A3A"/>
-                </a:solidFill>
-                <a:latin typeface="DejaVu Sans"/>
-                <a:ea typeface="DejaVu Sans"/>
-                <a:cs typeface="DejaVu Sans"/>
-              </a:defRPr>
-            </a:lvl2pPr>
-            <a:lvl3pPr>
-              <a:defRPr sz="1950" b="0">
-                <a:solidFill>
-                  <a:srgbClr val="112A3A"/>
-                </a:solidFill>
-                <a:latin typeface="DejaVu Sans"/>
-                <a:ea typeface="DejaVu Sans"/>
-                <a:cs typeface="DejaVu Sans"/>
-              </a:defRPr>
-            </a:lvl3pPr>
-            <a:lvl4pPr>
-              <a:defRPr sz="1950" b="0">
-                <a:solidFill>
-                  <a:srgbClr val="112A3A"/>
-                </a:solidFill>
-                <a:latin typeface="DejaVu Sans"/>
-                <a:ea typeface="DejaVu Sans"/>
-                <a:cs typeface="DejaVu Sans"/>
-              </a:defRPr>
-            </a:lvl4pPr>
-            <a:lvl5pPr>
-              <a:defRPr sz="1950" b="0">
-                <a:solidFill>
-                  <a:srgbClr val="112A3A"/>
-                </a:solidFill>
-                <a:latin typeface="DejaVu Sans"/>
-                <a:ea typeface="DejaVu Sans"/>
-                <a:cs typeface="DejaVu Sans"/>
-              </a:defRPr>
-            </a:lvl5pPr>
-            <a:lvl6pPr>
-              <a:defRPr sz="1950" b="0">
-                <a:solidFill>
-                  <a:srgbClr val="112A3A"/>
-                </a:solidFill>
-                <a:latin typeface="DejaVu Sans"/>
-                <a:ea typeface="DejaVu Sans"/>
-                <a:cs typeface="DejaVu Sans"/>
-              </a:defRPr>
-            </a:lvl6pPr>
-            <a:lvl7pPr>
-              <a:defRPr sz="1950" b="0">
-                <a:solidFill>
-                  <a:srgbClr val="112A3A"/>
-                </a:solidFill>
-                <a:latin typeface="DejaVu Sans"/>
-                <a:ea typeface="DejaVu Sans"/>
-                <a:cs typeface="DejaVu Sans"/>
-              </a:defRPr>
-            </a:lvl7pPr>
-            <a:lvl8pPr>
-              <a:defRPr sz="1950" b="0">
-                <a:solidFill>
-                  <a:srgbClr val="112A3A"/>
-                </a:solidFill>
-                <a:latin typeface="DejaVu Sans"/>
-                <a:ea typeface="DejaVu Sans"/>
-                <a:cs typeface="DejaVu Sans"/>
-              </a:defRPr>
-            </a:lvl8pPr>
-            <a:lvl9pPr>
-              <a:defRPr sz="1950" b="0">
-                <a:solidFill>
-                  <a:srgbClr val="112A3A"/>
-                </a:solidFill>
-                <a:latin typeface="DejaVu Sans"/>
-                <a:ea typeface="DejaVu Sans"/>
-                <a:cs typeface="DejaVu Sans"/>
-              </a:defRPr>
-            </a:lvl9pPr>
-          </a:lstStyle>
-          <a:p xmlns:a="http://schemas.openxmlformats.org/drawingml/2006/main">
-            <a:pPr>
-              <a:defRPr sz="1950" b="0">
-                <a:solidFill>
-                  <a:srgbClr val="112A3A"/>
-                </a:solidFill>
-                <a:latin typeface="DejaVu Sans"/>
-                <a:ea typeface="DejaVu Sans"/>
-                <a:cs typeface="DejaVu Sans"/>
-              </a:defRPr>
-            </a:pPr>
-            <a:r>
-              <a:rPr sz="1950" b="0">
-                <a:solidFill>
-                  <a:srgbClr val="112A3A"/>
-                </a:solidFill>
-                <a:latin typeface="DejaVu Sans"/>
-                <a:ea typeface="DejaVu Sans"/>
-                <a:cs typeface="DejaVu Sans"/>
-              </a:rPr>
-              <a:t>Ejercicio: recuperación en 50 s / RPO de 30 s del reloj virtual.</a:t>
-            </a:r>
-          </a:p>
-          <a:p xmlns:a="http://schemas.openxmlformats.org/drawingml/2006/main">
-            <a:pPr>
-              <a:defRPr sz="1950" b="0">
-                <a:solidFill>
-                  <a:srgbClr val="112A3A"/>
-                </a:solidFill>
-                <a:latin typeface="DejaVu Sans"/>
-                <a:ea typeface="DejaVu Sans"/>
-                <a:cs typeface="DejaVu Sans"/>
-              </a:defRPr>
-            </a:pPr>
-            <a:r>
-              <a:rPr sz="1950" b="0">
-                <a:solidFill>
-                  <a:srgbClr val="112A3A"/>
-                </a:solidFill>
-                <a:latin typeface="DejaVu Sans"/>
-                <a:ea typeface="DejaVu Sans"/>
-                <a:cs typeface="DejaVu Sans"/>
-              </a:rPr>
-              <a:t>Objetivos del diseño: 300 s / 60 s.</a:t>
-            </a:r>
-          </a:p>
-        </p:txBody>
-      </p:sp>
-    </p:spTree>
-    <p:extLst>
-      <p:ext uri="{BB962C8B-B14F-4D97-AF65-F5344CB8AC3E}">
-        <p14:creationId xmlns:p14="http://schemas.microsoft.com/office/powerpoint/2010/main" val="1651296735"/>
-      </p:ext>
-    </p:extLst>
-  </p:cSld>
-</p:sld>
-</file>
-
-<file path=ppt/slides/slide7.xml><?xml version="1.0" encoding="utf-8"?>
-<p:sld xmlns:p="http://schemas.openxmlformats.org/presentationml/2006/main">
-  <p:cSld>
-    <p:bg>
-      <p:bgPr>
-        <a:solidFill xmlns:a="http://schemas.openxmlformats.org/drawingml/2006/main">
-          <a:srgbClr val="F5F7F5"/>
-        </a:solidFill>
-      </p:bgPr>
-    </p:bg>
-    <p:spTree>
-      <p:nvGrpSpPr>
-        <p:cNvPr id="1" name=""/>
-        <p:cNvGrpSpPr/>
-        <p:nvPr/>
-      </p:nvGrpSpPr>
-      <p:grpSpPr>
-        <a:xfrm xmlns:a="http://schemas.openxmlformats.org/drawingml/2006/main"/>
-      </p:grpSpPr>
-      <p:sp>
-        <p:nvSpPr>
-          <p:cNvPr id="8" name="title">
-            <a:extLst xmlns:a="http://schemas.openxmlformats.org/drawingml/2006/main">
-              <a:ext uri="{FF2B5EF4-FFF2-40B4-BE49-F238E27FC236}">
-                <a16:creationId xmlns:a16="http://schemas.microsoft.com/office/drawing/2014/main" id="{1691303A-A694-44DE-890E-42D480471421}"/>
-              </a:ext>
-            </a:extLst>
-          </p:cNvPr>
-          <p:cNvSpPr>
-            <a:spLocks xmlns:a="http://schemas.openxmlformats.org/drawingml/2006/main" noGrp="1"/>
-          </p:cNvSpPr>
-          <p:nvPr/>
-        </p:nvSpPr>
-        <p:spPr>
-          <a:xfrm xmlns:a="http://schemas.openxmlformats.org/drawingml/2006/main">
-            <a:off x="609600" y="381000"/>
-            <a:ext cx="10972800" cy="952500"/>
-          </a:xfrm>
-          <a:prstGeom xmlns:a="http://schemas.openxmlformats.org/drawingml/2006/main" prst="rect">
-            <a:avLst/>
-          </a:prstGeom>
-          <a:noFill xmlns:a="http://schemas.openxmlformats.org/drawingml/2006/main"/>
-          <a:ln xmlns:a="http://schemas.openxmlformats.org/drawingml/2006/main" w="0">
-            <a:noFill/>
-            <a:prstDash val="solid"/>
-          </a:ln>
-        </p:spPr>
-        <p:txBody>
-          <a:bodyPr xmlns:a="http://schemas.openxmlformats.org/drawingml/2006/main"/>
-          <a:lstStyle xmlns:a="http://schemas.openxmlformats.org/drawingml/2006/main">
-            <a:defPPr>
-              <a:defRPr sz="3300" b="1">
-                <a:solidFill>
-                  <a:srgbClr val="112A3A"/>
-                </a:solidFill>
-                <a:latin typeface="DejaVu Sans"/>
-                <a:ea typeface="DejaVu Sans"/>
-                <a:cs typeface="DejaVu Sans"/>
-              </a:defRPr>
-            </a:defPPr>
-            <a:lvl1pPr>
-              <a:defRPr sz="3300" b="1">
-                <a:solidFill>
-                  <a:srgbClr val="112A3A"/>
-                </a:solidFill>
-                <a:latin typeface="DejaVu Sans"/>
-                <a:ea typeface="DejaVu Sans"/>
-                <a:cs typeface="DejaVu Sans"/>
-              </a:defRPr>
-            </a:lvl1pPr>
-            <a:lvl2pPr>
-              <a:defRPr sz="3300" b="1">
-                <a:solidFill>
-                  <a:srgbClr val="112A3A"/>
-                </a:solidFill>
-                <a:latin typeface="DejaVu Sans"/>
-                <a:ea typeface="DejaVu Sans"/>
-                <a:cs typeface="DejaVu Sans"/>
-              </a:defRPr>
-            </a:lvl2pPr>
-            <a:lvl3pPr>
-              <a:defRPr sz="3300" b="1">
-                <a:solidFill>
-                  <a:srgbClr val="112A3A"/>
-                </a:solidFill>
-                <a:latin typeface="DejaVu Sans"/>
-                <a:ea typeface="DejaVu Sans"/>
-                <a:cs typeface="DejaVu Sans"/>
-              </a:defRPr>
-            </a:lvl3pPr>
-            <a:lvl4pPr>
-              <a:defRPr sz="3300" b="1">
-                <a:solidFill>
-                  <a:srgbClr val="112A3A"/>
-                </a:solidFill>
-                <a:latin typeface="DejaVu Sans"/>
-                <a:ea typeface="DejaVu Sans"/>
-                <a:cs typeface="DejaVu Sans"/>
-              </a:defRPr>
-            </a:lvl4pPr>
-            <a:lvl5pPr>
-              <a:defRPr sz="3300" b="1">
-                <a:solidFill>
-                  <a:srgbClr val="112A3A"/>
-                </a:solidFill>
-                <a:latin typeface="DejaVu Sans"/>
-                <a:ea typeface="DejaVu Sans"/>
-                <a:cs typeface="DejaVu Sans"/>
-              </a:defRPr>
-            </a:lvl5pPr>
-            <a:lvl6pPr>
-              <a:defRPr sz="3300" b="1">
-                <a:solidFill>
-                  <a:srgbClr val="112A3A"/>
-                </a:solidFill>
-                <a:latin typeface="DejaVu Sans"/>
-                <a:ea typeface="DejaVu Sans"/>
-                <a:cs typeface="DejaVu Sans"/>
-              </a:defRPr>
-            </a:lvl6pPr>
-            <a:lvl7pPr>
-              <a:defRPr sz="3300" b="1">
-                <a:solidFill>
-                  <a:srgbClr val="112A3A"/>
-                </a:solidFill>
-                <a:latin typeface="DejaVu Sans"/>
-                <a:ea typeface="DejaVu Sans"/>
-                <a:cs typeface="DejaVu Sans"/>
-              </a:defRPr>
-            </a:lvl7pPr>
-            <a:lvl8pPr>
-              <a:defRPr sz="3300" b="1">
-                <a:solidFill>
-                  <a:srgbClr val="112A3A"/>
-                </a:solidFill>
-                <a:latin typeface="DejaVu Sans"/>
-                <a:ea typeface="DejaVu Sans"/>
-                <a:cs typeface="DejaVu Sans"/>
-              </a:defRPr>
-            </a:lvl8pPr>
-            <a:lvl9pPr>
-              <a:defRPr sz="3300" b="1">
-                <a:solidFill>
-                  <a:srgbClr val="112A3A"/>
-                </a:solidFill>
-                <a:latin typeface="DejaVu Sans"/>
-                <a:ea typeface="DejaVu Sans"/>
-                <a:cs typeface="DejaVu Sans"/>
-              </a:defRPr>
-            </a:lvl9pPr>
-          </a:lstStyle>
-          <a:p xmlns:a="http://schemas.openxmlformats.org/drawingml/2006/main">
-            <a:pPr>
-              <a:defRPr sz="3300" b="1">
-                <a:solidFill>
-                  <a:srgbClr val="112A3A"/>
-                </a:solidFill>
-                <a:latin typeface="DejaVu Sans"/>
-                <a:ea typeface="DejaVu Sans"/>
-                <a:cs typeface="DejaVu Sans"/>
-              </a:defRPr>
-            </a:pPr>
-            <a:r>
-              <a:rPr sz="3300" b="1">
-                <a:solidFill>
-                  <a:srgbClr val="112A3A"/>
-                </a:solidFill>
-                <a:latin typeface="DejaVu Sans"/>
-                <a:ea typeface="DejaVu Sans"/>
-                <a:cs typeface="DejaVu Sans"/>
-              </a:rPr>
-              <a:t>Capacidad y puesta en marcha</a:t>
-            </a:r>
-          </a:p>
-        </p:txBody>
-      </p:sp>
-      <p:sp>
-        <p:nvSpPr>
-          <p:cNvPr id="2" name="message">
-            <a:extLst xmlns:a="http://schemas.openxmlformats.org/drawingml/2006/main">
-              <a:ext uri="{FF2B5EF4-FFF2-40B4-BE49-F238E27FC236}">
-                <a16:creationId xmlns:a16="http://schemas.microsoft.com/office/drawing/2014/main" id="{D95DB9E4-C7BB-496B-8620-39198E3B4E96}"/>
-              </a:ext>
-            </a:extLst>
-          </p:cNvPr>
-          <p:cNvSpPr>
-            <a:spLocks xmlns:a="http://schemas.openxmlformats.org/drawingml/2006/main" noGrp="1"/>
-          </p:cNvSpPr>
-          <p:nvPr/>
-        </p:nvSpPr>
-        <p:spPr>
-          <a:xfrm xmlns:a="http://schemas.openxmlformats.org/drawingml/2006/main">
-            <a:off x="609600" y="1524000"/>
-            <a:ext cx="10972800" cy="666750"/>
-          </a:xfrm>
-          <a:prstGeom xmlns:a="http://schemas.openxmlformats.org/drawingml/2006/main" prst="rect">
-            <a:avLst/>
-          </a:prstGeom>
-          <a:noFill xmlns:a="http://schemas.openxmlformats.org/drawingml/2006/main"/>
-          <a:ln xmlns:a="http://schemas.openxmlformats.org/drawingml/2006/main" w="0">
-            <a:noFill/>
-            <a:prstDash val="solid"/>
-          </a:ln>
-        </p:spPr>
-        <p:txBody>
-          <a:bodyPr xmlns:a="http://schemas.openxmlformats.org/drawingml/2006/main"/>
-          <a:lstStyle xmlns:a="http://schemas.openxmlformats.org/drawingml/2006/main">
-            <a:defPPr>
-              <a:defRPr sz="2025" b="0">
-                <a:solidFill>
-                  <a:srgbClr val="31515E"/>
-                </a:solidFill>
-                <a:latin typeface="DejaVu Sans"/>
-                <a:ea typeface="DejaVu Sans"/>
-                <a:cs typeface="DejaVu Sans"/>
-              </a:defRPr>
-            </a:defPPr>
-            <a:lvl1pPr>
-              <a:defRPr sz="2025" b="0">
-                <a:solidFill>
-                  <a:srgbClr val="31515E"/>
-                </a:solidFill>
-                <a:latin typeface="DejaVu Sans"/>
-                <a:ea typeface="DejaVu Sans"/>
-                <a:cs typeface="DejaVu Sans"/>
-              </a:defRPr>
-            </a:lvl1pPr>
-            <a:lvl2pPr>
-              <a:defRPr sz="2025" b="0">
-                <a:solidFill>
-                  <a:srgbClr val="31515E"/>
-                </a:solidFill>
-                <a:latin typeface="DejaVu Sans"/>
-                <a:ea typeface="DejaVu Sans"/>
-                <a:cs typeface="DejaVu Sans"/>
-              </a:defRPr>
-            </a:lvl2pPr>
-            <a:lvl3pPr>
-              <a:defRPr sz="2025" b="0">
-                <a:solidFill>
-                  <a:srgbClr val="31515E"/>
-                </a:solidFill>
-                <a:latin typeface="DejaVu Sans"/>
-                <a:ea typeface="DejaVu Sans"/>
-                <a:cs typeface="DejaVu Sans"/>
-              </a:defRPr>
-            </a:lvl3pPr>
-            <a:lvl4pPr>
-              <a:defRPr sz="2025" b="0">
-                <a:solidFill>
-                  <a:srgbClr val="31515E"/>
-                </a:solidFill>
-                <a:latin typeface="DejaVu Sans"/>
-                <a:ea typeface="DejaVu Sans"/>
-                <a:cs typeface="DejaVu Sans"/>
-              </a:defRPr>
-            </a:lvl4pPr>
-            <a:lvl5pPr>
-              <a:defRPr sz="2025" b="0">
-                <a:solidFill>
-                  <a:srgbClr val="31515E"/>
-                </a:solidFill>
-                <a:latin typeface="DejaVu Sans"/>
-                <a:ea typeface="DejaVu Sans"/>
-                <a:cs typeface="DejaVu Sans"/>
-              </a:defRPr>
-            </a:lvl5pPr>
-            <a:lvl6pPr>
-              <a:defRPr sz="2025" b="0">
-                <a:solidFill>
-                  <a:srgbClr val="31515E"/>
-                </a:solidFill>
-                <a:latin typeface="DejaVu Sans"/>
-                <a:ea typeface="DejaVu Sans"/>
-                <a:cs typeface="DejaVu Sans"/>
-              </a:defRPr>
-            </a:lvl6pPr>
-            <a:lvl7pPr>
-              <a:defRPr sz="2025" b="0">
-                <a:solidFill>
-                  <a:srgbClr val="31515E"/>
-                </a:solidFill>
-                <a:latin typeface="DejaVu Sans"/>
-                <a:ea typeface="DejaVu Sans"/>
-                <a:cs typeface="DejaVu Sans"/>
-              </a:defRPr>
-            </a:lvl7pPr>
-            <a:lvl8pPr>
-              <a:defRPr sz="2025" b="0">
-                <a:solidFill>
-                  <a:srgbClr val="31515E"/>
-                </a:solidFill>
-                <a:latin typeface="DejaVu Sans"/>
-                <a:ea typeface="DejaVu Sans"/>
-                <a:cs typeface="DejaVu Sans"/>
-              </a:defRPr>
-            </a:lvl8pPr>
-            <a:lvl9pPr>
-              <a:defRPr sz="2025" b="0">
-                <a:solidFill>
-                  <a:srgbClr val="31515E"/>
-                </a:solidFill>
-                <a:latin typeface="DejaVu Sans"/>
-                <a:ea typeface="DejaVu Sans"/>
-                <a:cs typeface="DejaVu Sans"/>
-              </a:defRPr>
-            </a:lvl9pPr>
-          </a:lstStyle>
-          <a:p xmlns:a="http://schemas.openxmlformats.org/drawingml/2006/main">
-            <a:pPr>
-              <a:defRPr sz="2025" b="0">
-                <a:solidFill>
-                  <a:srgbClr val="31515E"/>
-                </a:solidFill>
-                <a:latin typeface="DejaVu Sans"/>
-                <a:ea typeface="DejaVu Sans"/>
-                <a:cs typeface="DejaVu Sans"/>
-              </a:defRPr>
-            </a:pPr>
-            <a:r>
-              <a:rPr sz="2025" b="0">
-                <a:solidFill>
-                  <a:srgbClr val="31515E"/>
-                </a:solidFill>
-                <a:latin typeface="DejaVu Sans"/>
-                <a:ea typeface="DejaVu Sans"/>
-                <a:cs typeface="DejaVu Sans"/>
-              </a:rPr>
-              <a:t>El respaldo permite continuar, ajustando la carga disponible.</a:t>
-            </a:r>
-          </a:p>
-        </p:txBody>
-      </p:sp>
-      <p:sp>
-        <p:nvSpPr>
-          <p:cNvPr id="3" name="number">
-            <a:extLst xmlns:a="http://schemas.openxmlformats.org/drawingml/2006/main">
-              <a:ext uri="{FF2B5EF4-FFF2-40B4-BE49-F238E27FC236}">
-                <a16:creationId xmlns:a16="http://schemas.microsoft.com/office/drawing/2014/main" id="{74313F7F-E852-42C0-B388-7BCFB6B62B6A}"/>
-              </a:ext>
-            </a:extLst>
-          </p:cNvPr>
-          <p:cNvSpPr>
-            <a:spLocks xmlns:a="http://schemas.openxmlformats.org/drawingml/2006/main" noGrp="1"/>
-          </p:cNvSpPr>
-          <p:nvPr/>
-        </p:nvSpPr>
-        <p:spPr>
-          <a:xfrm xmlns:a="http://schemas.openxmlformats.org/drawingml/2006/main">
-            <a:off x="10477500" y="6448425"/>
-            <a:ext cx="1123950" cy="238125"/>
-          </a:xfrm>
-          <a:prstGeom xmlns:a="http://schemas.openxmlformats.org/drawingml/2006/main" prst="rect">
-            <a:avLst/>
-          </a:prstGeom>
-          <a:noFill xmlns:a="http://schemas.openxmlformats.org/drawingml/2006/main"/>
-          <a:ln xmlns:a="http://schemas.openxmlformats.org/drawingml/2006/main" w="0">
-            <a:noFill/>
-            <a:prstDash val="solid"/>
-          </a:ln>
-        </p:spPr>
-        <p:txBody>
-          <a:bodyPr xmlns:a="http://schemas.openxmlformats.org/drawingml/2006/main"/>
-          <a:lstStyle xmlns:a="http://schemas.openxmlformats.org/drawingml/2006/main">
-            <a:defPPr>
-              <a:defRPr sz="1275" b="0">
-                <a:solidFill>
-                  <a:srgbClr val="456278"/>
-                </a:solidFill>
-                <a:latin typeface="DejaVu Sans"/>
-                <a:ea typeface="DejaVu Sans"/>
-                <a:cs typeface="DejaVu Sans"/>
-              </a:defRPr>
-            </a:defPPr>
-            <a:lvl1pPr>
-              <a:defRPr sz="1275" b="0">
-                <a:solidFill>
-                  <a:srgbClr val="456278"/>
-                </a:solidFill>
-                <a:latin typeface="DejaVu Sans"/>
-                <a:ea typeface="DejaVu Sans"/>
-                <a:cs typeface="DejaVu Sans"/>
-              </a:defRPr>
-            </a:lvl1pPr>
-            <a:lvl2pPr>
-              <a:defRPr sz="1275" b="0">
-                <a:solidFill>
-                  <a:srgbClr val="456278"/>
-                </a:solidFill>
-                <a:latin typeface="DejaVu Sans"/>
-                <a:ea typeface="DejaVu Sans"/>
-                <a:cs typeface="DejaVu Sans"/>
-              </a:defRPr>
-            </a:lvl2pPr>
-            <a:lvl3pPr>
-              <a:defRPr sz="1275" b="0">
-                <a:solidFill>
-                  <a:srgbClr val="456278"/>
-                </a:solidFill>
-                <a:latin typeface="DejaVu Sans"/>
-                <a:ea typeface="DejaVu Sans"/>
-                <a:cs typeface="DejaVu Sans"/>
-              </a:defRPr>
-            </a:lvl3pPr>
-            <a:lvl4pPr>
-              <a:defRPr sz="1275" b="0">
-                <a:solidFill>
-                  <a:srgbClr val="456278"/>
-                </a:solidFill>
-                <a:latin typeface="DejaVu Sans"/>
-                <a:ea typeface="DejaVu Sans"/>
-                <a:cs typeface="DejaVu Sans"/>
-              </a:defRPr>
-            </a:lvl4pPr>
-            <a:lvl5pPr>
-              <a:defRPr sz="1275" b="0">
-                <a:solidFill>
-                  <a:srgbClr val="456278"/>
-                </a:solidFill>
-                <a:latin typeface="DejaVu Sans"/>
-                <a:ea typeface="DejaVu Sans"/>
-                <a:cs typeface="DejaVu Sans"/>
-              </a:defRPr>
-            </a:lvl5pPr>
-            <a:lvl6pPr>
-              <a:defRPr sz="1275" b="0">
-                <a:solidFill>
-                  <a:srgbClr val="456278"/>
-                </a:solidFill>
-                <a:latin typeface="DejaVu Sans"/>
-                <a:ea typeface="DejaVu Sans"/>
-                <a:cs typeface="DejaVu Sans"/>
-              </a:defRPr>
-            </a:lvl6pPr>
-            <a:lvl7pPr>
-              <a:defRPr sz="1275" b="0">
-                <a:solidFill>
-                  <a:srgbClr val="456278"/>
-                </a:solidFill>
-                <a:latin typeface="DejaVu Sans"/>
-                <a:ea typeface="DejaVu Sans"/>
-                <a:cs typeface="DejaVu Sans"/>
-              </a:defRPr>
-            </a:lvl7pPr>
-            <a:lvl8pPr>
-              <a:defRPr sz="1275" b="0">
-                <a:solidFill>
-                  <a:srgbClr val="456278"/>
-                </a:solidFill>
-                <a:latin typeface="DejaVu Sans"/>
-                <a:ea typeface="DejaVu Sans"/>
-                <a:cs typeface="DejaVu Sans"/>
-              </a:defRPr>
-            </a:lvl8pPr>
-            <a:lvl9pPr>
-              <a:defRPr sz="1275" b="0">
-                <a:solidFill>
-                  <a:srgbClr val="456278"/>
-                </a:solidFill>
-                <a:latin typeface="DejaVu Sans"/>
-                <a:ea typeface="DejaVu Sans"/>
-                <a:cs typeface="DejaVu Sans"/>
-              </a:defRPr>
-            </a:lvl9pPr>
-          </a:lstStyle>
-          <a:p xmlns:a="http://schemas.openxmlformats.org/drawingml/2006/main">
-            <a:pPr>
-              <a:defRPr sz="1275" b="0">
-                <a:solidFill>
-                  <a:srgbClr val="456278"/>
-                </a:solidFill>
-                <a:latin typeface="DejaVu Sans"/>
-                <a:ea typeface="DejaVu Sans"/>
-                <a:cs typeface="DejaVu Sans"/>
-              </a:defRPr>
-            </a:pPr>
-            <a:r>
-              <a:rPr sz="1275" b="0">
-                <a:solidFill>
-                  <a:srgbClr val="456278"/>
-                </a:solidFill>
-                <a:latin typeface="DejaVu Sans"/>
-                <a:ea typeface="DejaVu Sans"/>
-                <a:cs typeface="DejaVu Sans"/>
-              </a:rPr>
-              <a:t>07 / 9</a:t>
-            </a:r>
-          </a:p>
-        </p:txBody>
-      </p:sp>
-      <p:sp>
-        <p:nvSpPr>
-          <p:cNvPr id="4" name="project">
-            <a:extLst xmlns:a="http://schemas.openxmlformats.org/drawingml/2006/main">
-              <a:ext uri="{FF2B5EF4-FFF2-40B4-BE49-F238E27FC236}">
-                <a16:creationId xmlns:a16="http://schemas.microsoft.com/office/drawing/2014/main" id="{684282B9-2EA5-474D-A16A-A6740125AA36}"/>
-              </a:ext>
-            </a:extLst>
-          </p:cNvPr>
-          <p:cNvSpPr>
-            <a:spLocks xmlns:a="http://schemas.openxmlformats.org/drawingml/2006/main" noGrp="1"/>
-          </p:cNvSpPr>
-          <p:nvPr/>
-        </p:nvSpPr>
-        <p:spPr>
-          <a:xfrm xmlns:a="http://schemas.openxmlformats.org/drawingml/2006/main">
-            <a:off x="609600" y="6477000"/>
-            <a:ext cx="8382000" cy="228600"/>
-          </a:xfrm>
-          <a:prstGeom xmlns:a="http://schemas.openxmlformats.org/drawingml/2006/main" prst="rect">
-            <a:avLst/>
-          </a:prstGeom>
-          <a:noFill xmlns:a="http://schemas.openxmlformats.org/drawingml/2006/main"/>
-          <a:ln xmlns:a="http://schemas.openxmlformats.org/drawingml/2006/main" w="0">
-            <a:noFill/>
-            <a:prstDash val="solid"/>
-          </a:ln>
-        </p:spPr>
-        <p:txBody>
-          <a:bodyPr xmlns:a="http://schemas.openxmlformats.org/drawingml/2006/main"/>
-          <a:lstStyle xmlns:a="http://schemas.openxmlformats.org/drawingml/2006/main">
-            <a:defPPr>
-              <a:defRPr sz="1200" b="0">
-                <a:solidFill>
-                  <a:srgbClr val="456278"/>
-                </a:solidFill>
-                <a:latin typeface="DejaVu Sans"/>
-                <a:ea typeface="DejaVu Sans"/>
-                <a:cs typeface="DejaVu Sans"/>
-              </a:defRPr>
-            </a:defPPr>
-            <a:lvl1pPr>
-              <a:defRPr sz="1200" b="0">
-                <a:solidFill>
-                  <a:srgbClr val="456278"/>
-                </a:solidFill>
-                <a:latin typeface="DejaVu Sans"/>
-                <a:ea typeface="DejaVu Sans"/>
-                <a:cs typeface="DejaVu Sans"/>
-              </a:defRPr>
-            </a:lvl1pPr>
-            <a:lvl2pPr>
-              <a:defRPr sz="1200" b="0">
-                <a:solidFill>
-                  <a:srgbClr val="456278"/>
-                </a:solidFill>
-                <a:latin typeface="DejaVu Sans"/>
-                <a:ea typeface="DejaVu Sans"/>
-                <a:cs typeface="DejaVu Sans"/>
-              </a:defRPr>
-            </a:lvl2pPr>
-            <a:lvl3pPr>
-              <a:defRPr sz="1200" b="0">
-                <a:solidFill>
-                  <a:srgbClr val="456278"/>
-                </a:solidFill>
-                <a:latin typeface="DejaVu Sans"/>
-                <a:ea typeface="DejaVu Sans"/>
-                <a:cs typeface="DejaVu Sans"/>
-              </a:defRPr>
-            </a:lvl3pPr>
-            <a:lvl4pPr>
-              <a:defRPr sz="1200" b="0">
-                <a:solidFill>
-                  <a:srgbClr val="456278"/>
-                </a:solidFill>
-                <a:latin typeface="DejaVu Sans"/>
-                <a:ea typeface="DejaVu Sans"/>
-                <a:cs typeface="DejaVu Sans"/>
-              </a:defRPr>
-            </a:lvl4pPr>
-            <a:lvl5pPr>
-              <a:defRPr sz="1200" b="0">
-                <a:solidFill>
-                  <a:srgbClr val="456278"/>
-                </a:solidFill>
-                <a:latin typeface="DejaVu Sans"/>
-                <a:ea typeface="DejaVu Sans"/>
-                <a:cs typeface="DejaVu Sans"/>
-              </a:defRPr>
-            </a:lvl5pPr>
-            <a:lvl6pPr>
-              <a:defRPr sz="1200" b="0">
-                <a:solidFill>
-                  <a:srgbClr val="456278"/>
-                </a:solidFill>
-                <a:latin typeface="DejaVu Sans"/>
-                <a:ea typeface="DejaVu Sans"/>
-                <a:cs typeface="DejaVu Sans"/>
-              </a:defRPr>
-            </a:lvl6pPr>
-            <a:lvl7pPr>
-              <a:defRPr sz="1200" b="0">
-                <a:solidFill>
-                  <a:srgbClr val="456278"/>
-                </a:solidFill>
-                <a:latin typeface="DejaVu Sans"/>
-                <a:ea typeface="DejaVu Sans"/>
-                <a:cs typeface="DejaVu Sans"/>
-              </a:defRPr>
-            </a:lvl7pPr>
-            <a:lvl8pPr>
-              <a:defRPr sz="1200" b="0">
-                <a:solidFill>
-                  <a:srgbClr val="456278"/>
-                </a:solidFill>
-                <a:latin typeface="DejaVu Sans"/>
-                <a:ea typeface="DejaVu Sans"/>
-                <a:cs typeface="DejaVu Sans"/>
-              </a:defRPr>
-            </a:lvl8pPr>
-            <a:lvl9pPr>
-              <a:defRPr sz="1200" b="0">
-                <a:solidFill>
-                  <a:srgbClr val="456278"/>
-                </a:solidFill>
-                <a:latin typeface="DejaVu Sans"/>
-                <a:ea typeface="DejaVu Sans"/>
-                <a:cs typeface="DejaVu Sans"/>
-              </a:defRPr>
-            </a:lvl9pPr>
-          </a:lstStyle>
-          <a:p xmlns:a="http://schemas.openxmlformats.org/drawingml/2006/main">
-            <a:pPr>
-              <a:defRPr sz="1200" b="0">
-                <a:solidFill>
-                  <a:srgbClr val="456278"/>
-                </a:solidFill>
-                <a:latin typeface="DejaVu Sans"/>
-                <a:ea typeface="DejaVu Sans"/>
-                <a:cs typeface="DejaVu Sans"/>
-              </a:defRPr>
-            </a:pPr>
-            <a:r>
-              <a:rPr sz="1200" b="0">
-                <a:solidFill>
-                  <a:srgbClr val="456278"/>
-                </a:solidFill>
-                <a:latin typeface="DejaVu Sans"/>
-                <a:ea typeface="DejaVu Sans"/>
-                <a:cs typeface="DejaVu Sans"/>
-              </a:rPr>
-              <a:t>Financiera Pacífico</a:t>
-            </a:r>
-          </a:p>
-        </p:txBody>
-      </p:sp>
-      <p:graphicFrame>
-        <p:nvGraphicFramePr>
-          <p:cNvPr id="5" name="">
-            <a:extLst xmlns:a="http://schemas.openxmlformats.org/drawingml/2006/main">
-              <a:ext uri="{FF2B5EF4-FFF2-40B4-BE49-F238E27FC236}">
-                <a16:creationId xmlns:a16="http://schemas.microsoft.com/office/drawing/2014/main" id="{A11D9EB3-4FC4-404B-BAFC-61F4CF5130B6}"/>
-              </a:ext>
-            </a:extLst>
-          </p:cNvPr>
-          <p:cNvGraphicFramePr/>
-          <p:nvPr/>
-        </p:nvGraphicFramePr>
-        <p:xfrm>
-          <a:off xmlns:a="http://schemas.openxmlformats.org/drawingml/2006/main" x="609600" y="2428875"/>
-          <a:ext xmlns:a="http://schemas.openxmlformats.org/drawingml/2006/main" cx="10972800" cy="2524125"/>
-        </p:xfrm>
-        <a:graphic xmlns:a="http://schemas.openxmlformats.org/drawingml/2006/main">
-          <a:graphicData uri="http://schemas.openxmlformats.org/drawingml/2006/table">
-            <a:tbl>
-              <a:tblPr/>
-              <a:tblGrid>
-                <a:gridCol w="7905750"/>
-                <a:gridCol w="3067050"/>
-              </a:tblGrid>
-              <a:tr h="631031">
-                <a:tc>
-                  <a:txBody>
-                    <a:bodyPr/>
-                    <a:lstStyle/>
-                    <a:p>
-                      <a:r>
-                        <a:rPr sz="1950" b="1">
-                          <a:solidFill>
-                            <a:srgbClr val="FFFFFF"/>
-                          </a:solidFill>
-                          <a:latin typeface="DejaVu Sans"/>
-                          <a:ea typeface="DejaVu Sans"/>
-                          <a:cs typeface="DejaVu Sans"/>
-                        </a:rPr>
-                        <a:t>Dimensionamiento de Casa Matriz</a:t>
-                      </a:r>
-                    </a:p>
-                  </a:txBody>
-                  <a:tcPr marL="91440" marR="91440" marT="45720" marB="45720">
-                    <a:lnL w="9525">
-                      <a:solidFill>
-                        <a:srgbClr val="C6D7D7"/>
-                      </a:solidFill>
-                      <a:prstDash val="solid"/>
-                    </a:lnL>
-                    <a:lnR w="9525">
-                      <a:solidFill>
-                        <a:srgbClr val="C6D7D7"/>
-                      </a:solidFill>
-                      <a:prstDash val="solid"/>
-                    </a:lnR>
-                    <a:lnT w="9525">
-                      <a:solidFill>
-                        <a:srgbClr val="C6D7D7"/>
-                      </a:solidFill>
-                      <a:prstDash val="solid"/>
-                    </a:lnT>
-                    <a:lnB w="9525">
-                      <a:solidFill>
-                        <a:srgbClr val="C6D7D7"/>
-                      </a:solidFill>
-                      <a:prstDash val="solid"/>
-                    </a:lnB>
-                    <a:solidFill>
-                      <a:srgbClr val="112A3A"/>
-                    </a:solidFill>
-                  </a:tcPr>
-                </a:tc>
-                <a:tc>
-                  <a:txBody>
-                    <a:bodyPr/>
-                    <a:lstStyle/>
-                    <a:p>
-                      <a:r>
-                        <a:rPr sz="1950" b="1">
-                          <a:solidFill>
-                            <a:srgbClr val="FFFFFF"/>
-                          </a:solidFill>
-                          <a:latin typeface="DejaVu Sans"/>
-                          <a:ea typeface="DejaVu Sans"/>
-                          <a:cs typeface="DejaVu Sans"/>
-                        </a:rPr>
-                        <a:t>Subida objetivo</a:t>
-                      </a:r>
-                    </a:p>
-                  </a:txBody>
-                  <a:tcPr marL="91440" marR="91440" marT="45720" marB="45720">
-                    <a:lnR w="9525">
-                      <a:solidFill>
-                        <a:srgbClr val="C6D7D7"/>
-                      </a:solidFill>
-                      <a:prstDash val="solid"/>
-                    </a:lnR>
-                    <a:lnT w="9525">
-                      <a:solidFill>
-                        <a:srgbClr val="C6D7D7"/>
-                      </a:solidFill>
-                      <a:prstDash val="solid"/>
-                    </a:lnT>
-                    <a:lnB w="9525">
-                      <a:solidFill>
-                        <a:srgbClr val="C6D7D7"/>
-                      </a:solidFill>
-                      <a:prstDash val="solid"/>
-                    </a:lnB>
-                    <a:solidFill>
-                      <a:srgbClr val="112A3A"/>
-                    </a:solidFill>
-                  </a:tcPr>
-                </a:tc>
-              </a:tr>
-              <a:tr h="631031">
-                <a:tc>
-                  <a:txBody>
-                    <a:bodyPr/>
-                    <a:lstStyle/>
-                    <a:p>
-                      <a:r>
-                        <a:rPr sz="1950" b="0">
-                          <a:solidFill>
-                            <a:srgbClr val="112A3A"/>
-                          </a:solidFill>
-                          <a:latin typeface="DejaVu Sans"/>
-                          <a:ea typeface="DejaVu Sans"/>
-                          <a:cs typeface="DejaVu Sans"/>
-                        </a:rPr>
-                        <a:t>Sin video</a:t>
-                      </a:r>
-                    </a:p>
-                  </a:txBody>
-                  <a:tcPr marL="91440" marR="91440" marT="45720" marB="45720">
-                    <a:lnL w="9525">
-                      <a:solidFill>
-                        <a:srgbClr val="C6D7D7"/>
-                      </a:solidFill>
-                      <a:prstDash val="solid"/>
-                    </a:lnL>
-                    <a:lnR w="9525">
-                      <a:solidFill>
-                        <a:srgbClr val="C6D7D7"/>
-                      </a:solidFill>
-                      <a:prstDash val="solid"/>
-                    </a:lnR>
-                    <a:lnB w="9525">
-                      <a:solidFill>
-                        <a:srgbClr val="C6D7D7"/>
-                      </a:solidFill>
-                      <a:prstDash val="solid"/>
-                    </a:lnB>
-                    <a:solidFill>
-                      <a:srgbClr val="EDF4F2"/>
-                    </a:solidFill>
-                  </a:tcPr>
-                </a:tc>
-                <a:tc>
-                  <a:txBody>
-                    <a:bodyPr/>
-                    <a:lstStyle/>
-                    <a:p>
-                      <a:r>
-                        <a:rPr sz="1950" b="0">
-                          <a:solidFill>
-                            <a:srgbClr val="112A3A"/>
-                          </a:solidFill>
-                          <a:latin typeface="DejaVu Sans"/>
-                          <a:ea typeface="DejaVu Sans"/>
-                          <a:cs typeface="DejaVu Sans"/>
-                        </a:rPr>
-                        <a:t>647,4 Mbps</a:t>
-                      </a:r>
-                    </a:p>
-                  </a:txBody>
-                  <a:tcPr marL="91440" marR="91440" marT="45720" marB="45720">
-                    <a:lnR w="9525">
-                      <a:solidFill>
-                        <a:srgbClr val="C6D7D7"/>
-                      </a:solidFill>
-                      <a:prstDash val="solid"/>
-                    </a:lnR>
-                    <a:lnB w="9525">
-                      <a:solidFill>
-                        <a:srgbClr val="C6D7D7"/>
-                      </a:solidFill>
-                      <a:prstDash val="solid"/>
-                    </a:lnB>
-                    <a:solidFill>
-                      <a:srgbClr val="EDF4F2"/>
-                    </a:solidFill>
-                  </a:tcPr>
-                </a:tc>
-              </a:tr>
-              <a:tr h="631031">
-                <a:tc>
-                  <a:txBody>
-                    <a:bodyPr/>
-                    <a:lstStyle/>
-                    <a:p>
-                      <a:r>
-                        <a:rPr sz="1950" b="0">
-                          <a:solidFill>
-                            <a:srgbClr val="112A3A"/>
-                          </a:solidFill>
-                          <a:latin typeface="DejaVu Sans"/>
-                          <a:ea typeface="DejaVu Sans"/>
-                          <a:cs typeface="DejaVu Sans"/>
-                        </a:rPr>
-                        <a:t>Con video limitado a 30 remotos y 3 centrales</a:t>
-                      </a:r>
-                    </a:p>
-                  </a:txBody>
-                  <a:tcPr marL="91440" marR="91440" marT="45720" marB="45720">
-                    <a:lnL w="9525">
-                      <a:solidFill>
-                        <a:srgbClr val="C6D7D7"/>
-                      </a:solidFill>
-                      <a:prstDash val="solid"/>
-                    </a:lnL>
-                    <a:lnR w="9525">
-                      <a:solidFill>
-                        <a:srgbClr val="C6D7D7"/>
-                      </a:solidFill>
-                      <a:prstDash val="solid"/>
-                    </a:lnR>
-                    <a:lnB w="9525">
-                      <a:solidFill>
-                        <a:srgbClr val="C6D7D7"/>
-                      </a:solidFill>
-                      <a:prstDash val="solid"/>
-                    </a:lnB>
-                    <a:solidFill>
-                      <a:srgbClr val="FFFFFF"/>
-                    </a:solidFill>
-                  </a:tcPr>
-                </a:tc>
-                <a:tc>
-                  <a:txBody>
-                    <a:bodyPr/>
-                    <a:lstStyle/>
-                    <a:p>
-                      <a:r>
-                        <a:rPr sz="1950" b="0">
-                          <a:solidFill>
-                            <a:srgbClr val="112A3A"/>
-                          </a:solidFill>
-                          <a:latin typeface="DejaVu Sans"/>
-                          <a:ea typeface="DejaVu Sans"/>
-                          <a:cs typeface="DejaVu Sans"/>
-                        </a:rPr>
-                        <a:t>965,6 Mbps</a:t>
-                      </a:r>
-                    </a:p>
-                  </a:txBody>
-                  <a:tcPr marL="91440" marR="91440" marT="45720" marB="45720">
-                    <a:lnR w="9525">
-                      <a:solidFill>
-                        <a:srgbClr val="C6D7D7"/>
-                      </a:solidFill>
-                      <a:prstDash val="solid"/>
-                    </a:lnR>
-                    <a:lnB w="9525">
-                      <a:solidFill>
-                        <a:srgbClr val="C6D7D7"/>
-                      </a:solidFill>
-                      <a:prstDash val="solid"/>
-                    </a:lnB>
-                    <a:solidFill>
-                      <a:srgbClr val="FFFFFF"/>
-                    </a:solidFill>
-                  </a:tcPr>
-                </a:tc>
-              </a:tr>
-              <a:tr h="631031">
-                <a:tc>
-                  <a:txBody>
-                    <a:bodyPr/>
-                    <a:lstStyle/>
-                    <a:p>
-                      <a:r>
-                        <a:rPr sz="1950" b="0">
-                          <a:solidFill>
-                            <a:srgbClr val="112A3A"/>
-                          </a:solidFill>
-                          <a:latin typeface="DejaVu Sans"/>
-                          <a:ea typeface="DejaVu Sans"/>
-                          <a:cs typeface="DejaVu Sans"/>
-                        </a:rPr>
-                        <a:t>Principal propuesto, por sentido</a:t>
-                      </a:r>
-                    </a:p>
-                  </a:txBody>
-                  <a:tcPr marL="91440" marR="91440" marT="45720" marB="45720">
-                    <a:lnL w="9525">
-                      <a:solidFill>
-                        <a:srgbClr val="C6D7D7"/>
-                      </a:solidFill>
-                      <a:prstDash val="solid"/>
-                    </a:lnL>
-                    <a:lnR w="9525">
-                      <a:solidFill>
-                        <a:srgbClr val="C6D7D7"/>
-                      </a:solidFill>
-                      <a:prstDash val="solid"/>
-                    </a:lnR>
-                    <a:lnB w="9525">
-                      <a:solidFill>
-                        <a:srgbClr val="C6D7D7"/>
-                      </a:solidFill>
-                      <a:prstDash val="solid"/>
-                    </a:lnB>
-                    <a:solidFill>
-                      <a:srgbClr val="EDF4F2"/>
-                    </a:solidFill>
-                  </a:tcPr>
-                </a:tc>
-                <a:tc>
-                  <a:txBody>
-                    <a:bodyPr/>
-                    <a:lstStyle/>
-                    <a:p>
-                      <a:r>
-                        <a:rPr sz="1950" b="0">
-                          <a:solidFill>
-                            <a:srgbClr val="112A3A"/>
-                          </a:solidFill>
-                          <a:latin typeface="DejaVu Sans"/>
-                          <a:ea typeface="DejaVu Sans"/>
-                          <a:cs typeface="DejaVu Sans"/>
-                        </a:rPr>
-                        <a:t>1.000 Mbps</a:t>
-                      </a:r>
-                    </a:p>
-                  </a:txBody>
-                  <a:tcPr marL="91440" marR="91440" marT="45720" marB="45720">
-                    <a:lnR w="9525">
-                      <a:solidFill>
-                        <a:srgbClr val="C6D7D7"/>
-                      </a:solidFill>
-                      <a:prstDash val="solid"/>
-                    </a:lnR>
-                    <a:lnB w="9525">
-                      <a:solidFill>
-                        <a:srgbClr val="C6D7D7"/>
-                      </a:solidFill>
-                      <a:prstDash val="solid"/>
-                    </a:lnB>
-                    <a:solidFill>
-                      <a:srgbClr val="EDF4F2"/>
-                    </a:solidFill>
-                  </a:tcPr>
-                </a:tc>
-              </a:tr>
-            </a:tbl>
-          </a:graphicData>
-        </a:graphic>
-      </p:graphicFrame>
-      <p:sp>
-        <p:nvSpPr>
-          <p:cNvPr id="6" name="contingency">
-            <a:extLst xmlns:a="http://schemas.openxmlformats.org/drawingml/2006/main">
-              <a:ext uri="{FF2B5EF4-FFF2-40B4-BE49-F238E27FC236}">
-                <a16:creationId xmlns:a16="http://schemas.microsoft.com/office/drawing/2014/main" id="{D200EB3E-9A60-4CBB-B326-1709213E0B47}"/>
-              </a:ext>
-            </a:extLst>
-          </p:cNvPr>
-          <p:cNvSpPr>
-            <a:spLocks xmlns:a="http://schemas.openxmlformats.org/drawingml/2006/main" noGrp="1"/>
-          </p:cNvSpPr>
-          <p:nvPr/>
-        </p:nvSpPr>
-        <p:spPr>
-          <a:xfrm xmlns:a="http://schemas.openxmlformats.org/drawingml/2006/main">
-            <a:off x="609600" y="5219700"/>
-            <a:ext cx="10953750" cy="609600"/>
-          </a:xfrm>
-          <a:prstGeom xmlns:a="http://schemas.openxmlformats.org/drawingml/2006/main" prst="rect">
-            <a:avLst/>
-          </a:prstGeom>
-          <a:noFill xmlns:a="http://schemas.openxmlformats.org/drawingml/2006/main"/>
-          <a:ln xmlns:a="http://schemas.openxmlformats.org/drawingml/2006/main" w="0">
-            <a:noFill/>
-            <a:prstDash val="solid"/>
-          </a:ln>
-        </p:spPr>
-        <p:txBody>
-          <a:bodyPr xmlns:a="http://schemas.openxmlformats.org/drawingml/2006/main"/>
-          <a:lstStyle xmlns:a="http://schemas.openxmlformats.org/drawingml/2006/main">
-            <a:defPPr>
-              <a:defRPr sz="1950" b="1">
-                <a:solidFill>
-                  <a:srgbClr val="00888A"/>
-                </a:solidFill>
-                <a:latin typeface="DejaVu Sans"/>
-                <a:ea typeface="DejaVu Sans"/>
-                <a:cs typeface="DejaVu Sans"/>
-              </a:defRPr>
-            </a:defPPr>
-            <a:lvl1pPr>
-              <a:defRPr sz="1950" b="1">
-                <a:solidFill>
-                  <a:srgbClr val="00888A"/>
-                </a:solidFill>
-                <a:latin typeface="DejaVu Sans"/>
-                <a:ea typeface="DejaVu Sans"/>
-                <a:cs typeface="DejaVu Sans"/>
-              </a:defRPr>
-            </a:lvl1pPr>
-            <a:lvl2pPr>
-              <a:defRPr sz="1950" b="1">
-                <a:solidFill>
-                  <a:srgbClr val="00888A"/>
-                </a:solidFill>
-                <a:latin typeface="DejaVu Sans"/>
-                <a:ea typeface="DejaVu Sans"/>
-                <a:cs typeface="DejaVu Sans"/>
-              </a:defRPr>
-            </a:lvl2pPr>
-            <a:lvl3pPr>
-              <a:defRPr sz="1950" b="1">
-                <a:solidFill>
-                  <a:srgbClr val="00888A"/>
-                </a:solidFill>
-                <a:latin typeface="DejaVu Sans"/>
-                <a:ea typeface="DejaVu Sans"/>
-                <a:cs typeface="DejaVu Sans"/>
-              </a:defRPr>
-            </a:lvl3pPr>
-            <a:lvl4pPr>
-              <a:defRPr sz="1950" b="1">
-                <a:solidFill>
-                  <a:srgbClr val="00888A"/>
-                </a:solidFill>
-                <a:latin typeface="DejaVu Sans"/>
-                <a:ea typeface="DejaVu Sans"/>
-                <a:cs typeface="DejaVu Sans"/>
-              </a:defRPr>
-            </a:lvl4pPr>
-            <a:lvl5pPr>
-              <a:defRPr sz="1950" b="1">
-                <a:solidFill>
-                  <a:srgbClr val="00888A"/>
-                </a:solidFill>
-                <a:latin typeface="DejaVu Sans"/>
-                <a:ea typeface="DejaVu Sans"/>
-                <a:cs typeface="DejaVu Sans"/>
-              </a:defRPr>
-            </a:lvl5pPr>
-            <a:lvl6pPr>
-              <a:defRPr sz="1950" b="1">
-                <a:solidFill>
-                  <a:srgbClr val="00888A"/>
-                </a:solidFill>
-                <a:latin typeface="DejaVu Sans"/>
-                <a:ea typeface="DejaVu Sans"/>
-                <a:cs typeface="DejaVu Sans"/>
-              </a:defRPr>
-            </a:lvl6pPr>
-            <a:lvl7pPr>
-              <a:defRPr sz="1950" b="1">
-                <a:solidFill>
-                  <a:srgbClr val="00888A"/>
-                </a:solidFill>
-                <a:latin typeface="DejaVu Sans"/>
-                <a:ea typeface="DejaVu Sans"/>
-                <a:cs typeface="DejaVu Sans"/>
-              </a:defRPr>
-            </a:lvl7pPr>
-            <a:lvl8pPr>
-              <a:defRPr sz="1950" b="1">
-                <a:solidFill>
-                  <a:srgbClr val="00888A"/>
-                </a:solidFill>
-                <a:latin typeface="DejaVu Sans"/>
-                <a:ea typeface="DejaVu Sans"/>
-                <a:cs typeface="DejaVu Sans"/>
-              </a:defRPr>
-            </a:lvl8pPr>
-            <a:lvl9pPr>
-              <a:defRPr sz="1950" b="1">
-                <a:solidFill>
-                  <a:srgbClr val="00888A"/>
-                </a:solidFill>
-                <a:latin typeface="DejaVu Sans"/>
-                <a:ea typeface="DejaVu Sans"/>
-                <a:cs typeface="DejaVu Sans"/>
-              </a:defRPr>
-            </a:lvl9pPr>
-          </a:lstStyle>
-          <a:p xmlns:a="http://schemas.openxmlformats.org/drawingml/2006/main">
-            <a:pPr>
-              <a:defRPr sz="1950" b="1">
-                <a:solidFill>
-                  <a:srgbClr val="00888A"/>
-                </a:solidFill>
-                <a:latin typeface="DejaVu Sans"/>
-                <a:ea typeface="DejaVu Sans"/>
-                <a:cs typeface="DejaVu Sans"/>
-              </a:defRPr>
-            </a:pPr>
-            <a:r>
-              <a:rPr sz="1950" b="1">
-                <a:solidFill>
-                  <a:srgbClr val="00888A"/>
-                </a:solidFill>
-                <a:latin typeface="DejaVu Sans"/>
-                <a:ea typeface="DejaVu Sans"/>
-                <a:cs typeface="DejaVu Sans"/>
-              </a:rPr>
-              <a:t>En contingencia: aplicación y voz primero; video y cargas grandes esperan.</a:t>
-            </a:r>
-          </a:p>
-        </p:txBody>
-      </p:sp>
-      <p:sp>
-        <p:nvSpPr>
-          <p:cNvPr id="7" name="plan">
-            <a:extLst xmlns:a="http://schemas.openxmlformats.org/drawingml/2006/main">
-              <a:ext uri="{FF2B5EF4-FFF2-40B4-BE49-F238E27FC236}">
-                <a16:creationId xmlns:a16="http://schemas.microsoft.com/office/drawing/2014/main" id="{F3FEDEF4-3BA7-4E2C-9B34-24A646E58070}"/>
-              </a:ext>
-            </a:extLst>
-          </p:cNvPr>
-          <p:cNvSpPr>
-            <a:spLocks xmlns:a="http://schemas.openxmlformats.org/drawingml/2006/main" noGrp="1"/>
-          </p:cNvSpPr>
-          <p:nvPr/>
-        </p:nvSpPr>
-        <p:spPr>
-          <a:xfrm xmlns:a="http://schemas.openxmlformats.org/drawingml/2006/main">
-            <a:off x="609600" y="5934075"/>
-            <a:ext cx="10953750" cy="381000"/>
-          </a:xfrm>
-          <a:prstGeom xmlns:a="http://schemas.openxmlformats.org/drawingml/2006/main" prst="rect">
-            <a:avLst/>
-          </a:prstGeom>
-          <a:noFill xmlns:a="http://schemas.openxmlformats.org/drawingml/2006/main"/>
-          <a:ln xmlns:a="http://schemas.openxmlformats.org/drawingml/2006/main" w="0">
-            <a:noFill/>
-            <a:prstDash val="solid"/>
-          </a:ln>
-        </p:spPr>
-        <p:txBody>
-          <a:bodyPr xmlns:a="http://schemas.openxmlformats.org/drawingml/2006/main"/>
-          <a:lstStyle xmlns:a="http://schemas.openxmlformats.org/drawingml/2006/main">
-            <a:defPPr>
-              <a:defRPr sz="1725" b="0">
-                <a:solidFill>
-                  <a:srgbClr val="112A3A"/>
-                </a:solidFill>
-                <a:latin typeface="DejaVu Sans"/>
-                <a:ea typeface="DejaVu Sans"/>
-                <a:cs typeface="DejaVu Sans"/>
-              </a:defRPr>
-            </a:defPPr>
-            <a:lvl1pPr>
-              <a:defRPr sz="1725" b="0">
-                <a:solidFill>
-                  <a:srgbClr val="112A3A"/>
-                </a:solidFill>
-                <a:latin typeface="DejaVu Sans"/>
-                <a:ea typeface="DejaVu Sans"/>
-                <a:cs typeface="DejaVu Sans"/>
-              </a:defRPr>
-            </a:lvl1pPr>
-            <a:lvl2pPr>
-              <a:defRPr sz="1725" b="0">
-                <a:solidFill>
-                  <a:srgbClr val="112A3A"/>
-                </a:solidFill>
-                <a:latin typeface="DejaVu Sans"/>
-                <a:ea typeface="DejaVu Sans"/>
-                <a:cs typeface="DejaVu Sans"/>
-              </a:defRPr>
-            </a:lvl2pPr>
-            <a:lvl3pPr>
-              <a:defRPr sz="1725" b="0">
-                <a:solidFill>
-                  <a:srgbClr val="112A3A"/>
-                </a:solidFill>
-                <a:latin typeface="DejaVu Sans"/>
-                <a:ea typeface="DejaVu Sans"/>
-                <a:cs typeface="DejaVu Sans"/>
-              </a:defRPr>
-            </a:lvl3pPr>
-            <a:lvl4pPr>
-              <a:defRPr sz="1725" b="0">
-                <a:solidFill>
-                  <a:srgbClr val="112A3A"/>
-                </a:solidFill>
-                <a:latin typeface="DejaVu Sans"/>
-                <a:ea typeface="DejaVu Sans"/>
-                <a:cs typeface="DejaVu Sans"/>
-              </a:defRPr>
-            </a:lvl4pPr>
-            <a:lvl5pPr>
-              <a:defRPr sz="1725" b="0">
-                <a:solidFill>
-                  <a:srgbClr val="112A3A"/>
-                </a:solidFill>
-                <a:latin typeface="DejaVu Sans"/>
-                <a:ea typeface="DejaVu Sans"/>
-                <a:cs typeface="DejaVu Sans"/>
-              </a:defRPr>
-            </a:lvl5pPr>
-            <a:lvl6pPr>
-              <a:defRPr sz="1725" b="0">
-                <a:solidFill>
-                  <a:srgbClr val="112A3A"/>
-                </a:solidFill>
-                <a:latin typeface="DejaVu Sans"/>
-                <a:ea typeface="DejaVu Sans"/>
-                <a:cs typeface="DejaVu Sans"/>
-              </a:defRPr>
-            </a:lvl6pPr>
-            <a:lvl7pPr>
-              <a:defRPr sz="1725" b="0">
-                <a:solidFill>
-                  <a:srgbClr val="112A3A"/>
-                </a:solidFill>
-                <a:latin typeface="DejaVu Sans"/>
-                <a:ea typeface="DejaVu Sans"/>
-                <a:cs typeface="DejaVu Sans"/>
-              </a:defRPr>
-            </a:lvl7pPr>
-            <a:lvl8pPr>
-              <a:defRPr sz="1725" b="0">
-                <a:solidFill>
-                  <a:srgbClr val="112A3A"/>
-                </a:solidFill>
-                <a:latin typeface="DejaVu Sans"/>
-                <a:ea typeface="DejaVu Sans"/>
-                <a:cs typeface="DejaVu Sans"/>
-              </a:defRPr>
-            </a:lvl8pPr>
-            <a:lvl9pPr>
-              <a:defRPr sz="1725" b="0">
-                <a:solidFill>
-                  <a:srgbClr val="112A3A"/>
-                </a:solidFill>
-                <a:latin typeface="DejaVu Sans"/>
-                <a:ea typeface="DejaVu Sans"/>
-                <a:cs typeface="DejaVu Sans"/>
-              </a:defRPr>
-            </a:lvl9pPr>
-          </a:lstStyle>
-          <a:p xmlns:a="http://schemas.openxmlformats.org/drawingml/2006/main">
-            <a:pPr>
-              <a:defRPr sz="1725" b="0">
-                <a:solidFill>
-                  <a:srgbClr val="112A3A"/>
-                </a:solidFill>
-                <a:latin typeface="DejaVu Sans"/>
-                <a:ea typeface="DejaVu Sans"/>
-                <a:cs typeface="DejaVu Sans"/>
-              </a:defRPr>
-            </a:pPr>
-            <a:r>
-              <a:rPr sz="1725" b="0">
-                <a:solidFill>
-                  <a:srgbClr val="112A3A"/>
-                </a:solidFill>
-                <a:latin typeface="DejaVu Sans"/>
-                <a:ea typeface="DejaVu Sans"/>
-                <a:cs typeface="DejaVu Sans"/>
-              </a:rPr>
-              <a:t>Doce semanas: piloto y migración por grupos. Aperturas futuras: recalcular demanda.</a:t>
-            </a:r>
-          </a:p>
-        </p:txBody>
-      </p:sp>
-    </p:spTree>
-    <p:extLst>
-      <p:ext uri="{BB962C8B-B14F-4D97-AF65-F5344CB8AC3E}">
-        <p14:creationId xmlns:p14="http://schemas.microsoft.com/office/powerpoint/2010/main" val="1218943877"/>
-      </p:ext>
-    </p:extLst>
-  </p:cSld>
-</p:sld>
-</file>
-
-<file path=ppt/slides/slide8.xml><?xml version="1.0" encoding="utf-8"?>
 <p:sld xmlns:p="http://schemas.openxmlformats.org/presentationml/2006/main">
   <p:cSld>
     <p:bg>
@@ -12455,6 +8626,7 @@
               </a:defRPr>
             </a:defPPr>
             <a:lvl1pPr>
+              <a:buNone/>
               <a:defRPr sz="3300" b="1">
                 <a:solidFill>
                   <a:srgbClr val="112A3A"/>
@@ -12465,6 +8637,7 @@
               </a:defRPr>
             </a:lvl1pPr>
             <a:lvl2pPr>
+              <a:buNone/>
               <a:defRPr sz="3300" b="1">
                 <a:solidFill>
                   <a:srgbClr val="112A3A"/>
@@ -12475,6 +8648,7 @@
               </a:defRPr>
             </a:lvl2pPr>
             <a:lvl3pPr>
+              <a:buNone/>
               <a:defRPr sz="3300" b="1">
                 <a:solidFill>
                   <a:srgbClr val="112A3A"/>
@@ -12485,6 +8659,7 @@
               </a:defRPr>
             </a:lvl3pPr>
             <a:lvl4pPr>
+              <a:buNone/>
               <a:defRPr sz="3300" b="1">
                 <a:solidFill>
                   <a:srgbClr val="112A3A"/>
@@ -12495,6 +8670,7 @@
               </a:defRPr>
             </a:lvl4pPr>
             <a:lvl5pPr>
+              <a:buNone/>
               <a:defRPr sz="3300" b="1">
                 <a:solidFill>
                   <a:srgbClr val="112A3A"/>
@@ -12505,6 +8681,7 @@
               </a:defRPr>
             </a:lvl5pPr>
             <a:lvl6pPr>
+              <a:buNone/>
               <a:defRPr sz="3300" b="1">
                 <a:solidFill>
                   <a:srgbClr val="112A3A"/>
@@ -12515,6 +8692,7 @@
               </a:defRPr>
             </a:lvl6pPr>
             <a:lvl7pPr>
+              <a:buNone/>
               <a:defRPr sz="3300" b="1">
                 <a:solidFill>
                   <a:srgbClr val="112A3A"/>
@@ -12525,6 +8703,7 @@
               </a:defRPr>
             </a:lvl7pPr>
             <a:lvl8pPr>
+              <a:buNone/>
               <a:defRPr sz="3300" b="1">
                 <a:solidFill>
                   <a:srgbClr val="112A3A"/>
@@ -12535,6 +8714,7 @@
               </a:defRPr>
             </a:lvl8pPr>
             <a:lvl9pPr>
+              <a:buNone/>
               <a:defRPr sz="3300" b="1">
                 <a:solidFill>
                   <a:srgbClr val="112A3A"/>
@@ -12547,6 +8727,7 @@
           </a:lstStyle>
           <a:p xmlns:a="http://schemas.openxmlformats.org/drawingml/2006/main">
             <a:pPr>
+              <a:buNone/>
               <a:defRPr sz="3300" b="1">
                 <a:solidFill>
                   <a:srgbClr val="112A3A"/>
@@ -12565,7 +8746,7 @@
                 <a:ea typeface="DejaVu Sans"/>
                 <a:cs typeface="DejaVu Sans"/>
               </a:rPr>
-              <a:t>Dos alternativas de inversión</a:t>
+              <a:t>Alternativas A y B</a:t>
             </a:r>
           </a:p>
         </p:txBody>
@@ -12612,6 +8793,7 @@
               </a:defRPr>
             </a:defPPr>
             <a:lvl1pPr>
+              <a:buNone/>
               <a:defRPr sz="2025" b="0">
                 <a:solidFill>
                   <a:srgbClr val="31515E"/>
@@ -12622,6 +8804,7 @@
               </a:defRPr>
             </a:lvl1pPr>
             <a:lvl2pPr>
+              <a:buNone/>
               <a:defRPr sz="2025" b="0">
                 <a:solidFill>
                   <a:srgbClr val="31515E"/>
@@ -12632,6 +8815,7 @@
               </a:defRPr>
             </a:lvl2pPr>
             <a:lvl3pPr>
+              <a:buNone/>
               <a:defRPr sz="2025" b="0">
                 <a:solidFill>
                   <a:srgbClr val="31515E"/>
@@ -12642,6 +8826,7 @@
               </a:defRPr>
             </a:lvl3pPr>
             <a:lvl4pPr>
+              <a:buNone/>
               <a:defRPr sz="2025" b="0">
                 <a:solidFill>
                   <a:srgbClr val="31515E"/>
@@ -12652,6 +8837,7 @@
               </a:defRPr>
             </a:lvl4pPr>
             <a:lvl5pPr>
+              <a:buNone/>
               <a:defRPr sz="2025" b="0">
                 <a:solidFill>
                   <a:srgbClr val="31515E"/>
@@ -12662,6 +8848,7 @@
               </a:defRPr>
             </a:lvl5pPr>
             <a:lvl6pPr>
+              <a:buNone/>
               <a:defRPr sz="2025" b="0">
                 <a:solidFill>
                   <a:srgbClr val="31515E"/>
@@ -12672,6 +8859,7 @@
               </a:defRPr>
             </a:lvl6pPr>
             <a:lvl7pPr>
+              <a:buNone/>
               <a:defRPr sz="2025" b="0">
                 <a:solidFill>
                   <a:srgbClr val="31515E"/>
@@ -12682,6 +8870,7 @@
               </a:defRPr>
             </a:lvl7pPr>
             <a:lvl8pPr>
+              <a:buNone/>
               <a:defRPr sz="2025" b="0">
                 <a:solidFill>
                   <a:srgbClr val="31515E"/>
@@ -12692,6 +8881,7 @@
               </a:defRPr>
             </a:lvl8pPr>
             <a:lvl9pPr>
+              <a:buNone/>
               <a:defRPr sz="2025" b="0">
                 <a:solidFill>
                   <a:srgbClr val="31515E"/>
@@ -12704,6 +8894,7 @@
           </a:lstStyle>
           <a:p xmlns:a="http://schemas.openxmlformats.org/drawingml/2006/main">
             <a:pPr>
+              <a:buNone/>
               <a:defRPr sz="2025" b="0">
                 <a:solidFill>
                   <a:srgbClr val="31515E"/>
@@ -12722,7 +8913,7 @@
                 <a:ea typeface="DejaVu Sans"/>
                 <a:cs typeface="DejaVu Sans"/>
               </a:rPr>
-              <a:t>El diseño también tiene que poder financiarse.</a:t>
+              <a:t>El mismo objetivo de continuidad, con equipos e inversiones diferentes.</a:t>
             </a:r>
           </a:p>
         </p:txBody>
@@ -12769,6 +8960,7 @@
               </a:defRPr>
             </a:defPPr>
             <a:lvl1pPr>
+              <a:buNone/>
               <a:defRPr sz="1275" b="0">
                 <a:solidFill>
                   <a:srgbClr val="456278"/>
@@ -12779,6 +8971,7 @@
               </a:defRPr>
             </a:lvl1pPr>
             <a:lvl2pPr>
+              <a:buNone/>
               <a:defRPr sz="1275" b="0">
                 <a:solidFill>
                   <a:srgbClr val="456278"/>
@@ -12789,6 +8982,7 @@
               </a:defRPr>
             </a:lvl2pPr>
             <a:lvl3pPr>
+              <a:buNone/>
               <a:defRPr sz="1275" b="0">
                 <a:solidFill>
                   <a:srgbClr val="456278"/>
@@ -12799,6 +8993,7 @@
               </a:defRPr>
             </a:lvl3pPr>
             <a:lvl4pPr>
+              <a:buNone/>
               <a:defRPr sz="1275" b="0">
                 <a:solidFill>
                   <a:srgbClr val="456278"/>
@@ -12809,6 +9004,7 @@
               </a:defRPr>
             </a:lvl4pPr>
             <a:lvl5pPr>
+              <a:buNone/>
               <a:defRPr sz="1275" b="0">
                 <a:solidFill>
                   <a:srgbClr val="456278"/>
@@ -12819,6 +9015,7 @@
               </a:defRPr>
             </a:lvl5pPr>
             <a:lvl6pPr>
+              <a:buNone/>
               <a:defRPr sz="1275" b="0">
                 <a:solidFill>
                   <a:srgbClr val="456278"/>
@@ -12829,6 +9026,7 @@
               </a:defRPr>
             </a:lvl6pPr>
             <a:lvl7pPr>
+              <a:buNone/>
               <a:defRPr sz="1275" b="0">
                 <a:solidFill>
                   <a:srgbClr val="456278"/>
@@ -12839,6 +9037,7 @@
               </a:defRPr>
             </a:lvl7pPr>
             <a:lvl8pPr>
+              <a:buNone/>
               <a:defRPr sz="1275" b="0">
                 <a:solidFill>
                   <a:srgbClr val="456278"/>
@@ -12849,6 +9048,7 @@
               </a:defRPr>
             </a:lvl8pPr>
             <a:lvl9pPr>
+              <a:buNone/>
               <a:defRPr sz="1275" b="0">
                 <a:solidFill>
                   <a:srgbClr val="456278"/>
@@ -12861,6 +9061,7 @@
           </a:lstStyle>
           <a:p xmlns:a="http://schemas.openxmlformats.org/drawingml/2006/main">
             <a:pPr>
+              <a:buNone/>
               <a:defRPr sz="1275" b="0">
                 <a:solidFill>
                   <a:srgbClr val="456278"/>
@@ -12879,7 +9080,7 @@
                 <a:ea typeface="DejaVu Sans"/>
                 <a:cs typeface="DejaVu Sans"/>
               </a:rPr>
-              <a:t>08 / 9</a:t>
+              <a:t>05 / 6</a:t>
             </a:r>
           </a:p>
         </p:txBody>
@@ -12926,6 +9127,7 @@
               </a:defRPr>
             </a:defPPr>
             <a:lvl1pPr>
+              <a:buNone/>
               <a:defRPr sz="1200" b="0">
                 <a:solidFill>
                   <a:srgbClr val="456278"/>
@@ -12936,6 +9138,7 @@
               </a:defRPr>
             </a:lvl1pPr>
             <a:lvl2pPr>
+              <a:buNone/>
               <a:defRPr sz="1200" b="0">
                 <a:solidFill>
                   <a:srgbClr val="456278"/>
@@ -12946,6 +9149,7 @@
               </a:defRPr>
             </a:lvl2pPr>
             <a:lvl3pPr>
+              <a:buNone/>
               <a:defRPr sz="1200" b="0">
                 <a:solidFill>
                   <a:srgbClr val="456278"/>
@@ -12956,6 +9160,7 @@
               </a:defRPr>
             </a:lvl3pPr>
             <a:lvl4pPr>
+              <a:buNone/>
               <a:defRPr sz="1200" b="0">
                 <a:solidFill>
                   <a:srgbClr val="456278"/>
@@ -12966,6 +9171,7 @@
               </a:defRPr>
             </a:lvl4pPr>
             <a:lvl5pPr>
+              <a:buNone/>
               <a:defRPr sz="1200" b="0">
                 <a:solidFill>
                   <a:srgbClr val="456278"/>
@@ -12976,6 +9182,7 @@
               </a:defRPr>
             </a:lvl5pPr>
             <a:lvl6pPr>
+              <a:buNone/>
               <a:defRPr sz="1200" b="0">
                 <a:solidFill>
                   <a:srgbClr val="456278"/>
@@ -12986,6 +9193,7 @@
               </a:defRPr>
             </a:lvl6pPr>
             <a:lvl7pPr>
+              <a:buNone/>
               <a:defRPr sz="1200" b="0">
                 <a:solidFill>
                   <a:srgbClr val="456278"/>
@@ -12996,6 +9204,7 @@
               </a:defRPr>
             </a:lvl7pPr>
             <a:lvl8pPr>
+              <a:buNone/>
               <a:defRPr sz="1200" b="0">
                 <a:solidFill>
                   <a:srgbClr val="456278"/>
@@ -13006,6 +9215,7 @@
               </a:defRPr>
             </a:lvl8pPr>
             <a:lvl9pPr>
+              <a:buNone/>
               <a:defRPr sz="1200" b="0">
                 <a:solidFill>
                   <a:srgbClr val="456278"/>
@@ -13018,6 +9228,7 @@
           </a:lstStyle>
           <a:p xmlns:a="http://schemas.openxmlformats.org/drawingml/2006/main">
             <a:pPr>
+              <a:buNone/>
               <a:defRPr sz="1200" b="0">
                 <a:solidFill>
                   <a:srgbClr val="456278"/>
@@ -13046,7 +9257,7 @@
           <p:cNvPr id="5" name="">
             <a:extLst xmlns:a="http://schemas.openxmlformats.org/drawingml/2006/main">
               <a:ext uri="{FF2B5EF4-FFF2-40B4-BE49-F238E27FC236}">
-                <a16:creationId xmlns:a16="http://schemas.microsoft.com/office/drawing/2014/main" id="{920B8F46-6E1A-4C6C-BF4A-531401A85DED}"/>
+                <a16:creationId xmlns:a16="http://schemas.microsoft.com/office/drawing/2014/main" id="{46551E75-B6F0-46B6-AF11-07449C426412}"/>
               </a:ext>
             </a:extLst>
           </p:cNvPr>
@@ -13055,7 +9266,7 @@
         </p:nvGraphicFramePr>
         <p:xfrm>
           <a:off xmlns:a="http://schemas.openxmlformats.org/drawingml/2006/main" x="609600" y="2428875"/>
-          <a:ext xmlns:a="http://schemas.openxmlformats.org/drawingml/2006/main" cx="10972800" cy="2762250"/>
+          <a:ext xmlns:a="http://schemas.openxmlformats.org/drawingml/2006/main" cx="10972800" cy="4143378"/>
         </p:xfrm>
         <a:graphic xmlns:a="http://schemas.openxmlformats.org/drawingml/2006/main">
           <a:graphicData uri="http://schemas.openxmlformats.org/drawingml/2006/table">
@@ -13066,14 +9277,14 @@
                 <a:gridCol w="3152775"/>
                 <a:gridCol w="3152775"/>
               </a:tblGrid>
-              <a:tr h="690563">
+              <a:tr h="457200">
                 <a:tc>
                   <a:txBody>
                     <a:bodyPr/>
                     <a:lstStyle/>
                     <a:p>
                       <a:r>
-                        <a:rPr sz="1950" b="1">
+                        <a:rPr sz="1800" b="1">
                           <a:solidFill>
                             <a:srgbClr val="FFFFFF"/>
                           </a:solidFill>
@@ -13081,7 +9292,7 @@
                           <a:ea typeface="DejaVu Sans"/>
                           <a:cs typeface="DejaVu Sans"/>
                         </a:rPr>
-                        <a:t>CLP, IVA supuesto incluido</a:t>
+                        <a:t>Concepto</a:t>
                       </a:r>
                     </a:p>
                   </a:txBody>
@@ -13121,7 +9332,7 @@
                     <a:lstStyle/>
                     <a:p>
                       <a:r>
-                        <a:rPr sz="1950" b="1">
+                        <a:rPr sz="1800" b="1">
                           <a:solidFill>
                             <a:srgbClr val="FFFFFF"/>
                           </a:solidFill>
@@ -13129,7 +9340,7 @@
                           <a:ea typeface="DejaVu Sans"/>
                           <a:cs typeface="DejaVu Sans"/>
                         </a:rPr>
-                        <a:t>A: Cisco / Palo Alto</a:t>
+                        <a:t>A</a:t>
                       </a:r>
                     </a:p>
                   </a:txBody>
@@ -13163,7 +9374,7 @@
                     <a:lstStyle/>
                     <a:p>
                       <a:r>
-                        <a:rPr sz="1950" b="1">
+                        <a:rPr sz="1800" b="1">
                           <a:solidFill>
                             <a:srgbClr val="FFFFFF"/>
                           </a:solidFill>
@@ -13171,7 +9382,7 @@
                           <a:ea typeface="DejaVu Sans"/>
                           <a:cs typeface="DejaVu Sans"/>
                         </a:rPr>
-                        <a:t>B: MikroTik / OPNsense</a:t>
+                        <a:t>B</a:t>
                       </a:r>
                     </a:p>
                   </a:txBody>
@@ -13200,14 +9411,246 @@
                   </a:tcPr>
                 </a:tc>
               </a:tr>
-              <a:tr h="690563">
+              <a:tr h="457200">
                 <a:tc>
                   <a:txBody>
                     <a:bodyPr/>
                     <a:lstStyle/>
                     <a:p>
                       <a:r>
-                        <a:rPr sz="1950" b="0">
+                        <a:rPr sz="1800" b="0">
+                          <a:solidFill>
+                            <a:srgbClr val="112A3A"/>
+                          </a:solidFill>
+                          <a:latin typeface="DejaVu Sans"/>
+                          <a:ea typeface="DejaVu Sans"/>
+                          <a:cs typeface="DejaVu Sans"/>
+                        </a:rPr>
+                        <a:t>Routers de sucursal</a:t>
+                      </a:r>
+                    </a:p>
+                  </a:txBody>
+                  <a:tcPr marL="91440" marR="91440" marT="45720" marB="45720">
+                    <a:lnL w="9525">
+                      <a:solidFill>
+                        <a:srgbClr val="C6D7D7"/>
+                      </a:solidFill>
+                      <a:prstDash val="solid"/>
+                    </a:lnL>
+                    <a:lnR w="9525">
+                      <a:solidFill>
+                        <a:srgbClr val="C6D7D7"/>
+                      </a:solidFill>
+                      <a:prstDash val="solid"/>
+                    </a:lnR>
+                    <a:lnB w="9525">
+                      <a:solidFill>
+                        <a:srgbClr val="C6D7D7"/>
+                      </a:solidFill>
+                      <a:prstDash val="solid"/>
+                    </a:lnB>
+                    <a:solidFill>
+                      <a:srgbClr val="EDF4F2"/>
+                    </a:solidFill>
+                  </a:tcPr>
+                </a:tc>
+                <a:tc>
+                  <a:txBody>
+                    <a:bodyPr/>
+                    <a:lstStyle/>
+                    <a:p>
+                      <a:r>
+                        <a:rPr sz="1800" b="0">
+                          <a:solidFill>
+                            <a:srgbClr val="112A3A"/>
+                          </a:solidFill>
+                          <a:latin typeface="DejaVu Sans"/>
+                          <a:ea typeface="DejaVu Sans"/>
+                          <a:cs typeface="DejaVu Sans"/>
+                        </a:rPr>
+                        <a:t>Cisco</a:t>
+                      </a:r>
+                    </a:p>
+                  </a:txBody>
+                  <a:tcPr marL="91440" marR="91440" marT="45720" marB="45720">
+                    <a:lnR w="9525">
+                      <a:solidFill>
+                        <a:srgbClr val="C6D7D7"/>
+                      </a:solidFill>
+                      <a:prstDash val="solid"/>
+                    </a:lnR>
+                    <a:lnB w="9525">
+                      <a:solidFill>
+                        <a:srgbClr val="C6D7D7"/>
+                      </a:solidFill>
+                      <a:prstDash val="solid"/>
+                    </a:lnB>
+                    <a:solidFill>
+                      <a:srgbClr val="EDF4F2"/>
+                    </a:solidFill>
+                  </a:tcPr>
+                </a:tc>
+                <a:tc>
+                  <a:txBody>
+                    <a:bodyPr/>
+                    <a:lstStyle/>
+                    <a:p>
+                      <a:r>
+                        <a:rPr sz="1800" b="0">
+                          <a:solidFill>
+                            <a:srgbClr val="112A3A"/>
+                          </a:solidFill>
+                          <a:latin typeface="DejaVu Sans"/>
+                          <a:ea typeface="DejaVu Sans"/>
+                          <a:cs typeface="DejaVu Sans"/>
+                        </a:rPr>
+                        <a:t>MikroTik</a:t>
+                      </a:r>
+                    </a:p>
+                  </a:txBody>
+                  <a:tcPr marL="91440" marR="91440" marT="45720" marB="45720">
+                    <a:lnR w="9525">
+                      <a:solidFill>
+                        <a:srgbClr val="C6D7D7"/>
+                      </a:solidFill>
+                      <a:prstDash val="solid"/>
+                    </a:lnR>
+                    <a:lnB w="9525">
+                      <a:solidFill>
+                        <a:srgbClr val="C6D7D7"/>
+                      </a:solidFill>
+                      <a:prstDash val="solid"/>
+                    </a:lnB>
+                    <a:solidFill>
+                      <a:srgbClr val="EDF4F2"/>
+                    </a:solidFill>
+                  </a:tcPr>
+                </a:tc>
+              </a:tr>
+              <a:tr h="457200">
+                <a:tc>
+                  <a:txBody>
+                    <a:bodyPr/>
+                    <a:lstStyle/>
+                    <a:p>
+                      <a:r>
+                        <a:rPr sz="1800" b="0">
+                          <a:solidFill>
+                            <a:srgbClr val="112A3A"/>
+                          </a:solidFill>
+                          <a:latin typeface="DejaVu Sans"/>
+                          <a:ea typeface="DejaVu Sans"/>
+                          <a:cs typeface="DejaVu Sans"/>
+                        </a:rPr>
+                        <a:t>Firewall central</a:t>
+                      </a:r>
+                    </a:p>
+                  </a:txBody>
+                  <a:tcPr marL="91440" marR="91440" marT="45720" marB="45720">
+                    <a:lnL w="9525">
+                      <a:solidFill>
+                        <a:srgbClr val="C6D7D7"/>
+                      </a:solidFill>
+                      <a:prstDash val="solid"/>
+                    </a:lnL>
+                    <a:lnR w="9525">
+                      <a:solidFill>
+                        <a:srgbClr val="C6D7D7"/>
+                      </a:solidFill>
+                      <a:prstDash val="solid"/>
+                    </a:lnR>
+                    <a:lnB w="9525">
+                      <a:solidFill>
+                        <a:srgbClr val="C6D7D7"/>
+                      </a:solidFill>
+                      <a:prstDash val="solid"/>
+                    </a:lnB>
+                    <a:solidFill>
+                      <a:srgbClr val="FFFFFF"/>
+                    </a:solidFill>
+                  </a:tcPr>
+                </a:tc>
+                <a:tc>
+                  <a:txBody>
+                    <a:bodyPr/>
+                    <a:lstStyle/>
+                    <a:p>
+                      <a:r>
+                        <a:rPr sz="1800" b="0">
+                          <a:solidFill>
+                            <a:srgbClr val="112A3A"/>
+                          </a:solidFill>
+                          <a:latin typeface="DejaVu Sans"/>
+                          <a:ea typeface="DejaVu Sans"/>
+                          <a:cs typeface="DejaVu Sans"/>
+                        </a:rPr>
+                        <a:t>Palo Alto</a:t>
+                      </a:r>
+                    </a:p>
+                  </a:txBody>
+                  <a:tcPr marL="91440" marR="91440" marT="45720" marB="45720">
+                    <a:lnR w="9525">
+                      <a:solidFill>
+                        <a:srgbClr val="C6D7D7"/>
+                      </a:solidFill>
+                      <a:prstDash val="solid"/>
+                    </a:lnR>
+                    <a:lnB w="9525">
+                      <a:solidFill>
+                        <a:srgbClr val="C6D7D7"/>
+                      </a:solidFill>
+                      <a:prstDash val="solid"/>
+                    </a:lnB>
+                    <a:solidFill>
+                      <a:srgbClr val="FFFFFF"/>
+                    </a:solidFill>
+                  </a:tcPr>
+                </a:tc>
+                <a:tc>
+                  <a:txBody>
+                    <a:bodyPr/>
+                    <a:lstStyle/>
+                    <a:p>
+                      <a:r>
+                        <a:rPr sz="1800" b="0">
+                          <a:solidFill>
+                            <a:srgbClr val="112A3A"/>
+                          </a:solidFill>
+                          <a:latin typeface="DejaVu Sans"/>
+                          <a:ea typeface="DejaVu Sans"/>
+                          <a:cs typeface="DejaVu Sans"/>
+                        </a:rPr>
+                        <a:t>OPNsense</a:t>
+                      </a:r>
+                    </a:p>
+                  </a:txBody>
+                  <a:tcPr marL="91440" marR="91440" marT="45720" marB="45720">
+                    <a:lnR w="9525">
+                      <a:solidFill>
+                        <a:srgbClr val="C6D7D7"/>
+                      </a:solidFill>
+                      <a:prstDash val="solid"/>
+                    </a:lnR>
+                    <a:lnB w="9525">
+                      <a:solidFill>
+                        <a:srgbClr val="C6D7D7"/>
+                      </a:solidFill>
+                      <a:prstDash val="solid"/>
+                    </a:lnB>
+                    <a:solidFill>
+                      <a:srgbClr val="FFFFFF"/>
+                    </a:solidFill>
+                  </a:tcPr>
+                </a:tc>
+              </a:tr>
+              <a:tr h="457200">
+                <a:tc>
+                  <a:txBody>
+                    <a:bodyPr/>
+                    <a:lstStyle/>
+                    <a:p>
+                      <a:r>
+                        <a:rPr sz="1800" b="0">
                           <a:solidFill>
                             <a:srgbClr val="112A3A"/>
                           </a:solidFill>
@@ -13249,7 +9692,7 @@
                     <a:lstStyle/>
                     <a:p>
                       <a:r>
-                        <a:rPr sz="1950" b="0">
+                        <a:rPr sz="1800" b="0">
                           <a:solidFill>
                             <a:srgbClr val="112A3A"/>
                           </a:solidFill>
@@ -13285,7 +9728,7 @@
                     <a:lstStyle/>
                     <a:p>
                       <a:r>
-                        <a:rPr sz="1950" b="0">
+                        <a:rPr sz="1800" b="0">
                           <a:solidFill>
                             <a:srgbClr val="112A3A"/>
                           </a:solidFill>
@@ -13316,14 +9759,14 @@
                   </a:tcPr>
                 </a:tc>
               </a:tr>
-              <a:tr h="690563">
+              <a:tr h="457200">
                 <a:tc>
                   <a:txBody>
                     <a:bodyPr/>
                     <a:lstStyle/>
                     <a:p>
                       <a:r>
-                        <a:rPr sz="1950" b="0">
+                        <a:rPr sz="1800" b="0">
                           <a:solidFill>
                             <a:srgbClr val="112A3A"/>
                           </a:solidFill>
@@ -13365,7 +9808,7 @@
                     <a:lstStyle/>
                     <a:p>
                       <a:r>
-                        <a:rPr sz="1950" b="0">
+                        <a:rPr sz="1800" b="0">
                           <a:solidFill>
                             <a:srgbClr val="112A3A"/>
                           </a:solidFill>
@@ -13401,7 +9844,7 @@
                     <a:lstStyle/>
                     <a:p>
                       <a:r>
-                        <a:rPr sz="1950" b="0">
+                        <a:rPr sz="1800" b="0">
                           <a:solidFill>
                             <a:srgbClr val="112A3A"/>
                           </a:solidFill>
@@ -13432,14 +9875,14 @@
                   </a:tcPr>
                 </a:tc>
               </a:tr>
-              <a:tr h="690563">
+              <a:tr h="457200">
                 <a:tc>
                   <a:txBody>
                     <a:bodyPr/>
                     <a:lstStyle/>
                     <a:p>
                       <a:r>
-                        <a:rPr sz="1950" b="0">
+                        <a:rPr sz="1800" b="0">
                           <a:solidFill>
                             <a:srgbClr val="112A3A"/>
                           </a:solidFill>
@@ -13481,7 +9924,7 @@
                     <a:lstStyle/>
                     <a:p>
                       <a:r>
-                        <a:rPr sz="1950" b="0">
+                        <a:rPr sz="1800" b="0">
                           <a:solidFill>
                             <a:srgbClr val="112A3A"/>
                           </a:solidFill>
@@ -13517,7 +9960,7 @@
                     <a:lstStyle/>
                     <a:p>
                       <a:r>
-                        <a:rPr sz="1950" b="0">
+                        <a:rPr sz="1800" b="0">
                           <a:solidFill>
                             <a:srgbClr val="112A3A"/>
                           </a:solidFill>
@@ -13594,6 +10037,7 @@
               </a:defRPr>
             </a:defPPr>
             <a:lvl1pPr>
+              <a:buNone/>
               <a:defRPr sz="2175" b="1">
                 <a:solidFill>
                   <a:srgbClr val="00888A"/>
@@ -13604,6 +10048,7 @@
               </a:defRPr>
             </a:lvl1pPr>
             <a:lvl2pPr>
+              <a:buNone/>
               <a:defRPr sz="2175" b="1">
                 <a:solidFill>
                   <a:srgbClr val="00888A"/>
@@ -13614,6 +10059,7 @@
               </a:defRPr>
             </a:lvl2pPr>
             <a:lvl3pPr>
+              <a:buNone/>
               <a:defRPr sz="2175" b="1">
                 <a:solidFill>
                   <a:srgbClr val="00888A"/>
@@ -13624,6 +10070,7 @@
               </a:defRPr>
             </a:lvl3pPr>
             <a:lvl4pPr>
+              <a:buNone/>
               <a:defRPr sz="2175" b="1">
                 <a:solidFill>
                   <a:srgbClr val="00888A"/>
@@ -13634,6 +10081,7 @@
               </a:defRPr>
             </a:lvl4pPr>
             <a:lvl5pPr>
+              <a:buNone/>
               <a:defRPr sz="2175" b="1">
                 <a:solidFill>
                   <a:srgbClr val="00888A"/>
@@ -13644,6 +10092,7 @@
               </a:defRPr>
             </a:lvl5pPr>
             <a:lvl6pPr>
+              <a:buNone/>
               <a:defRPr sz="2175" b="1">
                 <a:solidFill>
                   <a:srgbClr val="00888A"/>
@@ -13654,6 +10103,7 @@
               </a:defRPr>
             </a:lvl6pPr>
             <a:lvl7pPr>
+              <a:buNone/>
               <a:defRPr sz="2175" b="1">
                 <a:solidFill>
                   <a:srgbClr val="00888A"/>
@@ -13664,6 +10114,7 @@
               </a:defRPr>
             </a:lvl7pPr>
             <a:lvl8pPr>
+              <a:buNone/>
               <a:defRPr sz="2175" b="1">
                 <a:solidFill>
                   <a:srgbClr val="00888A"/>
@@ -13674,6 +10125,7 @@
               </a:defRPr>
             </a:lvl8pPr>
             <a:lvl9pPr>
+              <a:buNone/>
               <a:defRPr sz="2175" b="1">
                 <a:solidFill>
                   <a:srgbClr val="00888A"/>
@@ -13686,6 +10138,7 @@
           </a:lstStyle>
           <a:p xmlns:a="http://schemas.openxmlformats.org/drawingml/2006/main">
             <a:pPr>
+              <a:buNone/>
               <a:defRPr sz="2175" b="1">
                 <a:solidFill>
                   <a:srgbClr val="00888A"/>
@@ -13751,6 +10204,7 @@
               </a:defRPr>
             </a:defPPr>
             <a:lvl1pPr>
+              <a:buNone/>
               <a:defRPr sz="1650" b="0">
                 <a:solidFill>
                   <a:srgbClr val="112A3A"/>
@@ -13761,6 +10215,7 @@
               </a:defRPr>
             </a:lvl1pPr>
             <a:lvl2pPr>
+              <a:buNone/>
               <a:defRPr sz="1650" b="0">
                 <a:solidFill>
                   <a:srgbClr val="112A3A"/>
@@ -13771,6 +10226,7 @@
               </a:defRPr>
             </a:lvl2pPr>
             <a:lvl3pPr>
+              <a:buNone/>
               <a:defRPr sz="1650" b="0">
                 <a:solidFill>
                   <a:srgbClr val="112A3A"/>
@@ -13781,6 +10237,7 @@
               </a:defRPr>
             </a:lvl3pPr>
             <a:lvl4pPr>
+              <a:buNone/>
               <a:defRPr sz="1650" b="0">
                 <a:solidFill>
                   <a:srgbClr val="112A3A"/>
@@ -13791,6 +10248,7 @@
               </a:defRPr>
             </a:lvl4pPr>
             <a:lvl5pPr>
+              <a:buNone/>
               <a:defRPr sz="1650" b="0">
                 <a:solidFill>
                   <a:srgbClr val="112A3A"/>
@@ -13801,6 +10259,7 @@
               </a:defRPr>
             </a:lvl5pPr>
             <a:lvl6pPr>
+              <a:buNone/>
               <a:defRPr sz="1650" b="0">
                 <a:solidFill>
                   <a:srgbClr val="112A3A"/>
@@ -13811,6 +10270,7 @@
               </a:defRPr>
             </a:lvl6pPr>
             <a:lvl7pPr>
+              <a:buNone/>
               <a:defRPr sz="1650" b="0">
                 <a:solidFill>
                   <a:srgbClr val="112A3A"/>
@@ -13821,6 +10281,7 @@
               </a:defRPr>
             </a:lvl7pPr>
             <a:lvl8pPr>
+              <a:buNone/>
               <a:defRPr sz="1650" b="0">
                 <a:solidFill>
                   <a:srgbClr val="112A3A"/>
@@ -13831,6 +10292,7 @@
               </a:defRPr>
             </a:lvl8pPr>
             <a:lvl9pPr>
+              <a:buNone/>
               <a:defRPr sz="1650" b="0">
                 <a:solidFill>
                   <a:srgbClr val="112A3A"/>
@@ -13843,6 +10305,7 @@
           </a:lstStyle>
           <a:p xmlns:a="http://schemas.openxmlformats.org/drawingml/2006/main">
             <a:pPr>
+              <a:buNone/>
               <a:defRPr sz="1650" b="0">
                 <a:solidFill>
                   <a:srgbClr val="112A3A"/>
@@ -13876,7 +10339,7 @@
 </p:sld>
 </file>
 
-<file path=ppt/slides/slide9.xml><?xml version="1.0" encoding="utf-8"?>
+<file path=ppt/slides/slide6.xml><?xml version="1.0" encoding="utf-8"?>
 <p:sld xmlns:p="http://schemas.openxmlformats.org/presentationml/2006/main">
   <p:cSld>
     <p:bg>
@@ -13937,6 +10400,7 @@
               </a:defRPr>
             </a:defPPr>
             <a:lvl1pPr>
+              <a:buNone/>
               <a:defRPr sz="3300" b="1">
                 <a:solidFill>
                   <a:srgbClr val="112A3A"/>
@@ -13947,6 +10411,7 @@
               </a:defRPr>
             </a:lvl1pPr>
             <a:lvl2pPr>
+              <a:buNone/>
               <a:defRPr sz="3300" b="1">
                 <a:solidFill>
                   <a:srgbClr val="112A3A"/>
@@ -13957,6 +10422,7 @@
               </a:defRPr>
             </a:lvl2pPr>
             <a:lvl3pPr>
+              <a:buNone/>
               <a:defRPr sz="3300" b="1">
                 <a:solidFill>
                   <a:srgbClr val="112A3A"/>
@@ -13967,6 +10433,7 @@
               </a:defRPr>
             </a:lvl3pPr>
             <a:lvl4pPr>
+              <a:buNone/>
               <a:defRPr sz="3300" b="1">
                 <a:solidFill>
                   <a:srgbClr val="112A3A"/>
@@ -13977,6 +10444,7 @@
               </a:defRPr>
             </a:lvl4pPr>
             <a:lvl5pPr>
+              <a:buNone/>
               <a:defRPr sz="3300" b="1">
                 <a:solidFill>
                   <a:srgbClr val="112A3A"/>
@@ -13987,6 +10455,7 @@
               </a:defRPr>
             </a:lvl5pPr>
             <a:lvl6pPr>
+              <a:buNone/>
               <a:defRPr sz="3300" b="1">
                 <a:solidFill>
                   <a:srgbClr val="112A3A"/>
@@ -13997,6 +10466,7 @@
               </a:defRPr>
             </a:lvl6pPr>
             <a:lvl7pPr>
+              <a:buNone/>
               <a:defRPr sz="3300" b="1">
                 <a:solidFill>
                   <a:srgbClr val="112A3A"/>
@@ -14007,6 +10477,7 @@
               </a:defRPr>
             </a:lvl7pPr>
             <a:lvl8pPr>
+              <a:buNone/>
               <a:defRPr sz="3300" b="1">
                 <a:solidFill>
                   <a:srgbClr val="112A3A"/>
@@ -14017,6 +10488,7 @@
               </a:defRPr>
             </a:lvl8pPr>
             <a:lvl9pPr>
+              <a:buNone/>
               <a:defRPr sz="3300" b="1">
                 <a:solidFill>
                   <a:srgbClr val="112A3A"/>
@@ -14029,6 +10501,7 @@
           </a:lstStyle>
           <a:p xmlns:a="http://schemas.openxmlformats.org/drawingml/2006/main">
             <a:pPr>
+              <a:buNone/>
               <a:defRPr sz="3300" b="1">
                 <a:solidFill>
                   <a:srgbClr val="112A3A"/>
@@ -14094,6 +10567,7 @@
               </a:defRPr>
             </a:defPPr>
             <a:lvl1pPr>
+              <a:buNone/>
               <a:defRPr sz="2025" b="0">
                 <a:solidFill>
                   <a:srgbClr val="31515E"/>
@@ -14104,6 +10578,7 @@
               </a:defRPr>
             </a:lvl1pPr>
             <a:lvl2pPr>
+              <a:buNone/>
               <a:defRPr sz="2025" b="0">
                 <a:solidFill>
                   <a:srgbClr val="31515E"/>
@@ -14114,6 +10589,7 @@
               </a:defRPr>
             </a:lvl2pPr>
             <a:lvl3pPr>
+              <a:buNone/>
               <a:defRPr sz="2025" b="0">
                 <a:solidFill>
                   <a:srgbClr val="31515E"/>
@@ -14124,6 +10600,7 @@
               </a:defRPr>
             </a:lvl3pPr>
             <a:lvl4pPr>
+              <a:buNone/>
               <a:defRPr sz="2025" b="0">
                 <a:solidFill>
                   <a:srgbClr val="31515E"/>
@@ -14134,6 +10611,7 @@
               </a:defRPr>
             </a:lvl4pPr>
             <a:lvl5pPr>
+              <a:buNone/>
               <a:defRPr sz="2025" b="0">
                 <a:solidFill>
                   <a:srgbClr val="31515E"/>
@@ -14144,6 +10622,7 @@
               </a:defRPr>
             </a:lvl5pPr>
             <a:lvl6pPr>
+              <a:buNone/>
               <a:defRPr sz="2025" b="0">
                 <a:solidFill>
                   <a:srgbClr val="31515E"/>
@@ -14154,6 +10633,7 @@
               </a:defRPr>
             </a:lvl6pPr>
             <a:lvl7pPr>
+              <a:buNone/>
               <a:defRPr sz="2025" b="0">
                 <a:solidFill>
                   <a:srgbClr val="31515E"/>
@@ -14164,6 +10644,7 @@
               </a:defRPr>
             </a:lvl7pPr>
             <a:lvl8pPr>
+              <a:buNone/>
               <a:defRPr sz="2025" b="0">
                 <a:solidFill>
                   <a:srgbClr val="31515E"/>
@@ -14174,6 +10655,7 @@
               </a:defRPr>
             </a:lvl8pPr>
             <a:lvl9pPr>
+              <a:buNone/>
               <a:defRPr sz="2025" b="0">
                 <a:solidFill>
                   <a:srgbClr val="31515E"/>
@@ -14186,6 +10668,7 @@
           </a:lstStyle>
           <a:p xmlns:a="http://schemas.openxmlformats.org/drawingml/2006/main">
             <a:pPr>
+              <a:buNone/>
               <a:defRPr sz="2025" b="0">
                 <a:solidFill>
                   <a:srgbClr val="31515E"/>
@@ -14204,7 +10687,7 @@
                 <a:ea typeface="DejaVu Sans"/>
                 <a:cs typeface="DejaVu Sans"/>
               </a:rPr>
-              <a:t>El avance permite explicar la propuesta y comprobar sus respuestas.</a:t>
+              <a:t>Estado del avance y decisiones para revisar con el profesor.</a:t>
             </a:r>
           </a:p>
         </p:txBody>
@@ -14251,6 +10734,7 @@
               </a:defRPr>
             </a:defPPr>
             <a:lvl1pPr>
+              <a:buNone/>
               <a:defRPr sz="1275" b="0">
                 <a:solidFill>
                   <a:srgbClr val="456278"/>
@@ -14261,6 +10745,7 @@
               </a:defRPr>
             </a:lvl1pPr>
             <a:lvl2pPr>
+              <a:buNone/>
               <a:defRPr sz="1275" b="0">
                 <a:solidFill>
                   <a:srgbClr val="456278"/>
@@ -14271,6 +10756,7 @@
               </a:defRPr>
             </a:lvl2pPr>
             <a:lvl3pPr>
+              <a:buNone/>
               <a:defRPr sz="1275" b="0">
                 <a:solidFill>
                   <a:srgbClr val="456278"/>
@@ -14281,6 +10767,7 @@
               </a:defRPr>
             </a:lvl3pPr>
             <a:lvl4pPr>
+              <a:buNone/>
               <a:defRPr sz="1275" b="0">
                 <a:solidFill>
                   <a:srgbClr val="456278"/>
@@ -14291,6 +10778,7 @@
               </a:defRPr>
             </a:lvl4pPr>
             <a:lvl5pPr>
+              <a:buNone/>
               <a:defRPr sz="1275" b="0">
                 <a:solidFill>
                   <a:srgbClr val="456278"/>
@@ -14301,6 +10789,7 @@
               </a:defRPr>
             </a:lvl5pPr>
             <a:lvl6pPr>
+              <a:buNone/>
               <a:defRPr sz="1275" b="0">
                 <a:solidFill>
                   <a:srgbClr val="456278"/>
@@ -14311,6 +10800,7 @@
               </a:defRPr>
             </a:lvl6pPr>
             <a:lvl7pPr>
+              <a:buNone/>
               <a:defRPr sz="1275" b="0">
                 <a:solidFill>
                   <a:srgbClr val="456278"/>
@@ -14321,6 +10811,7 @@
               </a:defRPr>
             </a:lvl7pPr>
             <a:lvl8pPr>
+              <a:buNone/>
               <a:defRPr sz="1275" b="0">
                 <a:solidFill>
                   <a:srgbClr val="456278"/>
@@ -14331,6 +10822,7 @@
               </a:defRPr>
             </a:lvl8pPr>
             <a:lvl9pPr>
+              <a:buNone/>
               <a:defRPr sz="1275" b="0">
                 <a:solidFill>
                   <a:srgbClr val="456278"/>
@@ -14343,6 +10835,7 @@
           </a:lstStyle>
           <a:p xmlns:a="http://schemas.openxmlformats.org/drawingml/2006/main">
             <a:pPr>
+              <a:buNone/>
               <a:defRPr sz="1275" b="0">
                 <a:solidFill>
                   <a:srgbClr val="456278"/>
@@ -14361,7 +10854,7 @@
                 <a:ea typeface="DejaVu Sans"/>
                 <a:cs typeface="DejaVu Sans"/>
               </a:rPr>
-              <a:t>09 / 9</a:t>
+              <a:t>06 / 6</a:t>
             </a:r>
           </a:p>
         </p:txBody>
@@ -14408,6 +10901,7 @@
               </a:defRPr>
             </a:defPPr>
             <a:lvl1pPr>
+              <a:buNone/>
               <a:defRPr sz="1200" b="0">
                 <a:solidFill>
                   <a:srgbClr val="456278"/>
@@ -14418,6 +10912,7 @@
               </a:defRPr>
             </a:lvl1pPr>
             <a:lvl2pPr>
+              <a:buNone/>
               <a:defRPr sz="1200" b="0">
                 <a:solidFill>
                   <a:srgbClr val="456278"/>
@@ -14428,6 +10923,7 @@
               </a:defRPr>
             </a:lvl2pPr>
             <a:lvl3pPr>
+              <a:buNone/>
               <a:defRPr sz="1200" b="0">
                 <a:solidFill>
                   <a:srgbClr val="456278"/>
@@ -14438,6 +10934,7 @@
               </a:defRPr>
             </a:lvl3pPr>
             <a:lvl4pPr>
+              <a:buNone/>
               <a:defRPr sz="1200" b="0">
                 <a:solidFill>
                   <a:srgbClr val="456278"/>
@@ -14448,6 +10945,7 @@
               </a:defRPr>
             </a:lvl4pPr>
             <a:lvl5pPr>
+              <a:buNone/>
               <a:defRPr sz="1200" b="0">
                 <a:solidFill>
                   <a:srgbClr val="456278"/>
@@ -14458,6 +10956,7 @@
               </a:defRPr>
             </a:lvl5pPr>
             <a:lvl6pPr>
+              <a:buNone/>
               <a:defRPr sz="1200" b="0">
                 <a:solidFill>
                   <a:srgbClr val="456278"/>
@@ -14468,6 +10967,7 @@
               </a:defRPr>
             </a:lvl6pPr>
             <a:lvl7pPr>
+              <a:buNone/>
               <a:defRPr sz="1200" b="0">
                 <a:solidFill>
                   <a:srgbClr val="456278"/>
@@ -14478,6 +10978,7 @@
               </a:defRPr>
             </a:lvl7pPr>
             <a:lvl8pPr>
+              <a:buNone/>
               <a:defRPr sz="1200" b="0">
                 <a:solidFill>
                   <a:srgbClr val="456278"/>
@@ -14488,6 +10989,7 @@
               </a:defRPr>
             </a:lvl8pPr>
             <a:lvl9pPr>
+              <a:buNone/>
               <a:defRPr sz="1200" b="0">
                 <a:solidFill>
                   <a:srgbClr val="456278"/>
@@ -14500,6 +11002,7 @@
           </a:lstStyle>
           <a:p xmlns:a="http://schemas.openxmlformats.org/drawingml/2006/main">
             <a:pPr>
+              <a:buNone/>
               <a:defRPr sz="1200" b="0">
                 <a:solidFill>
                   <a:srgbClr val="456278"/>
@@ -14565,6 +11068,7 @@
               </a:defRPr>
             </a:defPPr>
             <a:lvl1pPr>
+              <a:buNone/>
               <a:defRPr sz="2925" b="1">
                 <a:solidFill>
                   <a:srgbClr val="00888A"/>
@@ -14575,6 +11079,7 @@
               </a:defRPr>
             </a:lvl1pPr>
             <a:lvl2pPr>
+              <a:buNone/>
               <a:defRPr sz="2925" b="1">
                 <a:solidFill>
                   <a:srgbClr val="00888A"/>
@@ -14585,6 +11090,7 @@
               </a:defRPr>
             </a:lvl2pPr>
             <a:lvl3pPr>
+              <a:buNone/>
               <a:defRPr sz="2925" b="1">
                 <a:solidFill>
                   <a:srgbClr val="00888A"/>
@@ -14595,6 +11101,7 @@
               </a:defRPr>
             </a:lvl3pPr>
             <a:lvl4pPr>
+              <a:buNone/>
               <a:defRPr sz="2925" b="1">
                 <a:solidFill>
                   <a:srgbClr val="00888A"/>
@@ -14605,6 +11112,7 @@
               </a:defRPr>
             </a:lvl4pPr>
             <a:lvl5pPr>
+              <a:buNone/>
               <a:defRPr sz="2925" b="1">
                 <a:solidFill>
                   <a:srgbClr val="00888A"/>
@@ -14615,6 +11123,7 @@
               </a:defRPr>
             </a:lvl5pPr>
             <a:lvl6pPr>
+              <a:buNone/>
               <a:defRPr sz="2925" b="1">
                 <a:solidFill>
                   <a:srgbClr val="00888A"/>
@@ -14625,6 +11134,7 @@
               </a:defRPr>
             </a:lvl6pPr>
             <a:lvl7pPr>
+              <a:buNone/>
               <a:defRPr sz="2925" b="1">
                 <a:solidFill>
                   <a:srgbClr val="00888A"/>
@@ -14635,6 +11145,7 @@
               </a:defRPr>
             </a:lvl7pPr>
             <a:lvl8pPr>
+              <a:buNone/>
               <a:defRPr sz="2925" b="1">
                 <a:solidFill>
                   <a:srgbClr val="00888A"/>
@@ -14645,6 +11156,7 @@
               </a:defRPr>
             </a:lvl8pPr>
             <a:lvl9pPr>
+              <a:buNone/>
               <a:defRPr sz="2925" b="1">
                 <a:solidFill>
                   <a:srgbClr val="00888A"/>
@@ -14657,6 +11169,7 @@
           </a:lstStyle>
           <a:p xmlns:a="http://schemas.openxmlformats.org/drawingml/2006/main">
             <a:pPr>
+              <a:buNone/>
               <a:defRPr sz="2925" b="1">
                 <a:solidFill>
                   <a:srgbClr val="00888A"/>
@@ -14675,7 +11188,7 @@
                 <a:ea typeface="DejaVu Sans"/>
                 <a:cs typeface="DejaVu Sans"/>
               </a:rPr>
-              <a:t>Una propuesta que ya se puede poner a prueba</a:t>
+              <a:t>Aspectos para revisar con el profesor</a:t>
             </a:r>
           </a:p>
         </p:txBody>
@@ -14722,6 +11235,7 @@
               </a:defRPr>
             </a:defPPr>
             <a:lvl1pPr>
+              <a:buNone/>
               <a:defRPr sz="2250" b="0">
                 <a:solidFill>
                   <a:srgbClr val="112A3A"/>
@@ -14732,6 +11246,7 @@
               </a:defRPr>
             </a:lvl1pPr>
             <a:lvl2pPr>
+              <a:buNone/>
               <a:defRPr sz="2250" b="0">
                 <a:solidFill>
                   <a:srgbClr val="112A3A"/>
@@ -14742,6 +11257,7 @@
               </a:defRPr>
             </a:lvl2pPr>
             <a:lvl3pPr>
+              <a:buNone/>
               <a:defRPr sz="2250" b="0">
                 <a:solidFill>
                   <a:srgbClr val="112A3A"/>
@@ -14752,6 +11268,7 @@
               </a:defRPr>
             </a:lvl3pPr>
             <a:lvl4pPr>
+              <a:buNone/>
               <a:defRPr sz="2250" b="0">
                 <a:solidFill>
                   <a:srgbClr val="112A3A"/>
@@ -14762,6 +11279,7 @@
               </a:defRPr>
             </a:lvl4pPr>
             <a:lvl5pPr>
+              <a:buNone/>
               <a:defRPr sz="2250" b="0">
                 <a:solidFill>
                   <a:srgbClr val="112A3A"/>
@@ -14772,6 +11290,7 @@
               </a:defRPr>
             </a:lvl5pPr>
             <a:lvl6pPr>
+              <a:buNone/>
               <a:defRPr sz="2250" b="0">
                 <a:solidFill>
                   <a:srgbClr val="112A3A"/>
@@ -14782,6 +11301,7 @@
               </a:defRPr>
             </a:lvl6pPr>
             <a:lvl7pPr>
+              <a:buNone/>
               <a:defRPr sz="2250" b="0">
                 <a:solidFill>
                   <a:srgbClr val="112A3A"/>
@@ -14792,6 +11312,7 @@
               </a:defRPr>
             </a:lvl7pPr>
             <a:lvl8pPr>
+              <a:buNone/>
               <a:defRPr sz="2250" b="0">
                 <a:solidFill>
                   <a:srgbClr val="112A3A"/>
@@ -14802,6 +11323,7 @@
               </a:defRPr>
             </a:lvl8pPr>
             <a:lvl9pPr>
+              <a:buNone/>
               <a:defRPr sz="2250" b="0">
                 <a:solidFill>
                   <a:srgbClr val="112A3A"/>
@@ -14814,6 +11336,7 @@
           </a:lstStyle>
           <a:p xmlns:a="http://schemas.openxmlformats.org/drawingml/2006/main">
             <a:pPr>
+              <a:buNone/>
               <a:defRPr sz="2250" b="0">
                 <a:solidFill>
                   <a:srgbClr val="112A3A"/>
@@ -14832,11 +11355,12 @@
                 <a:ea typeface="DejaVu Sans"/>
                 <a:cs typeface="DejaVu Sans"/>
               </a:rPr>
-              <a:t>Diseño, simulador y costos coherentes.</a:t>
+              <a:t>Prioridades y alcance de la propuesta.</a:t>
             </a:r>
           </a:p>
           <a:p xmlns:a="http://schemas.openxmlformats.org/drawingml/2006/main">
             <a:pPr>
+              <a:buNone/>
               <a:defRPr sz="2250" b="0">
                 <a:solidFill>
                   <a:srgbClr val="112A3A"/>
@@ -14855,7 +11379,7 @@
                 <a:ea typeface="DejaVu Sans"/>
                 <a:cs typeface="DejaVu Sans"/>
               </a:rPr>
-              <a:t>Pruebas de conectividad, permisos y recuperación.</a:t>
+              <a:t>Alternativa de equipos e inversión.</a:t>
             </a:r>
           </a:p>
         </p:txBody>
@@ -14902,6 +11426,7 @@
               </a:defRPr>
             </a:defPPr>
             <a:lvl1pPr>
+              <a:buNone/>
               <a:defRPr sz="2100" b="0">
                 <a:solidFill>
                   <a:srgbClr val="112A3A"/>
@@ -14912,6 +11437,7 @@
               </a:defRPr>
             </a:lvl1pPr>
             <a:lvl2pPr>
+              <a:buNone/>
               <a:defRPr sz="2100" b="0">
                 <a:solidFill>
                   <a:srgbClr val="112A3A"/>
@@ -14922,6 +11448,7 @@
               </a:defRPr>
             </a:lvl2pPr>
             <a:lvl3pPr>
+              <a:buNone/>
               <a:defRPr sz="2100" b="0">
                 <a:solidFill>
                   <a:srgbClr val="112A3A"/>
@@ -14932,6 +11459,7 @@
               </a:defRPr>
             </a:lvl3pPr>
             <a:lvl4pPr>
+              <a:buNone/>
               <a:defRPr sz="2100" b="0">
                 <a:solidFill>
                   <a:srgbClr val="112A3A"/>
@@ -14942,6 +11470,7 @@
               </a:defRPr>
             </a:lvl4pPr>
             <a:lvl5pPr>
+              <a:buNone/>
               <a:defRPr sz="2100" b="0">
                 <a:solidFill>
                   <a:srgbClr val="112A3A"/>
@@ -14952,6 +11481,7 @@
               </a:defRPr>
             </a:lvl5pPr>
             <a:lvl6pPr>
+              <a:buNone/>
               <a:defRPr sz="2100" b="0">
                 <a:solidFill>
                   <a:srgbClr val="112A3A"/>
@@ -14962,6 +11492,7 @@
               </a:defRPr>
             </a:lvl6pPr>
             <a:lvl7pPr>
+              <a:buNone/>
               <a:defRPr sz="2100" b="0">
                 <a:solidFill>
                   <a:srgbClr val="112A3A"/>
@@ -14972,6 +11503,7 @@
               </a:defRPr>
             </a:lvl7pPr>
             <a:lvl8pPr>
+              <a:buNone/>
               <a:defRPr sz="2100" b="0">
                 <a:solidFill>
                   <a:srgbClr val="112A3A"/>
@@ -14982,6 +11514,7 @@
               </a:defRPr>
             </a:lvl8pPr>
             <a:lvl9pPr>
+              <a:buNone/>
               <a:defRPr sz="2100" b="0">
                 <a:solidFill>
                   <a:srgbClr val="112A3A"/>
@@ -14994,6 +11527,7 @@
           </a:lstStyle>
           <a:p xmlns:a="http://schemas.openxmlformats.org/drawingml/2006/main">
             <a:pPr>
+              <a:buNone/>
               <a:defRPr sz="2100" b="0">
                 <a:solidFill>
                   <a:srgbClr val="112A3A"/>
@@ -15012,7 +11546,7 @@
                 <a:ea typeface="DejaVu Sans"/>
                 <a:cs typeface="DejaVu Sans"/>
               </a:rPr>
-              <a:t>Siguiente paso: validar las condiciones en un piloto.</a:t>
+              <a:t>Continuación: ajustar la propuesta con las observaciones recibidas.</a:t>
             </a:r>
           </a:p>
         </p:txBody>
@@ -15059,6 +11593,7 @@
               </a:defRPr>
             </a:defPPr>
             <a:lvl1pPr>
+              <a:buNone/>
               <a:defRPr sz="2100" b="1">
                 <a:solidFill>
                   <a:srgbClr val="00888A"/>
@@ -15069,6 +11604,7 @@
               </a:defRPr>
             </a:lvl1pPr>
             <a:lvl2pPr>
+              <a:buNone/>
               <a:defRPr sz="2100" b="1">
                 <a:solidFill>
                   <a:srgbClr val="00888A"/>
@@ -15079,6 +11615,7 @@
               </a:defRPr>
             </a:lvl2pPr>
             <a:lvl3pPr>
+              <a:buNone/>
               <a:defRPr sz="2100" b="1">
                 <a:solidFill>
                   <a:srgbClr val="00888A"/>
@@ -15089,6 +11626,7 @@
               </a:defRPr>
             </a:lvl3pPr>
             <a:lvl4pPr>
+              <a:buNone/>
               <a:defRPr sz="2100" b="1">
                 <a:solidFill>
                   <a:srgbClr val="00888A"/>
@@ -15099,6 +11637,7 @@
               </a:defRPr>
             </a:lvl4pPr>
             <a:lvl5pPr>
+              <a:buNone/>
               <a:defRPr sz="2100" b="1">
                 <a:solidFill>
                   <a:srgbClr val="00888A"/>
@@ -15109,6 +11648,7 @@
               </a:defRPr>
             </a:lvl5pPr>
             <a:lvl6pPr>
+              <a:buNone/>
               <a:defRPr sz="2100" b="1">
                 <a:solidFill>
                   <a:srgbClr val="00888A"/>
@@ -15119,6 +11659,7 @@
               </a:defRPr>
             </a:lvl6pPr>
             <a:lvl7pPr>
+              <a:buNone/>
               <a:defRPr sz="2100" b="1">
                 <a:solidFill>
                   <a:srgbClr val="00888A"/>
@@ -15129,6 +11670,7 @@
               </a:defRPr>
             </a:lvl7pPr>
             <a:lvl8pPr>
+              <a:buNone/>
               <a:defRPr sz="2100" b="1">
                 <a:solidFill>
                   <a:srgbClr val="00888A"/>
@@ -15139,6 +11681,7 @@
               </a:defRPr>
             </a:lvl8pPr>
             <a:lvl9pPr>
+              <a:buNone/>
               <a:defRPr sz="2100" b="1">
                 <a:solidFill>
                   <a:srgbClr val="00888A"/>
@@ -15151,6 +11694,7 @@
           </a:lstStyle>
           <a:p xmlns:a="http://schemas.openxmlformats.org/drawingml/2006/main">
             <a:pPr>
+              <a:buNone/>
               <a:defRPr sz="2100" b="1">
                 <a:solidFill>
                   <a:srgbClr val="00888A"/>

--- a/Presentacion/Avance_Financiera_Pacifico_30_oct_2026.pptx
+++ b/Presentacion/Avance_Financiera_Pacifico_30_oct_2026.pptx
@@ -2,18 +2,18 @@
 <file path=ppt/presentation.xml><?xml version="1.0" encoding="utf-8"?>
 <p:presentation xmlns:p="http://schemas.openxmlformats.org/presentationml/2006/main">
   <p:sldMasterIdLst>
-    <p:sldMasterId xmlns:r="http://schemas.openxmlformats.org/officeDocument/2006/relationships" id="2147483648" r:id="Rfa0a8a683aaa4bcd"/>
+    <p:sldMasterId xmlns:r="http://schemas.openxmlformats.org/officeDocument/2006/relationships" id="2147483648" r:id="R05d096aa4af74a65"/>
   </p:sldMasterIdLst>
   <p:notesMasterIdLst>
-    <p:notesMasterId xmlns:r="http://schemas.openxmlformats.org/officeDocument/2006/relationships" r:id="Rb96ba321e5544be0"/>
+    <p:notesMasterId xmlns:r="http://schemas.openxmlformats.org/officeDocument/2006/relationships" r:id="R4a523468c26c4110"/>
   </p:notesMasterIdLst>
   <p:sldIdLst>
-    <p:sldId xmlns:r="http://schemas.openxmlformats.org/officeDocument/2006/relationships" id="256" r:id="R8556fd0d80c64104"/>
-    <p:sldId xmlns:r="http://schemas.openxmlformats.org/officeDocument/2006/relationships" id="257" r:id="Ra7da00e1db74438e"/>
-    <p:sldId xmlns:r="http://schemas.openxmlformats.org/officeDocument/2006/relationships" id="258" r:id="Rf53c22501d1c46e7"/>
-    <p:sldId xmlns:r="http://schemas.openxmlformats.org/officeDocument/2006/relationships" id="259" r:id="Re450e42c8d2a49e0"/>
-    <p:sldId xmlns:r="http://schemas.openxmlformats.org/officeDocument/2006/relationships" id="260" r:id="R525f13047a77482b"/>
-    <p:sldId xmlns:r="http://schemas.openxmlformats.org/officeDocument/2006/relationships" id="261" r:id="Reb40a7bb87b54eeb"/>
+    <p:sldId xmlns:r="http://schemas.openxmlformats.org/officeDocument/2006/relationships" id="256" r:id="R12cfb594480b427f"/>
+    <p:sldId xmlns:r="http://schemas.openxmlformats.org/officeDocument/2006/relationships" id="257" r:id="R66dd1f6ab487484d"/>
+    <p:sldId xmlns:r="http://schemas.openxmlformats.org/officeDocument/2006/relationships" id="258" r:id="R8863c81932e449ad"/>
+    <p:sldId xmlns:r="http://schemas.openxmlformats.org/officeDocument/2006/relationships" id="259" r:id="R1e321470cc9a41cb"/>
+    <p:sldId xmlns:r="http://schemas.openxmlformats.org/officeDocument/2006/relationships" id="260" r:id="Rf679da0c6b544918"/>
+    <p:sldId xmlns:r="http://schemas.openxmlformats.org/officeDocument/2006/relationships" id="261" r:id="R95345893e3494eb8"/>
   </p:sldIdLst>
   <p:sldSz cx="12192000" cy="6858000"/>
   <p:notesSz cx="6858000" cy="9144000"/>
@@ -3240,12 +3240,12 @@
   </p:cSld>
   <p:clrMap bg1="lt1" tx1="dk1" bg2="lt2" tx2="dk2" accent1="accent1" accent2="accent2" accent3="accent3" accent4="accent4" accent5="accent5" accent6="accent6" hlink="hlink" folHlink="folHlink"/>
   <p:sldLayoutIdLst>
-    <p:sldLayoutId xmlns:r="http://schemas.openxmlformats.org/officeDocument/2006/relationships" id="2147483649" r:id="R87bfae4efd83402b"/>
-    <p:sldLayoutId xmlns:r="http://schemas.openxmlformats.org/officeDocument/2006/relationships" id="2147483650" r:id="R5c83f40baeeb426f"/>
-    <p:sldLayoutId xmlns:r="http://schemas.openxmlformats.org/officeDocument/2006/relationships" id="2147483651" r:id="Rb5f6cc96b5534604"/>
-    <p:sldLayoutId xmlns:r="http://schemas.openxmlformats.org/officeDocument/2006/relationships" id="2147483652" r:id="R83819e3fe8ec42ae"/>
-    <p:sldLayoutId xmlns:r="http://schemas.openxmlformats.org/officeDocument/2006/relationships" id="2147483653" r:id="R4eedcec1dbb24378"/>
-    <p:sldLayoutId xmlns:r="http://schemas.openxmlformats.org/officeDocument/2006/relationships" id="2147483654" r:id="R498413f120ca495b"/>
+    <p:sldLayoutId xmlns:r="http://schemas.openxmlformats.org/officeDocument/2006/relationships" id="2147483649" r:id="Rc5ee6af17c5f4a42"/>
+    <p:sldLayoutId xmlns:r="http://schemas.openxmlformats.org/officeDocument/2006/relationships" id="2147483650" r:id="R3555b85245b54783"/>
+    <p:sldLayoutId xmlns:r="http://schemas.openxmlformats.org/officeDocument/2006/relationships" id="2147483651" r:id="R2cab6ca0cd0a46a6"/>
+    <p:sldLayoutId xmlns:r="http://schemas.openxmlformats.org/officeDocument/2006/relationships" id="2147483652" r:id="Rb11cd3c2dbef4a65"/>
+    <p:sldLayoutId xmlns:r="http://schemas.openxmlformats.org/officeDocument/2006/relationships" id="2147483653" r:id="R0b665ccc809e46b9"/>
+    <p:sldLayoutId xmlns:r="http://schemas.openxmlformats.org/officeDocument/2006/relationships" id="2147483654" r:id="R0914c4e884f04f86"/>
   </p:sldLayoutIdLst>
   <p:txStyles>
     <p:titleStyle>
@@ -4788,7 +4788,7 @@
                 <a:ea typeface="DejaVu Sans"/>
                 <a:cs typeface="DejaVu Sans"/>
               </a:rPr>
-              <a:t>Diseño y prototipo desarrollados para revisar el enfoque.</a:t>
+              <a:t>Diseño de red, simulador, inventario y presupuesto.</a:t>
             </a:r>
           </a:p>
         </p:txBody>
@@ -5829,7 +5829,7 @@
           <p:cNvPr id="5" name="">
             <a:extLst xmlns:a="http://schemas.openxmlformats.org/drawingml/2006/main">
               <a:ext uri="{FF2B5EF4-FFF2-40B4-BE49-F238E27FC236}">
-                <a16:creationId xmlns:a16="http://schemas.microsoft.com/office/drawing/2014/main" id="{D59EDF21-D1AA-4C86-B66E-ECB93B409F99}"/>
+                <a16:creationId xmlns:a16="http://schemas.microsoft.com/office/drawing/2014/main" id="{42EED3DA-B338-4D6A-8703-FA898BA5350B}"/>
               </a:ext>
             </a:extLst>
           </p:cNvPr>
@@ -7389,7 +7389,7 @@
           <p:cNvPr id="7" name="">
             <a:extLst xmlns:a="http://schemas.openxmlformats.org/drawingml/2006/main">
               <a:ext uri="{FF2B5EF4-FFF2-40B4-BE49-F238E27FC236}">
-                <a16:creationId xmlns:a16="http://schemas.microsoft.com/office/drawing/2014/main" id="{F9A1C70E-B139-4057-B52F-FE907E6ED8AB}"/>
+                <a16:creationId xmlns:a16="http://schemas.microsoft.com/office/drawing/2014/main" id="{FF19E071-B095-4836-A80B-2BDC935E82D0}"/>
               </a:ext>
             </a:extLst>
           </p:cNvPr>
@@ -7399,7 +7399,7 @@
           <p:nvPr/>
         </p:nvPicPr>
         <p:blipFill>
-          <a:blip xmlns:r="http://schemas.openxmlformats.org/officeDocument/2006/relationships" xmlns:a="http://schemas.openxmlformats.org/drawingml/2006/main" r:embed="Ra340cf38ce7e4bd2"/>
+          <a:blip xmlns:r="http://schemas.openxmlformats.org/officeDocument/2006/relationships" xmlns:a="http://schemas.openxmlformats.org/drawingml/2006/main" r:embed="Raba22e457a384429"/>
           <a:stretch xmlns:a="http://schemas.openxmlformats.org/drawingml/2006/main"/>
         </p:blipFill>
         <p:spPr>
@@ -8114,7 +8114,7 @@
           <p:cNvPr id="5" name="">
             <a:extLst xmlns:a="http://schemas.openxmlformats.org/drawingml/2006/main">
               <a:ext uri="{FF2B5EF4-FFF2-40B4-BE49-F238E27FC236}">
-                <a16:creationId xmlns:a16="http://schemas.microsoft.com/office/drawing/2014/main" id="{C50DE47C-794A-44B5-8C8D-E8EA895BF9D6}"/>
+                <a16:creationId xmlns:a16="http://schemas.microsoft.com/office/drawing/2014/main" id="{373F654B-AA0B-4F90-B970-DAC47ACEB7BD}"/>
               </a:ext>
             </a:extLst>
           </p:cNvPr>
@@ -9257,7 +9257,7 @@
           <p:cNvPr id="5" name="">
             <a:extLst xmlns:a="http://schemas.openxmlformats.org/drawingml/2006/main">
               <a:ext uri="{FF2B5EF4-FFF2-40B4-BE49-F238E27FC236}">
-                <a16:creationId xmlns:a16="http://schemas.microsoft.com/office/drawing/2014/main" id="{46551E75-B6F0-46B6-AF11-07449C426412}"/>
+                <a16:creationId xmlns:a16="http://schemas.microsoft.com/office/drawing/2014/main" id="{97C8505F-4D22-4366-8D57-D5735D70D8CB}"/>
               </a:ext>
             </a:extLst>
           </p:cNvPr>
@@ -10687,7 +10687,7 @@
                 <a:ea typeface="DejaVu Sans"/>
                 <a:cs typeface="DejaVu Sans"/>
               </a:rPr>
-              <a:t>Estado del avance y decisiones para revisar con el profesor.</a:t>
+              <a:t>Diseño de red y prototipo desarrollados para Financiera Pacífico.</a:t>
             </a:r>
           </a:p>
         </p:txBody>
@@ -11188,7 +11188,7 @@
                 <a:ea typeface="DejaVu Sans"/>
                 <a:cs typeface="DejaVu Sans"/>
               </a:rPr>
-              <a:t>Aspectos para revisar con el profesor</a:t>
+              <a:t>Continuidad y control de acceso</a:t>
             </a:r>
           </a:p>
         </p:txBody>
@@ -11355,7 +11355,7 @@
                 <a:ea typeface="DejaVu Sans"/>
                 <a:cs typeface="DejaVu Sans"/>
               </a:rPr>
-              <a:t>Prioridades y alcance de la propuesta.</a:t>
+              <a:t>Diseño de red y pruebas del simulador.</a:t>
             </a:r>
           </a:p>
           <a:p xmlns:a="http://schemas.openxmlformats.org/drawingml/2006/main">
@@ -11379,7 +11379,7 @@
                 <a:ea typeface="DejaVu Sans"/>
                 <a:cs typeface="DejaVu Sans"/>
               </a:rPr>
-              <a:t>Alternativa de equipos e inversión.</a:t>
+              <a:t>Inventario y comparación de costos A/B.</a:t>
             </a:r>
           </a:p>
         </p:txBody>
@@ -11546,7 +11546,7 @@
                 <a:ea typeface="DejaVu Sans"/>
                 <a:cs typeface="DejaVu Sans"/>
               </a:rPr>
-              <a:t>Continuación: ajustar la propuesta con las observaciones recibidas.</a:t>
+              <a:t>Caminos alternativos y permisos por servicio.</a:t>
             </a:r>
           </a:p>
         </p:txBody>
